--- a/decks/Chem_03_Renal-Liver-Cardiac-Biomarkers.pptx
+++ b/decks/Chem_03_Renal-Liver-Cardiac-Biomarkers.pptx
@@ -26,9 +26,14 @@
     <p:sldId id="274" r:id="rId20"/>
     <p:sldId id="275" r:id="rId21"/>
     <p:sldId id="276" r:id="rId22"/>
+    <p:sldId id="277" r:id="rId23"/>
+    <p:sldId id="278" r:id="rId24"/>
+    <p:sldId id="279" r:id="rId25"/>
+    <p:sldId id="280" r:id="rId26"/>
+    <p:sldId id="281" r:id="rId27"/>
   </p:sldIdLst>
   <p:notesMasterIdLst>
-    <p:notesMasterId r:id="rId23"/>
+    <p:notesMasterId r:id="rId28"/>
   </p:notesMasterIdLst>
   <p:sldSz cx="12191695" cy="6858000"/>
   <p:notesSz cx="6858000" cy="12191695"/>
@@ -1690,6 +1695,446 @@
             <a:fld id="{F7021451-1387-4CA6-816F-3879F97B5CBC}" type="slidenum">
               <a:rPr lang="en-US"/>
               <a:t>21</a:t>
+            </a:fld>
+            <a:endParaRPr lang="en-US"/>
+          </a:p>
+        </p:txBody>
+      </p:sp>
+    </p:spTree>
+    <p:extLst>
+      <p:ext uri="{BB962C8B-B14F-4D97-AF65-F5344CB8AC3E}">
+        <p14:creationId xmlns:p14="http://schemas.microsoft.com/office/powerpoint/2010/main" val="1024086991"/>
+      </p:ext>
+    </p:extLst>
+  </p:cSld>
+  <p:clrMapOvr>
+    <a:masterClrMapping/>
+  </p:clrMapOvr>
+</p:notes>
+</file>
+
+<file path=ppt/notesSlides/notesSlide22.xml><?xml version="1.0" encoding="utf-8"?>
+<p:notes xmlns:a="http://schemas.openxmlformats.org/drawingml/2006/main" xmlns:r="http://schemas.openxmlformats.org/officeDocument/2006/relationships" xmlns:p="http://schemas.openxmlformats.org/presentationml/2006/main">
+  <p:cSld>
+    <p:spTree>
+      <p:nvGrpSpPr>
+        <p:cNvPr id="1" name=""/>
+        <p:cNvGrpSpPr/>
+        <p:nvPr/>
+      </p:nvGrpSpPr>
+      <p:grpSpPr>
+        <a:xfrm>
+          <a:off x="0" y="0"/>
+          <a:ext cx="0" cy="0"/>
+          <a:chOff x="0" y="0"/>
+          <a:chExt cx="0" cy="0"/>
+        </a:xfrm>
+      </p:grpSpPr>
+      <p:sp>
+        <p:nvSpPr>
+          <p:cNvPr id="2" name="Slide Image Placeholder 1"/>
+          <p:cNvSpPr>
+            <a:spLocks noGrp="1" noRot="1" noChangeAspect="1"/>
+          </p:cNvSpPr>
+          <p:nvPr>
+            <p:ph type="sldImg"/>
+          </p:nvPr>
+        </p:nvSpPr>
+        <p:spPr/>
+      </p:sp>
+      <p:sp>
+        <p:nvSpPr>
+          <p:cNvPr id="3" name="Notes Placeholder 2"/>
+          <p:cNvSpPr>
+            <a:spLocks noGrp="1"/>
+          </p:cNvSpPr>
+          <p:nvPr>
+            <p:ph type="body" idx="1"/>
+          </p:nvPr>
+        </p:nvSpPr>
+        <p:spPr/>
+        <p:txBody>
+          <a:bodyPr/>
+          <a:lstStyle/>
+          <a:p>
+            <a:r>
+              <a:rPr lang="en-US" dirty="0"/>
+              <a:t/>
+            </a:r>
+            <a:endParaRPr lang="en-US" dirty="0"/>
+          </a:p>
+        </p:txBody>
+      </p:sp>
+      <p:sp>
+        <p:nvSpPr>
+          <p:cNvPr id="4" name="Slide Number Placeholder 3"/>
+          <p:cNvSpPr>
+            <a:spLocks noGrp="1"/>
+          </p:cNvSpPr>
+          <p:nvPr>
+            <p:ph type="sldNum" sz="quarter" idx="10"/>
+          </p:nvPr>
+        </p:nvSpPr>
+        <p:spPr/>
+        <p:txBody>
+          <a:bodyPr/>
+          <a:lstStyle/>
+          <a:p>
+            <a:fld id="{F7021451-1387-4CA6-816F-3879F97B5CBC}" type="slidenum">
+              <a:rPr lang="en-US"/>
+              <a:t>22</a:t>
+            </a:fld>
+            <a:endParaRPr lang="en-US"/>
+          </a:p>
+        </p:txBody>
+      </p:sp>
+    </p:spTree>
+    <p:extLst>
+      <p:ext uri="{BB962C8B-B14F-4D97-AF65-F5344CB8AC3E}">
+        <p14:creationId xmlns:p14="http://schemas.microsoft.com/office/powerpoint/2010/main" val="1024086991"/>
+      </p:ext>
+    </p:extLst>
+  </p:cSld>
+  <p:clrMapOvr>
+    <a:masterClrMapping/>
+  </p:clrMapOvr>
+</p:notes>
+</file>
+
+<file path=ppt/notesSlides/notesSlide23.xml><?xml version="1.0" encoding="utf-8"?>
+<p:notes xmlns:a="http://schemas.openxmlformats.org/drawingml/2006/main" xmlns:r="http://schemas.openxmlformats.org/officeDocument/2006/relationships" xmlns:p="http://schemas.openxmlformats.org/presentationml/2006/main">
+  <p:cSld>
+    <p:spTree>
+      <p:nvGrpSpPr>
+        <p:cNvPr id="1" name=""/>
+        <p:cNvGrpSpPr/>
+        <p:nvPr/>
+      </p:nvGrpSpPr>
+      <p:grpSpPr>
+        <a:xfrm>
+          <a:off x="0" y="0"/>
+          <a:ext cx="0" cy="0"/>
+          <a:chOff x="0" y="0"/>
+          <a:chExt cx="0" cy="0"/>
+        </a:xfrm>
+      </p:grpSpPr>
+      <p:sp>
+        <p:nvSpPr>
+          <p:cNvPr id="2" name="Slide Image Placeholder 1"/>
+          <p:cNvSpPr>
+            <a:spLocks noGrp="1" noRot="1" noChangeAspect="1"/>
+          </p:cNvSpPr>
+          <p:nvPr>
+            <p:ph type="sldImg"/>
+          </p:nvPr>
+        </p:nvSpPr>
+        <p:spPr/>
+      </p:sp>
+      <p:sp>
+        <p:nvSpPr>
+          <p:cNvPr id="3" name="Notes Placeholder 2"/>
+          <p:cNvSpPr>
+            <a:spLocks noGrp="1"/>
+          </p:cNvSpPr>
+          <p:nvPr>
+            <p:ph type="body" idx="1"/>
+          </p:nvPr>
+        </p:nvSpPr>
+        <p:spPr/>
+        <p:txBody>
+          <a:bodyPr/>
+          <a:lstStyle/>
+          <a:p>
+            <a:r>
+              <a:rPr lang="en-US" dirty="0"/>
+              <a:t/>
+            </a:r>
+            <a:endParaRPr lang="en-US" dirty="0"/>
+          </a:p>
+        </p:txBody>
+      </p:sp>
+      <p:sp>
+        <p:nvSpPr>
+          <p:cNvPr id="4" name="Slide Number Placeholder 3"/>
+          <p:cNvSpPr>
+            <a:spLocks noGrp="1"/>
+          </p:cNvSpPr>
+          <p:nvPr>
+            <p:ph type="sldNum" sz="quarter" idx="10"/>
+          </p:nvPr>
+        </p:nvSpPr>
+        <p:spPr/>
+        <p:txBody>
+          <a:bodyPr/>
+          <a:lstStyle/>
+          <a:p>
+            <a:fld id="{F7021451-1387-4CA6-816F-3879F97B5CBC}" type="slidenum">
+              <a:rPr lang="en-US"/>
+              <a:t>23</a:t>
+            </a:fld>
+            <a:endParaRPr lang="en-US"/>
+          </a:p>
+        </p:txBody>
+      </p:sp>
+    </p:spTree>
+    <p:extLst>
+      <p:ext uri="{BB962C8B-B14F-4D97-AF65-F5344CB8AC3E}">
+        <p14:creationId xmlns:p14="http://schemas.microsoft.com/office/powerpoint/2010/main" val="1024086991"/>
+      </p:ext>
+    </p:extLst>
+  </p:cSld>
+  <p:clrMapOvr>
+    <a:masterClrMapping/>
+  </p:clrMapOvr>
+</p:notes>
+</file>
+
+<file path=ppt/notesSlides/notesSlide24.xml><?xml version="1.0" encoding="utf-8"?>
+<p:notes xmlns:a="http://schemas.openxmlformats.org/drawingml/2006/main" xmlns:r="http://schemas.openxmlformats.org/officeDocument/2006/relationships" xmlns:p="http://schemas.openxmlformats.org/presentationml/2006/main">
+  <p:cSld>
+    <p:spTree>
+      <p:nvGrpSpPr>
+        <p:cNvPr id="1" name=""/>
+        <p:cNvGrpSpPr/>
+        <p:nvPr/>
+      </p:nvGrpSpPr>
+      <p:grpSpPr>
+        <a:xfrm>
+          <a:off x="0" y="0"/>
+          <a:ext cx="0" cy="0"/>
+          <a:chOff x="0" y="0"/>
+          <a:chExt cx="0" cy="0"/>
+        </a:xfrm>
+      </p:grpSpPr>
+      <p:sp>
+        <p:nvSpPr>
+          <p:cNvPr id="2" name="Slide Image Placeholder 1"/>
+          <p:cNvSpPr>
+            <a:spLocks noGrp="1" noRot="1" noChangeAspect="1"/>
+          </p:cNvSpPr>
+          <p:nvPr>
+            <p:ph type="sldImg"/>
+          </p:nvPr>
+        </p:nvSpPr>
+        <p:spPr/>
+      </p:sp>
+      <p:sp>
+        <p:nvSpPr>
+          <p:cNvPr id="3" name="Notes Placeholder 2"/>
+          <p:cNvSpPr>
+            <a:spLocks noGrp="1"/>
+          </p:cNvSpPr>
+          <p:nvPr>
+            <p:ph type="body" idx="1"/>
+          </p:nvPr>
+        </p:nvSpPr>
+        <p:spPr/>
+        <p:txBody>
+          <a:bodyPr/>
+          <a:lstStyle/>
+          <a:p>
+            <a:r>
+              <a:rPr lang="en-US" dirty="0"/>
+              <a:t/>
+            </a:r>
+            <a:endParaRPr lang="en-US" dirty="0"/>
+          </a:p>
+        </p:txBody>
+      </p:sp>
+      <p:sp>
+        <p:nvSpPr>
+          <p:cNvPr id="4" name="Slide Number Placeholder 3"/>
+          <p:cNvSpPr>
+            <a:spLocks noGrp="1"/>
+          </p:cNvSpPr>
+          <p:nvPr>
+            <p:ph type="sldNum" sz="quarter" idx="10"/>
+          </p:nvPr>
+        </p:nvSpPr>
+        <p:spPr/>
+        <p:txBody>
+          <a:bodyPr/>
+          <a:lstStyle/>
+          <a:p>
+            <a:fld id="{F7021451-1387-4CA6-816F-3879F97B5CBC}" type="slidenum">
+              <a:rPr lang="en-US"/>
+              <a:t>24</a:t>
+            </a:fld>
+            <a:endParaRPr lang="en-US"/>
+          </a:p>
+        </p:txBody>
+      </p:sp>
+    </p:spTree>
+    <p:extLst>
+      <p:ext uri="{BB962C8B-B14F-4D97-AF65-F5344CB8AC3E}">
+        <p14:creationId xmlns:p14="http://schemas.microsoft.com/office/powerpoint/2010/main" val="1024086991"/>
+      </p:ext>
+    </p:extLst>
+  </p:cSld>
+  <p:clrMapOvr>
+    <a:masterClrMapping/>
+  </p:clrMapOvr>
+</p:notes>
+</file>
+
+<file path=ppt/notesSlides/notesSlide25.xml><?xml version="1.0" encoding="utf-8"?>
+<p:notes xmlns:a="http://schemas.openxmlformats.org/drawingml/2006/main" xmlns:r="http://schemas.openxmlformats.org/officeDocument/2006/relationships" xmlns:p="http://schemas.openxmlformats.org/presentationml/2006/main">
+  <p:cSld>
+    <p:spTree>
+      <p:nvGrpSpPr>
+        <p:cNvPr id="1" name=""/>
+        <p:cNvGrpSpPr/>
+        <p:nvPr/>
+      </p:nvGrpSpPr>
+      <p:grpSpPr>
+        <a:xfrm>
+          <a:off x="0" y="0"/>
+          <a:ext cx="0" cy="0"/>
+          <a:chOff x="0" y="0"/>
+          <a:chExt cx="0" cy="0"/>
+        </a:xfrm>
+      </p:grpSpPr>
+      <p:sp>
+        <p:nvSpPr>
+          <p:cNvPr id="2" name="Slide Image Placeholder 1"/>
+          <p:cNvSpPr>
+            <a:spLocks noGrp="1" noRot="1" noChangeAspect="1"/>
+          </p:cNvSpPr>
+          <p:nvPr>
+            <p:ph type="sldImg"/>
+          </p:nvPr>
+        </p:nvSpPr>
+        <p:spPr/>
+      </p:sp>
+      <p:sp>
+        <p:nvSpPr>
+          <p:cNvPr id="3" name="Notes Placeholder 2"/>
+          <p:cNvSpPr>
+            <a:spLocks noGrp="1"/>
+          </p:cNvSpPr>
+          <p:nvPr>
+            <p:ph type="body" idx="1"/>
+          </p:nvPr>
+        </p:nvSpPr>
+        <p:spPr/>
+        <p:txBody>
+          <a:bodyPr/>
+          <a:lstStyle/>
+          <a:p>
+            <a:r>
+              <a:rPr lang="en-US" dirty="0"/>
+              <a:t/>
+            </a:r>
+            <a:endParaRPr lang="en-US" dirty="0"/>
+          </a:p>
+        </p:txBody>
+      </p:sp>
+      <p:sp>
+        <p:nvSpPr>
+          <p:cNvPr id="4" name="Slide Number Placeholder 3"/>
+          <p:cNvSpPr>
+            <a:spLocks noGrp="1"/>
+          </p:cNvSpPr>
+          <p:nvPr>
+            <p:ph type="sldNum" sz="quarter" idx="10"/>
+          </p:nvPr>
+        </p:nvSpPr>
+        <p:spPr/>
+        <p:txBody>
+          <a:bodyPr/>
+          <a:lstStyle/>
+          <a:p>
+            <a:fld id="{F7021451-1387-4CA6-816F-3879F97B5CBC}" type="slidenum">
+              <a:rPr lang="en-US"/>
+              <a:t>25</a:t>
+            </a:fld>
+            <a:endParaRPr lang="en-US"/>
+          </a:p>
+        </p:txBody>
+      </p:sp>
+    </p:spTree>
+    <p:extLst>
+      <p:ext uri="{BB962C8B-B14F-4D97-AF65-F5344CB8AC3E}">
+        <p14:creationId xmlns:p14="http://schemas.microsoft.com/office/powerpoint/2010/main" val="1024086991"/>
+      </p:ext>
+    </p:extLst>
+  </p:cSld>
+  <p:clrMapOvr>
+    <a:masterClrMapping/>
+  </p:clrMapOvr>
+</p:notes>
+</file>
+
+<file path=ppt/notesSlides/notesSlide26.xml><?xml version="1.0" encoding="utf-8"?>
+<p:notes xmlns:a="http://schemas.openxmlformats.org/drawingml/2006/main" xmlns:r="http://schemas.openxmlformats.org/officeDocument/2006/relationships" xmlns:p="http://schemas.openxmlformats.org/presentationml/2006/main">
+  <p:cSld>
+    <p:spTree>
+      <p:nvGrpSpPr>
+        <p:cNvPr id="1" name=""/>
+        <p:cNvGrpSpPr/>
+        <p:nvPr/>
+      </p:nvGrpSpPr>
+      <p:grpSpPr>
+        <a:xfrm>
+          <a:off x="0" y="0"/>
+          <a:ext cx="0" cy="0"/>
+          <a:chOff x="0" y="0"/>
+          <a:chExt cx="0" cy="0"/>
+        </a:xfrm>
+      </p:grpSpPr>
+      <p:sp>
+        <p:nvSpPr>
+          <p:cNvPr id="2" name="Slide Image Placeholder 1"/>
+          <p:cNvSpPr>
+            <a:spLocks noGrp="1" noRot="1" noChangeAspect="1"/>
+          </p:cNvSpPr>
+          <p:nvPr>
+            <p:ph type="sldImg"/>
+          </p:nvPr>
+        </p:nvSpPr>
+        <p:spPr/>
+      </p:sp>
+      <p:sp>
+        <p:nvSpPr>
+          <p:cNvPr id="3" name="Notes Placeholder 2"/>
+          <p:cNvSpPr>
+            <a:spLocks noGrp="1"/>
+          </p:cNvSpPr>
+          <p:nvPr>
+            <p:ph type="body" idx="1"/>
+          </p:nvPr>
+        </p:nvSpPr>
+        <p:spPr/>
+        <p:txBody>
+          <a:bodyPr/>
+          <a:lstStyle/>
+          <a:p>
+            <a:r>
+              <a:rPr lang="en-US" dirty="0"/>
+              <a:t/>
+            </a:r>
+            <a:endParaRPr lang="en-US" dirty="0"/>
+          </a:p>
+        </p:txBody>
+      </p:sp>
+      <p:sp>
+        <p:nvSpPr>
+          <p:cNvPr id="4" name="Slide Number Placeholder 3"/>
+          <p:cNvSpPr>
+            <a:spLocks noGrp="1"/>
+          </p:cNvSpPr>
+          <p:nvPr>
+            <p:ph type="sldNum" sz="quarter" idx="10"/>
+          </p:nvPr>
+        </p:nvSpPr>
+        <p:spPr/>
+        <p:txBody>
+          <a:bodyPr/>
+          <a:lstStyle/>
+          <a:p>
+            <a:fld id="{F7021451-1387-4CA6-816F-3879F97B5CBC}" type="slidenum">
+              <a:rPr lang="en-US"/>
+              <a:t>26</a:t>
             </a:fld>
             <a:endParaRPr lang="en-US"/>
           </a:p>
@@ -2893,7 +3338,7 @@
                 <a:ea typeface="Calibri" pitchFamily="34" charset="-122"/>
                 <a:cs typeface="Calibri" pitchFamily="34" charset="-120"/>
               </a:rPr>
-              <a:t>Interpretation Patterns and Common Misuse</a:t>
+              <a:t>Interpretation Patterns, Kinetics, and Common Misuse</a:t>
             </a:r>
             <a:endParaRPr lang="en-US" sz="1900" dirty="0"/>
           </a:p>
@@ -3085,7 +3530,7 @@
                 <a:ea typeface="Calibri" pitchFamily="34" charset="-122"/>
                 <a:cs typeface="Calibri" pitchFamily="34" charset="-120"/>
               </a:rPr>
-              <a:t>CLINICAL CHEMISTRY   ·   CARDIAC</a:t>
+              <a:t>CLINICAL CHEMISTRY   ·   LIVER</a:t>
             </a:r>
             <a:endParaRPr lang="en-US" sz="1100" dirty="0"/>
           </a:p>
@@ -3124,7 +3569,7 @@
                 <a:ea typeface="Calibri" pitchFamily="34" charset="-122"/>
                 <a:cs typeface="Calibri" pitchFamily="34" charset="-120"/>
               </a:rPr>
-              <a:t>Troponin and Natriuretic Peptides</a:t>
+              <a:t>Patterns and Function</a:t>
             </a:r>
             <a:endParaRPr lang="en-US" sz="3000" dirty="0"/>
           </a:p>
@@ -3192,7 +3637,7 @@
                 <a:ea typeface="Calibri" pitchFamily="34" charset="-122"/>
                 <a:cs typeface="Calibri" pitchFamily="34" charset="-120"/>
               </a:rPr>
-              <a:t>TROPONIN INTERPRETATION</a:t>
+              <a:t>HEPATOCELLULAR VS CHOLESTATIC</a:t>
             </a:r>
             <a:endParaRPr lang="en-US" sz="1200" dirty="0"/>
           </a:p>
@@ -3235,7 +3680,7 @@
                 <a:ea typeface="Calibri" pitchFamily="34" charset="-122"/>
                 <a:cs typeface="Calibri" pitchFamily="34" charset="-120"/>
               </a:rPr>
-              <a:t>A value above the 99th-percentile URL defines myocardial injury; a rising/falling pattern defines ACUTE injury.</a:t>
+              <a:t>Hepatocellular: ALT/AST predominate (viral, toxic, ischemic, autoimmune).</a:t>
             </a:r>
             <a:endParaRPr lang="en-US" sz="1250" dirty="0"/>
           </a:p>
@@ -3256,7 +3701,7 @@
                 <a:ea typeface="Calibri" pitchFamily="34" charset="-122"/>
                 <a:cs typeface="Calibri" pitchFamily="34" charset="-120"/>
               </a:rPr>
-              <a:t>High-sensitivity assays use sex-specific URLs and 0/1- or 0/2-hour delta protocols.</a:t>
+              <a:t>AST:ALT &amp;gt; 2 with modest elevation suggests alcoholic liver disease.</a:t>
             </a:r>
             <a:endParaRPr lang="en-US" sz="1250" dirty="0"/>
           </a:p>
@@ -3277,7 +3722,7 @@
                 <a:ea typeface="Calibri" pitchFamily="34" charset="-122"/>
                 <a:cs typeface="Calibri" pitchFamily="34" charset="-120"/>
               </a:rPr>
-              <a:t>Chronic elevation (stable) occurs in CKD, heart failure, structural disease — not an MI by itself.</a:t>
+              <a:t>Cholestatic: ALP and GGT predominate (obstruction, PBC, drugs).</a:t>
             </a:r>
             <a:endParaRPr lang="en-US" sz="1250" dirty="0"/>
           </a:p>
@@ -3298,7 +3743,7 @@
                 <a:ea typeface="Calibri" pitchFamily="34" charset="-122"/>
                 <a:cs typeface="Calibri" pitchFamily="34" charset="-120"/>
               </a:rPr>
-              <a:t>Type 2 MI (supply-demand) vs type 1 (plaque rupture) requires clinical correlation.</a:t>
+              <a:t>GGT confirms a hepatic source of an elevated ALP (vs bone).</a:t>
             </a:r>
             <a:endParaRPr lang="en-US" sz="1250" dirty="0"/>
           </a:p>
@@ -3366,7 +3811,7 @@
                 <a:ea typeface="Calibri" pitchFamily="34" charset="-122"/>
                 <a:cs typeface="Calibri" pitchFamily="34" charset="-120"/>
               </a:rPr>
-              <a:t>BNP / NT-PROBNP</a:t>
+              <a:t>FUNCTION VS INJURY</a:t>
             </a:r>
             <a:endParaRPr lang="en-US" sz="1200" dirty="0"/>
           </a:p>
@@ -3409,7 +3854,7 @@
                 <a:ea typeface="Calibri" pitchFamily="34" charset="-122"/>
                 <a:cs typeface="Calibri" pitchFamily="34" charset="-120"/>
               </a:rPr>
-              <a:t>Rise with ventricular wall stress — useful to rule OUT heart failure when low.</a:t>
+              <a:t>ALT/AST/ALP measure injury; bilirubin, albumin, PT/INR measure FUNCTION.</a:t>
             </a:r>
             <a:endParaRPr lang="en-US" sz="1250" dirty="0"/>
           </a:p>
@@ -3430,7 +3875,7 @@
                 <a:ea typeface="Calibri" pitchFamily="34" charset="-122"/>
                 <a:cs typeface="Calibri" pitchFamily="34" charset="-120"/>
               </a:rPr>
-              <a:t>Higher with age and renal impairment; lower in obesity.</a:t>
+              <a:t>Synthetic failure: low albumin, prolonged PT/INR.</a:t>
             </a:r>
             <a:endParaRPr lang="en-US" sz="1250" dirty="0"/>
           </a:p>
@@ -3451,7 +3896,7 @@
                 <a:ea typeface="Calibri" pitchFamily="34" charset="-122"/>
                 <a:cs typeface="Calibri" pitchFamily="34" charset="-120"/>
               </a:rPr>
-              <a:t>NT-proBNP is renally cleared and runs higher than BNP.</a:t>
+              <a:t>Isolated unconjugated hyperbilirubinemia: hemolysis or Gilbert.</a:t>
             </a:r>
             <a:endParaRPr lang="en-US" sz="1250" dirty="0"/>
           </a:p>
@@ -3472,7 +3917,7 @@
                 <a:ea typeface="Calibri" pitchFamily="34" charset="-122"/>
                 <a:cs typeface="Calibri" pitchFamily="34" charset="-120"/>
               </a:rPr>
-              <a:t>Use to support, not replace, the clinical diagnosis.</a:t>
+              <a:t>Conjugated hyperbilirubinemia → hepatobiliary disease.</a:t>
             </a:r>
             <a:endParaRPr lang="en-US" sz="1250" dirty="0"/>
           </a:p>
@@ -3598,7 +4043,7 @@
     <p:bg>
       <p:bgPr>
         <a:solidFill>
-          <a:srgbClr val="0D4A92"/>
+          <a:srgbClr val="FFFFFF"/>
         </a:solidFill>
       </p:bgPr>
     </p:bg>
@@ -3618,58 +4063,189 @@
       </p:grpSpPr>
       <p:sp>
         <p:nvSpPr>
-          <p:cNvPr id="2" name="Shape 0"/>
-          <p:cNvSpPr/>
-          <p:nvPr/>
-        </p:nvSpPr>
-        <p:spPr>
-          <a:xfrm>
-            <a:off x="9509760" y="-1280160"/>
-            <a:ext cx="4754880" cy="4754880"/>
-          </a:xfrm>
-          <a:prstGeom prst="ellipse">
-            <a:avLst/>
+          <p:cNvPr id="2" name="Text 0"/>
+          <p:cNvSpPr/>
+          <p:nvPr/>
+        </p:nvSpPr>
+        <p:spPr>
+          <a:xfrm>
+            <a:off x="566928" y="329184"/>
+            <a:ext cx="10515600" cy="310896"/>
+          </a:xfrm>
+          <a:prstGeom prst="rect">
+            <a:avLst/>
+          </a:prstGeom>
+          <a:noFill/>
+          <a:ln/>
+        </p:spPr>
+        <p:txBody>
+          <a:bodyPr wrap="square" lIns="0" tIns="0" rIns="0" bIns="0" rtlCol="0" anchor="ctr"/>
+          <a:lstStyle/>
+          <a:p>
+            <a:pPr algn="l" indent="0" marL="0">
+              <a:buNone/>
+            </a:pPr>
+            <a:r>
+              <a:rPr lang="en-US" sz="1100" b="1" spc="150" kern="0" dirty="0">
+                <a:solidFill>
+                  <a:srgbClr val="1565C0"/>
+                </a:solidFill>
+                <a:latin typeface="Calibri" pitchFamily="34" charset="0"/>
+                <a:ea typeface="Calibri" pitchFamily="34" charset="-122"/>
+                <a:cs typeface="Calibri" pitchFamily="34" charset="-120"/>
+              </a:rPr>
+              <a:t>CLINICAL CHEMISTRY   ·   CARDIAC</a:t>
+            </a:r>
+            <a:endParaRPr lang="en-US" sz="1100" dirty="0"/>
+          </a:p>
+        </p:txBody>
+      </p:sp>
+      <p:sp>
+        <p:nvSpPr>
+          <p:cNvPr id="3" name="Text 1"/>
+          <p:cNvSpPr/>
+          <p:nvPr/>
+        </p:nvSpPr>
+        <p:spPr>
+          <a:xfrm>
+            <a:off x="566928" y="713232"/>
+            <a:ext cx="11064240" cy="749808"/>
+          </a:xfrm>
+          <a:prstGeom prst="rect">
+            <a:avLst/>
+          </a:prstGeom>
+          <a:noFill/>
+          <a:ln/>
+        </p:spPr>
+        <p:txBody>
+          <a:bodyPr wrap="square" lIns="0" tIns="0" rIns="0" bIns="0" rtlCol="0" anchor="ctr"/>
+          <a:lstStyle/>
+          <a:p>
+            <a:pPr algn="l" indent="0" marL="0">
+              <a:buNone/>
+            </a:pPr>
+            <a:r>
+              <a:rPr lang="en-US" sz="3000" b="1" dirty="0">
+                <a:solidFill>
+                  <a:srgbClr val="0E3A5F"/>
+                </a:solidFill>
+                <a:latin typeface="Calibri" pitchFamily="34" charset="0"/>
+                <a:ea typeface="Calibri" pitchFamily="34" charset="-122"/>
+                <a:cs typeface="Calibri" pitchFamily="34" charset="-120"/>
+              </a:rPr>
+              <a:t>High-Sensitivity Troponin Kinetics</a:t>
+            </a:r>
+            <a:endParaRPr lang="en-US" sz="3000" dirty="0"/>
+          </a:p>
+        </p:txBody>
+      </p:sp>
+      <p:sp>
+        <p:nvSpPr>
+          <p:cNvPr id="4" name="Shape 2"/>
+          <p:cNvSpPr/>
+          <p:nvPr/>
+        </p:nvSpPr>
+        <p:spPr>
+          <a:xfrm>
+            <a:off x="1249528" y="1481328"/>
+            <a:ext cx="9692640" cy="4151376"/>
+          </a:xfrm>
+          <a:prstGeom prst="roundRect">
+            <a:avLst>
+              <a:gd name="adj" fmla="val 1982"/>
+            </a:avLst>
           </a:prstGeom>
           <a:solidFill>
-            <a:srgbClr val="FFFFFF">
-              <a:alpha val="8000"/>
-            </a:srgbClr>
+            <a:srgbClr val="FFFFFF"/>
           </a:solidFill>
-          <a:ln/>
-        </p:spPr>
-      </p:sp>
-      <p:sp>
-        <p:nvSpPr>
-          <p:cNvPr id="3" name="Shape 1"/>
-          <p:cNvSpPr/>
-          <p:nvPr/>
-        </p:nvSpPr>
-        <p:spPr>
-          <a:xfrm>
-            <a:off x="10607040" y="3931920"/>
-            <a:ext cx="3108960" cy="3108960"/>
-          </a:xfrm>
-          <a:prstGeom prst="ellipse">
-            <a:avLst/>
-          </a:prstGeom>
-          <a:solidFill>
-            <a:srgbClr val="FFFFFF">
-              <a:alpha val="6000"/>
-            </a:srgbClr>
-          </a:solidFill>
-          <a:ln/>
-        </p:spPr>
-      </p:sp>
-      <p:sp>
-        <p:nvSpPr>
-          <p:cNvPr id="4" name="Text 2"/>
-          <p:cNvSpPr/>
-          <p:nvPr/>
-        </p:nvSpPr>
-        <p:spPr>
-          <a:xfrm>
-            <a:off x="566928" y="1783080"/>
-            <a:ext cx="2743200" cy="1463040"/>
+          <a:ln w="12700">
+            <a:solidFill>
+              <a:srgbClr val="DCE4EC"/>
+            </a:solidFill>
+            <a:prstDash val="solid"/>
+          </a:ln>
+          <a:effectLst>
+            <a:outerShdw sx="100000" sy="100000" kx="0" ky="0" algn="bl" rotWithShape="0" blurRad="88900" dist="25400" dir="5400000">
+              <a:srgbClr val="22303C">
+                <a:alpha val="12000"/>
+              </a:srgbClr>
+            </a:outerShdw>
+          </a:effectLst>
+        </p:spPr>
+      </p:sp>
+      <p:pic>
+        <p:nvPicPr>
+          <p:cNvPr id="5" name="Image 0" descr="/tmp/cp_work2/art/chem_troponin.png">    </p:cNvPr>
+          <p:cNvPicPr>
+            <a:picLocks noChangeAspect="1"/>
+          </p:cNvPicPr>
+          <p:nvPr/>
+        </p:nvPicPr>
+        <p:blipFill>
+          <a:blip r:embed="rId1"/>
+          <a:stretch>
+            <a:fillRect/>
+          </a:stretch>
+        </p:blipFill>
+        <p:spPr>
+          <a:xfrm>
+            <a:off x="1377544" y="1609344"/>
+            <a:ext cx="9436608" cy="3895344"/>
+          </a:xfrm>
+          <a:prstGeom prst="rect">
+            <a:avLst/>
+          </a:prstGeom>
+        </p:spPr>
+      </p:pic>
+      <p:sp>
+        <p:nvSpPr>
+          <p:cNvPr id="6" name="Text 3"/>
+          <p:cNvSpPr/>
+          <p:nvPr/>
+        </p:nvSpPr>
+        <p:spPr>
+          <a:xfrm>
+            <a:off x="566928" y="5705856"/>
+            <a:ext cx="11057839" cy="365760"/>
+          </a:xfrm>
+          <a:prstGeom prst="rect">
+            <a:avLst/>
+          </a:prstGeom>
+          <a:noFill/>
+          <a:ln/>
+        </p:spPr>
+        <p:txBody>
+          <a:bodyPr wrap="square" lIns="0" tIns="0" rIns="0" bIns="0" rtlCol="0" anchor="t"/>
+          <a:lstStyle/>
+          <a:p>
+            <a:pPr algn="ctr" indent="0" marL="0">
+              <a:buNone/>
+            </a:pPr>
+            <a:r>
+              <a:rPr lang="en-US" sz="1150" i="1" dirty="0">
+                <a:solidFill>
+                  <a:srgbClr val="6B7B8A"/>
+                </a:solidFill>
+                <a:latin typeface="Calibri" pitchFamily="34" charset="0"/>
+                <a:ea typeface="Calibri" pitchFamily="34" charset="-122"/>
+                <a:cs typeface="Calibri" pitchFamily="34" charset="-120"/>
+              </a:rPr>
+              <a:t>Original schematic. Acute injury produces a rise-and-fall around the 99th-percentile URL; chronic elevation is stable.</a:t>
+            </a:r>
+            <a:endParaRPr lang="en-US" sz="1150" dirty="0"/>
+          </a:p>
+        </p:txBody>
+      </p:sp>
+      <p:sp>
+        <p:nvSpPr>
+          <p:cNvPr id="7" name="Text 4"/>
+          <p:cNvSpPr/>
+          <p:nvPr/>
+        </p:nvSpPr>
+        <p:spPr>
+          <a:xfrm>
+            <a:off x="566928" y="6473952"/>
+            <a:ext cx="7772400" cy="274320"/>
           </a:xfrm>
           <a:prstGeom prst="rect">
             <a:avLst/>
@@ -3685,30 +4261,30 @@
               <a:buNone/>
             </a:pPr>
             <a:r>
-              <a:rPr lang="en-US" sz="6400" b="1" dirty="0">
-                <a:solidFill>
-                  <a:srgbClr val="E7EFFA"/>
-                </a:solidFill>
-                <a:latin typeface="Calibri" pitchFamily="34" charset="0"/>
-                <a:ea typeface="Calibri" pitchFamily="34" charset="-122"/>
-                <a:cs typeface="Calibri" pitchFamily="34" charset="-120"/>
-              </a:rPr>
-              <a:t>03</a:t>
-            </a:r>
-            <a:endParaRPr lang="en-US" sz="6400" dirty="0"/>
-          </a:p>
-        </p:txBody>
-      </p:sp>
-      <p:sp>
-        <p:nvSpPr>
-          <p:cNvPr id="5" name="Text 3"/>
-          <p:cNvSpPr/>
-          <p:nvPr/>
-        </p:nvSpPr>
-        <p:spPr>
-          <a:xfrm>
-            <a:off x="566928" y="3246120"/>
-            <a:ext cx="10058400" cy="365760"/>
+              <a:rPr lang="en-US" sz="850" dirty="0">
+                <a:solidFill>
+                  <a:srgbClr val="9AA8B4"/>
+                </a:solidFill>
+                <a:latin typeface="Calibri" pitchFamily="34" charset="0"/>
+                <a:ea typeface="Calibri" pitchFamily="34" charset="-122"/>
+                <a:cs typeface="Calibri" pitchFamily="34" charset="-120"/>
+              </a:rPr>
+              <a:t>Makassed General Hospital  ·  Department of Laboratory Medicine</a:t>
+            </a:r>
+            <a:endParaRPr lang="en-US" sz="850" dirty="0"/>
+          </a:p>
+        </p:txBody>
+      </p:sp>
+      <p:sp>
+        <p:nvSpPr>
+          <p:cNvPr id="8" name="Text 5"/>
+          <p:cNvSpPr/>
+          <p:nvPr/>
+        </p:nvSpPr>
+        <p:spPr>
+          <a:xfrm>
+            <a:off x="9814255" y="6473952"/>
+            <a:ext cx="1828800" cy="274320"/>
           </a:xfrm>
           <a:prstGeom prst="rect">
             <a:avLst/>
@@ -3720,60 +4296,49 @@
           <a:bodyPr wrap="square" lIns="0" tIns="0" rIns="0" bIns="0" rtlCol="0" anchor="ctr"/>
           <a:lstStyle/>
           <a:p>
-            <a:pPr algn="l" indent="0" marL="0">
-              <a:buNone/>
-            </a:pPr>
-            <a:r>
-              <a:rPr lang="en-US" sz="1300" b="1" spc="250" kern="0" dirty="0">
-                <a:solidFill>
-                  <a:srgbClr val="F2C9D9"/>
-                </a:solidFill>
-                <a:latin typeface="Calibri" pitchFamily="34" charset="0"/>
-                <a:ea typeface="Calibri" pitchFamily="34" charset="-122"/>
-                <a:cs typeface="Calibri" pitchFamily="34" charset="-120"/>
-              </a:rPr>
-              <a:t>PART THREE</a:t>
-            </a:r>
-            <a:endParaRPr lang="en-US" sz="1300" dirty="0"/>
-          </a:p>
-        </p:txBody>
-      </p:sp>
-      <p:sp>
-        <p:nvSpPr>
-          <p:cNvPr id="6" name="Text 4"/>
-          <p:cNvSpPr/>
-          <p:nvPr/>
-        </p:nvSpPr>
-        <p:spPr>
-          <a:xfrm>
-            <a:off x="566928" y="3611880"/>
-            <a:ext cx="10607040" cy="1463040"/>
-          </a:xfrm>
-          <a:prstGeom prst="rect">
-            <a:avLst/>
-          </a:prstGeom>
-          <a:noFill/>
-          <a:ln/>
-        </p:spPr>
-        <p:txBody>
-          <a:bodyPr wrap="square" lIns="0" tIns="0" rIns="0" bIns="0" rtlCol="0" anchor="t"/>
-          <a:lstStyle/>
-          <a:p>
-            <a:pPr algn="l" indent="0" marL="0">
-              <a:buNone/>
-            </a:pPr>
-            <a:r>
-              <a:rPr lang="en-US" sz="3800" b="1" dirty="0">
-                <a:solidFill>
-                  <a:srgbClr val="FFFFFF"/>
-                </a:solidFill>
-                <a:latin typeface="Calibri" pitchFamily="34" charset="0"/>
-                <a:ea typeface="Calibri" pitchFamily="34" charset="-122"/>
-                <a:cs typeface="Calibri" pitchFamily="34" charset="-120"/>
-              </a:rPr>
-              <a:t>Pitfalls, Cases &amp; Board</a:t>
-            </a:r>
-            <a:endParaRPr lang="en-US" sz="3800" dirty="0"/>
+            <a:pPr algn="r" indent="0" marL="0">
+              <a:buNone/>
+            </a:pPr>
+            <a:r>
+              <a:rPr lang="en-US" sz="850" dirty="0">
+                <a:solidFill>
+                  <a:srgbClr val="9AA8B4"/>
+                </a:solidFill>
+                <a:latin typeface="Calibri" pitchFamily="34" charset="0"/>
+                <a:ea typeface="Calibri" pitchFamily="34" charset="-122"/>
+                <a:cs typeface="Calibri" pitchFamily="34" charset="-120"/>
+              </a:rPr>
+              <a:t>CP Lecture Series</a:t>
+            </a:r>
+            <a:pPr algn="r" indent="0" marL="0">
+              <a:buNone/>
+            </a:pPr>
+            <a:r>
+              <a:rPr lang="en-US" sz="850" dirty="0">
+                <a:solidFill>
+                  <a:srgbClr val="DCE4EC"/>
+                </a:solidFill>
+                <a:latin typeface="Calibri" pitchFamily="34" charset="0"/>
+                <a:ea typeface="Calibri" pitchFamily="34" charset="-122"/>
+                <a:cs typeface="Calibri" pitchFamily="34" charset="-120"/>
+              </a:rPr>
+              <a:t>   ·   </a:t>
+            </a:r>
+            <a:pPr algn="r" indent="0" marL="0">
+              <a:buNone/>
+            </a:pPr>
+            <a:r>
+              <a:rPr lang="en-US" sz="850" b="1" dirty="0">
+                <a:solidFill>
+                  <a:srgbClr val="1565C0"/>
+                </a:solidFill>
+                <a:latin typeface="Calibri" pitchFamily="34" charset="0"/>
+                <a:ea typeface="Calibri" pitchFamily="34" charset="-122"/>
+                <a:cs typeface="Calibri" pitchFamily="34" charset="-120"/>
+              </a:rPr>
+              <a:t>9</a:t>
+            </a:r>
+            <a:endParaRPr lang="en-US" sz="850" dirty="0"/>
           </a:p>
         </p:txBody>
       </p:sp>
@@ -3842,7 +4407,7 @@
                 <a:ea typeface="Calibri" pitchFamily="34" charset="-122"/>
                 <a:cs typeface="Calibri" pitchFamily="34" charset="-120"/>
               </a:rPr>
-              <a:t>CLINICAL CHEMISTRY   ·   PITFALLS</a:t>
+              <a:t>CLINICAL CHEMISTRY   ·   CARDIAC</a:t>
             </a:r>
             <a:endParaRPr lang="en-US" sz="1100" dirty="0"/>
           </a:p>
@@ -3881,7 +4446,7 @@
                 <a:ea typeface="Calibri" pitchFamily="34" charset="-122"/>
                 <a:cs typeface="Calibri" pitchFamily="34" charset="-120"/>
               </a:rPr>
-              <a:t>Macro-Analytes &amp; Misuse</a:t>
+              <a:t>Troponin and Natriuretic Peptides</a:t>
             </a:r>
             <a:endParaRPr lang="en-US" sz="3000" dirty="0"/>
           </a:p>
@@ -3949,7 +4514,7 @@
                 <a:ea typeface="Calibri" pitchFamily="34" charset="-122"/>
                 <a:cs typeface="Calibri" pitchFamily="34" charset="-120"/>
               </a:rPr>
-              <a:t>MACRO-ANALYTES</a:t>
+              <a:t>TROPONIN INTERPRETATION</a:t>
             </a:r>
             <a:endParaRPr lang="en-US" sz="1200" dirty="0"/>
           </a:p>
@@ -3992,7 +4557,7 @@
                 <a:ea typeface="Calibri" pitchFamily="34" charset="-122"/>
                 <a:cs typeface="Calibri" pitchFamily="34" charset="-120"/>
               </a:rPr>
-              <a:t>Macro-CK and macro-AST: analyte bound to immunoglobulin → persistently high, clinically silent.</a:t>
+              <a:t>A value &amp;gt; 99th-percentile URL defines myocardial injury; a rising/falling pattern defines ACUTE injury.</a:t>
             </a:r>
             <a:endParaRPr lang="en-US" sz="1250" dirty="0"/>
           </a:p>
@@ -4013,7 +4578,7 @@
                 <a:ea typeface="Calibri" pitchFamily="34" charset="-122"/>
                 <a:cs typeface="Calibri" pitchFamily="34" charset="-120"/>
               </a:rPr>
-              <a:t>Macroprolactin: big-big prolactin causes spurious hyperprolactinemia — confirm with PEG precipitation.</a:t>
+              <a:t>High-sensitivity assays use sex-specific URLs and 0/1- or 0/2-hour delta protocols.</a:t>
             </a:r>
             <a:endParaRPr lang="en-US" sz="1250" dirty="0"/>
           </a:p>
@@ -4034,7 +4599,7 @@
                 <a:ea typeface="Calibri" pitchFamily="34" charset="-122"/>
                 <a:cs typeface="Calibri" pitchFamily="34" charset="-120"/>
               </a:rPr>
-              <a:t>Suspect when an isolated marker is high without clinical correlate.</a:t>
+              <a:t>Chronic stable elevation: CKD, heart failure, structural disease — not MI by itself.</a:t>
             </a:r>
             <a:endParaRPr lang="en-US" sz="1250" dirty="0"/>
           </a:p>
@@ -4055,7 +4620,7 @@
                 <a:ea typeface="Calibri" pitchFamily="34" charset="-122"/>
                 <a:cs typeface="Calibri" pitchFamily="34" charset="-120"/>
               </a:rPr>
-              <a:t>Resolve with alternative methods or PEG.</a:t>
+              <a:t>Type 1 (plaque rupture) vs type 2 (supply-demand) needs clinical correlation.</a:t>
             </a:r>
             <a:endParaRPr lang="en-US" sz="1250" dirty="0"/>
           </a:p>
@@ -4123,7 +4688,7 @@
                 <a:ea typeface="Calibri" pitchFamily="34" charset="-122"/>
                 <a:cs typeface="Calibri" pitchFamily="34" charset="-120"/>
               </a:rPr>
-              <a:t>COMMON MISUSE</a:t>
+              <a:t>BNP / NT-PROBNP</a:t>
             </a:r>
             <a:endParaRPr lang="en-US" sz="1200" dirty="0"/>
           </a:p>
@@ -4166,7 +4731,7 @@
                 <a:ea typeface="Calibri" pitchFamily="34" charset="-122"/>
                 <a:cs typeface="Calibri" pitchFamily="34" charset="-120"/>
               </a:rPr>
-              <a:t>Ordering troponin without a pretest probability of ACS → false-positive-driven workups.</a:t>
+              <a:t>Rise with ventricular wall stress — strong NEGATIVE predictive value to rule out heart failure.</a:t>
             </a:r>
             <a:endParaRPr lang="en-US" sz="1250" dirty="0"/>
           </a:p>
@@ -4187,7 +4752,7 @@
                 <a:ea typeface="Calibri" pitchFamily="34" charset="-122"/>
                 <a:cs typeface="Calibri" pitchFamily="34" charset="-120"/>
               </a:rPr>
-              <a:t>Using BNP in isolation to diagnose dyspnea.</a:t>
+              <a:t>Higher with age and renal impairment; lower in obesity.</a:t>
             </a:r>
             <a:endParaRPr lang="en-US" sz="1250" dirty="0"/>
           </a:p>
@@ -4208,7 +4773,7 @@
                 <a:ea typeface="Calibri" pitchFamily="34" charset="-122"/>
                 <a:cs typeface="Calibri" pitchFamily="34" charset="-120"/>
               </a:rPr>
-              <a:t>Repeating LFTs without a pattern-based plan.</a:t>
+              <a:t>NT-proBNP is renally cleared and runs higher than BNP.</a:t>
             </a:r>
             <a:endParaRPr lang="en-US" sz="1250" dirty="0"/>
           </a:p>
@@ -4229,7 +4794,7 @@
                 <a:ea typeface="Calibri" pitchFamily="34" charset="-122"/>
                 <a:cs typeface="Calibri" pitchFamily="34" charset="-120"/>
               </a:rPr>
-              <a:t>Ignoring drug effects on creatinine.</a:t>
+              <a:t>Support, don’t replace, the clinical diagnosis.</a:t>
             </a:r>
             <a:endParaRPr lang="en-US" sz="1250" dirty="0"/>
           </a:p>
@@ -4335,7 +4900,7 @@
                 <a:ea typeface="Calibri" pitchFamily="34" charset="-122"/>
                 <a:cs typeface="Calibri" pitchFamily="34" charset="-120"/>
               </a:rPr>
-              <a:t>9</a:t>
+              <a:t>10</a:t>
             </a:r>
             <a:endParaRPr lang="en-US" sz="850" dirty="0"/>
           </a:p>
@@ -4355,7 +4920,7 @@
     <p:bg>
       <p:bgPr>
         <a:solidFill>
-          <a:srgbClr val="FFFFFF"/>
+          <a:srgbClr val="0D4A92"/>
         </a:solidFill>
       </p:bgPr>
     </p:bg>
@@ -4375,14 +4940,58 @@
       </p:grpSpPr>
       <p:sp>
         <p:nvSpPr>
-          <p:cNvPr id="2" name="Text 0"/>
-          <p:cNvSpPr/>
-          <p:nvPr/>
-        </p:nvSpPr>
-        <p:spPr>
-          <a:xfrm>
-            <a:off x="566928" y="329184"/>
-            <a:ext cx="10515600" cy="310896"/>
+          <p:cNvPr id="2" name="Shape 0"/>
+          <p:cNvSpPr/>
+          <p:nvPr/>
+        </p:nvSpPr>
+        <p:spPr>
+          <a:xfrm>
+            <a:off x="9509760" y="-1280160"/>
+            <a:ext cx="4754880" cy="4754880"/>
+          </a:xfrm>
+          <a:prstGeom prst="ellipse">
+            <a:avLst/>
+          </a:prstGeom>
+          <a:solidFill>
+            <a:srgbClr val="FFFFFF">
+              <a:alpha val="8000"/>
+            </a:srgbClr>
+          </a:solidFill>
+          <a:ln/>
+        </p:spPr>
+      </p:sp>
+      <p:sp>
+        <p:nvSpPr>
+          <p:cNvPr id="3" name="Shape 1"/>
+          <p:cNvSpPr/>
+          <p:nvPr/>
+        </p:nvSpPr>
+        <p:spPr>
+          <a:xfrm>
+            <a:off x="10607040" y="3931920"/>
+            <a:ext cx="3108960" cy="3108960"/>
+          </a:xfrm>
+          <a:prstGeom prst="ellipse">
+            <a:avLst/>
+          </a:prstGeom>
+          <a:solidFill>
+            <a:srgbClr val="FFFFFF">
+              <a:alpha val="6000"/>
+            </a:srgbClr>
+          </a:solidFill>
+          <a:ln/>
+        </p:spPr>
+      </p:sp>
+      <p:sp>
+        <p:nvSpPr>
+          <p:cNvPr id="4" name="Text 2"/>
+          <p:cNvSpPr/>
+          <p:nvPr/>
+        </p:nvSpPr>
+        <p:spPr>
+          <a:xfrm>
+            <a:off x="566928" y="1783080"/>
+            <a:ext cx="2743200" cy="1463040"/>
           </a:xfrm>
           <a:prstGeom prst="rect">
             <a:avLst/>
@@ -4398,30 +5007,30 @@
               <a:buNone/>
             </a:pPr>
             <a:r>
-              <a:rPr lang="en-US" sz="1100" b="1" spc="150" kern="0" dirty="0">
-                <a:solidFill>
-                  <a:srgbClr val="1565C0"/>
-                </a:solidFill>
-                <a:latin typeface="Calibri" pitchFamily="34" charset="0"/>
-                <a:ea typeface="Calibri" pitchFamily="34" charset="-122"/>
-                <a:cs typeface="Calibri" pitchFamily="34" charset="-120"/>
-              </a:rPr>
-              <a:t>CLINICAL CHEMISTRY   ·   CASE 1</a:t>
-            </a:r>
-            <a:endParaRPr lang="en-US" sz="1100" dirty="0"/>
-          </a:p>
-        </p:txBody>
-      </p:sp>
-      <p:sp>
-        <p:nvSpPr>
-          <p:cNvPr id="3" name="Text 1"/>
-          <p:cNvSpPr/>
-          <p:nvPr/>
-        </p:nvSpPr>
-        <p:spPr>
-          <a:xfrm>
-            <a:off x="566928" y="713232"/>
-            <a:ext cx="11064240" cy="749808"/>
+              <a:rPr lang="en-US" sz="6400" b="1" dirty="0">
+                <a:solidFill>
+                  <a:srgbClr val="E7EFFA"/>
+                </a:solidFill>
+                <a:latin typeface="Calibri" pitchFamily="34" charset="0"/>
+                <a:ea typeface="Calibri" pitchFamily="34" charset="-122"/>
+                <a:cs typeface="Calibri" pitchFamily="34" charset="-120"/>
+              </a:rPr>
+              <a:t>03</a:t>
+            </a:r>
+            <a:endParaRPr lang="en-US" sz="6400" dirty="0"/>
+          </a:p>
+        </p:txBody>
+      </p:sp>
+      <p:sp>
+        <p:nvSpPr>
+          <p:cNvPr id="5" name="Text 3"/>
+          <p:cNvSpPr/>
+          <p:nvPr/>
+        </p:nvSpPr>
+        <p:spPr>
+          <a:xfrm>
+            <a:off x="566928" y="3246120"/>
+            <a:ext cx="10058400" cy="365760"/>
           </a:xfrm>
           <a:prstGeom prst="rect">
             <a:avLst/>
@@ -4437,85 +5046,17 @@
               <a:buNone/>
             </a:pPr>
             <a:r>
-              <a:rPr lang="en-US" sz="3000" b="1" dirty="0">
-                <a:solidFill>
-                  <a:srgbClr val="0E3A5F"/>
-                </a:solidFill>
-                <a:latin typeface="Calibri" pitchFamily="34" charset="0"/>
-                <a:ea typeface="Calibri" pitchFamily="34" charset="-122"/>
-                <a:cs typeface="Calibri" pitchFamily="34" charset="-120"/>
-              </a:rPr>
-              <a:t>Case 1</a:t>
-            </a:r>
-            <a:endParaRPr lang="en-US" sz="3000" dirty="0"/>
-          </a:p>
-        </p:txBody>
-      </p:sp>
-      <p:sp>
-        <p:nvSpPr>
-          <p:cNvPr id="4" name="Shape 2"/>
-          <p:cNvSpPr/>
-          <p:nvPr/>
-        </p:nvSpPr>
-        <p:spPr>
-          <a:xfrm>
-            <a:off x="566928" y="1517904"/>
-            <a:ext cx="11057839" cy="2788920"/>
-          </a:xfrm>
-          <a:prstGeom prst="roundRect">
-            <a:avLst>
-              <a:gd name="adj" fmla="val 2951"/>
-            </a:avLst>
-          </a:prstGeom>
-          <a:solidFill>
-            <a:srgbClr val="E7EFFA"/>
-          </a:solidFill>
-          <a:ln/>
-          <a:effectLst>
-            <a:outerShdw sx="100000" sy="100000" kx="0" ky="0" algn="bl" rotWithShape="0" blurRad="88900" dist="25400" dir="5400000">
-              <a:srgbClr val="22303C">
-                <a:alpha val="12000"/>
-              </a:srgbClr>
-            </a:outerShdw>
-          </a:effectLst>
-        </p:spPr>
-      </p:sp>
-      <p:sp>
-        <p:nvSpPr>
-          <p:cNvPr id="5" name="Text 3"/>
-          <p:cNvSpPr/>
-          <p:nvPr/>
-        </p:nvSpPr>
-        <p:spPr>
-          <a:xfrm>
-            <a:off x="841248" y="1700784"/>
-            <a:ext cx="5486400" cy="292608"/>
-          </a:xfrm>
-          <a:prstGeom prst="rect">
-            <a:avLst/>
-          </a:prstGeom>
-          <a:noFill/>
-          <a:ln/>
-        </p:spPr>
-        <p:txBody>
-          <a:bodyPr wrap="square" lIns="0" tIns="0" rIns="0" bIns="0" rtlCol="0" anchor="ctr"/>
-          <a:lstStyle/>
-          <a:p>
-            <a:pPr indent="0" marL="0">
-              <a:buNone/>
-            </a:pPr>
-            <a:r>
-              <a:rPr lang="en-US" sz="1100" b="1" spc="150" kern="0" dirty="0">
-                <a:solidFill>
-                  <a:srgbClr val="1565C0"/>
-                </a:solidFill>
-                <a:latin typeface="Calibri" pitchFamily="34" charset="0"/>
-                <a:ea typeface="Calibri" pitchFamily="34" charset="-122"/>
-                <a:cs typeface="Calibri" pitchFamily="34" charset="-120"/>
-              </a:rPr>
-              <a:t>CLINICAL VIGNETTE</a:t>
-            </a:r>
-            <a:endParaRPr lang="en-US" sz="1100" dirty="0"/>
+              <a:rPr lang="en-US" sz="1300" b="1" spc="250" kern="0" dirty="0">
+                <a:solidFill>
+                  <a:srgbClr val="F2C9D9"/>
+                </a:solidFill>
+                <a:latin typeface="Calibri" pitchFamily="34" charset="0"/>
+                <a:ea typeface="Calibri" pitchFamily="34" charset="-122"/>
+                <a:cs typeface="Calibri" pitchFamily="34" charset="-120"/>
+              </a:rPr>
+              <a:t>PART THREE</a:t>
+            </a:r>
+            <a:endParaRPr lang="en-US" sz="1300" dirty="0"/>
           </a:p>
         </p:txBody>
       </p:sp>
@@ -4527,8 +5068,8 @@
         </p:nvSpPr>
         <p:spPr>
           <a:xfrm>
-            <a:off x="841248" y="2029968"/>
-            <a:ext cx="10509199" cy="2148840"/>
+            <a:off x="566928" y="3611880"/>
+            <a:ext cx="10607040" cy="1463040"/>
           </a:xfrm>
           <a:prstGeom prst="rect">
             <a:avLst/>
@@ -4541,120 +5082,10 @@
           <a:lstStyle/>
           <a:p>
             <a:pPr algn="l" indent="0" marL="0">
-              <a:lnSpc>
-                <a:spcPct val="108000"/>
-              </a:lnSpc>
-              <a:buNone/>
-            </a:pPr>
-            <a:r>
-              <a:rPr lang="en-US" sz="1450" dirty="0">
-                <a:solidFill>
-                  <a:srgbClr val="33444F"/>
-                </a:solidFill>
-                <a:latin typeface="Calibri" pitchFamily="34" charset="0"/>
-                <a:ea typeface="Calibri" pitchFamily="34" charset="-122"/>
-                <a:cs typeface="Calibri" pitchFamily="34" charset="-120"/>
-              </a:rPr>
-              <a:t>A patient with advanced CKD has a troponin persistently just above the URL, unchanged across three serial draws, with no ischemic symptoms or ECG changes.</a:t>
-            </a:r>
-            <a:endParaRPr lang="en-US" sz="1450" dirty="0"/>
-          </a:p>
-        </p:txBody>
-      </p:sp>
-      <p:sp>
-        <p:nvSpPr>
-          <p:cNvPr id="7" name="Shape 5"/>
-          <p:cNvSpPr/>
-          <p:nvPr/>
-        </p:nvSpPr>
-        <p:spPr>
-          <a:xfrm>
-            <a:off x="566928" y="4553712"/>
-            <a:ext cx="11057839" cy="1325880"/>
-          </a:xfrm>
-          <a:prstGeom prst="roundRect">
-            <a:avLst>
-              <a:gd name="adj" fmla="val 6207"/>
-            </a:avLst>
-          </a:prstGeom>
-          <a:solidFill>
-            <a:srgbClr val="0E3A5F"/>
-          </a:solidFill>
-          <a:ln/>
-          <a:effectLst>
-            <a:outerShdw sx="100000" sy="100000" kx="0" ky="0" algn="bl" rotWithShape="0" blurRad="88900" dist="25400" dir="5400000">
-              <a:srgbClr val="22303C">
-                <a:alpha val="12000"/>
-              </a:srgbClr>
-            </a:outerShdw>
-          </a:effectLst>
-        </p:spPr>
-      </p:sp>
-      <p:sp>
-        <p:nvSpPr>
-          <p:cNvPr id="8" name="Text 6"/>
-          <p:cNvSpPr/>
-          <p:nvPr/>
-        </p:nvSpPr>
-        <p:spPr>
-          <a:xfrm>
-            <a:off x="822960" y="4681728"/>
-            <a:ext cx="640080" cy="960120"/>
-          </a:xfrm>
-          <a:prstGeom prst="rect">
-            <a:avLst/>
-          </a:prstGeom>
-          <a:noFill/>
-          <a:ln/>
-        </p:spPr>
-        <p:txBody>
-          <a:bodyPr wrap="square" lIns="0" tIns="0" rIns="0" bIns="0" rtlCol="0" anchor="ctr"/>
-          <a:lstStyle/>
-          <a:p>
-            <a:pPr algn="ctr" indent="0" marL="0">
-              <a:buNone/>
-            </a:pPr>
-            <a:r>
-              <a:rPr lang="en-US" sz="4000" b="1" dirty="0">
-                <a:solidFill>
-                  <a:srgbClr val="1565C0"/>
-                </a:solidFill>
-                <a:latin typeface="Calibri" pitchFamily="34" charset="0"/>
-                <a:ea typeface="Calibri" pitchFamily="34" charset="-122"/>
-                <a:cs typeface="Calibri" pitchFamily="34" charset="-120"/>
-              </a:rPr>
-              <a:t>?</a:t>
-            </a:r>
-            <a:endParaRPr lang="en-US" sz="4000" dirty="0"/>
-          </a:p>
-        </p:txBody>
-      </p:sp>
-      <p:sp>
-        <p:nvSpPr>
-          <p:cNvPr id="9" name="Text 7"/>
-          <p:cNvSpPr/>
-          <p:nvPr/>
-        </p:nvSpPr>
-        <p:spPr>
-          <a:xfrm>
-            <a:off x="1618488" y="4553712"/>
-            <a:ext cx="9686239" cy="1325880"/>
-          </a:xfrm>
-          <a:prstGeom prst="rect">
-            <a:avLst/>
-          </a:prstGeom>
-          <a:noFill/>
-          <a:ln/>
-        </p:spPr>
-        <p:txBody>
-          <a:bodyPr wrap="square" lIns="0" tIns="0" rIns="0" bIns="0" rtlCol="0" anchor="ctr"/>
-          <a:lstStyle/>
-          <a:p>
-            <a:pPr algn="l" indent="0" marL="0">
-              <a:buNone/>
-            </a:pPr>
-            <a:r>
-              <a:rPr lang="en-US" sz="1500" b="1" dirty="0">
+              <a:buNone/>
+            </a:pPr>
+            <a:r>
+              <a:rPr lang="en-US" sz="3800" b="1" dirty="0">
                 <a:solidFill>
                   <a:srgbClr val="FFFFFF"/>
                 </a:solidFill>
@@ -4662,115 +5093,9 @@
                 <a:ea typeface="Calibri" pitchFamily="34" charset="-122"/>
                 <a:cs typeface="Calibri" pitchFamily="34" charset="-120"/>
               </a:rPr>
-              <a:t>Is this an acute MI? How does the pattern guide you?</a:t>
-            </a:r>
-            <a:endParaRPr lang="en-US" sz="1500" dirty="0"/>
-          </a:p>
-        </p:txBody>
-      </p:sp>
-      <p:sp>
-        <p:nvSpPr>
-          <p:cNvPr id="10" name="Text 8"/>
-          <p:cNvSpPr/>
-          <p:nvPr/>
-        </p:nvSpPr>
-        <p:spPr>
-          <a:xfrm>
-            <a:off x="566928" y="6473952"/>
-            <a:ext cx="7772400" cy="274320"/>
-          </a:xfrm>
-          <a:prstGeom prst="rect">
-            <a:avLst/>
-          </a:prstGeom>
-          <a:noFill/>
-          <a:ln/>
-        </p:spPr>
-        <p:txBody>
-          <a:bodyPr wrap="square" lIns="0" tIns="0" rIns="0" bIns="0" rtlCol="0" anchor="ctr"/>
-          <a:lstStyle/>
-          <a:p>
-            <a:pPr algn="l" indent="0" marL="0">
-              <a:buNone/>
-            </a:pPr>
-            <a:r>
-              <a:rPr lang="en-US" sz="850" dirty="0">
-                <a:solidFill>
-                  <a:srgbClr val="9AA8B4"/>
-                </a:solidFill>
-                <a:latin typeface="Calibri" pitchFamily="34" charset="0"/>
-                <a:ea typeface="Calibri" pitchFamily="34" charset="-122"/>
-                <a:cs typeface="Calibri" pitchFamily="34" charset="-120"/>
-              </a:rPr>
-              <a:t>Makassed General Hospital  ·  Department of Laboratory Medicine</a:t>
-            </a:r>
-            <a:endParaRPr lang="en-US" sz="850" dirty="0"/>
-          </a:p>
-        </p:txBody>
-      </p:sp>
-      <p:sp>
-        <p:nvSpPr>
-          <p:cNvPr id="11" name="Text 9"/>
-          <p:cNvSpPr/>
-          <p:nvPr/>
-        </p:nvSpPr>
-        <p:spPr>
-          <a:xfrm>
-            <a:off x="9814255" y="6473952"/>
-            <a:ext cx="1828800" cy="274320"/>
-          </a:xfrm>
-          <a:prstGeom prst="rect">
-            <a:avLst/>
-          </a:prstGeom>
-          <a:noFill/>
-          <a:ln/>
-        </p:spPr>
-        <p:txBody>
-          <a:bodyPr wrap="square" lIns="0" tIns="0" rIns="0" bIns="0" rtlCol="0" anchor="ctr"/>
-          <a:lstStyle/>
-          <a:p>
-            <a:pPr algn="r" indent="0" marL="0">
-              <a:buNone/>
-            </a:pPr>
-            <a:r>
-              <a:rPr lang="en-US" sz="850" dirty="0">
-                <a:solidFill>
-                  <a:srgbClr val="9AA8B4"/>
-                </a:solidFill>
-                <a:latin typeface="Calibri" pitchFamily="34" charset="0"/>
-                <a:ea typeface="Calibri" pitchFamily="34" charset="-122"/>
-                <a:cs typeface="Calibri" pitchFamily="34" charset="-120"/>
-              </a:rPr>
-              <a:t>CP Lecture Series</a:t>
-            </a:r>
-            <a:pPr algn="r" indent="0" marL="0">
-              <a:buNone/>
-            </a:pPr>
-            <a:r>
-              <a:rPr lang="en-US" sz="850" dirty="0">
-                <a:solidFill>
-                  <a:srgbClr val="DCE4EC"/>
-                </a:solidFill>
-                <a:latin typeface="Calibri" pitchFamily="34" charset="0"/>
-                <a:ea typeface="Calibri" pitchFamily="34" charset="-122"/>
-                <a:cs typeface="Calibri" pitchFamily="34" charset="-120"/>
-              </a:rPr>
-              <a:t>   ·   </a:t>
-            </a:r>
-            <a:pPr algn="r" indent="0" marL="0">
-              <a:buNone/>
-            </a:pPr>
-            <a:r>
-              <a:rPr lang="en-US" sz="850" b="1" dirty="0">
-                <a:solidFill>
-                  <a:srgbClr val="1565C0"/>
-                </a:solidFill>
-                <a:latin typeface="Calibri" pitchFamily="34" charset="0"/>
-                <a:ea typeface="Calibri" pitchFamily="34" charset="-122"/>
-                <a:cs typeface="Calibri" pitchFamily="34" charset="-120"/>
-              </a:rPr>
-              <a:t>10</a:t>
-            </a:r>
-            <a:endParaRPr lang="en-US" sz="850" dirty="0"/>
+              <a:t>Pitfalls, Cases &amp; Board</a:t>
+            </a:r>
+            <a:endParaRPr lang="en-US" sz="3800" dirty="0"/>
           </a:p>
         </p:txBody>
       </p:sp>
@@ -4839,7 +5164,7 @@
                 <a:ea typeface="Calibri" pitchFamily="34" charset="-122"/>
                 <a:cs typeface="Calibri" pitchFamily="34" charset="-120"/>
               </a:rPr>
-              <a:t>CLINICAL CHEMISTRY   ·   CASE 1  ·  RESOLUTION</a:t>
+              <a:t>CLINICAL CHEMISTRY   ·   PITFALLS</a:t>
             </a:r>
             <a:endParaRPr lang="en-US" sz="1100" dirty="0"/>
           </a:p>
@@ -4878,7 +5203,7 @@
                 <a:ea typeface="Calibri" pitchFamily="34" charset="-122"/>
                 <a:cs typeface="Calibri" pitchFamily="34" charset="-120"/>
               </a:rPr>
-              <a:t>Case 1: Chronic Troponin Elevation</a:t>
+              <a:t>Macro-Analytes &amp; Common Misuse</a:t>
             </a:r>
             <a:endParaRPr lang="en-US" sz="3000" dirty="0"/>
           </a:p>
@@ -4886,124 +5211,18 @@
       </p:sp>
       <p:sp>
         <p:nvSpPr>
-          <p:cNvPr id="4" name="Text 2"/>
-          <p:cNvSpPr/>
-          <p:nvPr/>
-        </p:nvSpPr>
-        <p:spPr>
-          <a:xfrm>
-            <a:off x="566928" y="1554480"/>
-            <a:ext cx="6413547" cy="4023360"/>
-          </a:xfrm>
-          <a:prstGeom prst="rect">
-            <a:avLst/>
-          </a:prstGeom>
-          <a:noFill/>
-          <a:ln/>
-        </p:spPr>
-        <p:txBody>
-          <a:bodyPr wrap="square" lIns="0" tIns="0" rIns="0" bIns="0" rtlCol="0" anchor="t"/>
-          <a:lstStyle/>
-          <a:p>
-            <a:pPr algn="l" marL="177800" indent="-177800">
-              <a:spcAft>
-                <a:spcPts val="900"/>
-              </a:spcAft>
-              <a:buSzPct val="100000"/>
-              <a:buChar char="•"/>
-            </a:pPr>
-            <a:r>
-              <a:rPr lang="en-US" sz="1400" b="1" dirty="0">
-                <a:solidFill>
-                  <a:srgbClr val="1B2A38"/>
-                </a:solidFill>
-                <a:latin typeface="Calibri" pitchFamily="34" charset="0"/>
-                <a:ea typeface="Calibri" pitchFamily="34" charset="-122"/>
-                <a:cs typeface="Calibri" pitchFamily="34" charset="-120"/>
-              </a:rPr>
-              <a:t>A stable elevation without a rise/fall is chronic myocardial injury, not an acute MI.</a:t>
-            </a:r>
-            <a:endParaRPr lang="en-US" sz="1400" dirty="0"/>
-          </a:p>
-          <a:p>
-            <a:pPr algn="l" marL="177800" indent="-177800">
-              <a:spcAft>
-                <a:spcPts val="900"/>
-              </a:spcAft>
-              <a:buSzPct val="100000"/>
-              <a:buChar char="•"/>
-            </a:pPr>
-            <a:r>
-              <a:rPr lang="en-US" sz="1400" dirty="0">
-                <a:solidFill>
-                  <a:srgbClr val="33444F"/>
-                </a:solidFill>
-                <a:latin typeface="Calibri" pitchFamily="34" charset="0"/>
-                <a:ea typeface="Calibri" pitchFamily="34" charset="-122"/>
-                <a:cs typeface="Calibri" pitchFamily="34" charset="-120"/>
-              </a:rPr>
-              <a:t>CKD, heart failure, and structural disease cause stable elevations.</a:t>
-            </a:r>
-            <a:endParaRPr lang="en-US" sz="1400" dirty="0"/>
-          </a:p>
-          <a:p>
-            <a:pPr algn="l" marL="177800" indent="-177800">
-              <a:spcAft>
-                <a:spcPts val="900"/>
-              </a:spcAft>
-              <a:buSzPct val="100000"/>
-              <a:buChar char="•"/>
-            </a:pPr>
-            <a:r>
-              <a:rPr lang="en-US" sz="1400" dirty="0">
-                <a:solidFill>
-                  <a:srgbClr val="33444F"/>
-                </a:solidFill>
-                <a:latin typeface="Calibri" pitchFamily="34" charset="0"/>
-                <a:ea typeface="Calibri" pitchFamily="34" charset="-122"/>
-                <a:cs typeface="Calibri" pitchFamily="34" charset="-120"/>
-              </a:rPr>
-              <a:t>Acute MI requires a dynamic rise and/or fall on serial high-sensitivity testing plus clinical/ECG context.</a:t>
-            </a:r>
-            <a:endParaRPr lang="en-US" sz="1400" dirty="0"/>
-          </a:p>
-          <a:p>
-            <a:pPr algn="l" marL="177800" indent="-177800">
-              <a:spcAft>
-                <a:spcPts val="900"/>
-              </a:spcAft>
-              <a:buSzPct val="100000"/>
-              <a:buChar char="•"/>
-            </a:pPr>
-            <a:r>
-              <a:rPr lang="en-US" sz="1400" dirty="0">
-                <a:solidFill>
-                  <a:srgbClr val="33444F"/>
-                </a:solidFill>
-                <a:latin typeface="Calibri" pitchFamily="34" charset="0"/>
-                <a:ea typeface="Calibri" pitchFamily="34" charset="-122"/>
-                <a:cs typeface="Calibri" pitchFamily="34" charset="-120"/>
-              </a:rPr>
-              <a:t>Establish each patient’s baseline.</a:t>
-            </a:r>
-            <a:endParaRPr lang="en-US" sz="1400" dirty="0"/>
-          </a:p>
-        </p:txBody>
-      </p:sp>
-      <p:sp>
-        <p:nvSpPr>
-          <p:cNvPr id="5" name="Shape 3"/>
-          <p:cNvSpPr/>
-          <p:nvPr/>
-        </p:nvSpPr>
-        <p:spPr>
-          <a:xfrm>
-            <a:off x="7422788" y="1554480"/>
-            <a:ext cx="4201979" cy="3977640"/>
+          <p:cNvPr id="4" name="Shape 2"/>
+          <p:cNvSpPr/>
+          <p:nvPr/>
+        </p:nvSpPr>
+        <p:spPr>
+          <a:xfrm>
+            <a:off x="566928" y="1517904"/>
+            <a:ext cx="5346040" cy="4114800"/>
           </a:xfrm>
           <a:prstGeom prst="roundRect">
             <a:avLst>
-              <a:gd name="adj" fmla="val 2069"/>
+              <a:gd name="adj" fmla="val 2000"/>
             </a:avLst>
           </a:prstGeom>
           <a:solidFill>
@@ -5021,14 +5240,188 @@
       </p:sp>
       <p:sp>
         <p:nvSpPr>
+          <p:cNvPr id="5" name="Text 3"/>
+          <p:cNvSpPr/>
+          <p:nvPr/>
+        </p:nvSpPr>
+        <p:spPr>
+          <a:xfrm>
+            <a:off x="804672" y="1682496"/>
+            <a:ext cx="4888840" cy="274320"/>
+          </a:xfrm>
+          <a:prstGeom prst="rect">
+            <a:avLst/>
+          </a:prstGeom>
+          <a:noFill/>
+          <a:ln/>
+        </p:spPr>
+        <p:txBody>
+          <a:bodyPr wrap="square" lIns="0" tIns="0" rIns="0" bIns="0" rtlCol="0" anchor="ctr"/>
+          <a:lstStyle/>
+          <a:p>
+            <a:pPr indent="0" marL="0">
+              <a:buNone/>
+            </a:pPr>
+            <a:r>
+              <a:rPr lang="en-US" sz="1200" b="1" spc="100" kern="0" dirty="0">
+                <a:solidFill>
+                  <a:srgbClr val="0D4A92"/>
+                </a:solidFill>
+                <a:latin typeface="Calibri" pitchFamily="34" charset="0"/>
+                <a:ea typeface="Calibri" pitchFamily="34" charset="-122"/>
+                <a:cs typeface="Calibri" pitchFamily="34" charset="-120"/>
+              </a:rPr>
+              <a:t>MACRO-ANALYTES</a:t>
+            </a:r>
+            <a:endParaRPr lang="en-US" sz="1200" dirty="0"/>
+          </a:p>
+        </p:txBody>
+      </p:sp>
+      <p:sp>
+        <p:nvSpPr>
           <p:cNvPr id="6" name="Text 4"/>
           <p:cNvSpPr/>
           <p:nvPr/>
         </p:nvSpPr>
         <p:spPr>
           <a:xfrm>
-            <a:off x="7660532" y="1755648"/>
-            <a:ext cx="3744779" cy="310896"/>
+            <a:off x="804672" y="2029968"/>
+            <a:ext cx="4870552" cy="3474720"/>
+          </a:xfrm>
+          <a:prstGeom prst="rect">
+            <a:avLst/>
+          </a:prstGeom>
+          <a:noFill/>
+          <a:ln/>
+        </p:spPr>
+        <p:txBody>
+          <a:bodyPr wrap="square" lIns="0" tIns="0" rIns="0" bIns="0" rtlCol="0" anchor="t"/>
+          <a:lstStyle/>
+          <a:p>
+            <a:pPr algn="l" marL="177800" indent="-177800">
+              <a:spcAft>
+                <a:spcPts val="900"/>
+              </a:spcAft>
+              <a:buSzPct val="100000"/>
+              <a:buChar char="•"/>
+            </a:pPr>
+            <a:r>
+              <a:rPr lang="en-US" sz="1250" b="1" dirty="0">
+                <a:solidFill>
+                  <a:srgbClr val="1B2A38"/>
+                </a:solidFill>
+                <a:latin typeface="Calibri" pitchFamily="34" charset="0"/>
+                <a:ea typeface="Calibri" pitchFamily="34" charset="-122"/>
+                <a:cs typeface="Calibri" pitchFamily="34" charset="-120"/>
+              </a:rPr>
+              <a:t>Macro-CK and macro-AST: immunoglobulin-bound → persistently high, silent.</a:t>
+            </a:r>
+            <a:endParaRPr lang="en-US" sz="1250" dirty="0"/>
+          </a:p>
+          <a:p>
+            <a:pPr algn="l" marL="177800" indent="-177800">
+              <a:spcAft>
+                <a:spcPts val="900"/>
+              </a:spcAft>
+              <a:buSzPct val="100000"/>
+              <a:buChar char="•"/>
+            </a:pPr>
+            <a:r>
+              <a:rPr lang="en-US" sz="1250" dirty="0">
+                <a:solidFill>
+                  <a:srgbClr val="33444F"/>
+                </a:solidFill>
+                <a:latin typeface="Calibri" pitchFamily="34" charset="0"/>
+                <a:ea typeface="Calibri" pitchFamily="34" charset="-122"/>
+                <a:cs typeface="Calibri" pitchFamily="34" charset="-120"/>
+              </a:rPr>
+              <a:t>Macroprolactin: spurious hyperprolactinemia — confirm with PEG precipitation.</a:t>
+            </a:r>
+            <a:endParaRPr lang="en-US" sz="1250" dirty="0"/>
+          </a:p>
+          <a:p>
+            <a:pPr algn="l" marL="177800" indent="-177800">
+              <a:spcAft>
+                <a:spcPts val="900"/>
+              </a:spcAft>
+              <a:buSzPct val="100000"/>
+              <a:buChar char="•"/>
+            </a:pPr>
+            <a:r>
+              <a:rPr lang="en-US" sz="1250" dirty="0">
+                <a:solidFill>
+                  <a:srgbClr val="33444F"/>
+                </a:solidFill>
+                <a:latin typeface="Calibri" pitchFamily="34" charset="0"/>
+                <a:ea typeface="Calibri" pitchFamily="34" charset="-122"/>
+                <a:cs typeface="Calibri" pitchFamily="34" charset="-120"/>
+              </a:rPr>
+              <a:t>Suspect when an isolated marker is high without clinical correlate.</a:t>
+            </a:r>
+            <a:endParaRPr lang="en-US" sz="1250" dirty="0"/>
+          </a:p>
+          <a:p>
+            <a:pPr algn="l" marL="177800" indent="-177800">
+              <a:spcAft>
+                <a:spcPts val="900"/>
+              </a:spcAft>
+              <a:buSzPct val="100000"/>
+              <a:buChar char="•"/>
+            </a:pPr>
+            <a:r>
+              <a:rPr lang="en-US" sz="1250" dirty="0">
+                <a:solidFill>
+                  <a:srgbClr val="33444F"/>
+                </a:solidFill>
+                <a:latin typeface="Calibri" pitchFamily="34" charset="0"/>
+                <a:ea typeface="Calibri" pitchFamily="34" charset="-122"/>
+                <a:cs typeface="Calibri" pitchFamily="34" charset="-120"/>
+              </a:rPr>
+              <a:t>Resolve with alternative methods or PEG.</a:t>
+            </a:r>
+            <a:endParaRPr lang="en-US" sz="1250" dirty="0"/>
+          </a:p>
+        </p:txBody>
+      </p:sp>
+      <p:sp>
+        <p:nvSpPr>
+          <p:cNvPr id="7" name="Shape 5"/>
+          <p:cNvSpPr/>
+          <p:nvPr/>
+        </p:nvSpPr>
+        <p:spPr>
+          <a:xfrm>
+            <a:off x="6278728" y="1517904"/>
+            <a:ext cx="5346040" cy="4114800"/>
+          </a:xfrm>
+          <a:prstGeom prst="roundRect">
+            <a:avLst>
+              <a:gd name="adj" fmla="val 2000"/>
+            </a:avLst>
+          </a:prstGeom>
+          <a:solidFill>
+            <a:srgbClr val="E7EFFA"/>
+          </a:solidFill>
+          <a:ln/>
+          <a:effectLst>
+            <a:outerShdw sx="100000" sy="100000" kx="0" ky="0" algn="bl" rotWithShape="0" blurRad="88900" dist="25400" dir="5400000">
+              <a:srgbClr val="22303C">
+                <a:alpha val="12000"/>
+              </a:srgbClr>
+            </a:outerShdw>
+          </a:effectLst>
+        </p:spPr>
+      </p:sp>
+      <p:sp>
+        <p:nvSpPr>
+          <p:cNvPr id="8" name="Text 6"/>
+          <p:cNvSpPr/>
+          <p:nvPr/>
+        </p:nvSpPr>
+        <p:spPr>
+          <a:xfrm>
+            <a:off x="6516472" y="1682496"/>
+            <a:ext cx="4888840" cy="274320"/>
           </a:xfrm>
           <a:prstGeom prst="rect">
             <a:avLst/>
@@ -5044,30 +5437,30 @@
               <a:buNone/>
             </a:pPr>
             <a:r>
-              <a:rPr lang="en-US" sz="1100" b="1" spc="140" kern="0" dirty="0">
-                <a:solidFill>
-                  <a:srgbClr val="1565C0"/>
-                </a:solidFill>
-                <a:latin typeface="Calibri" pitchFamily="34" charset="0"/>
-                <a:ea typeface="Calibri" pitchFamily="34" charset="-122"/>
-                <a:cs typeface="Calibri" pitchFamily="34" charset="-120"/>
-              </a:rPr>
-              <a:t>TEACHING POINT</a:t>
-            </a:r>
-            <a:endParaRPr lang="en-US" sz="1100" dirty="0"/>
-          </a:p>
-        </p:txBody>
-      </p:sp>
-      <p:sp>
-        <p:nvSpPr>
-          <p:cNvPr id="7" name="Text 5"/>
-          <p:cNvSpPr/>
-          <p:nvPr/>
-        </p:nvSpPr>
-        <p:spPr>
-          <a:xfrm>
-            <a:off x="7660532" y="2121408"/>
-            <a:ext cx="3726491" cy="3291840"/>
+              <a:rPr lang="en-US" sz="1200" b="1" spc="100" kern="0" dirty="0">
+                <a:solidFill>
+                  <a:srgbClr val="0D4A92"/>
+                </a:solidFill>
+                <a:latin typeface="Calibri" pitchFamily="34" charset="0"/>
+                <a:ea typeface="Calibri" pitchFamily="34" charset="-122"/>
+                <a:cs typeface="Calibri" pitchFamily="34" charset="-120"/>
+              </a:rPr>
+              <a:t>COMMON MISUSE</a:t>
+            </a:r>
+            <a:endParaRPr lang="en-US" sz="1200" dirty="0"/>
+          </a:p>
+        </p:txBody>
+      </p:sp>
+      <p:sp>
+        <p:nvSpPr>
+          <p:cNvPr id="9" name="Text 7"/>
+          <p:cNvSpPr/>
+          <p:nvPr/>
+        </p:nvSpPr>
+        <p:spPr>
+          <a:xfrm>
+            <a:off x="6516472" y="2029968"/>
+            <a:ext cx="4870552" cy="3474720"/>
           </a:xfrm>
           <a:prstGeom prst="rect">
             <a:avLst/>
@@ -5079,14 +5472,36 @@
           <a:bodyPr wrap="square" lIns="0" tIns="0" rIns="0" bIns="0" rtlCol="0" anchor="t"/>
           <a:lstStyle/>
           <a:p>
-            <a:pPr algn="l" indent="0" marL="0">
-              <a:lnSpc>
-                <a:spcPct val="110000"/>
-              </a:lnSpc>
-              <a:buNone/>
-            </a:pPr>
-            <a:r>
-              <a:rPr lang="en-US" sz="1350" dirty="0">
+            <a:pPr algn="l" marL="177800" indent="-177800">
+              <a:spcAft>
+                <a:spcPts val="900"/>
+              </a:spcAft>
+              <a:buSzPct val="100000"/>
+              <a:buChar char="•"/>
+            </a:pPr>
+            <a:r>
+              <a:rPr lang="en-US" sz="1250" b="1" dirty="0">
+                <a:solidFill>
+                  <a:srgbClr val="1B2A38"/>
+                </a:solidFill>
+                <a:latin typeface="Calibri" pitchFamily="34" charset="0"/>
+                <a:ea typeface="Calibri" pitchFamily="34" charset="-122"/>
+                <a:cs typeface="Calibri" pitchFamily="34" charset="-120"/>
+              </a:rPr>
+              <a:t>Ordering troponin without a pretest probability of ACS → false-positive-driven workups.</a:t>
+            </a:r>
+            <a:endParaRPr lang="en-US" sz="1250" dirty="0"/>
+          </a:p>
+          <a:p>
+            <a:pPr algn="l" marL="177800" indent="-177800">
+              <a:spcAft>
+                <a:spcPts val="900"/>
+              </a:spcAft>
+              <a:buSzPct val="100000"/>
+              <a:buChar char="•"/>
+            </a:pPr>
+            <a:r>
+              <a:rPr lang="en-US" sz="1250" dirty="0">
                 <a:solidFill>
                   <a:srgbClr val="33444F"/>
                 </a:solidFill>
@@ -5094,15 +5509,57 @@
                 <a:ea typeface="Calibri" pitchFamily="34" charset="-122"/>
                 <a:cs typeface="Calibri" pitchFamily="34" charset="-120"/>
               </a:rPr>
-              <a:t>With high-sensitivity troponin, the DELTA matters more than a single value — stable = chronic injury, dynamic = acute.</a:t>
-            </a:r>
-            <a:endParaRPr lang="en-US" sz="1350" dirty="0"/>
-          </a:p>
-        </p:txBody>
-      </p:sp>
-      <p:sp>
-        <p:nvSpPr>
-          <p:cNvPr id="8" name="Text 6"/>
+              <a:t>Using BNP in isolation to diagnose dyspnea.</a:t>
+            </a:r>
+            <a:endParaRPr lang="en-US" sz="1250" dirty="0"/>
+          </a:p>
+          <a:p>
+            <a:pPr algn="l" marL="177800" indent="-177800">
+              <a:spcAft>
+                <a:spcPts val="900"/>
+              </a:spcAft>
+              <a:buSzPct val="100000"/>
+              <a:buChar char="•"/>
+            </a:pPr>
+            <a:r>
+              <a:rPr lang="en-US" sz="1250" dirty="0">
+                <a:solidFill>
+                  <a:srgbClr val="33444F"/>
+                </a:solidFill>
+                <a:latin typeface="Calibri" pitchFamily="34" charset="0"/>
+                <a:ea typeface="Calibri" pitchFamily="34" charset="-122"/>
+                <a:cs typeface="Calibri" pitchFamily="34" charset="-120"/>
+              </a:rPr>
+              <a:t>Repeating LFTs without a pattern-based plan.</a:t>
+            </a:r>
+            <a:endParaRPr lang="en-US" sz="1250" dirty="0"/>
+          </a:p>
+          <a:p>
+            <a:pPr algn="l" marL="177800" indent="-177800">
+              <a:spcAft>
+                <a:spcPts val="900"/>
+              </a:spcAft>
+              <a:buSzPct val="100000"/>
+              <a:buChar char="•"/>
+            </a:pPr>
+            <a:r>
+              <a:rPr lang="en-US" sz="1250" dirty="0">
+                <a:solidFill>
+                  <a:srgbClr val="33444F"/>
+                </a:solidFill>
+                <a:latin typeface="Calibri" pitchFamily="34" charset="0"/>
+                <a:ea typeface="Calibri" pitchFamily="34" charset="-122"/>
+                <a:cs typeface="Calibri" pitchFamily="34" charset="-120"/>
+              </a:rPr>
+              <a:t>Ignoring drug effects on creatinine.</a:t>
+            </a:r>
+            <a:endParaRPr lang="en-US" sz="1250" dirty="0"/>
+          </a:p>
+        </p:txBody>
+      </p:sp>
+      <p:sp>
+        <p:nvSpPr>
+          <p:cNvPr id="10" name="Text 8"/>
           <p:cNvSpPr/>
           <p:nvPr/>
         </p:nvSpPr>
@@ -5141,7 +5598,7 @@
       </p:sp>
       <p:sp>
         <p:nvSpPr>
-          <p:cNvPr id="9" name="Text 7"/>
+          <p:cNvPr id="11" name="Text 9"/>
           <p:cNvSpPr/>
           <p:nvPr/>
         </p:nvSpPr>
@@ -5271,7 +5728,7 @@
                 <a:ea typeface="Calibri" pitchFamily="34" charset="-122"/>
                 <a:cs typeface="Calibri" pitchFamily="34" charset="-120"/>
               </a:rPr>
-              <a:t>CLINICAL CHEMISTRY   ·   CASE 2</a:t>
+              <a:t>CLINICAL CHEMISTRY   ·   CASE 1</a:t>
             </a:r>
             <a:endParaRPr lang="en-US" sz="1100" dirty="0"/>
           </a:p>
@@ -5310,7 +5767,7 @@
                 <a:ea typeface="Calibri" pitchFamily="34" charset="-122"/>
                 <a:cs typeface="Calibri" pitchFamily="34" charset="-120"/>
               </a:rPr>
-              <a:t>Case 2</a:t>
+              <a:t>Case 1</a:t>
             </a:r>
             <a:endParaRPr lang="en-US" sz="3000" dirty="0"/>
           </a:p>
@@ -5420,7 +5877,7 @@
                 <a:ea typeface="Calibri" pitchFamily="34" charset="-122"/>
                 <a:cs typeface="Calibri" pitchFamily="34" charset="-120"/>
               </a:rPr>
-              <a:t>An asymptomatic woman has an isolated, persistently elevated prolactin. Imaging is normal. The laboratory performs polyethylene glycol precipitation, after which the recovered prolactin is normal.</a:t>
+              <a:t>A patient with advanced CKD has a troponin persistently just above the URL, unchanged across three serial draws, with no ischemic symptoms or ECG changes.</a:t>
             </a:r>
             <a:endParaRPr lang="en-US" sz="1450" dirty="0"/>
           </a:p>
@@ -5527,7 +5984,7 @@
                 <a:ea typeface="Calibri" pitchFamily="34" charset="-122"/>
                 <a:cs typeface="Calibri" pitchFamily="34" charset="-120"/>
               </a:rPr>
-              <a:t>What was the cause of the apparent hyperprolactinemia?</a:t>
+              <a:t>Is this an acute MI? How does the pattern guide you?</a:t>
             </a:r>
             <a:endParaRPr lang="en-US" sz="1500" dirty="0"/>
           </a:p>
@@ -5704,7 +6161,7 @@
                 <a:ea typeface="Calibri" pitchFamily="34" charset="-122"/>
                 <a:cs typeface="Calibri" pitchFamily="34" charset="-120"/>
               </a:rPr>
-              <a:t>CLINICAL CHEMISTRY   ·   CASE 2  ·  RESOLUTION</a:t>
+              <a:t>CLINICAL CHEMISTRY   ·   CASE 1  ·  RESOLUTION</a:t>
             </a:r>
             <a:endParaRPr lang="en-US" sz="1100" dirty="0"/>
           </a:p>
@@ -5743,7 +6200,7 @@
                 <a:ea typeface="Calibri" pitchFamily="34" charset="-122"/>
                 <a:cs typeface="Calibri" pitchFamily="34" charset="-120"/>
               </a:rPr>
-              <a:t>Case 2: Macroprolactin</a:t>
+              <a:t>Case 1: Chronic Troponin Elevation</a:t>
             </a:r>
             <a:endParaRPr lang="en-US" sz="3000" dirty="0"/>
           </a:p>
@@ -5786,7 +6243,7 @@
                 <a:ea typeface="Calibri" pitchFamily="34" charset="-122"/>
                 <a:cs typeface="Calibri" pitchFamily="34" charset="-120"/>
               </a:rPr>
-              <a:t>Macroprolactin (prolactin–IgG complex) caused spurious hyperprolactinemia.</a:t>
+              <a:t>A stable elevation without a rise/fall is chronic myocardial injury, not an acute MI.</a:t>
             </a:r>
             <a:endParaRPr lang="en-US" sz="1400" dirty="0"/>
           </a:p>
@@ -5807,7 +6264,7 @@
                 <a:ea typeface="Calibri" pitchFamily="34" charset="-122"/>
                 <a:cs typeface="Calibri" pitchFamily="34" charset="-120"/>
               </a:rPr>
-              <a:t>It is biologically inactive but immunoreactive on the assay.</a:t>
+              <a:t>CKD, heart failure, and structural disease cause stable elevations.</a:t>
             </a:r>
             <a:endParaRPr lang="en-US" sz="1400" dirty="0"/>
           </a:p>
@@ -5828,7 +6285,7 @@
                 <a:ea typeface="Calibri" pitchFamily="34" charset="-122"/>
                 <a:cs typeface="Calibri" pitchFamily="34" charset="-120"/>
               </a:rPr>
-              <a:t>PEG precipitation removes the complex; normal recovered prolactin confirms macroprolactin.</a:t>
+              <a:t>Acute MI requires a dynamic rise and/or fall on serial hs-troponin plus clinical/ECG context.</a:t>
             </a:r>
             <a:endParaRPr lang="en-US" sz="1400" dirty="0"/>
           </a:p>
@@ -5849,7 +6306,7 @@
                 <a:ea typeface="Calibri" pitchFamily="34" charset="-122"/>
                 <a:cs typeface="Calibri" pitchFamily="34" charset="-120"/>
               </a:rPr>
-              <a:t>Recognizing it avoids unnecessary imaging and treatment.</a:t>
+              <a:t>Establish each patient’s baseline.</a:t>
             </a:r>
             <a:endParaRPr lang="en-US" sz="1400" dirty="0"/>
           </a:p>
@@ -5959,7 +6416,7 @@
                 <a:ea typeface="Calibri" pitchFamily="34" charset="-122"/>
                 <a:cs typeface="Calibri" pitchFamily="34" charset="-120"/>
               </a:rPr>
-              <a:t>Isolated hyperprolactinemia without symptoms warrants a macroprolactin check (PEG) before pursuing a prolactinoma.</a:t>
+              <a:t>With high-sensitivity troponin, the DELTA matters more than a single value — stable = chronic, dynamic = acute.</a:t>
             </a:r>
             <a:endParaRPr lang="en-US" sz="1350" dirty="0"/>
           </a:p>
@@ -6136,7 +6593,7 @@
                 <a:ea typeface="Calibri" pitchFamily="34" charset="-122"/>
                 <a:cs typeface="Calibri" pitchFamily="34" charset="-120"/>
               </a:rPr>
-              <a:t>CLINICAL CHEMISTRY   ·   BOARD REVIEW  ·  Q1</a:t>
+              <a:t>CLINICAL CHEMISTRY   ·   CASE 2</a:t>
             </a:r>
             <a:endParaRPr lang="en-US" sz="1100" dirty="0"/>
           </a:p>
@@ -6167,7 +6624,7 @@
               <a:buNone/>
             </a:pPr>
             <a:r>
-              <a:rPr lang="en-US" sz="2600" b="1" dirty="0">
+              <a:rPr lang="en-US" sz="3000" b="1" dirty="0">
                 <a:solidFill>
                   <a:srgbClr val="0E3A5F"/>
                 </a:solidFill>
@@ -6175,190 +6632,26 @@
                 <a:ea typeface="Calibri" pitchFamily="34" charset="-122"/>
                 <a:cs typeface="Calibri" pitchFamily="34" charset="-120"/>
               </a:rPr>
-              <a:t>Board-Style Review</a:t>
-            </a:r>
-            <a:endParaRPr lang="en-US" sz="2600" dirty="0"/>
-          </a:p>
-        </p:txBody>
-      </p:sp>
-      <p:sp>
-        <p:nvSpPr>
-          <p:cNvPr id="4" name="Text 2"/>
-          <p:cNvSpPr/>
-          <p:nvPr/>
-        </p:nvSpPr>
-        <p:spPr>
-          <a:xfrm>
-            <a:off x="566928" y="1417320"/>
-            <a:ext cx="11057839" cy="914400"/>
-          </a:xfrm>
-          <a:prstGeom prst="rect">
-            <a:avLst/>
-          </a:prstGeom>
-          <a:noFill/>
-          <a:ln/>
-        </p:spPr>
-        <p:txBody>
-          <a:bodyPr wrap="square" lIns="0" tIns="0" rIns="0" bIns="0" rtlCol="0" anchor="t"/>
-          <a:lstStyle/>
-          <a:p>
-            <a:pPr algn="l" indent="0" marL="0">
-              <a:lnSpc>
-                <a:spcPct val="105000"/>
-              </a:lnSpc>
-              <a:buNone/>
-            </a:pPr>
-            <a:r>
-              <a:rPr lang="en-US" sz="1450" b="1" dirty="0">
-                <a:solidFill>
-                  <a:srgbClr val="1B2A38"/>
-                </a:solidFill>
-                <a:latin typeface="Calibri" pitchFamily="34" charset="0"/>
-                <a:ea typeface="Calibri" pitchFamily="34" charset="-122"/>
-                <a:cs typeface="Calibri" pitchFamily="34" charset="-120"/>
-              </a:rPr>
-              <a:t>Which finding best distinguishes an acute myocardial infarction from chronic troponin elevation?</a:t>
-            </a:r>
-            <a:endParaRPr lang="en-US" sz="1450" dirty="0"/>
-          </a:p>
-        </p:txBody>
-      </p:sp>
-      <p:sp>
-        <p:nvSpPr>
-          <p:cNvPr id="5" name="Text 3"/>
-          <p:cNvSpPr/>
-          <p:nvPr/>
-        </p:nvSpPr>
-        <p:spPr>
-          <a:xfrm>
-            <a:off x="658368" y="2395728"/>
-            <a:ext cx="6192390" cy="3017520"/>
-          </a:xfrm>
-          <a:prstGeom prst="rect">
-            <a:avLst/>
-          </a:prstGeom>
-          <a:noFill/>
-          <a:ln/>
-        </p:spPr>
-        <p:txBody>
-          <a:bodyPr wrap="square" lIns="0" tIns="0" rIns="0" bIns="0" rtlCol="0" anchor="t"/>
-          <a:lstStyle/>
-          <a:p>
-            <a:pPr algn="l" indent="0" marL="0">
-              <a:spcAft>
-                <a:spcPts val="600"/>
-              </a:spcAft>
-              <a:buNone/>
-            </a:pPr>
-            <a:r>
-              <a:rPr lang="en-US" sz="1350" dirty="0">
-                <a:solidFill>
-                  <a:srgbClr val="33444F"/>
-                </a:solidFill>
-                <a:latin typeface="Calibri" pitchFamily="34" charset="0"/>
-                <a:ea typeface="Calibri" pitchFamily="34" charset="-122"/>
-                <a:cs typeface="Calibri" pitchFamily="34" charset="-120"/>
-              </a:rPr>
-              <a:t>A. Any value above the URL</a:t>
-            </a:r>
-            <a:endParaRPr lang="en-US" sz="1350" dirty="0"/>
-          </a:p>
-          <a:p>
-            <a:pPr algn="l" indent="0" marL="0">
-              <a:spcAft>
-                <a:spcPts val="600"/>
-              </a:spcAft>
-              <a:buNone/>
-            </a:pPr>
-            <a:r>
-              <a:rPr lang="en-US" sz="1350" b="1" dirty="0">
-                <a:solidFill>
-                  <a:srgbClr val="0D4A92"/>
-                </a:solidFill>
-                <a:latin typeface="Calibri" pitchFamily="34" charset="0"/>
-                <a:ea typeface="Calibri" pitchFamily="34" charset="-122"/>
-                <a:cs typeface="Calibri" pitchFamily="34" charset="-120"/>
-              </a:rPr>
-              <a:t>B. A dynamic rise and/or fall on serial testing</a:t>
-            </a:r>
-            <a:endParaRPr lang="en-US" sz="1350" dirty="0"/>
-          </a:p>
-          <a:p>
-            <a:pPr algn="l" indent="0" marL="0">
-              <a:spcAft>
-                <a:spcPts val="600"/>
-              </a:spcAft>
-              <a:buNone/>
-            </a:pPr>
-            <a:r>
-              <a:rPr lang="en-US" sz="1350" dirty="0">
-                <a:solidFill>
-                  <a:srgbClr val="33444F"/>
-                </a:solidFill>
-                <a:latin typeface="Calibri" pitchFamily="34" charset="0"/>
-                <a:ea typeface="Calibri" pitchFamily="34" charset="-122"/>
-                <a:cs typeface="Calibri" pitchFamily="34" charset="-120"/>
-              </a:rPr>
-              <a:t>C. A single very high value</a:t>
-            </a:r>
-            <a:endParaRPr lang="en-US" sz="1350" dirty="0"/>
-          </a:p>
-          <a:p>
-            <a:pPr algn="l" indent="0" marL="0">
-              <a:spcAft>
-                <a:spcPts val="600"/>
-              </a:spcAft>
-              <a:buNone/>
-            </a:pPr>
-            <a:r>
-              <a:rPr lang="en-US" sz="1350" dirty="0">
-                <a:solidFill>
-                  <a:srgbClr val="33444F"/>
-                </a:solidFill>
-                <a:latin typeface="Calibri" pitchFamily="34" charset="0"/>
-                <a:ea typeface="Calibri" pitchFamily="34" charset="-122"/>
-                <a:cs typeface="Calibri" pitchFamily="34" charset="-120"/>
-              </a:rPr>
-              <a:t>D. Coexisting high BNP</a:t>
-            </a:r>
-            <a:endParaRPr lang="en-US" sz="1350" dirty="0"/>
-          </a:p>
-          <a:p>
-            <a:pPr algn="l" indent="0" marL="0">
-              <a:spcAft>
-                <a:spcPts val="600"/>
-              </a:spcAft>
-              <a:buNone/>
-            </a:pPr>
-            <a:r>
-              <a:rPr lang="en-US" sz="1350" dirty="0">
-                <a:solidFill>
-                  <a:srgbClr val="33444F"/>
-                </a:solidFill>
-                <a:latin typeface="Calibri" pitchFamily="34" charset="0"/>
-                <a:ea typeface="Calibri" pitchFamily="34" charset="-122"/>
-                <a:cs typeface="Calibri" pitchFamily="34" charset="-120"/>
-              </a:rPr>
-              <a:t>E. Elevated creatinine</a:t>
-            </a:r>
-            <a:endParaRPr lang="en-US" sz="1350" dirty="0"/>
-          </a:p>
-        </p:txBody>
-      </p:sp>
-      <p:sp>
-        <p:nvSpPr>
-          <p:cNvPr id="6" name="Shape 4"/>
-          <p:cNvSpPr/>
-          <p:nvPr/>
-        </p:nvSpPr>
-        <p:spPr>
-          <a:xfrm>
-            <a:off x="7201632" y="2395728"/>
-            <a:ext cx="4423136" cy="3246120"/>
+              <a:t>Case 2</a:t>
+            </a:r>
+            <a:endParaRPr lang="en-US" sz="3000" dirty="0"/>
+          </a:p>
+        </p:txBody>
+      </p:sp>
+      <p:sp>
+        <p:nvSpPr>
+          <p:cNvPr id="4" name="Shape 2"/>
+          <p:cNvSpPr/>
+          <p:nvPr/>
+        </p:nvSpPr>
+        <p:spPr>
+          <a:xfrm>
+            <a:off x="566928" y="1517904"/>
+            <a:ext cx="11057839" cy="2788920"/>
           </a:xfrm>
           <a:prstGeom prst="roundRect">
             <a:avLst>
-              <a:gd name="adj" fmla="val 2535"/>
+              <a:gd name="adj" fmla="val 2951"/>
             </a:avLst>
           </a:prstGeom>
           <a:solidFill>
@@ -6376,14 +6669,14 @@
       </p:sp>
       <p:sp>
         <p:nvSpPr>
-          <p:cNvPr id="7" name="Text 5"/>
-          <p:cNvSpPr/>
-          <p:nvPr/>
-        </p:nvSpPr>
-        <p:spPr>
-          <a:xfrm>
-            <a:off x="7439376" y="2578608"/>
-            <a:ext cx="3965936" cy="457200"/>
+          <p:cNvPr id="5" name="Text 3"/>
+          <p:cNvSpPr/>
+          <p:nvPr/>
+        </p:nvSpPr>
+        <p:spPr>
+          <a:xfrm>
+            <a:off x="841248" y="1700784"/>
+            <a:ext cx="5486400" cy="292608"/>
           </a:xfrm>
           <a:prstGeom prst="rect">
             <a:avLst/>
@@ -6399,7 +6692,7 @@
               <a:buNone/>
             </a:pPr>
             <a:r>
-              <a:rPr lang="en-US" sz="1500" b="1" dirty="0">
+              <a:rPr lang="en-US" sz="1100" b="1" spc="150" kern="0" dirty="0">
                 <a:solidFill>
                   <a:srgbClr val="1565C0"/>
                 </a:solidFill>
@@ -6407,36 +6700,22 @@
                 <a:ea typeface="Calibri" pitchFamily="34" charset="-122"/>
                 <a:cs typeface="Calibri" pitchFamily="34" charset="-120"/>
               </a:rPr>
-              <a:t>ANSWER  </a:t>
-            </a:r>
-            <a:pPr indent="0" marL="0">
-              <a:buNone/>
-            </a:pPr>
-            <a:r>
-              <a:rPr lang="en-US" sz="1500" b="1" dirty="0">
-                <a:solidFill>
-                  <a:srgbClr val="1B2A38"/>
-                </a:solidFill>
-                <a:latin typeface="Calibri" pitchFamily="34" charset="0"/>
-                <a:ea typeface="Calibri" pitchFamily="34" charset="-122"/>
-                <a:cs typeface="Calibri" pitchFamily="34" charset="-120"/>
-              </a:rPr>
-              <a:t>B — A dynamic rise/fall on serial testing</a:t>
-            </a:r>
-            <a:endParaRPr lang="en-US" sz="1500" dirty="0"/>
-          </a:p>
-        </p:txBody>
-      </p:sp>
-      <p:sp>
-        <p:nvSpPr>
-          <p:cNvPr id="8" name="Text 6"/>
-          <p:cNvSpPr/>
-          <p:nvPr/>
-        </p:nvSpPr>
-        <p:spPr>
-          <a:xfrm>
-            <a:off x="7439376" y="3127248"/>
-            <a:ext cx="3947648" cy="2377440"/>
+              <a:t>CLINICAL VIGNETTE</a:t>
+            </a:r>
+            <a:endParaRPr lang="en-US" sz="1100" dirty="0"/>
+          </a:p>
+        </p:txBody>
+      </p:sp>
+      <p:sp>
+        <p:nvSpPr>
+          <p:cNvPr id="6" name="Text 4"/>
+          <p:cNvSpPr/>
+          <p:nvPr/>
+        </p:nvSpPr>
+        <p:spPr>
+          <a:xfrm>
+            <a:off x="841248" y="2029968"/>
+            <a:ext cx="10509199" cy="2148840"/>
           </a:xfrm>
           <a:prstGeom prst="rect">
             <a:avLst/>
@@ -6455,7 +6734,7 @@
               <a:buNone/>
             </a:pPr>
             <a:r>
-              <a:rPr lang="en-US" sz="1250" dirty="0">
+              <a:rPr lang="en-US" sz="1450" dirty="0">
                 <a:solidFill>
                   <a:srgbClr val="33444F"/>
                 </a:solidFill>
@@ -6463,15 +6742,122 @@
                 <a:ea typeface="Calibri" pitchFamily="34" charset="-122"/>
                 <a:cs typeface="Calibri" pitchFamily="34" charset="-120"/>
               </a:rPr>
-              <a:t>Acute injury (MI) shows a changing pattern around the 99th-percentile URL; chronic conditions show stable elevations.</a:t>
-            </a:r>
-            <a:endParaRPr lang="en-US" sz="1250" dirty="0"/>
+              <a:t>A patient has ALP three times the upper limit. The team asks whether this is from liver or bone.</a:t>
+            </a:r>
+            <a:endParaRPr lang="en-US" sz="1450" dirty="0"/>
+          </a:p>
+        </p:txBody>
+      </p:sp>
+      <p:sp>
+        <p:nvSpPr>
+          <p:cNvPr id="7" name="Shape 5"/>
+          <p:cNvSpPr/>
+          <p:nvPr/>
+        </p:nvSpPr>
+        <p:spPr>
+          <a:xfrm>
+            <a:off x="566928" y="4553712"/>
+            <a:ext cx="11057839" cy="1325880"/>
+          </a:xfrm>
+          <a:prstGeom prst="roundRect">
+            <a:avLst>
+              <a:gd name="adj" fmla="val 6207"/>
+            </a:avLst>
+          </a:prstGeom>
+          <a:solidFill>
+            <a:srgbClr val="0E3A5F"/>
+          </a:solidFill>
+          <a:ln/>
+          <a:effectLst>
+            <a:outerShdw sx="100000" sy="100000" kx="0" ky="0" algn="bl" rotWithShape="0" blurRad="88900" dist="25400" dir="5400000">
+              <a:srgbClr val="22303C">
+                <a:alpha val="12000"/>
+              </a:srgbClr>
+            </a:outerShdw>
+          </a:effectLst>
+        </p:spPr>
+      </p:sp>
+      <p:sp>
+        <p:nvSpPr>
+          <p:cNvPr id="8" name="Text 6"/>
+          <p:cNvSpPr/>
+          <p:nvPr/>
+        </p:nvSpPr>
+        <p:spPr>
+          <a:xfrm>
+            <a:off x="822960" y="4681728"/>
+            <a:ext cx="640080" cy="960120"/>
+          </a:xfrm>
+          <a:prstGeom prst="rect">
+            <a:avLst/>
+          </a:prstGeom>
+          <a:noFill/>
+          <a:ln/>
+        </p:spPr>
+        <p:txBody>
+          <a:bodyPr wrap="square" lIns="0" tIns="0" rIns="0" bIns="0" rtlCol="0" anchor="ctr"/>
+          <a:lstStyle/>
+          <a:p>
+            <a:pPr algn="ctr" indent="0" marL="0">
+              <a:buNone/>
+            </a:pPr>
+            <a:r>
+              <a:rPr lang="en-US" sz="4000" b="1" dirty="0">
+                <a:solidFill>
+                  <a:srgbClr val="1565C0"/>
+                </a:solidFill>
+                <a:latin typeface="Calibri" pitchFamily="34" charset="0"/>
+                <a:ea typeface="Calibri" pitchFamily="34" charset="-122"/>
+                <a:cs typeface="Calibri" pitchFamily="34" charset="-120"/>
+              </a:rPr>
+              <a:t>?</a:t>
+            </a:r>
+            <a:endParaRPr lang="en-US" sz="4000" dirty="0"/>
           </a:p>
         </p:txBody>
       </p:sp>
       <p:sp>
         <p:nvSpPr>
           <p:cNvPr id="9" name="Text 7"/>
+          <p:cNvSpPr/>
+          <p:nvPr/>
+        </p:nvSpPr>
+        <p:spPr>
+          <a:xfrm>
+            <a:off x="1618488" y="4553712"/>
+            <a:ext cx="9686239" cy="1325880"/>
+          </a:xfrm>
+          <a:prstGeom prst="rect">
+            <a:avLst/>
+          </a:prstGeom>
+          <a:noFill/>
+          <a:ln/>
+        </p:spPr>
+        <p:txBody>
+          <a:bodyPr wrap="square" lIns="0" tIns="0" rIns="0" bIns="0" rtlCol="0" anchor="ctr"/>
+          <a:lstStyle/>
+          <a:p>
+            <a:pPr algn="l" indent="0" marL="0">
+              <a:buNone/>
+            </a:pPr>
+            <a:r>
+              <a:rPr lang="en-US" sz="1500" b="1" dirty="0">
+                <a:solidFill>
+                  <a:srgbClr val="FFFFFF"/>
+                </a:solidFill>
+                <a:latin typeface="Calibri" pitchFamily="34" charset="0"/>
+                <a:ea typeface="Calibri" pitchFamily="34" charset="-122"/>
+                <a:cs typeface="Calibri" pitchFamily="34" charset="-120"/>
+              </a:rPr>
+              <a:t>Which single add-on test resolves the source, and how?</a:t>
+            </a:r>
+            <a:endParaRPr lang="en-US" sz="1500" dirty="0"/>
+          </a:p>
+        </p:txBody>
+      </p:sp>
+      <p:sp>
+        <p:nvSpPr>
+          <p:cNvPr id="10" name="Text 8"/>
           <p:cNvSpPr/>
           <p:nvPr/>
         </p:nvSpPr>
@@ -6510,7 +6896,7 @@
       </p:sp>
       <p:sp>
         <p:nvSpPr>
-          <p:cNvPr id="10" name="Text 8"/>
+          <p:cNvPr id="11" name="Text 9"/>
           <p:cNvSpPr/>
           <p:nvPr/>
         </p:nvSpPr>
@@ -6640,7 +7026,7 @@
                 <a:ea typeface="Calibri" pitchFamily="34" charset="-122"/>
                 <a:cs typeface="Calibri" pitchFamily="34" charset="-120"/>
               </a:rPr>
-              <a:t>CLINICAL CHEMISTRY   ·   BOARD REVIEW  ·  Q2</a:t>
+              <a:t>CLINICAL CHEMISTRY   ·   CASE 2  ·  RESOLUTION</a:t>
             </a:r>
             <a:endParaRPr lang="en-US" sz="1100" dirty="0"/>
           </a:p>
@@ -6671,7 +7057,7 @@
               <a:buNone/>
             </a:pPr>
             <a:r>
-              <a:rPr lang="en-US" sz="2600" b="1" dirty="0">
+              <a:rPr lang="en-US" sz="3000" b="1" dirty="0">
                 <a:solidFill>
                   <a:srgbClr val="0E3A5F"/>
                 </a:solidFill>
@@ -6679,9 +7065,9 @@
                 <a:ea typeface="Calibri" pitchFamily="34" charset="-122"/>
                 <a:cs typeface="Calibri" pitchFamily="34" charset="-120"/>
               </a:rPr>
-              <a:t>Board-Style Review</a:t>
-            </a:r>
-            <a:endParaRPr lang="en-US" sz="2600" dirty="0"/>
+              <a:t>Case 2: Isolated High ALP</a:t>
+            </a:r>
+            <a:endParaRPr lang="en-US" sz="3000" dirty="0"/>
           </a:p>
         </p:txBody>
       </p:sp>
@@ -6693,8 +7079,8 @@
         </p:nvSpPr>
         <p:spPr>
           <a:xfrm>
-            <a:off x="566928" y="1417320"/>
-            <a:ext cx="11057839" cy="914400"/>
+            <a:off x="566928" y="1554480"/>
+            <a:ext cx="6413547" cy="4023360"/>
           </a:xfrm>
           <a:prstGeom prst="rect">
             <a:avLst/>
@@ -6706,14 +7092,15 @@
           <a:bodyPr wrap="square" lIns="0" tIns="0" rIns="0" bIns="0" rtlCol="0" anchor="t"/>
           <a:lstStyle/>
           <a:p>
-            <a:pPr algn="l" indent="0" marL="0">
-              <a:lnSpc>
-                <a:spcPct val="105000"/>
-              </a:lnSpc>
-              <a:buNone/>
-            </a:pPr>
-            <a:r>
-              <a:rPr lang="en-US" sz="1450" b="1" dirty="0">
+            <a:pPr algn="l" marL="177800" indent="-177800">
+              <a:spcAft>
+                <a:spcPts val="900"/>
+              </a:spcAft>
+              <a:buSzPct val="100000"/>
+              <a:buChar char="•"/>
+            </a:pPr>
+            <a:r>
+              <a:rPr lang="en-US" sz="1400" b="1" dirty="0">
                 <a:solidFill>
                   <a:srgbClr val="1B2A38"/>
                 </a:solidFill>
@@ -6721,41 +7108,20 @@
                 <a:ea typeface="Calibri" pitchFamily="34" charset="-122"/>
                 <a:cs typeface="Calibri" pitchFamily="34" charset="-120"/>
               </a:rPr>
-              <a:t>An elevated alkaline phosphatase with a normal GGT most likely originates from:</a:t>
-            </a:r>
-            <a:endParaRPr lang="en-US" sz="1450" dirty="0"/>
-          </a:p>
-        </p:txBody>
-      </p:sp>
-      <p:sp>
-        <p:nvSpPr>
-          <p:cNvPr id="5" name="Text 3"/>
-          <p:cNvSpPr/>
-          <p:nvPr/>
-        </p:nvSpPr>
-        <p:spPr>
-          <a:xfrm>
-            <a:off x="658368" y="2395728"/>
-            <a:ext cx="6192390" cy="3017520"/>
-          </a:xfrm>
-          <a:prstGeom prst="rect">
-            <a:avLst/>
-          </a:prstGeom>
-          <a:noFill/>
-          <a:ln/>
-        </p:spPr>
-        <p:txBody>
-          <a:bodyPr wrap="square" lIns="0" tIns="0" rIns="0" bIns="0" rtlCol="0" anchor="t"/>
-          <a:lstStyle/>
-          <a:p>
-            <a:pPr algn="l" indent="0" marL="0">
+              <a:t>Check GGT: an elevated GGT confirms a hepatic (biliary) source of the high ALP.</a:t>
+            </a:r>
+            <a:endParaRPr lang="en-US" sz="1400" dirty="0"/>
+          </a:p>
+          <a:p>
+            <a:pPr algn="l" marL="177800" indent="-177800">
               <a:spcAft>
-                <a:spcPts val="600"/>
+                <a:spcPts val="900"/>
               </a:spcAft>
-              <a:buNone/>
-            </a:pPr>
-            <a:r>
-              <a:rPr lang="en-US" sz="1350" dirty="0">
+              <a:buSzPct val="100000"/>
+              <a:buChar char="•"/>
+            </a:pPr>
+            <a:r>
+              <a:rPr lang="en-US" sz="1400" dirty="0">
                 <a:solidFill>
                   <a:srgbClr val="33444F"/>
                 </a:solidFill>
@@ -6763,19 +7129,20 @@
                 <a:ea typeface="Calibri" pitchFamily="34" charset="-122"/>
                 <a:cs typeface="Calibri" pitchFamily="34" charset="-120"/>
               </a:rPr>
-              <a:t>A. Bile ducts</a:t>
-            </a:r>
-            <a:endParaRPr lang="en-US" sz="1350" dirty="0"/>
-          </a:p>
-          <a:p>
-            <a:pPr algn="l" indent="0" marL="0">
+              <a:t>A normal GGT points to a non-hepatic source (bone, placenta, intestine).</a:t>
+            </a:r>
+            <a:endParaRPr lang="en-US" sz="1400" dirty="0"/>
+          </a:p>
+          <a:p>
+            <a:pPr algn="l" marL="177800" indent="-177800">
               <a:spcAft>
-                <a:spcPts val="600"/>
+                <a:spcPts val="900"/>
               </a:spcAft>
-              <a:buNone/>
-            </a:pPr>
-            <a:r>
-              <a:rPr lang="en-US" sz="1350" dirty="0">
+              <a:buSzPct val="100000"/>
+              <a:buChar char="•"/>
+            </a:pPr>
+            <a:r>
+              <a:rPr lang="en-US" sz="1400" dirty="0">
                 <a:solidFill>
                   <a:srgbClr val="33444F"/>
                 </a:solidFill>
@@ -6783,39 +7150,20 @@
                 <a:ea typeface="Calibri" pitchFamily="34" charset="-122"/>
                 <a:cs typeface="Calibri" pitchFamily="34" charset="-120"/>
               </a:rPr>
-              <a:t>B. Liver</a:t>
-            </a:r>
-            <a:endParaRPr lang="en-US" sz="1350" dirty="0"/>
-          </a:p>
-          <a:p>
-            <a:pPr algn="l" indent="0" marL="0">
+              <a:t>ALP isoenzyme fractionation is an alternative.</a:t>
+            </a:r>
+            <a:endParaRPr lang="en-US" sz="1400" dirty="0"/>
+          </a:p>
+          <a:p>
+            <a:pPr algn="l" marL="177800" indent="-177800">
               <a:spcAft>
-                <a:spcPts val="600"/>
+                <a:spcPts val="900"/>
               </a:spcAft>
-              <a:buNone/>
-            </a:pPr>
-            <a:r>
-              <a:rPr lang="en-US" sz="1350" b="1" dirty="0">
-                <a:solidFill>
-                  <a:srgbClr val="0D4A92"/>
-                </a:solidFill>
-                <a:latin typeface="Calibri" pitchFamily="34" charset="0"/>
-                <a:ea typeface="Calibri" pitchFamily="34" charset="-122"/>
-                <a:cs typeface="Calibri" pitchFamily="34" charset="-120"/>
-              </a:rPr>
-              <a:t>C. Bone (or placenta/intestine)</a:t>
-            </a:r>
-            <a:endParaRPr lang="en-US" sz="1350" dirty="0"/>
-          </a:p>
-          <a:p>
-            <a:pPr algn="l" indent="0" marL="0">
-              <a:spcAft>
-                <a:spcPts val="600"/>
-              </a:spcAft>
-              <a:buNone/>
-            </a:pPr>
-            <a:r>
-              <a:rPr lang="en-US" sz="1350" dirty="0">
+              <a:buSzPct val="100000"/>
+              <a:buChar char="•"/>
+            </a:pPr>
+            <a:r>
+              <a:rPr lang="en-US" sz="1400" dirty="0">
                 <a:solidFill>
                   <a:srgbClr val="33444F"/>
                 </a:solidFill>
@@ -6823,46 +7171,26 @@
                 <a:ea typeface="Calibri" pitchFamily="34" charset="-122"/>
                 <a:cs typeface="Calibri" pitchFamily="34" charset="-120"/>
               </a:rPr>
-              <a:t>D. Red cells</a:t>
-            </a:r>
-            <a:endParaRPr lang="en-US" sz="1350" dirty="0"/>
-          </a:p>
-          <a:p>
-            <a:pPr algn="l" indent="0" marL="0">
-              <a:spcAft>
-                <a:spcPts val="600"/>
-              </a:spcAft>
-              <a:buNone/>
-            </a:pPr>
-            <a:r>
-              <a:rPr lang="en-US" sz="1350" dirty="0">
-                <a:solidFill>
-                  <a:srgbClr val="33444F"/>
-                </a:solidFill>
-                <a:latin typeface="Calibri" pitchFamily="34" charset="0"/>
-                <a:ea typeface="Calibri" pitchFamily="34" charset="-122"/>
-                <a:cs typeface="Calibri" pitchFamily="34" charset="-120"/>
-              </a:rPr>
-              <a:t>E. Muscle</a:t>
-            </a:r>
-            <a:endParaRPr lang="en-US" sz="1350" dirty="0"/>
-          </a:p>
-        </p:txBody>
-      </p:sp>
-      <p:sp>
-        <p:nvSpPr>
-          <p:cNvPr id="6" name="Shape 4"/>
-          <p:cNvSpPr/>
-          <p:nvPr/>
-        </p:nvSpPr>
-        <p:spPr>
-          <a:xfrm>
-            <a:off x="7201632" y="2395728"/>
-            <a:ext cx="4423136" cy="3246120"/>
+              <a:t>Correlate with the clinical context and other LFTs.</a:t>
+            </a:r>
+            <a:endParaRPr lang="en-US" sz="1400" dirty="0"/>
+          </a:p>
+        </p:txBody>
+      </p:sp>
+      <p:sp>
+        <p:nvSpPr>
+          <p:cNvPr id="5" name="Shape 3"/>
+          <p:cNvSpPr/>
+          <p:nvPr/>
+        </p:nvSpPr>
+        <p:spPr>
+          <a:xfrm>
+            <a:off x="7422788" y="1554480"/>
+            <a:ext cx="4201979" cy="3977640"/>
           </a:xfrm>
           <a:prstGeom prst="roundRect">
             <a:avLst>
-              <a:gd name="adj" fmla="val 2535"/>
+              <a:gd name="adj" fmla="val 2069"/>
             </a:avLst>
           </a:prstGeom>
           <a:solidFill>
@@ -6880,67 +7208,53 @@
       </p:sp>
       <p:sp>
         <p:nvSpPr>
+          <p:cNvPr id="6" name="Text 4"/>
+          <p:cNvSpPr/>
+          <p:nvPr/>
+        </p:nvSpPr>
+        <p:spPr>
+          <a:xfrm>
+            <a:off x="7660532" y="1755648"/>
+            <a:ext cx="3744779" cy="310896"/>
+          </a:xfrm>
+          <a:prstGeom prst="rect">
+            <a:avLst/>
+          </a:prstGeom>
+          <a:noFill/>
+          <a:ln/>
+        </p:spPr>
+        <p:txBody>
+          <a:bodyPr wrap="square" lIns="0" tIns="0" rIns="0" bIns="0" rtlCol="0" anchor="ctr"/>
+          <a:lstStyle/>
+          <a:p>
+            <a:pPr indent="0" marL="0">
+              <a:buNone/>
+            </a:pPr>
+            <a:r>
+              <a:rPr lang="en-US" sz="1100" b="1" spc="140" kern="0" dirty="0">
+                <a:solidFill>
+                  <a:srgbClr val="1565C0"/>
+                </a:solidFill>
+                <a:latin typeface="Calibri" pitchFamily="34" charset="0"/>
+                <a:ea typeface="Calibri" pitchFamily="34" charset="-122"/>
+                <a:cs typeface="Calibri" pitchFamily="34" charset="-120"/>
+              </a:rPr>
+              <a:t>TEACHING POINT</a:t>
+            </a:r>
+            <a:endParaRPr lang="en-US" sz="1100" dirty="0"/>
+          </a:p>
+        </p:txBody>
+      </p:sp>
+      <p:sp>
+        <p:nvSpPr>
           <p:cNvPr id="7" name="Text 5"/>
           <p:cNvSpPr/>
           <p:nvPr/>
         </p:nvSpPr>
         <p:spPr>
           <a:xfrm>
-            <a:off x="7439376" y="2578608"/>
-            <a:ext cx="3965936" cy="457200"/>
-          </a:xfrm>
-          <a:prstGeom prst="rect">
-            <a:avLst/>
-          </a:prstGeom>
-          <a:noFill/>
-          <a:ln/>
-        </p:spPr>
-        <p:txBody>
-          <a:bodyPr wrap="square" lIns="0" tIns="0" rIns="0" bIns="0" rtlCol="0" anchor="ctr"/>
-          <a:lstStyle/>
-          <a:p>
-            <a:pPr indent="0" marL="0">
-              <a:buNone/>
-            </a:pPr>
-            <a:r>
-              <a:rPr lang="en-US" sz="1500" b="1" dirty="0">
-                <a:solidFill>
-                  <a:srgbClr val="1565C0"/>
-                </a:solidFill>
-                <a:latin typeface="Calibri" pitchFamily="34" charset="0"/>
-                <a:ea typeface="Calibri" pitchFamily="34" charset="-122"/>
-                <a:cs typeface="Calibri" pitchFamily="34" charset="-120"/>
-              </a:rPr>
-              <a:t>ANSWER  </a:t>
-            </a:r>
-            <a:pPr indent="0" marL="0">
-              <a:buNone/>
-            </a:pPr>
-            <a:r>
-              <a:rPr lang="en-US" sz="1500" b="1" dirty="0">
-                <a:solidFill>
-                  <a:srgbClr val="1B2A38"/>
-                </a:solidFill>
-                <a:latin typeface="Calibri" pitchFamily="34" charset="0"/>
-                <a:ea typeface="Calibri" pitchFamily="34" charset="-122"/>
-                <a:cs typeface="Calibri" pitchFamily="34" charset="-120"/>
-              </a:rPr>
-              <a:t>C — Bone (non-hepatic)</a:t>
-            </a:r>
-            <a:endParaRPr lang="en-US" sz="1500" dirty="0"/>
-          </a:p>
-        </p:txBody>
-      </p:sp>
-      <p:sp>
-        <p:nvSpPr>
-          <p:cNvPr id="8" name="Text 6"/>
-          <p:cNvSpPr/>
-          <p:nvPr/>
-        </p:nvSpPr>
-        <p:spPr>
-          <a:xfrm>
-            <a:off x="7439376" y="3127248"/>
-            <a:ext cx="3947648" cy="2377440"/>
+            <a:off x="7660532" y="2121408"/>
+            <a:ext cx="3726491" cy="3291840"/>
           </a:xfrm>
           <a:prstGeom prst="rect">
             <a:avLst/>
@@ -6954,12 +7268,12 @@
           <a:p>
             <a:pPr algn="l" indent="0" marL="0">
               <a:lnSpc>
-                <a:spcPct val="108000"/>
+                <a:spcPct val="110000"/>
               </a:lnSpc>
               <a:buNone/>
             </a:pPr>
             <a:r>
-              <a:rPr lang="en-US" sz="1250" dirty="0">
+              <a:rPr lang="en-US" sz="1350" dirty="0">
                 <a:solidFill>
                   <a:srgbClr val="33444F"/>
                 </a:solidFill>
@@ -6967,15 +7281,15 @@
                 <a:ea typeface="Calibri" pitchFamily="34" charset="-122"/>
                 <a:cs typeface="Calibri" pitchFamily="34" charset="-120"/>
               </a:rPr>
-              <a:t>GGT confirms a hepatic source of elevated ALP. A normal GGT points to a non-hepatic source such as bone, placenta, or intestine.</a:t>
-            </a:r>
-            <a:endParaRPr lang="en-US" sz="1250" dirty="0"/>
-          </a:p>
-        </p:txBody>
-      </p:sp>
-      <p:sp>
-        <p:nvSpPr>
-          <p:cNvPr id="9" name="Text 7"/>
+              <a:t>GGT is the reflex test for an isolated high ALP: GGT up → hepatic; GGT normal → bone/placenta/intestine.</a:t>
+            </a:r>
+            <a:endParaRPr lang="en-US" sz="1350" dirty="0"/>
+          </a:p>
+        </p:txBody>
+      </p:sp>
+      <p:sp>
+        <p:nvSpPr>
+          <p:cNvPr id="8" name="Text 6"/>
           <p:cNvSpPr/>
           <p:nvPr/>
         </p:nvSpPr>
@@ -7014,7 +7328,7 @@
       </p:sp>
       <p:sp>
         <p:nvSpPr>
-          <p:cNvPr id="10" name="Text 8"/>
+          <p:cNvPr id="9" name="Text 7"/>
           <p:cNvSpPr/>
           <p:nvPr/>
         </p:nvSpPr>
@@ -7144,7 +7458,7 @@
                 <a:ea typeface="Calibri" pitchFamily="34" charset="-122"/>
                 <a:cs typeface="Calibri" pitchFamily="34" charset="-120"/>
               </a:rPr>
-              <a:t>CLINICAL CHEMISTRY   ·   BOARD REVIEW  ·  Q3</a:t>
+              <a:t>CLINICAL CHEMISTRY   ·   CASE 3</a:t>
             </a:r>
             <a:endParaRPr lang="en-US" sz="1100" dirty="0"/>
           </a:p>
@@ -7175,7 +7489,7 @@
               <a:buNone/>
             </a:pPr>
             <a:r>
-              <a:rPr lang="en-US" sz="2600" b="1" dirty="0">
+              <a:rPr lang="en-US" sz="3000" b="1" dirty="0">
                 <a:solidFill>
                   <a:srgbClr val="0E3A5F"/>
                 </a:solidFill>
@@ -7183,190 +7497,26 @@
                 <a:ea typeface="Calibri" pitchFamily="34" charset="-122"/>
                 <a:cs typeface="Calibri" pitchFamily="34" charset="-120"/>
               </a:rPr>
-              <a:t>Board-Style Review</a:t>
-            </a:r>
-            <a:endParaRPr lang="en-US" sz="2600" dirty="0"/>
-          </a:p>
-        </p:txBody>
-      </p:sp>
-      <p:sp>
-        <p:nvSpPr>
-          <p:cNvPr id="4" name="Text 2"/>
-          <p:cNvSpPr/>
-          <p:nvPr/>
-        </p:nvSpPr>
-        <p:spPr>
-          <a:xfrm>
-            <a:off x="566928" y="1417320"/>
-            <a:ext cx="11057839" cy="914400"/>
-          </a:xfrm>
-          <a:prstGeom prst="rect">
-            <a:avLst/>
-          </a:prstGeom>
-          <a:noFill/>
-          <a:ln/>
-        </p:spPr>
-        <p:txBody>
-          <a:bodyPr wrap="square" lIns="0" tIns="0" rIns="0" bIns="0" rtlCol="0" anchor="t"/>
-          <a:lstStyle/>
-          <a:p>
-            <a:pPr algn="l" indent="0" marL="0">
-              <a:lnSpc>
-                <a:spcPct val="105000"/>
-              </a:lnSpc>
-              <a:buNone/>
-            </a:pPr>
-            <a:r>
-              <a:rPr lang="en-US" sz="1450" b="1" dirty="0">
-                <a:solidFill>
-                  <a:srgbClr val="1B2A38"/>
-                </a:solidFill>
-                <a:latin typeface="Calibri" pitchFamily="34" charset="0"/>
-                <a:ea typeface="Calibri" pitchFamily="34" charset="-122"/>
-                <a:cs typeface="Calibri" pitchFamily="34" charset="-120"/>
-              </a:rPr>
-              <a:t>A medication raises serum creatinine without reducing true GFR. The most likely mechanism is:</a:t>
-            </a:r>
-            <a:endParaRPr lang="en-US" sz="1450" dirty="0"/>
-          </a:p>
-        </p:txBody>
-      </p:sp>
-      <p:sp>
-        <p:nvSpPr>
-          <p:cNvPr id="5" name="Text 3"/>
-          <p:cNvSpPr/>
-          <p:nvPr/>
-        </p:nvSpPr>
-        <p:spPr>
-          <a:xfrm>
-            <a:off x="658368" y="2395728"/>
-            <a:ext cx="6192390" cy="3017520"/>
-          </a:xfrm>
-          <a:prstGeom prst="rect">
-            <a:avLst/>
-          </a:prstGeom>
-          <a:noFill/>
-          <a:ln/>
-        </p:spPr>
-        <p:txBody>
-          <a:bodyPr wrap="square" lIns="0" tIns="0" rIns="0" bIns="0" rtlCol="0" anchor="t"/>
-          <a:lstStyle/>
-          <a:p>
-            <a:pPr algn="l" indent="0" marL="0">
-              <a:spcAft>
-                <a:spcPts val="600"/>
-              </a:spcAft>
-              <a:buNone/>
-            </a:pPr>
-            <a:r>
-              <a:rPr lang="en-US" sz="1350" dirty="0">
-                <a:solidFill>
-                  <a:srgbClr val="33444F"/>
-                </a:solidFill>
-                <a:latin typeface="Calibri" pitchFamily="34" charset="0"/>
-                <a:ea typeface="Calibri" pitchFamily="34" charset="-122"/>
-                <a:cs typeface="Calibri" pitchFamily="34" charset="-120"/>
-              </a:rPr>
-              <a:t>A. Increased muscle breakdown</a:t>
-            </a:r>
-            <a:endParaRPr lang="en-US" sz="1350" dirty="0"/>
-          </a:p>
-          <a:p>
-            <a:pPr algn="l" indent="0" marL="0">
-              <a:spcAft>
-                <a:spcPts val="600"/>
-              </a:spcAft>
-              <a:buNone/>
-            </a:pPr>
-            <a:r>
-              <a:rPr lang="en-US" sz="1350" b="1" dirty="0">
-                <a:solidFill>
-                  <a:srgbClr val="0D4A92"/>
-                </a:solidFill>
-                <a:latin typeface="Calibri" pitchFamily="34" charset="0"/>
-                <a:ea typeface="Calibri" pitchFamily="34" charset="-122"/>
-                <a:cs typeface="Calibri" pitchFamily="34" charset="-120"/>
-              </a:rPr>
-              <a:t>B. Inhibition of tubular creatinine secretion</a:t>
-            </a:r>
-            <a:endParaRPr lang="en-US" sz="1350" dirty="0"/>
-          </a:p>
-          <a:p>
-            <a:pPr algn="l" indent="0" marL="0">
-              <a:spcAft>
-                <a:spcPts val="600"/>
-              </a:spcAft>
-              <a:buNone/>
-            </a:pPr>
-            <a:r>
-              <a:rPr lang="en-US" sz="1350" dirty="0">
-                <a:solidFill>
-                  <a:srgbClr val="33444F"/>
-                </a:solidFill>
-                <a:latin typeface="Calibri" pitchFamily="34" charset="0"/>
-                <a:ea typeface="Calibri" pitchFamily="34" charset="-122"/>
-                <a:cs typeface="Calibri" pitchFamily="34" charset="-120"/>
-              </a:rPr>
-              <a:t>C. Hemoconcentration</a:t>
-            </a:r>
-            <a:endParaRPr lang="en-US" sz="1350" dirty="0"/>
-          </a:p>
-          <a:p>
-            <a:pPr algn="l" indent="0" marL="0">
-              <a:spcAft>
-                <a:spcPts val="600"/>
-              </a:spcAft>
-              <a:buNone/>
-            </a:pPr>
-            <a:r>
-              <a:rPr lang="en-US" sz="1350" dirty="0">
-                <a:solidFill>
-                  <a:srgbClr val="33444F"/>
-                </a:solidFill>
-                <a:latin typeface="Calibri" pitchFamily="34" charset="0"/>
-                <a:ea typeface="Calibri" pitchFamily="34" charset="-122"/>
-                <a:cs typeface="Calibri" pitchFamily="34" charset="-120"/>
-              </a:rPr>
-              <a:t>D. Cross-reactivity with the assay only</a:t>
-            </a:r>
-            <a:endParaRPr lang="en-US" sz="1350" dirty="0"/>
-          </a:p>
-          <a:p>
-            <a:pPr algn="l" indent="0" marL="0">
-              <a:spcAft>
-                <a:spcPts val="600"/>
-              </a:spcAft>
-              <a:buNone/>
-            </a:pPr>
-            <a:r>
-              <a:rPr lang="en-US" sz="1350" dirty="0">
-                <a:solidFill>
-                  <a:srgbClr val="33444F"/>
-                </a:solidFill>
-                <a:latin typeface="Calibri" pitchFamily="34" charset="0"/>
-                <a:ea typeface="Calibri" pitchFamily="34" charset="-122"/>
-                <a:cs typeface="Calibri" pitchFamily="34" charset="-120"/>
-              </a:rPr>
-              <a:t>E. Increased dietary protein</a:t>
-            </a:r>
-            <a:endParaRPr lang="en-US" sz="1350" dirty="0"/>
-          </a:p>
-        </p:txBody>
-      </p:sp>
-      <p:sp>
-        <p:nvSpPr>
-          <p:cNvPr id="6" name="Shape 4"/>
-          <p:cNvSpPr/>
-          <p:nvPr/>
-        </p:nvSpPr>
-        <p:spPr>
-          <a:xfrm>
-            <a:off x="7201632" y="2395728"/>
-            <a:ext cx="4423136" cy="3246120"/>
+              <a:t>Case 3</a:t>
+            </a:r>
+            <a:endParaRPr lang="en-US" sz="3000" dirty="0"/>
+          </a:p>
+        </p:txBody>
+      </p:sp>
+      <p:sp>
+        <p:nvSpPr>
+          <p:cNvPr id="4" name="Shape 2"/>
+          <p:cNvSpPr/>
+          <p:nvPr/>
+        </p:nvSpPr>
+        <p:spPr>
+          <a:xfrm>
+            <a:off x="566928" y="1517904"/>
+            <a:ext cx="11057839" cy="2788920"/>
           </a:xfrm>
           <a:prstGeom prst="roundRect">
             <a:avLst>
-              <a:gd name="adj" fmla="val 2535"/>
+              <a:gd name="adj" fmla="val 2951"/>
             </a:avLst>
           </a:prstGeom>
           <a:solidFill>
@@ -7384,14 +7534,14 @@
       </p:sp>
       <p:sp>
         <p:nvSpPr>
-          <p:cNvPr id="7" name="Text 5"/>
-          <p:cNvSpPr/>
-          <p:nvPr/>
-        </p:nvSpPr>
-        <p:spPr>
-          <a:xfrm>
-            <a:off x="7439376" y="2578608"/>
-            <a:ext cx="3965936" cy="457200"/>
+          <p:cNvPr id="5" name="Text 3"/>
+          <p:cNvSpPr/>
+          <p:nvPr/>
+        </p:nvSpPr>
+        <p:spPr>
+          <a:xfrm>
+            <a:off x="841248" y="1700784"/>
+            <a:ext cx="5486400" cy="292608"/>
           </a:xfrm>
           <a:prstGeom prst="rect">
             <a:avLst/>
@@ -7407,7 +7557,7 @@
               <a:buNone/>
             </a:pPr>
             <a:r>
-              <a:rPr lang="en-US" sz="1500" b="1" dirty="0">
+              <a:rPr lang="en-US" sz="1100" b="1" spc="150" kern="0" dirty="0">
                 <a:solidFill>
                   <a:srgbClr val="1565C0"/>
                 </a:solidFill>
@@ -7415,36 +7565,22 @@
                 <a:ea typeface="Calibri" pitchFamily="34" charset="-122"/>
                 <a:cs typeface="Calibri" pitchFamily="34" charset="-120"/>
               </a:rPr>
-              <a:t>ANSWER  </a:t>
-            </a:r>
-            <a:pPr indent="0" marL="0">
-              <a:buNone/>
-            </a:pPr>
-            <a:r>
-              <a:rPr lang="en-US" sz="1500" b="1" dirty="0">
-                <a:solidFill>
-                  <a:srgbClr val="1B2A38"/>
-                </a:solidFill>
-                <a:latin typeface="Calibri" pitchFamily="34" charset="0"/>
-                <a:ea typeface="Calibri" pitchFamily="34" charset="-122"/>
-                <a:cs typeface="Calibri" pitchFamily="34" charset="-120"/>
-              </a:rPr>
-              <a:t>B — Inhibition of tubular secretion</a:t>
-            </a:r>
-            <a:endParaRPr lang="en-US" sz="1500" dirty="0"/>
-          </a:p>
-        </p:txBody>
-      </p:sp>
-      <p:sp>
-        <p:nvSpPr>
-          <p:cNvPr id="8" name="Text 6"/>
-          <p:cNvSpPr/>
-          <p:nvPr/>
-        </p:nvSpPr>
-        <p:spPr>
-          <a:xfrm>
-            <a:off x="7439376" y="3127248"/>
-            <a:ext cx="3947648" cy="2377440"/>
+              <a:t>CLINICAL VIGNETTE</a:t>
+            </a:r>
+            <a:endParaRPr lang="en-US" sz="1100" dirty="0"/>
+          </a:p>
+        </p:txBody>
+      </p:sp>
+      <p:sp>
+        <p:nvSpPr>
+          <p:cNvPr id="6" name="Text 4"/>
+          <p:cNvSpPr/>
+          <p:nvPr/>
+        </p:nvSpPr>
+        <p:spPr>
+          <a:xfrm>
+            <a:off x="841248" y="2029968"/>
+            <a:ext cx="10509199" cy="2148840"/>
           </a:xfrm>
           <a:prstGeom prst="rect">
             <a:avLst/>
@@ -7463,7 +7599,7 @@
               <a:buNone/>
             </a:pPr>
             <a:r>
-              <a:rPr lang="en-US" sz="1250" dirty="0">
+              <a:rPr lang="en-US" sz="1450" dirty="0">
                 <a:solidFill>
                   <a:srgbClr val="33444F"/>
                 </a:solidFill>
@@ -7471,15 +7607,122 @@
                 <a:ea typeface="Calibri" pitchFamily="34" charset="-122"/>
                 <a:cs typeface="Calibri" pitchFamily="34" charset="-120"/>
               </a:rPr>
-              <a:t>Drugs such as trimethoprim and cimetidine block tubular creatinine secretion, raising serum creatinine without changing actual GFR.</a:t>
-            </a:r>
-            <a:endParaRPr lang="en-US" sz="1250" dirty="0"/>
+              <a:t>An asymptomatic woman has an isolated, persistently elevated prolactin. Imaging is normal. PEG precipitation recovers a normal prolactin.</a:t>
+            </a:r>
+            <a:endParaRPr lang="en-US" sz="1450" dirty="0"/>
+          </a:p>
+        </p:txBody>
+      </p:sp>
+      <p:sp>
+        <p:nvSpPr>
+          <p:cNvPr id="7" name="Shape 5"/>
+          <p:cNvSpPr/>
+          <p:nvPr/>
+        </p:nvSpPr>
+        <p:spPr>
+          <a:xfrm>
+            <a:off x="566928" y="4553712"/>
+            <a:ext cx="11057839" cy="1325880"/>
+          </a:xfrm>
+          <a:prstGeom prst="roundRect">
+            <a:avLst>
+              <a:gd name="adj" fmla="val 6207"/>
+            </a:avLst>
+          </a:prstGeom>
+          <a:solidFill>
+            <a:srgbClr val="0E3A5F"/>
+          </a:solidFill>
+          <a:ln/>
+          <a:effectLst>
+            <a:outerShdw sx="100000" sy="100000" kx="0" ky="0" algn="bl" rotWithShape="0" blurRad="88900" dist="25400" dir="5400000">
+              <a:srgbClr val="22303C">
+                <a:alpha val="12000"/>
+              </a:srgbClr>
+            </a:outerShdw>
+          </a:effectLst>
+        </p:spPr>
+      </p:sp>
+      <p:sp>
+        <p:nvSpPr>
+          <p:cNvPr id="8" name="Text 6"/>
+          <p:cNvSpPr/>
+          <p:nvPr/>
+        </p:nvSpPr>
+        <p:spPr>
+          <a:xfrm>
+            <a:off x="822960" y="4681728"/>
+            <a:ext cx="640080" cy="960120"/>
+          </a:xfrm>
+          <a:prstGeom prst="rect">
+            <a:avLst/>
+          </a:prstGeom>
+          <a:noFill/>
+          <a:ln/>
+        </p:spPr>
+        <p:txBody>
+          <a:bodyPr wrap="square" lIns="0" tIns="0" rIns="0" bIns="0" rtlCol="0" anchor="ctr"/>
+          <a:lstStyle/>
+          <a:p>
+            <a:pPr algn="ctr" indent="0" marL="0">
+              <a:buNone/>
+            </a:pPr>
+            <a:r>
+              <a:rPr lang="en-US" sz="4000" b="1" dirty="0">
+                <a:solidFill>
+                  <a:srgbClr val="1565C0"/>
+                </a:solidFill>
+                <a:latin typeface="Calibri" pitchFamily="34" charset="0"/>
+                <a:ea typeface="Calibri" pitchFamily="34" charset="-122"/>
+                <a:cs typeface="Calibri" pitchFamily="34" charset="-120"/>
+              </a:rPr>
+              <a:t>?</a:t>
+            </a:r>
+            <a:endParaRPr lang="en-US" sz="4000" dirty="0"/>
           </a:p>
         </p:txBody>
       </p:sp>
       <p:sp>
         <p:nvSpPr>
           <p:cNvPr id="9" name="Text 7"/>
+          <p:cNvSpPr/>
+          <p:nvPr/>
+        </p:nvSpPr>
+        <p:spPr>
+          <a:xfrm>
+            <a:off x="1618488" y="4553712"/>
+            <a:ext cx="9686239" cy="1325880"/>
+          </a:xfrm>
+          <a:prstGeom prst="rect">
+            <a:avLst/>
+          </a:prstGeom>
+          <a:noFill/>
+          <a:ln/>
+        </p:spPr>
+        <p:txBody>
+          <a:bodyPr wrap="square" lIns="0" tIns="0" rIns="0" bIns="0" rtlCol="0" anchor="ctr"/>
+          <a:lstStyle/>
+          <a:p>
+            <a:pPr algn="l" indent="0" marL="0">
+              <a:buNone/>
+            </a:pPr>
+            <a:r>
+              <a:rPr lang="en-US" sz="1500" b="1" dirty="0">
+                <a:solidFill>
+                  <a:srgbClr val="FFFFFF"/>
+                </a:solidFill>
+                <a:latin typeface="Calibri" pitchFamily="34" charset="0"/>
+                <a:ea typeface="Calibri" pitchFamily="34" charset="-122"/>
+                <a:cs typeface="Calibri" pitchFamily="34" charset="-120"/>
+              </a:rPr>
+              <a:t>What was the cause of the apparent hyperprolactinemia?</a:t>
+            </a:r>
+            <a:endParaRPr lang="en-US" sz="1500" dirty="0"/>
+          </a:p>
+        </p:txBody>
+      </p:sp>
+      <p:sp>
+        <p:nvSpPr>
+          <p:cNvPr id="10" name="Text 8"/>
           <p:cNvSpPr/>
           <p:nvPr/>
         </p:nvSpPr>
@@ -7518,7 +7761,7 @@
       </p:sp>
       <p:sp>
         <p:nvSpPr>
-          <p:cNvPr id="10" name="Text 8"/>
+          <p:cNvPr id="11" name="Text 9"/>
           <p:cNvSpPr/>
           <p:nvPr/>
         </p:nvSpPr>
@@ -8079,7 +8322,7 @@
                 <a:ea typeface="Calibri" pitchFamily="34" charset="-122"/>
                 <a:cs typeface="Calibri" pitchFamily="34" charset="-120"/>
               </a:rPr>
-              <a:t>These are the biomarkers clinicians call about most. The consultative value is in interpretation patterns, kinetics, and recognizing the common ways each test is misused.</a:t>
+              <a:t>These are the biomarkers clinicians call about most. The consultative value is in interpretation patterns, kinetics, and recognizing the ways each test is misused.</a:t>
             </a:r>
             <a:endParaRPr lang="en-US" sz="1450" dirty="0"/>
           </a:p>
@@ -8122,7 +8365,7 @@
                 <a:ea typeface="Calibri" pitchFamily="34" charset="-122"/>
                 <a:cs typeface="Calibri" pitchFamily="34" charset="-120"/>
               </a:rPr>
-              <a:t>A single elevated troponin is not a myocardial infarction; a single normal creatinine is not normal kidney function — context and kinetics decide.</a:t>
+              <a:t>A single elevated troponin is not an MI; a single normal creatinine is not normal kidney function — context and kinetics decide.</a:t>
             </a:r>
             <a:endParaRPr lang="en-US" sz="1300" dirty="0"/>
           </a:p>
@@ -8248,7 +8491,7 @@
     <p:bg>
       <p:bgPr>
         <a:solidFill>
-          <a:srgbClr val="0A2A45"/>
+          <a:srgbClr val="FFFFFF"/>
         </a:solidFill>
       </p:bgPr>
     </p:bg>
@@ -8275,7 +8518,7 @@
         <p:spPr>
           <a:xfrm>
             <a:off x="566928" y="329184"/>
-            <a:ext cx="10058400" cy="310896"/>
+            <a:ext cx="10515600" cy="310896"/>
           </a:xfrm>
           <a:prstGeom prst="rect">
             <a:avLst/>
@@ -8287,7 +8530,7 @@
           <a:bodyPr wrap="square" lIns="0" tIns="0" rIns="0" bIns="0" rtlCol="0" anchor="ctr"/>
           <a:lstStyle/>
           <a:p>
-            <a:pPr indent="0" marL="0">
+            <a:pPr algn="l" indent="0" marL="0">
               <a:buNone/>
             </a:pPr>
             <a:r>
@@ -8299,7 +8542,7 @@
                 <a:ea typeface="Calibri" pitchFamily="34" charset="-122"/>
                 <a:cs typeface="Calibri" pitchFamily="34" charset="-120"/>
               </a:rPr>
-              <a:t>CLINICAL CHEMISTRY</a:t>
+              <a:t>CLINICAL CHEMISTRY   ·   CASE 3  ·  RESOLUTION</a:t>
             </a:r>
             <a:endParaRPr lang="en-US" sz="1100" dirty="0"/>
           </a:p>
@@ -8313,8 +8556,8 @@
         </p:nvSpPr>
         <p:spPr>
           <a:xfrm>
-            <a:off x="566928" y="676656"/>
-            <a:ext cx="10972800" cy="749808"/>
+            <a:off x="566928" y="713232"/>
+            <a:ext cx="11064240" cy="749808"/>
           </a:xfrm>
           <a:prstGeom prst="rect">
             <a:avLst/>
@@ -8326,19 +8569,19 @@
           <a:bodyPr wrap="square" lIns="0" tIns="0" rIns="0" bIns="0" rtlCol="0" anchor="ctr"/>
           <a:lstStyle/>
           <a:p>
-            <a:pPr indent="0" marL="0">
+            <a:pPr algn="l" indent="0" marL="0">
               <a:buNone/>
             </a:pPr>
             <a:r>
               <a:rPr lang="en-US" sz="3000" b="1" dirty="0">
                 <a:solidFill>
-                  <a:srgbClr val="FFFFFF"/>
-                </a:solidFill>
-                <a:latin typeface="Calibri" pitchFamily="34" charset="0"/>
-                <a:ea typeface="Calibri" pitchFamily="34" charset="-122"/>
-                <a:cs typeface="Calibri" pitchFamily="34" charset="-120"/>
-              </a:rPr>
-              <a:t>Key Take-Home Points</a:t>
+                  <a:srgbClr val="0E3A5F"/>
+                </a:solidFill>
+                <a:latin typeface="Calibri" pitchFamily="34" charset="0"/>
+                <a:ea typeface="Calibri" pitchFamily="34" charset="-122"/>
+                <a:cs typeface="Calibri" pitchFamily="34" charset="-120"/>
+              </a:rPr>
+              <a:t>Case 3: Macroprolactin</a:t>
             </a:r>
             <a:endParaRPr lang="en-US" sz="3000" dirty="0"/>
           </a:p>
@@ -8346,42 +8589,128 @@
       </p:sp>
       <p:sp>
         <p:nvSpPr>
-          <p:cNvPr id="4" name="Shape 2"/>
-          <p:cNvSpPr/>
-          <p:nvPr/>
-        </p:nvSpPr>
-        <p:spPr>
-          <a:xfrm>
-            <a:off x="566928" y="1517904"/>
-            <a:ext cx="11057839" cy="841248"/>
+          <p:cNvPr id="4" name="Text 2"/>
+          <p:cNvSpPr/>
+          <p:nvPr/>
+        </p:nvSpPr>
+        <p:spPr>
+          <a:xfrm>
+            <a:off x="566928" y="1554480"/>
+            <a:ext cx="6413547" cy="4023360"/>
+          </a:xfrm>
+          <a:prstGeom prst="rect">
+            <a:avLst/>
+          </a:prstGeom>
+          <a:noFill/>
+          <a:ln/>
+        </p:spPr>
+        <p:txBody>
+          <a:bodyPr wrap="square" lIns="0" tIns="0" rIns="0" bIns="0" rtlCol="0" anchor="t"/>
+          <a:lstStyle/>
+          <a:p>
+            <a:pPr algn="l" marL="177800" indent="-177800">
+              <a:spcAft>
+                <a:spcPts val="900"/>
+              </a:spcAft>
+              <a:buSzPct val="100000"/>
+              <a:buChar char="•"/>
+            </a:pPr>
+            <a:r>
+              <a:rPr lang="en-US" sz="1400" b="1" dirty="0">
+                <a:solidFill>
+                  <a:srgbClr val="1B2A38"/>
+                </a:solidFill>
+                <a:latin typeface="Calibri" pitchFamily="34" charset="0"/>
+                <a:ea typeface="Calibri" pitchFamily="34" charset="-122"/>
+                <a:cs typeface="Calibri" pitchFamily="34" charset="-120"/>
+              </a:rPr>
+              <a:t>Macroprolactin (prolactin–IgG complex) caused spurious hyperprolactinemia.</a:t>
+            </a:r>
+            <a:endParaRPr lang="en-US" sz="1400" dirty="0"/>
+          </a:p>
+          <a:p>
+            <a:pPr algn="l" marL="177800" indent="-177800">
+              <a:spcAft>
+                <a:spcPts val="900"/>
+              </a:spcAft>
+              <a:buSzPct val="100000"/>
+              <a:buChar char="•"/>
+            </a:pPr>
+            <a:r>
+              <a:rPr lang="en-US" sz="1400" dirty="0">
+                <a:solidFill>
+                  <a:srgbClr val="33444F"/>
+                </a:solidFill>
+                <a:latin typeface="Calibri" pitchFamily="34" charset="0"/>
+                <a:ea typeface="Calibri" pitchFamily="34" charset="-122"/>
+                <a:cs typeface="Calibri" pitchFamily="34" charset="-120"/>
+              </a:rPr>
+              <a:t>It is biologically inactive but immunoreactive.</a:t>
+            </a:r>
+            <a:endParaRPr lang="en-US" sz="1400" dirty="0"/>
+          </a:p>
+          <a:p>
+            <a:pPr algn="l" marL="177800" indent="-177800">
+              <a:spcAft>
+                <a:spcPts val="900"/>
+              </a:spcAft>
+              <a:buSzPct val="100000"/>
+              <a:buChar char="•"/>
+            </a:pPr>
+            <a:r>
+              <a:rPr lang="en-US" sz="1400" dirty="0">
+                <a:solidFill>
+                  <a:srgbClr val="33444F"/>
+                </a:solidFill>
+                <a:latin typeface="Calibri" pitchFamily="34" charset="0"/>
+                <a:ea typeface="Calibri" pitchFamily="34" charset="-122"/>
+                <a:cs typeface="Calibri" pitchFamily="34" charset="-120"/>
+              </a:rPr>
+              <a:t>PEG precipitation removes it; normal recovered prolactin confirms macroprolactin.</a:t>
+            </a:r>
+            <a:endParaRPr lang="en-US" sz="1400" dirty="0"/>
+          </a:p>
+          <a:p>
+            <a:pPr algn="l" marL="177800" indent="-177800">
+              <a:spcAft>
+                <a:spcPts val="900"/>
+              </a:spcAft>
+              <a:buSzPct val="100000"/>
+              <a:buChar char="•"/>
+            </a:pPr>
+            <a:r>
+              <a:rPr lang="en-US" sz="1400" dirty="0">
+                <a:solidFill>
+                  <a:srgbClr val="33444F"/>
+                </a:solidFill>
+                <a:latin typeface="Calibri" pitchFamily="34" charset="0"/>
+                <a:ea typeface="Calibri" pitchFamily="34" charset="-122"/>
+                <a:cs typeface="Calibri" pitchFamily="34" charset="-120"/>
+              </a:rPr>
+              <a:t>Recognizing it avoids unnecessary imaging and treatment.</a:t>
+            </a:r>
+            <a:endParaRPr lang="en-US" sz="1400" dirty="0"/>
+          </a:p>
+        </p:txBody>
+      </p:sp>
+      <p:sp>
+        <p:nvSpPr>
+          <p:cNvPr id="5" name="Shape 3"/>
+          <p:cNvSpPr/>
+          <p:nvPr/>
+        </p:nvSpPr>
+        <p:spPr>
+          <a:xfrm>
+            <a:off x="7422788" y="1554480"/>
+            <a:ext cx="4201979" cy="3977640"/>
           </a:xfrm>
           <a:prstGeom prst="roundRect">
             <a:avLst>
-              <a:gd name="adj" fmla="val 7609"/>
+              <a:gd name="adj" fmla="val 2069"/>
             </a:avLst>
           </a:prstGeom>
           <a:solidFill>
-            <a:srgbClr val="143651"/>
-          </a:solidFill>
-          <a:ln/>
-        </p:spPr>
-      </p:sp>
-      <p:sp>
-        <p:nvSpPr>
-          <p:cNvPr id="5" name="Shape 3"/>
-          <p:cNvSpPr/>
-          <p:nvPr/>
-        </p:nvSpPr>
-        <p:spPr>
-          <a:xfrm>
-            <a:off x="749808" y="1755648"/>
-            <a:ext cx="365760" cy="365760"/>
-          </a:xfrm>
-          <a:prstGeom prst="ellipse">
-            <a:avLst/>
-          </a:prstGeom>
-          <a:solidFill>
-            <a:srgbClr val="1565C0"/>
+            <a:srgbClr val="E7EFFA"/>
           </a:solidFill>
           <a:ln/>
           <a:effectLst>
@@ -8401,8 +8730,8 @@
         </p:nvSpPr>
         <p:spPr>
           <a:xfrm>
-            <a:off x="749808" y="1755648"/>
-            <a:ext cx="365760" cy="365760"/>
+            <a:off x="7660532" y="1755648"/>
+            <a:ext cx="3744779" cy="310896"/>
           </a:xfrm>
           <a:prstGeom prst="rect">
             <a:avLst/>
@@ -8414,21 +8743,21 @@
           <a:bodyPr wrap="square" lIns="0" tIns="0" rIns="0" bIns="0" rtlCol="0" anchor="ctr"/>
           <a:lstStyle/>
           <a:p>
-            <a:pPr algn="ctr" indent="0" marL="0">
-              <a:buNone/>
-            </a:pPr>
-            <a:r>
-              <a:rPr lang="en-US" sz="1500" b="1" dirty="0">
-                <a:solidFill>
-                  <a:srgbClr val="FFFFFF"/>
-                </a:solidFill>
-                <a:latin typeface="Calibri" pitchFamily="34" charset="0"/>
-                <a:ea typeface="Calibri" pitchFamily="34" charset="-122"/>
-                <a:cs typeface="Calibri" pitchFamily="34" charset="-120"/>
-              </a:rPr>
-              <a:t>1</a:t>
-            </a:r>
-            <a:endParaRPr lang="en-US" sz="1500" dirty="0"/>
+            <a:pPr indent="0" marL="0">
+              <a:buNone/>
+            </a:pPr>
+            <a:r>
+              <a:rPr lang="en-US" sz="1100" b="1" spc="140" kern="0" dirty="0">
+                <a:solidFill>
+                  <a:srgbClr val="1565C0"/>
+                </a:solidFill>
+                <a:latin typeface="Calibri" pitchFamily="34" charset="0"/>
+                <a:ea typeface="Calibri" pitchFamily="34" charset="-122"/>
+                <a:cs typeface="Calibri" pitchFamily="34" charset="-120"/>
+              </a:rPr>
+              <a:t>TEACHING POINT</a:t>
+            </a:r>
+            <a:endParaRPr lang="en-US" sz="1100" dirty="0"/>
           </a:p>
         </p:txBody>
       </p:sp>
@@ -8440,8 +8769,50 @@
         </p:nvSpPr>
         <p:spPr>
           <a:xfrm>
-            <a:off x="1280160" y="1517904"/>
-            <a:ext cx="10143439" cy="841248"/>
+            <a:off x="7660532" y="2121408"/>
+            <a:ext cx="3726491" cy="3291840"/>
+          </a:xfrm>
+          <a:prstGeom prst="rect">
+            <a:avLst/>
+          </a:prstGeom>
+          <a:noFill/>
+          <a:ln/>
+        </p:spPr>
+        <p:txBody>
+          <a:bodyPr wrap="square" lIns="0" tIns="0" rIns="0" bIns="0" rtlCol="0" anchor="t"/>
+          <a:lstStyle/>
+          <a:p>
+            <a:pPr algn="l" indent="0" marL="0">
+              <a:lnSpc>
+                <a:spcPct val="110000"/>
+              </a:lnSpc>
+              <a:buNone/>
+            </a:pPr>
+            <a:r>
+              <a:rPr lang="en-US" sz="1350" dirty="0">
+                <a:solidFill>
+                  <a:srgbClr val="33444F"/>
+                </a:solidFill>
+                <a:latin typeface="Calibri" pitchFamily="34" charset="0"/>
+                <a:ea typeface="Calibri" pitchFamily="34" charset="-122"/>
+                <a:cs typeface="Calibri" pitchFamily="34" charset="-120"/>
+              </a:rPr>
+              <a:t>Isolated, asymptomatic hyperprolactinemia warrants a macroprolactin check (PEG) before pursuing a prolactinoma.</a:t>
+            </a:r>
+            <a:endParaRPr lang="en-US" sz="1350" dirty="0"/>
+          </a:p>
+        </p:txBody>
+      </p:sp>
+      <p:sp>
+        <p:nvSpPr>
+          <p:cNvPr id="8" name="Text 6"/>
+          <p:cNvSpPr/>
+          <p:nvPr/>
+        </p:nvSpPr>
+        <p:spPr>
+          <a:xfrm>
+            <a:off x="566928" y="6473952"/>
+            <a:ext cx="7772400" cy="274320"/>
           </a:xfrm>
           <a:prstGeom prst="rect">
             <a:avLst/>
@@ -8457,79 +8828,30 @@
               <a:buNone/>
             </a:pPr>
             <a:r>
-              <a:rPr lang="en-US" sz="1350" dirty="0">
-                <a:solidFill>
-                  <a:srgbClr val="E7EEF4"/>
-                </a:solidFill>
-                <a:latin typeface="Calibri" pitchFamily="34" charset="0"/>
-                <a:ea typeface="Calibri" pitchFamily="34" charset="-122"/>
-                <a:cs typeface="Calibri" pitchFamily="34" charset="-120"/>
-              </a:rPr>
-              <a:t>Creatinine rises late; use eGFR (race-free CKD-EPI) and cystatin C when creatinine is unreliable.</a:t>
-            </a:r>
-            <a:endParaRPr lang="en-US" sz="1350" dirty="0"/>
-          </a:p>
-        </p:txBody>
-      </p:sp>
-      <p:sp>
-        <p:nvSpPr>
-          <p:cNvPr id="8" name="Shape 6"/>
-          <p:cNvSpPr/>
-          <p:nvPr/>
-        </p:nvSpPr>
-        <p:spPr>
-          <a:xfrm>
-            <a:off x="566928" y="2505456"/>
-            <a:ext cx="11057839" cy="841248"/>
-          </a:xfrm>
-          <a:prstGeom prst="roundRect">
-            <a:avLst>
-              <a:gd name="adj" fmla="val 7609"/>
-            </a:avLst>
-          </a:prstGeom>
-          <a:solidFill>
-            <a:srgbClr val="143651"/>
-          </a:solidFill>
-          <a:ln/>
-        </p:spPr>
-      </p:sp>
-      <p:sp>
-        <p:nvSpPr>
-          <p:cNvPr id="9" name="Shape 7"/>
-          <p:cNvSpPr/>
-          <p:nvPr/>
-        </p:nvSpPr>
-        <p:spPr>
-          <a:xfrm>
-            <a:off x="749808" y="2743200"/>
-            <a:ext cx="365760" cy="365760"/>
-          </a:xfrm>
-          <a:prstGeom prst="ellipse">
-            <a:avLst/>
-          </a:prstGeom>
-          <a:solidFill>
-            <a:srgbClr val="1565C0"/>
-          </a:solidFill>
-          <a:ln/>
-          <a:effectLst>
-            <a:outerShdw sx="100000" sy="100000" kx="0" ky="0" algn="bl" rotWithShape="0" blurRad="88900" dist="25400" dir="5400000">
-              <a:srgbClr val="22303C">
-                <a:alpha val="12000"/>
-              </a:srgbClr>
-            </a:outerShdw>
-          </a:effectLst>
-        </p:spPr>
-      </p:sp>
-      <p:sp>
-        <p:nvSpPr>
-          <p:cNvPr id="10" name="Text 8"/>
-          <p:cNvSpPr/>
-          <p:nvPr/>
-        </p:nvSpPr>
-        <p:spPr>
-          <a:xfrm>
-            <a:off x="749808" y="2743200"/>
-            <a:ext cx="365760" cy="365760"/>
+              <a:rPr lang="en-US" sz="850" dirty="0">
+                <a:solidFill>
+                  <a:srgbClr val="9AA8B4"/>
+                </a:solidFill>
+                <a:latin typeface="Calibri" pitchFamily="34" charset="0"/>
+                <a:ea typeface="Calibri" pitchFamily="34" charset="-122"/>
+                <a:cs typeface="Calibri" pitchFamily="34" charset="-120"/>
+              </a:rPr>
+              <a:t>Makassed General Hospital  ·  Department of Laboratory Medicine</a:t>
+            </a:r>
+            <a:endParaRPr lang="en-US" sz="850" dirty="0"/>
+          </a:p>
+        </p:txBody>
+      </p:sp>
+      <p:sp>
+        <p:nvSpPr>
+          <p:cNvPr id="9" name="Text 7"/>
+          <p:cNvSpPr/>
+          <p:nvPr/>
+        </p:nvSpPr>
+        <p:spPr>
+          <a:xfrm>
+            <a:off x="9814255" y="6473952"/>
+            <a:ext cx="1828800" cy="274320"/>
           </a:xfrm>
           <a:prstGeom prst="rect">
             <a:avLst/>
@@ -8541,504 +8863,34 @@
           <a:bodyPr wrap="square" lIns="0" tIns="0" rIns="0" bIns="0" rtlCol="0" anchor="ctr"/>
           <a:lstStyle/>
           <a:p>
-            <a:pPr algn="ctr" indent="0" marL="0">
-              <a:buNone/>
-            </a:pPr>
-            <a:r>
-              <a:rPr lang="en-US" sz="1500" b="1" dirty="0">
-                <a:solidFill>
-                  <a:srgbClr val="FFFFFF"/>
-                </a:solidFill>
-                <a:latin typeface="Calibri" pitchFamily="34" charset="0"/>
-                <a:ea typeface="Calibri" pitchFamily="34" charset="-122"/>
-                <a:cs typeface="Calibri" pitchFamily="34" charset="-120"/>
-              </a:rPr>
-              <a:t>2</a:t>
-            </a:r>
-            <a:endParaRPr lang="en-US" sz="1500" dirty="0"/>
-          </a:p>
-        </p:txBody>
-      </p:sp>
-      <p:sp>
-        <p:nvSpPr>
-          <p:cNvPr id="11" name="Text 9"/>
-          <p:cNvSpPr/>
-          <p:nvPr/>
-        </p:nvSpPr>
-        <p:spPr>
-          <a:xfrm>
-            <a:off x="1280160" y="2505456"/>
-            <a:ext cx="10143439" cy="841248"/>
-          </a:xfrm>
-          <a:prstGeom prst="rect">
-            <a:avLst/>
-          </a:prstGeom>
-          <a:noFill/>
-          <a:ln/>
-        </p:spPr>
-        <p:txBody>
-          <a:bodyPr wrap="square" lIns="0" tIns="0" rIns="0" bIns="0" rtlCol="0" anchor="ctr"/>
-          <a:lstStyle/>
-          <a:p>
-            <a:pPr algn="l" indent="0" marL="0">
-              <a:buNone/>
-            </a:pPr>
-            <a:r>
-              <a:rPr lang="en-US" sz="1350" dirty="0">
-                <a:solidFill>
-                  <a:srgbClr val="E7EEF4"/>
-                </a:solidFill>
-                <a:latin typeface="Calibri" pitchFamily="34" charset="0"/>
-                <a:ea typeface="Calibri" pitchFamily="34" charset="-122"/>
-                <a:cs typeface="Calibri" pitchFamily="34" charset="-120"/>
-              </a:rPr>
-              <a:t>Read LFTs as a pattern (hepatocellular vs cholestatic) and separate injury markers from function (albumin, PT/INR, bilirubin).</a:t>
-            </a:r>
-            <a:endParaRPr lang="en-US" sz="1350" dirty="0"/>
-          </a:p>
-        </p:txBody>
-      </p:sp>
-      <p:sp>
-        <p:nvSpPr>
-          <p:cNvPr id="12" name="Shape 10"/>
-          <p:cNvSpPr/>
-          <p:nvPr/>
-        </p:nvSpPr>
-        <p:spPr>
-          <a:xfrm>
-            <a:off x="566928" y="3493008"/>
-            <a:ext cx="11057839" cy="841248"/>
-          </a:xfrm>
-          <a:prstGeom prst="roundRect">
-            <a:avLst>
-              <a:gd name="adj" fmla="val 7609"/>
-            </a:avLst>
-          </a:prstGeom>
-          <a:solidFill>
-            <a:srgbClr val="143651"/>
-          </a:solidFill>
-          <a:ln/>
-        </p:spPr>
-      </p:sp>
-      <p:sp>
-        <p:nvSpPr>
-          <p:cNvPr id="13" name="Shape 11"/>
-          <p:cNvSpPr/>
-          <p:nvPr/>
-        </p:nvSpPr>
-        <p:spPr>
-          <a:xfrm>
-            <a:off x="749808" y="3730752"/>
-            <a:ext cx="365760" cy="365760"/>
-          </a:xfrm>
-          <a:prstGeom prst="ellipse">
-            <a:avLst/>
-          </a:prstGeom>
-          <a:solidFill>
-            <a:srgbClr val="1565C0"/>
-          </a:solidFill>
-          <a:ln/>
-          <a:effectLst>
-            <a:outerShdw sx="100000" sy="100000" kx="0" ky="0" algn="bl" rotWithShape="0" blurRad="88900" dist="25400" dir="5400000">
-              <a:srgbClr val="22303C">
-                <a:alpha val="12000"/>
-              </a:srgbClr>
-            </a:outerShdw>
-          </a:effectLst>
-        </p:spPr>
-      </p:sp>
-      <p:sp>
-        <p:nvSpPr>
-          <p:cNvPr id="14" name="Text 12"/>
-          <p:cNvSpPr/>
-          <p:nvPr/>
-        </p:nvSpPr>
-        <p:spPr>
-          <a:xfrm>
-            <a:off x="749808" y="3730752"/>
-            <a:ext cx="365760" cy="365760"/>
-          </a:xfrm>
-          <a:prstGeom prst="rect">
-            <a:avLst/>
-          </a:prstGeom>
-          <a:noFill/>
-          <a:ln/>
-        </p:spPr>
-        <p:txBody>
-          <a:bodyPr wrap="square" lIns="0" tIns="0" rIns="0" bIns="0" rtlCol="0" anchor="ctr"/>
-          <a:lstStyle/>
-          <a:p>
-            <a:pPr algn="ctr" indent="0" marL="0">
-              <a:buNone/>
-            </a:pPr>
-            <a:r>
-              <a:rPr lang="en-US" sz="1500" b="1" dirty="0">
-                <a:solidFill>
-                  <a:srgbClr val="FFFFFF"/>
-                </a:solidFill>
-                <a:latin typeface="Calibri" pitchFamily="34" charset="0"/>
-                <a:ea typeface="Calibri" pitchFamily="34" charset="-122"/>
-                <a:cs typeface="Calibri" pitchFamily="34" charset="-120"/>
-              </a:rPr>
-              <a:t>3</a:t>
-            </a:r>
-            <a:endParaRPr lang="en-US" sz="1500" dirty="0"/>
-          </a:p>
-        </p:txBody>
-      </p:sp>
-      <p:sp>
-        <p:nvSpPr>
-          <p:cNvPr id="15" name="Text 13"/>
-          <p:cNvSpPr/>
-          <p:nvPr/>
-        </p:nvSpPr>
-        <p:spPr>
-          <a:xfrm>
-            <a:off x="1280160" y="3493008"/>
-            <a:ext cx="10143439" cy="841248"/>
-          </a:xfrm>
-          <a:prstGeom prst="rect">
-            <a:avLst/>
-          </a:prstGeom>
-          <a:noFill/>
-          <a:ln/>
-        </p:spPr>
-        <p:txBody>
-          <a:bodyPr wrap="square" lIns="0" tIns="0" rIns="0" bIns="0" rtlCol="0" anchor="ctr"/>
-          <a:lstStyle/>
-          <a:p>
-            <a:pPr algn="l" indent="0" marL="0">
-              <a:buNone/>
-            </a:pPr>
-            <a:r>
-              <a:rPr lang="en-US" sz="1350" dirty="0">
-                <a:solidFill>
-                  <a:srgbClr val="E7EEF4"/>
-                </a:solidFill>
-                <a:latin typeface="Calibri" pitchFamily="34" charset="0"/>
-                <a:ea typeface="Calibri" pitchFamily="34" charset="-122"/>
-                <a:cs typeface="Calibri" pitchFamily="34" charset="-120"/>
-              </a:rPr>
-              <a:t>High-sensitivity troponin: the serial delta defines acute injury; stable elevation = chronic.</a:t>
-            </a:r>
-            <a:endParaRPr lang="en-US" sz="1350" dirty="0"/>
-          </a:p>
-        </p:txBody>
-      </p:sp>
-      <p:sp>
-        <p:nvSpPr>
-          <p:cNvPr id="16" name="Shape 14"/>
-          <p:cNvSpPr/>
-          <p:nvPr/>
-        </p:nvSpPr>
-        <p:spPr>
-          <a:xfrm>
-            <a:off x="566928" y="4480560"/>
-            <a:ext cx="11057839" cy="841248"/>
-          </a:xfrm>
-          <a:prstGeom prst="roundRect">
-            <a:avLst>
-              <a:gd name="adj" fmla="val 7609"/>
-            </a:avLst>
-          </a:prstGeom>
-          <a:solidFill>
-            <a:srgbClr val="143651"/>
-          </a:solidFill>
-          <a:ln/>
-        </p:spPr>
-      </p:sp>
-      <p:sp>
-        <p:nvSpPr>
-          <p:cNvPr id="17" name="Shape 15"/>
-          <p:cNvSpPr/>
-          <p:nvPr/>
-        </p:nvSpPr>
-        <p:spPr>
-          <a:xfrm>
-            <a:off x="749808" y="4718304"/>
-            <a:ext cx="365760" cy="365760"/>
-          </a:xfrm>
-          <a:prstGeom prst="ellipse">
-            <a:avLst/>
-          </a:prstGeom>
-          <a:solidFill>
-            <a:srgbClr val="1565C0"/>
-          </a:solidFill>
-          <a:ln/>
-          <a:effectLst>
-            <a:outerShdw sx="100000" sy="100000" kx="0" ky="0" algn="bl" rotWithShape="0" blurRad="88900" dist="25400" dir="5400000">
-              <a:srgbClr val="22303C">
-                <a:alpha val="12000"/>
-              </a:srgbClr>
-            </a:outerShdw>
-          </a:effectLst>
-        </p:spPr>
-      </p:sp>
-      <p:sp>
-        <p:nvSpPr>
-          <p:cNvPr id="18" name="Text 16"/>
-          <p:cNvSpPr/>
-          <p:nvPr/>
-        </p:nvSpPr>
-        <p:spPr>
-          <a:xfrm>
-            <a:off x="749808" y="4718304"/>
-            <a:ext cx="365760" cy="365760"/>
-          </a:xfrm>
-          <a:prstGeom prst="rect">
-            <a:avLst/>
-          </a:prstGeom>
-          <a:noFill/>
-          <a:ln/>
-        </p:spPr>
-        <p:txBody>
-          <a:bodyPr wrap="square" lIns="0" tIns="0" rIns="0" bIns="0" rtlCol="0" anchor="ctr"/>
-          <a:lstStyle/>
-          <a:p>
-            <a:pPr algn="ctr" indent="0" marL="0">
-              <a:buNone/>
-            </a:pPr>
-            <a:r>
-              <a:rPr lang="en-US" sz="1500" b="1" dirty="0">
-                <a:solidFill>
-                  <a:srgbClr val="FFFFFF"/>
-                </a:solidFill>
-                <a:latin typeface="Calibri" pitchFamily="34" charset="0"/>
-                <a:ea typeface="Calibri" pitchFamily="34" charset="-122"/>
-                <a:cs typeface="Calibri" pitchFamily="34" charset="-120"/>
-              </a:rPr>
-              <a:t>4</a:t>
-            </a:r>
-            <a:endParaRPr lang="en-US" sz="1500" dirty="0"/>
-          </a:p>
-        </p:txBody>
-      </p:sp>
-      <p:sp>
-        <p:nvSpPr>
-          <p:cNvPr id="19" name="Text 17"/>
-          <p:cNvSpPr/>
-          <p:nvPr/>
-        </p:nvSpPr>
-        <p:spPr>
-          <a:xfrm>
-            <a:off x="1280160" y="4480560"/>
-            <a:ext cx="10143439" cy="841248"/>
-          </a:xfrm>
-          <a:prstGeom prst="rect">
-            <a:avLst/>
-          </a:prstGeom>
-          <a:noFill/>
-          <a:ln/>
-        </p:spPr>
-        <p:txBody>
-          <a:bodyPr wrap="square" lIns="0" tIns="0" rIns="0" bIns="0" rtlCol="0" anchor="ctr"/>
-          <a:lstStyle/>
-          <a:p>
-            <a:pPr algn="l" indent="0" marL="0">
-              <a:buNone/>
-            </a:pPr>
-            <a:r>
-              <a:rPr lang="en-US" sz="1350" dirty="0">
-                <a:solidFill>
-                  <a:srgbClr val="E7EEF4"/>
-                </a:solidFill>
-                <a:latin typeface="Calibri" pitchFamily="34" charset="0"/>
-                <a:ea typeface="Calibri" pitchFamily="34" charset="-122"/>
-                <a:cs typeface="Calibri" pitchFamily="34" charset="-120"/>
-              </a:rPr>
-              <a:t>Use BNP/NT-proBNP to support, not replace, the heart-failure diagnosis; adjust for age, renal function, obesity.</a:t>
-            </a:r>
-            <a:endParaRPr lang="en-US" sz="1350" dirty="0"/>
-          </a:p>
-        </p:txBody>
-      </p:sp>
-      <p:sp>
-        <p:nvSpPr>
-          <p:cNvPr id="20" name="Shape 18"/>
-          <p:cNvSpPr/>
-          <p:nvPr/>
-        </p:nvSpPr>
-        <p:spPr>
-          <a:xfrm>
-            <a:off x="566928" y="5468112"/>
-            <a:ext cx="11057839" cy="841248"/>
-          </a:xfrm>
-          <a:prstGeom prst="roundRect">
-            <a:avLst>
-              <a:gd name="adj" fmla="val 7609"/>
-            </a:avLst>
-          </a:prstGeom>
-          <a:solidFill>
-            <a:srgbClr val="143651"/>
-          </a:solidFill>
-          <a:ln/>
-        </p:spPr>
-      </p:sp>
-      <p:sp>
-        <p:nvSpPr>
-          <p:cNvPr id="21" name="Shape 19"/>
-          <p:cNvSpPr/>
-          <p:nvPr/>
-        </p:nvSpPr>
-        <p:spPr>
-          <a:xfrm>
-            <a:off x="749808" y="5705856"/>
-            <a:ext cx="365760" cy="365760"/>
-          </a:xfrm>
-          <a:prstGeom prst="ellipse">
-            <a:avLst/>
-          </a:prstGeom>
-          <a:solidFill>
-            <a:srgbClr val="1565C0"/>
-          </a:solidFill>
-          <a:ln/>
-          <a:effectLst>
-            <a:outerShdw sx="100000" sy="100000" kx="0" ky="0" algn="bl" rotWithShape="0" blurRad="88900" dist="25400" dir="5400000">
-              <a:srgbClr val="22303C">
-                <a:alpha val="12000"/>
-              </a:srgbClr>
-            </a:outerShdw>
-          </a:effectLst>
-        </p:spPr>
-      </p:sp>
-      <p:sp>
-        <p:nvSpPr>
-          <p:cNvPr id="22" name="Text 20"/>
-          <p:cNvSpPr/>
-          <p:nvPr/>
-        </p:nvSpPr>
-        <p:spPr>
-          <a:xfrm>
-            <a:off x="749808" y="5705856"/>
-            <a:ext cx="365760" cy="365760"/>
-          </a:xfrm>
-          <a:prstGeom prst="rect">
-            <a:avLst/>
-          </a:prstGeom>
-          <a:noFill/>
-          <a:ln/>
-        </p:spPr>
-        <p:txBody>
-          <a:bodyPr wrap="square" lIns="0" tIns="0" rIns="0" bIns="0" rtlCol="0" anchor="ctr"/>
-          <a:lstStyle/>
-          <a:p>
-            <a:pPr algn="ctr" indent="0" marL="0">
-              <a:buNone/>
-            </a:pPr>
-            <a:r>
-              <a:rPr lang="en-US" sz="1500" b="1" dirty="0">
-                <a:solidFill>
-                  <a:srgbClr val="FFFFFF"/>
-                </a:solidFill>
-                <a:latin typeface="Calibri" pitchFamily="34" charset="0"/>
-                <a:ea typeface="Calibri" pitchFamily="34" charset="-122"/>
-                <a:cs typeface="Calibri" pitchFamily="34" charset="-120"/>
-              </a:rPr>
-              <a:t>5</a:t>
-            </a:r>
-            <a:endParaRPr lang="en-US" sz="1500" dirty="0"/>
-          </a:p>
-        </p:txBody>
-      </p:sp>
-      <p:sp>
-        <p:nvSpPr>
-          <p:cNvPr id="23" name="Text 21"/>
-          <p:cNvSpPr/>
-          <p:nvPr/>
-        </p:nvSpPr>
-        <p:spPr>
-          <a:xfrm>
-            <a:off x="1280160" y="5468112"/>
-            <a:ext cx="10143439" cy="841248"/>
-          </a:xfrm>
-          <a:prstGeom prst="rect">
-            <a:avLst/>
-          </a:prstGeom>
-          <a:noFill/>
-          <a:ln/>
-        </p:spPr>
-        <p:txBody>
-          <a:bodyPr wrap="square" lIns="0" tIns="0" rIns="0" bIns="0" rtlCol="0" anchor="ctr"/>
-          <a:lstStyle/>
-          <a:p>
-            <a:pPr algn="l" indent="0" marL="0">
-              <a:buNone/>
-            </a:pPr>
-            <a:r>
-              <a:rPr lang="en-US" sz="1350" dirty="0">
-                <a:solidFill>
-                  <a:srgbClr val="E7EEF4"/>
-                </a:solidFill>
-                <a:latin typeface="Calibri" pitchFamily="34" charset="0"/>
-                <a:ea typeface="Calibri" pitchFamily="34" charset="-122"/>
-                <a:cs typeface="Calibri" pitchFamily="34" charset="-120"/>
-              </a:rPr>
-              <a:t>Suspect macro-analytes (macro-CK, macroprolactin) for isolated, clinically silent elevations.</a:t>
-            </a:r>
-            <a:endParaRPr lang="en-US" sz="1350" dirty="0"/>
-          </a:p>
-        </p:txBody>
-      </p:sp>
-      <p:sp>
-        <p:nvSpPr>
-          <p:cNvPr id="24" name="Text 22"/>
-          <p:cNvSpPr/>
-          <p:nvPr/>
-        </p:nvSpPr>
-        <p:spPr>
-          <a:xfrm>
-            <a:off x="566928" y="6473952"/>
-            <a:ext cx="8229600" cy="274320"/>
-          </a:xfrm>
-          <a:prstGeom prst="rect">
-            <a:avLst/>
-          </a:prstGeom>
-          <a:noFill/>
-          <a:ln/>
-        </p:spPr>
-        <p:txBody>
-          <a:bodyPr wrap="square" lIns="0" tIns="0" rIns="0" bIns="0" rtlCol="0" anchor="ctr"/>
-          <a:lstStyle/>
-          <a:p>
-            <a:pPr indent="0" marL="0">
+            <a:pPr algn="r" indent="0" marL="0">
               <a:buNone/>
             </a:pPr>
             <a:r>
               <a:rPr lang="en-US" sz="850" dirty="0">
                 <a:solidFill>
-                  <a:srgbClr val="5E7488"/>
-                </a:solidFill>
-                <a:latin typeface="Calibri" pitchFamily="34" charset="0"/>
-                <a:ea typeface="Calibri" pitchFamily="34" charset="-122"/>
-                <a:cs typeface="Calibri" pitchFamily="34" charset="-120"/>
-              </a:rPr>
-              <a:t>Makassed General Hospital  ·  Department of Laboratory Medicine</a:t>
-            </a:r>
-            <a:endParaRPr lang="en-US" sz="850" dirty="0"/>
-          </a:p>
-        </p:txBody>
-      </p:sp>
-      <p:sp>
-        <p:nvSpPr>
-          <p:cNvPr id="25" name="Text 23"/>
-          <p:cNvSpPr/>
-          <p:nvPr/>
-        </p:nvSpPr>
-        <p:spPr>
-          <a:xfrm>
-            <a:off x="11002975" y="6473952"/>
-            <a:ext cx="640080" cy="274320"/>
-          </a:xfrm>
-          <a:prstGeom prst="rect">
-            <a:avLst/>
-          </a:prstGeom>
-          <a:noFill/>
-          <a:ln/>
-        </p:spPr>
-        <p:txBody>
-          <a:bodyPr wrap="square" lIns="0" tIns="0" rIns="0" bIns="0" rtlCol="0" anchor="ctr"/>
-          <a:lstStyle/>
-          <a:p>
+                  <a:srgbClr val="9AA8B4"/>
+                </a:solidFill>
+                <a:latin typeface="Calibri" pitchFamily="34" charset="0"/>
+                <a:ea typeface="Calibri" pitchFamily="34" charset="-122"/>
+                <a:cs typeface="Calibri" pitchFamily="34" charset="-120"/>
+              </a:rPr>
+              <a:t>CP Lecture Series</a:t>
+            </a:r>
+            <a:pPr algn="r" indent="0" marL="0">
+              <a:buNone/>
+            </a:pPr>
+            <a:r>
+              <a:rPr lang="en-US" sz="850" dirty="0">
+                <a:solidFill>
+                  <a:srgbClr val="DCE4EC"/>
+                </a:solidFill>
+                <a:latin typeface="Calibri" pitchFamily="34" charset="0"/>
+                <a:ea typeface="Calibri" pitchFamily="34" charset="-122"/>
+                <a:cs typeface="Calibri" pitchFamily="34" charset="-120"/>
+              </a:rPr>
+              <a:t>   ·   </a:t>
+            </a:r>
             <a:pPr algn="r" indent="0" marL="0">
               <a:buNone/>
             </a:pPr>
@@ -9122,6 +8974,2845 @@
                 <a:ea typeface="Calibri" pitchFamily="34" charset="-122"/>
                 <a:cs typeface="Calibri" pitchFamily="34" charset="-120"/>
               </a:rPr>
+              <a:t>CLINICAL CHEMISTRY   ·   BOARD REVIEW  ·  Q1</a:t>
+            </a:r>
+            <a:endParaRPr lang="en-US" sz="1100" dirty="0"/>
+          </a:p>
+        </p:txBody>
+      </p:sp>
+      <p:sp>
+        <p:nvSpPr>
+          <p:cNvPr id="3" name="Text 1"/>
+          <p:cNvSpPr/>
+          <p:nvPr/>
+        </p:nvSpPr>
+        <p:spPr>
+          <a:xfrm>
+            <a:off x="566928" y="713232"/>
+            <a:ext cx="11064240" cy="749808"/>
+          </a:xfrm>
+          <a:prstGeom prst="rect">
+            <a:avLst/>
+          </a:prstGeom>
+          <a:noFill/>
+          <a:ln/>
+        </p:spPr>
+        <p:txBody>
+          <a:bodyPr wrap="square" lIns="0" tIns="0" rIns="0" bIns="0" rtlCol="0" anchor="ctr"/>
+          <a:lstStyle/>
+          <a:p>
+            <a:pPr algn="l" indent="0" marL="0">
+              <a:buNone/>
+            </a:pPr>
+            <a:r>
+              <a:rPr lang="en-US" sz="2600" b="1" dirty="0">
+                <a:solidFill>
+                  <a:srgbClr val="0E3A5F"/>
+                </a:solidFill>
+                <a:latin typeface="Calibri" pitchFamily="34" charset="0"/>
+                <a:ea typeface="Calibri" pitchFamily="34" charset="-122"/>
+                <a:cs typeface="Calibri" pitchFamily="34" charset="-120"/>
+              </a:rPr>
+              <a:t>Board-Style Review</a:t>
+            </a:r>
+            <a:endParaRPr lang="en-US" sz="2600" dirty="0"/>
+          </a:p>
+        </p:txBody>
+      </p:sp>
+      <p:sp>
+        <p:nvSpPr>
+          <p:cNvPr id="4" name="Text 2"/>
+          <p:cNvSpPr/>
+          <p:nvPr/>
+        </p:nvSpPr>
+        <p:spPr>
+          <a:xfrm>
+            <a:off x="566928" y="1417320"/>
+            <a:ext cx="11057839" cy="914400"/>
+          </a:xfrm>
+          <a:prstGeom prst="rect">
+            <a:avLst/>
+          </a:prstGeom>
+          <a:noFill/>
+          <a:ln/>
+        </p:spPr>
+        <p:txBody>
+          <a:bodyPr wrap="square" lIns="0" tIns="0" rIns="0" bIns="0" rtlCol="0" anchor="t"/>
+          <a:lstStyle/>
+          <a:p>
+            <a:pPr algn="l" indent="0" marL="0">
+              <a:lnSpc>
+                <a:spcPct val="105000"/>
+              </a:lnSpc>
+              <a:buNone/>
+            </a:pPr>
+            <a:r>
+              <a:rPr lang="en-US" sz="1450" b="1" dirty="0">
+                <a:solidFill>
+                  <a:srgbClr val="1B2A38"/>
+                </a:solidFill>
+                <a:latin typeface="Calibri" pitchFamily="34" charset="0"/>
+                <a:ea typeface="Calibri" pitchFamily="34" charset="-122"/>
+                <a:cs typeface="Calibri" pitchFamily="34" charset="-120"/>
+              </a:rPr>
+              <a:t>Which best distinguishes acute MI from chronic troponin elevation?</a:t>
+            </a:r>
+            <a:endParaRPr lang="en-US" sz="1450" dirty="0"/>
+          </a:p>
+        </p:txBody>
+      </p:sp>
+      <p:sp>
+        <p:nvSpPr>
+          <p:cNvPr id="5" name="Text 3"/>
+          <p:cNvSpPr/>
+          <p:nvPr/>
+        </p:nvSpPr>
+        <p:spPr>
+          <a:xfrm>
+            <a:off x="658368" y="2395728"/>
+            <a:ext cx="6192390" cy="3017520"/>
+          </a:xfrm>
+          <a:prstGeom prst="rect">
+            <a:avLst/>
+          </a:prstGeom>
+          <a:noFill/>
+          <a:ln/>
+        </p:spPr>
+        <p:txBody>
+          <a:bodyPr wrap="square" lIns="0" tIns="0" rIns="0" bIns="0" rtlCol="0" anchor="t"/>
+          <a:lstStyle/>
+          <a:p>
+            <a:pPr algn="l" indent="0" marL="0">
+              <a:spcAft>
+                <a:spcPts val="600"/>
+              </a:spcAft>
+              <a:buNone/>
+            </a:pPr>
+            <a:r>
+              <a:rPr lang="en-US" sz="1350" dirty="0">
+                <a:solidFill>
+                  <a:srgbClr val="33444F"/>
+                </a:solidFill>
+                <a:latin typeface="Calibri" pitchFamily="34" charset="0"/>
+                <a:ea typeface="Calibri" pitchFamily="34" charset="-122"/>
+                <a:cs typeface="Calibri" pitchFamily="34" charset="-120"/>
+              </a:rPr>
+              <a:t>A. Any value above the URL</a:t>
+            </a:r>
+            <a:endParaRPr lang="en-US" sz="1350" dirty="0"/>
+          </a:p>
+          <a:p>
+            <a:pPr algn="l" indent="0" marL="0">
+              <a:spcAft>
+                <a:spcPts val="600"/>
+              </a:spcAft>
+              <a:buNone/>
+            </a:pPr>
+            <a:r>
+              <a:rPr lang="en-US" sz="1350" b="1" dirty="0">
+                <a:solidFill>
+                  <a:srgbClr val="0D4A92"/>
+                </a:solidFill>
+                <a:latin typeface="Calibri" pitchFamily="34" charset="0"/>
+                <a:ea typeface="Calibri" pitchFamily="34" charset="-122"/>
+                <a:cs typeface="Calibri" pitchFamily="34" charset="-120"/>
+              </a:rPr>
+              <a:t>B. A dynamic rise and/or fall on serial testing</a:t>
+            </a:r>
+            <a:endParaRPr lang="en-US" sz="1350" dirty="0"/>
+          </a:p>
+          <a:p>
+            <a:pPr algn="l" indent="0" marL="0">
+              <a:spcAft>
+                <a:spcPts val="600"/>
+              </a:spcAft>
+              <a:buNone/>
+            </a:pPr>
+            <a:r>
+              <a:rPr lang="en-US" sz="1350" dirty="0">
+                <a:solidFill>
+                  <a:srgbClr val="33444F"/>
+                </a:solidFill>
+                <a:latin typeface="Calibri" pitchFamily="34" charset="0"/>
+                <a:ea typeface="Calibri" pitchFamily="34" charset="-122"/>
+                <a:cs typeface="Calibri" pitchFamily="34" charset="-120"/>
+              </a:rPr>
+              <a:t>C. A single very high value</a:t>
+            </a:r>
+            <a:endParaRPr lang="en-US" sz="1350" dirty="0"/>
+          </a:p>
+          <a:p>
+            <a:pPr algn="l" indent="0" marL="0">
+              <a:spcAft>
+                <a:spcPts val="600"/>
+              </a:spcAft>
+              <a:buNone/>
+            </a:pPr>
+            <a:r>
+              <a:rPr lang="en-US" sz="1350" dirty="0">
+                <a:solidFill>
+                  <a:srgbClr val="33444F"/>
+                </a:solidFill>
+                <a:latin typeface="Calibri" pitchFamily="34" charset="0"/>
+                <a:ea typeface="Calibri" pitchFamily="34" charset="-122"/>
+                <a:cs typeface="Calibri" pitchFamily="34" charset="-120"/>
+              </a:rPr>
+              <a:t>D. Coexisting high BNP</a:t>
+            </a:r>
+            <a:endParaRPr lang="en-US" sz="1350" dirty="0"/>
+          </a:p>
+          <a:p>
+            <a:pPr algn="l" indent="0" marL="0">
+              <a:spcAft>
+                <a:spcPts val="600"/>
+              </a:spcAft>
+              <a:buNone/>
+            </a:pPr>
+            <a:r>
+              <a:rPr lang="en-US" sz="1350" dirty="0">
+                <a:solidFill>
+                  <a:srgbClr val="33444F"/>
+                </a:solidFill>
+                <a:latin typeface="Calibri" pitchFamily="34" charset="0"/>
+                <a:ea typeface="Calibri" pitchFamily="34" charset="-122"/>
+                <a:cs typeface="Calibri" pitchFamily="34" charset="-120"/>
+              </a:rPr>
+              <a:t>E. Elevated creatinine</a:t>
+            </a:r>
+            <a:endParaRPr lang="en-US" sz="1350" dirty="0"/>
+          </a:p>
+        </p:txBody>
+      </p:sp>
+      <p:sp>
+        <p:nvSpPr>
+          <p:cNvPr id="6" name="Shape 4"/>
+          <p:cNvSpPr/>
+          <p:nvPr/>
+        </p:nvSpPr>
+        <p:spPr>
+          <a:xfrm>
+            <a:off x="7201632" y="2395728"/>
+            <a:ext cx="4423136" cy="3246120"/>
+          </a:xfrm>
+          <a:prstGeom prst="roundRect">
+            <a:avLst>
+              <a:gd name="adj" fmla="val 2535"/>
+            </a:avLst>
+          </a:prstGeom>
+          <a:solidFill>
+            <a:srgbClr val="E7EFFA"/>
+          </a:solidFill>
+          <a:ln/>
+          <a:effectLst>
+            <a:outerShdw sx="100000" sy="100000" kx="0" ky="0" algn="bl" rotWithShape="0" blurRad="88900" dist="25400" dir="5400000">
+              <a:srgbClr val="22303C">
+                <a:alpha val="12000"/>
+              </a:srgbClr>
+            </a:outerShdw>
+          </a:effectLst>
+        </p:spPr>
+      </p:sp>
+      <p:sp>
+        <p:nvSpPr>
+          <p:cNvPr id="7" name="Text 5"/>
+          <p:cNvSpPr/>
+          <p:nvPr/>
+        </p:nvSpPr>
+        <p:spPr>
+          <a:xfrm>
+            <a:off x="7439376" y="2578608"/>
+            <a:ext cx="3965936" cy="457200"/>
+          </a:xfrm>
+          <a:prstGeom prst="rect">
+            <a:avLst/>
+          </a:prstGeom>
+          <a:noFill/>
+          <a:ln/>
+        </p:spPr>
+        <p:txBody>
+          <a:bodyPr wrap="square" lIns="0" tIns="0" rIns="0" bIns="0" rtlCol="0" anchor="ctr"/>
+          <a:lstStyle/>
+          <a:p>
+            <a:pPr indent="0" marL="0">
+              <a:buNone/>
+            </a:pPr>
+            <a:r>
+              <a:rPr lang="en-US" sz="1500" b="1" dirty="0">
+                <a:solidFill>
+                  <a:srgbClr val="1565C0"/>
+                </a:solidFill>
+                <a:latin typeface="Calibri" pitchFamily="34" charset="0"/>
+                <a:ea typeface="Calibri" pitchFamily="34" charset="-122"/>
+                <a:cs typeface="Calibri" pitchFamily="34" charset="-120"/>
+              </a:rPr>
+              <a:t>ANSWER  </a:t>
+            </a:r>
+            <a:pPr indent="0" marL="0">
+              <a:buNone/>
+            </a:pPr>
+            <a:r>
+              <a:rPr lang="en-US" sz="1500" b="1" dirty="0">
+                <a:solidFill>
+                  <a:srgbClr val="1B2A38"/>
+                </a:solidFill>
+                <a:latin typeface="Calibri" pitchFamily="34" charset="0"/>
+                <a:ea typeface="Calibri" pitchFamily="34" charset="-122"/>
+                <a:cs typeface="Calibri" pitchFamily="34" charset="-120"/>
+              </a:rPr>
+              <a:t>B — A dynamic rise/fall on serial testing</a:t>
+            </a:r>
+            <a:endParaRPr lang="en-US" sz="1500" dirty="0"/>
+          </a:p>
+        </p:txBody>
+      </p:sp>
+      <p:sp>
+        <p:nvSpPr>
+          <p:cNvPr id="8" name="Text 6"/>
+          <p:cNvSpPr/>
+          <p:nvPr/>
+        </p:nvSpPr>
+        <p:spPr>
+          <a:xfrm>
+            <a:off x="7439376" y="3127248"/>
+            <a:ext cx="3947648" cy="2377440"/>
+          </a:xfrm>
+          <a:prstGeom prst="rect">
+            <a:avLst/>
+          </a:prstGeom>
+          <a:noFill/>
+          <a:ln/>
+        </p:spPr>
+        <p:txBody>
+          <a:bodyPr wrap="square" lIns="0" tIns="0" rIns="0" bIns="0" rtlCol="0" anchor="t"/>
+          <a:lstStyle/>
+          <a:p>
+            <a:pPr algn="l" indent="0" marL="0">
+              <a:lnSpc>
+                <a:spcPct val="108000"/>
+              </a:lnSpc>
+              <a:buNone/>
+            </a:pPr>
+            <a:r>
+              <a:rPr lang="en-US" sz="1250" dirty="0">
+                <a:solidFill>
+                  <a:srgbClr val="33444F"/>
+                </a:solidFill>
+                <a:latin typeface="Calibri" pitchFamily="34" charset="0"/>
+                <a:ea typeface="Calibri" pitchFamily="34" charset="-122"/>
+                <a:cs typeface="Calibri" pitchFamily="34" charset="-120"/>
+              </a:rPr>
+              <a:t>Acute injury shows a changing pattern around the URL; chronic conditions show stable elevations.</a:t>
+            </a:r>
+            <a:endParaRPr lang="en-US" sz="1250" dirty="0"/>
+          </a:p>
+        </p:txBody>
+      </p:sp>
+      <p:sp>
+        <p:nvSpPr>
+          <p:cNvPr id="9" name="Text 7"/>
+          <p:cNvSpPr/>
+          <p:nvPr/>
+        </p:nvSpPr>
+        <p:spPr>
+          <a:xfrm>
+            <a:off x="566928" y="6473952"/>
+            <a:ext cx="7772400" cy="274320"/>
+          </a:xfrm>
+          <a:prstGeom prst="rect">
+            <a:avLst/>
+          </a:prstGeom>
+          <a:noFill/>
+          <a:ln/>
+        </p:spPr>
+        <p:txBody>
+          <a:bodyPr wrap="square" lIns="0" tIns="0" rIns="0" bIns="0" rtlCol="0" anchor="ctr"/>
+          <a:lstStyle/>
+          <a:p>
+            <a:pPr algn="l" indent="0" marL="0">
+              <a:buNone/>
+            </a:pPr>
+            <a:r>
+              <a:rPr lang="en-US" sz="850" dirty="0">
+                <a:solidFill>
+                  <a:srgbClr val="9AA8B4"/>
+                </a:solidFill>
+                <a:latin typeface="Calibri" pitchFamily="34" charset="0"/>
+                <a:ea typeface="Calibri" pitchFamily="34" charset="-122"/>
+                <a:cs typeface="Calibri" pitchFamily="34" charset="-120"/>
+              </a:rPr>
+              <a:t>Makassed General Hospital  ·  Department of Laboratory Medicine</a:t>
+            </a:r>
+            <a:endParaRPr lang="en-US" sz="850" dirty="0"/>
+          </a:p>
+        </p:txBody>
+      </p:sp>
+      <p:sp>
+        <p:nvSpPr>
+          <p:cNvPr id="10" name="Text 8"/>
+          <p:cNvSpPr/>
+          <p:nvPr/>
+        </p:nvSpPr>
+        <p:spPr>
+          <a:xfrm>
+            <a:off x="9814255" y="6473952"/>
+            <a:ext cx="1828800" cy="274320"/>
+          </a:xfrm>
+          <a:prstGeom prst="rect">
+            <a:avLst/>
+          </a:prstGeom>
+          <a:noFill/>
+          <a:ln/>
+        </p:spPr>
+        <p:txBody>
+          <a:bodyPr wrap="square" lIns="0" tIns="0" rIns="0" bIns="0" rtlCol="0" anchor="ctr"/>
+          <a:lstStyle/>
+          <a:p>
+            <a:pPr algn="r" indent="0" marL="0">
+              <a:buNone/>
+            </a:pPr>
+            <a:r>
+              <a:rPr lang="en-US" sz="850" dirty="0">
+                <a:solidFill>
+                  <a:srgbClr val="9AA8B4"/>
+                </a:solidFill>
+                <a:latin typeface="Calibri" pitchFamily="34" charset="0"/>
+                <a:ea typeface="Calibri" pitchFamily="34" charset="-122"/>
+                <a:cs typeface="Calibri" pitchFamily="34" charset="-120"/>
+              </a:rPr>
+              <a:t>CP Lecture Series</a:t>
+            </a:r>
+            <a:pPr algn="r" indent="0" marL="0">
+              <a:buNone/>
+            </a:pPr>
+            <a:r>
+              <a:rPr lang="en-US" sz="850" dirty="0">
+                <a:solidFill>
+                  <a:srgbClr val="DCE4EC"/>
+                </a:solidFill>
+                <a:latin typeface="Calibri" pitchFamily="34" charset="0"/>
+                <a:ea typeface="Calibri" pitchFamily="34" charset="-122"/>
+                <a:cs typeface="Calibri" pitchFamily="34" charset="-120"/>
+              </a:rPr>
+              <a:t>   ·   </a:t>
+            </a:r>
+            <a:pPr algn="r" indent="0" marL="0">
+              <a:buNone/>
+            </a:pPr>
+            <a:r>
+              <a:rPr lang="en-US" sz="850" b="1" dirty="0">
+                <a:solidFill>
+                  <a:srgbClr val="1565C0"/>
+                </a:solidFill>
+                <a:latin typeface="Calibri" pitchFamily="34" charset="0"/>
+                <a:ea typeface="Calibri" pitchFamily="34" charset="-122"/>
+                <a:cs typeface="Calibri" pitchFamily="34" charset="-120"/>
+              </a:rPr>
+              <a:t>18</a:t>
+            </a:r>
+            <a:endParaRPr lang="en-US" sz="850" dirty="0"/>
+          </a:p>
+        </p:txBody>
+      </p:sp>
+    </p:spTree>
+  </p:cSld>
+  <p:clrMapOvr>
+    <a:masterClrMapping/>
+  </p:clrMapOvr>
+</p:sld>
+</file>
+
+<file path=ppt/slides/slide22.xml><?xml version="1.0" encoding="utf-8"?>
+<p:sld xmlns:a="http://schemas.openxmlformats.org/drawingml/2006/main" xmlns:r="http://schemas.openxmlformats.org/officeDocument/2006/relationships" xmlns:p="http://schemas.openxmlformats.org/presentationml/2006/main">
+  <p:cSld name="Slide 22">
+    <p:bg>
+      <p:bgPr>
+        <a:solidFill>
+          <a:srgbClr val="FFFFFF"/>
+        </a:solidFill>
+      </p:bgPr>
+    </p:bg>
+    <p:spTree>
+      <p:nvGrpSpPr>
+        <p:cNvPr id="1" name=""/>
+        <p:cNvGrpSpPr/>
+        <p:nvPr/>
+      </p:nvGrpSpPr>
+      <p:grpSpPr>
+        <a:xfrm>
+          <a:off x="0" y="0"/>
+          <a:ext cx="0" cy="0"/>
+          <a:chOff x="0" y="0"/>
+          <a:chExt cx="0" cy="0"/>
+        </a:xfrm>
+      </p:grpSpPr>
+      <p:sp>
+        <p:nvSpPr>
+          <p:cNvPr id="2" name="Text 0"/>
+          <p:cNvSpPr/>
+          <p:nvPr/>
+        </p:nvSpPr>
+        <p:spPr>
+          <a:xfrm>
+            <a:off x="566928" y="329184"/>
+            <a:ext cx="10515600" cy="310896"/>
+          </a:xfrm>
+          <a:prstGeom prst="rect">
+            <a:avLst/>
+          </a:prstGeom>
+          <a:noFill/>
+          <a:ln/>
+        </p:spPr>
+        <p:txBody>
+          <a:bodyPr wrap="square" lIns="0" tIns="0" rIns="0" bIns="0" rtlCol="0" anchor="ctr"/>
+          <a:lstStyle/>
+          <a:p>
+            <a:pPr algn="l" indent="0" marL="0">
+              <a:buNone/>
+            </a:pPr>
+            <a:r>
+              <a:rPr lang="en-US" sz="1100" b="1" spc="150" kern="0" dirty="0">
+                <a:solidFill>
+                  <a:srgbClr val="1565C0"/>
+                </a:solidFill>
+                <a:latin typeface="Calibri" pitchFamily="34" charset="0"/>
+                <a:ea typeface="Calibri" pitchFamily="34" charset="-122"/>
+                <a:cs typeface="Calibri" pitchFamily="34" charset="-120"/>
+              </a:rPr>
+              <a:t>CLINICAL CHEMISTRY   ·   BOARD REVIEW  ·  Q2</a:t>
+            </a:r>
+            <a:endParaRPr lang="en-US" sz="1100" dirty="0"/>
+          </a:p>
+        </p:txBody>
+      </p:sp>
+      <p:sp>
+        <p:nvSpPr>
+          <p:cNvPr id="3" name="Text 1"/>
+          <p:cNvSpPr/>
+          <p:nvPr/>
+        </p:nvSpPr>
+        <p:spPr>
+          <a:xfrm>
+            <a:off x="566928" y="713232"/>
+            <a:ext cx="11064240" cy="749808"/>
+          </a:xfrm>
+          <a:prstGeom prst="rect">
+            <a:avLst/>
+          </a:prstGeom>
+          <a:noFill/>
+          <a:ln/>
+        </p:spPr>
+        <p:txBody>
+          <a:bodyPr wrap="square" lIns="0" tIns="0" rIns="0" bIns="0" rtlCol="0" anchor="ctr"/>
+          <a:lstStyle/>
+          <a:p>
+            <a:pPr algn="l" indent="0" marL="0">
+              <a:buNone/>
+            </a:pPr>
+            <a:r>
+              <a:rPr lang="en-US" sz="2600" b="1" dirty="0">
+                <a:solidFill>
+                  <a:srgbClr val="0E3A5F"/>
+                </a:solidFill>
+                <a:latin typeface="Calibri" pitchFamily="34" charset="0"/>
+                <a:ea typeface="Calibri" pitchFamily="34" charset="-122"/>
+                <a:cs typeface="Calibri" pitchFamily="34" charset="-120"/>
+              </a:rPr>
+              <a:t>Board-Style Review</a:t>
+            </a:r>
+            <a:endParaRPr lang="en-US" sz="2600" dirty="0"/>
+          </a:p>
+        </p:txBody>
+      </p:sp>
+      <p:sp>
+        <p:nvSpPr>
+          <p:cNvPr id="4" name="Text 2"/>
+          <p:cNvSpPr/>
+          <p:nvPr/>
+        </p:nvSpPr>
+        <p:spPr>
+          <a:xfrm>
+            <a:off x="566928" y="1417320"/>
+            <a:ext cx="11057839" cy="914400"/>
+          </a:xfrm>
+          <a:prstGeom prst="rect">
+            <a:avLst/>
+          </a:prstGeom>
+          <a:noFill/>
+          <a:ln/>
+        </p:spPr>
+        <p:txBody>
+          <a:bodyPr wrap="square" lIns="0" tIns="0" rIns="0" bIns="0" rtlCol="0" anchor="t"/>
+          <a:lstStyle/>
+          <a:p>
+            <a:pPr algn="l" indent="0" marL="0">
+              <a:lnSpc>
+                <a:spcPct val="105000"/>
+              </a:lnSpc>
+              <a:buNone/>
+            </a:pPr>
+            <a:r>
+              <a:rPr lang="en-US" sz="1450" b="1" dirty="0">
+                <a:solidFill>
+                  <a:srgbClr val="1B2A38"/>
+                </a:solidFill>
+                <a:latin typeface="Calibri" pitchFamily="34" charset="0"/>
+                <a:ea typeface="Calibri" pitchFamily="34" charset="-122"/>
+                <a:cs typeface="Calibri" pitchFamily="34" charset="-120"/>
+              </a:rPr>
+              <a:t>An elevated ALP with a normal GGT most likely originates from:</a:t>
+            </a:r>
+            <a:endParaRPr lang="en-US" sz="1450" dirty="0"/>
+          </a:p>
+        </p:txBody>
+      </p:sp>
+      <p:sp>
+        <p:nvSpPr>
+          <p:cNvPr id="5" name="Text 3"/>
+          <p:cNvSpPr/>
+          <p:nvPr/>
+        </p:nvSpPr>
+        <p:spPr>
+          <a:xfrm>
+            <a:off x="658368" y="2395728"/>
+            <a:ext cx="6192390" cy="3017520"/>
+          </a:xfrm>
+          <a:prstGeom prst="rect">
+            <a:avLst/>
+          </a:prstGeom>
+          <a:noFill/>
+          <a:ln/>
+        </p:spPr>
+        <p:txBody>
+          <a:bodyPr wrap="square" lIns="0" tIns="0" rIns="0" bIns="0" rtlCol="0" anchor="t"/>
+          <a:lstStyle/>
+          <a:p>
+            <a:pPr algn="l" indent="0" marL="0">
+              <a:spcAft>
+                <a:spcPts val="600"/>
+              </a:spcAft>
+              <a:buNone/>
+            </a:pPr>
+            <a:r>
+              <a:rPr lang="en-US" sz="1350" dirty="0">
+                <a:solidFill>
+                  <a:srgbClr val="33444F"/>
+                </a:solidFill>
+                <a:latin typeface="Calibri" pitchFamily="34" charset="0"/>
+                <a:ea typeface="Calibri" pitchFamily="34" charset="-122"/>
+                <a:cs typeface="Calibri" pitchFamily="34" charset="-120"/>
+              </a:rPr>
+              <a:t>A. Bile ducts</a:t>
+            </a:r>
+            <a:endParaRPr lang="en-US" sz="1350" dirty="0"/>
+          </a:p>
+          <a:p>
+            <a:pPr algn="l" indent="0" marL="0">
+              <a:spcAft>
+                <a:spcPts val="600"/>
+              </a:spcAft>
+              <a:buNone/>
+            </a:pPr>
+            <a:r>
+              <a:rPr lang="en-US" sz="1350" dirty="0">
+                <a:solidFill>
+                  <a:srgbClr val="33444F"/>
+                </a:solidFill>
+                <a:latin typeface="Calibri" pitchFamily="34" charset="0"/>
+                <a:ea typeface="Calibri" pitchFamily="34" charset="-122"/>
+                <a:cs typeface="Calibri" pitchFamily="34" charset="-120"/>
+              </a:rPr>
+              <a:t>B. Liver</a:t>
+            </a:r>
+            <a:endParaRPr lang="en-US" sz="1350" dirty="0"/>
+          </a:p>
+          <a:p>
+            <a:pPr algn="l" indent="0" marL="0">
+              <a:spcAft>
+                <a:spcPts val="600"/>
+              </a:spcAft>
+              <a:buNone/>
+            </a:pPr>
+            <a:r>
+              <a:rPr lang="en-US" sz="1350" b="1" dirty="0">
+                <a:solidFill>
+                  <a:srgbClr val="0D4A92"/>
+                </a:solidFill>
+                <a:latin typeface="Calibri" pitchFamily="34" charset="0"/>
+                <a:ea typeface="Calibri" pitchFamily="34" charset="-122"/>
+                <a:cs typeface="Calibri" pitchFamily="34" charset="-120"/>
+              </a:rPr>
+              <a:t>C. Bone (or placenta/intestine)</a:t>
+            </a:r>
+            <a:endParaRPr lang="en-US" sz="1350" dirty="0"/>
+          </a:p>
+          <a:p>
+            <a:pPr algn="l" indent="0" marL="0">
+              <a:spcAft>
+                <a:spcPts val="600"/>
+              </a:spcAft>
+              <a:buNone/>
+            </a:pPr>
+            <a:r>
+              <a:rPr lang="en-US" sz="1350" dirty="0">
+                <a:solidFill>
+                  <a:srgbClr val="33444F"/>
+                </a:solidFill>
+                <a:latin typeface="Calibri" pitchFamily="34" charset="0"/>
+                <a:ea typeface="Calibri" pitchFamily="34" charset="-122"/>
+                <a:cs typeface="Calibri" pitchFamily="34" charset="-120"/>
+              </a:rPr>
+              <a:t>D. Red cells</a:t>
+            </a:r>
+            <a:endParaRPr lang="en-US" sz="1350" dirty="0"/>
+          </a:p>
+          <a:p>
+            <a:pPr algn="l" indent="0" marL="0">
+              <a:spcAft>
+                <a:spcPts val="600"/>
+              </a:spcAft>
+              <a:buNone/>
+            </a:pPr>
+            <a:r>
+              <a:rPr lang="en-US" sz="1350" dirty="0">
+                <a:solidFill>
+                  <a:srgbClr val="33444F"/>
+                </a:solidFill>
+                <a:latin typeface="Calibri" pitchFamily="34" charset="0"/>
+                <a:ea typeface="Calibri" pitchFamily="34" charset="-122"/>
+                <a:cs typeface="Calibri" pitchFamily="34" charset="-120"/>
+              </a:rPr>
+              <a:t>E. Muscle</a:t>
+            </a:r>
+            <a:endParaRPr lang="en-US" sz="1350" dirty="0"/>
+          </a:p>
+        </p:txBody>
+      </p:sp>
+      <p:sp>
+        <p:nvSpPr>
+          <p:cNvPr id="6" name="Shape 4"/>
+          <p:cNvSpPr/>
+          <p:nvPr/>
+        </p:nvSpPr>
+        <p:spPr>
+          <a:xfrm>
+            <a:off x="7201632" y="2395728"/>
+            <a:ext cx="4423136" cy="3246120"/>
+          </a:xfrm>
+          <a:prstGeom prst="roundRect">
+            <a:avLst>
+              <a:gd name="adj" fmla="val 2535"/>
+            </a:avLst>
+          </a:prstGeom>
+          <a:solidFill>
+            <a:srgbClr val="E7EFFA"/>
+          </a:solidFill>
+          <a:ln/>
+          <a:effectLst>
+            <a:outerShdw sx="100000" sy="100000" kx="0" ky="0" algn="bl" rotWithShape="0" blurRad="88900" dist="25400" dir="5400000">
+              <a:srgbClr val="22303C">
+                <a:alpha val="12000"/>
+              </a:srgbClr>
+            </a:outerShdw>
+          </a:effectLst>
+        </p:spPr>
+      </p:sp>
+      <p:sp>
+        <p:nvSpPr>
+          <p:cNvPr id="7" name="Text 5"/>
+          <p:cNvSpPr/>
+          <p:nvPr/>
+        </p:nvSpPr>
+        <p:spPr>
+          <a:xfrm>
+            <a:off x="7439376" y="2578608"/>
+            <a:ext cx="3965936" cy="457200"/>
+          </a:xfrm>
+          <a:prstGeom prst="rect">
+            <a:avLst/>
+          </a:prstGeom>
+          <a:noFill/>
+          <a:ln/>
+        </p:spPr>
+        <p:txBody>
+          <a:bodyPr wrap="square" lIns="0" tIns="0" rIns="0" bIns="0" rtlCol="0" anchor="ctr"/>
+          <a:lstStyle/>
+          <a:p>
+            <a:pPr indent="0" marL="0">
+              <a:buNone/>
+            </a:pPr>
+            <a:r>
+              <a:rPr lang="en-US" sz="1500" b="1" dirty="0">
+                <a:solidFill>
+                  <a:srgbClr val="1565C0"/>
+                </a:solidFill>
+                <a:latin typeface="Calibri" pitchFamily="34" charset="0"/>
+                <a:ea typeface="Calibri" pitchFamily="34" charset="-122"/>
+                <a:cs typeface="Calibri" pitchFamily="34" charset="-120"/>
+              </a:rPr>
+              <a:t>ANSWER  </a:t>
+            </a:r>
+            <a:pPr indent="0" marL="0">
+              <a:buNone/>
+            </a:pPr>
+            <a:r>
+              <a:rPr lang="en-US" sz="1500" b="1" dirty="0">
+                <a:solidFill>
+                  <a:srgbClr val="1B2A38"/>
+                </a:solidFill>
+                <a:latin typeface="Calibri" pitchFamily="34" charset="0"/>
+                <a:ea typeface="Calibri" pitchFamily="34" charset="-122"/>
+                <a:cs typeface="Calibri" pitchFamily="34" charset="-120"/>
+              </a:rPr>
+              <a:t>C — Bone (non-hepatic)</a:t>
+            </a:r>
+            <a:endParaRPr lang="en-US" sz="1500" dirty="0"/>
+          </a:p>
+        </p:txBody>
+      </p:sp>
+      <p:sp>
+        <p:nvSpPr>
+          <p:cNvPr id="8" name="Text 6"/>
+          <p:cNvSpPr/>
+          <p:nvPr/>
+        </p:nvSpPr>
+        <p:spPr>
+          <a:xfrm>
+            <a:off x="7439376" y="3127248"/>
+            <a:ext cx="3947648" cy="2377440"/>
+          </a:xfrm>
+          <a:prstGeom prst="rect">
+            <a:avLst/>
+          </a:prstGeom>
+          <a:noFill/>
+          <a:ln/>
+        </p:spPr>
+        <p:txBody>
+          <a:bodyPr wrap="square" lIns="0" tIns="0" rIns="0" bIns="0" rtlCol="0" anchor="t"/>
+          <a:lstStyle/>
+          <a:p>
+            <a:pPr algn="l" indent="0" marL="0">
+              <a:lnSpc>
+                <a:spcPct val="108000"/>
+              </a:lnSpc>
+              <a:buNone/>
+            </a:pPr>
+            <a:r>
+              <a:rPr lang="en-US" sz="1250" dirty="0">
+                <a:solidFill>
+                  <a:srgbClr val="33444F"/>
+                </a:solidFill>
+                <a:latin typeface="Calibri" pitchFamily="34" charset="0"/>
+                <a:ea typeface="Calibri" pitchFamily="34" charset="-122"/>
+                <a:cs typeface="Calibri" pitchFamily="34" charset="-120"/>
+              </a:rPr>
+              <a:t>GGT confirms a hepatic source of ALP; a normal GGT points to bone, placenta, or intestine.</a:t>
+            </a:r>
+            <a:endParaRPr lang="en-US" sz="1250" dirty="0"/>
+          </a:p>
+        </p:txBody>
+      </p:sp>
+      <p:sp>
+        <p:nvSpPr>
+          <p:cNvPr id="9" name="Text 7"/>
+          <p:cNvSpPr/>
+          <p:nvPr/>
+        </p:nvSpPr>
+        <p:spPr>
+          <a:xfrm>
+            <a:off x="566928" y="6473952"/>
+            <a:ext cx="7772400" cy="274320"/>
+          </a:xfrm>
+          <a:prstGeom prst="rect">
+            <a:avLst/>
+          </a:prstGeom>
+          <a:noFill/>
+          <a:ln/>
+        </p:spPr>
+        <p:txBody>
+          <a:bodyPr wrap="square" lIns="0" tIns="0" rIns="0" bIns="0" rtlCol="0" anchor="ctr"/>
+          <a:lstStyle/>
+          <a:p>
+            <a:pPr algn="l" indent="0" marL="0">
+              <a:buNone/>
+            </a:pPr>
+            <a:r>
+              <a:rPr lang="en-US" sz="850" dirty="0">
+                <a:solidFill>
+                  <a:srgbClr val="9AA8B4"/>
+                </a:solidFill>
+                <a:latin typeface="Calibri" pitchFamily="34" charset="0"/>
+                <a:ea typeface="Calibri" pitchFamily="34" charset="-122"/>
+                <a:cs typeface="Calibri" pitchFamily="34" charset="-120"/>
+              </a:rPr>
+              <a:t>Makassed General Hospital  ·  Department of Laboratory Medicine</a:t>
+            </a:r>
+            <a:endParaRPr lang="en-US" sz="850" dirty="0"/>
+          </a:p>
+        </p:txBody>
+      </p:sp>
+      <p:sp>
+        <p:nvSpPr>
+          <p:cNvPr id="10" name="Text 8"/>
+          <p:cNvSpPr/>
+          <p:nvPr/>
+        </p:nvSpPr>
+        <p:spPr>
+          <a:xfrm>
+            <a:off x="9814255" y="6473952"/>
+            <a:ext cx="1828800" cy="274320"/>
+          </a:xfrm>
+          <a:prstGeom prst="rect">
+            <a:avLst/>
+          </a:prstGeom>
+          <a:noFill/>
+          <a:ln/>
+        </p:spPr>
+        <p:txBody>
+          <a:bodyPr wrap="square" lIns="0" tIns="0" rIns="0" bIns="0" rtlCol="0" anchor="ctr"/>
+          <a:lstStyle/>
+          <a:p>
+            <a:pPr algn="r" indent="0" marL="0">
+              <a:buNone/>
+            </a:pPr>
+            <a:r>
+              <a:rPr lang="en-US" sz="850" dirty="0">
+                <a:solidFill>
+                  <a:srgbClr val="9AA8B4"/>
+                </a:solidFill>
+                <a:latin typeface="Calibri" pitchFamily="34" charset="0"/>
+                <a:ea typeface="Calibri" pitchFamily="34" charset="-122"/>
+                <a:cs typeface="Calibri" pitchFamily="34" charset="-120"/>
+              </a:rPr>
+              <a:t>CP Lecture Series</a:t>
+            </a:r>
+            <a:pPr algn="r" indent="0" marL="0">
+              <a:buNone/>
+            </a:pPr>
+            <a:r>
+              <a:rPr lang="en-US" sz="850" dirty="0">
+                <a:solidFill>
+                  <a:srgbClr val="DCE4EC"/>
+                </a:solidFill>
+                <a:latin typeface="Calibri" pitchFamily="34" charset="0"/>
+                <a:ea typeface="Calibri" pitchFamily="34" charset="-122"/>
+                <a:cs typeface="Calibri" pitchFamily="34" charset="-120"/>
+              </a:rPr>
+              <a:t>   ·   </a:t>
+            </a:r>
+            <a:pPr algn="r" indent="0" marL="0">
+              <a:buNone/>
+            </a:pPr>
+            <a:r>
+              <a:rPr lang="en-US" sz="850" b="1" dirty="0">
+                <a:solidFill>
+                  <a:srgbClr val="1565C0"/>
+                </a:solidFill>
+                <a:latin typeface="Calibri" pitchFamily="34" charset="0"/>
+                <a:ea typeface="Calibri" pitchFamily="34" charset="-122"/>
+                <a:cs typeface="Calibri" pitchFamily="34" charset="-120"/>
+              </a:rPr>
+              <a:t>19</a:t>
+            </a:r>
+            <a:endParaRPr lang="en-US" sz="850" dirty="0"/>
+          </a:p>
+        </p:txBody>
+      </p:sp>
+    </p:spTree>
+  </p:cSld>
+  <p:clrMapOvr>
+    <a:masterClrMapping/>
+  </p:clrMapOvr>
+</p:sld>
+</file>
+
+<file path=ppt/slides/slide23.xml><?xml version="1.0" encoding="utf-8"?>
+<p:sld xmlns:a="http://schemas.openxmlformats.org/drawingml/2006/main" xmlns:r="http://schemas.openxmlformats.org/officeDocument/2006/relationships" xmlns:p="http://schemas.openxmlformats.org/presentationml/2006/main">
+  <p:cSld name="Slide 23">
+    <p:bg>
+      <p:bgPr>
+        <a:solidFill>
+          <a:srgbClr val="FFFFFF"/>
+        </a:solidFill>
+      </p:bgPr>
+    </p:bg>
+    <p:spTree>
+      <p:nvGrpSpPr>
+        <p:cNvPr id="1" name=""/>
+        <p:cNvGrpSpPr/>
+        <p:nvPr/>
+      </p:nvGrpSpPr>
+      <p:grpSpPr>
+        <a:xfrm>
+          <a:off x="0" y="0"/>
+          <a:ext cx="0" cy="0"/>
+          <a:chOff x="0" y="0"/>
+          <a:chExt cx="0" cy="0"/>
+        </a:xfrm>
+      </p:grpSpPr>
+      <p:sp>
+        <p:nvSpPr>
+          <p:cNvPr id="2" name="Text 0"/>
+          <p:cNvSpPr/>
+          <p:nvPr/>
+        </p:nvSpPr>
+        <p:spPr>
+          <a:xfrm>
+            <a:off x="566928" y="329184"/>
+            <a:ext cx="10515600" cy="310896"/>
+          </a:xfrm>
+          <a:prstGeom prst="rect">
+            <a:avLst/>
+          </a:prstGeom>
+          <a:noFill/>
+          <a:ln/>
+        </p:spPr>
+        <p:txBody>
+          <a:bodyPr wrap="square" lIns="0" tIns="0" rIns="0" bIns="0" rtlCol="0" anchor="ctr"/>
+          <a:lstStyle/>
+          <a:p>
+            <a:pPr algn="l" indent="0" marL="0">
+              <a:buNone/>
+            </a:pPr>
+            <a:r>
+              <a:rPr lang="en-US" sz="1100" b="1" spc="150" kern="0" dirty="0">
+                <a:solidFill>
+                  <a:srgbClr val="1565C0"/>
+                </a:solidFill>
+                <a:latin typeface="Calibri" pitchFamily="34" charset="0"/>
+                <a:ea typeface="Calibri" pitchFamily="34" charset="-122"/>
+                <a:cs typeface="Calibri" pitchFamily="34" charset="-120"/>
+              </a:rPr>
+              <a:t>CLINICAL CHEMISTRY   ·   BOARD REVIEW  ·  Q3</a:t>
+            </a:r>
+            <a:endParaRPr lang="en-US" sz="1100" dirty="0"/>
+          </a:p>
+        </p:txBody>
+      </p:sp>
+      <p:sp>
+        <p:nvSpPr>
+          <p:cNvPr id="3" name="Text 1"/>
+          <p:cNvSpPr/>
+          <p:nvPr/>
+        </p:nvSpPr>
+        <p:spPr>
+          <a:xfrm>
+            <a:off x="566928" y="713232"/>
+            <a:ext cx="11064240" cy="749808"/>
+          </a:xfrm>
+          <a:prstGeom prst="rect">
+            <a:avLst/>
+          </a:prstGeom>
+          <a:noFill/>
+          <a:ln/>
+        </p:spPr>
+        <p:txBody>
+          <a:bodyPr wrap="square" lIns="0" tIns="0" rIns="0" bIns="0" rtlCol="0" anchor="ctr"/>
+          <a:lstStyle/>
+          <a:p>
+            <a:pPr algn="l" indent="0" marL="0">
+              <a:buNone/>
+            </a:pPr>
+            <a:r>
+              <a:rPr lang="en-US" sz="2600" b="1" dirty="0">
+                <a:solidFill>
+                  <a:srgbClr val="0E3A5F"/>
+                </a:solidFill>
+                <a:latin typeface="Calibri" pitchFamily="34" charset="0"/>
+                <a:ea typeface="Calibri" pitchFamily="34" charset="-122"/>
+                <a:cs typeface="Calibri" pitchFamily="34" charset="-120"/>
+              </a:rPr>
+              <a:t>Board-Style Review</a:t>
+            </a:r>
+            <a:endParaRPr lang="en-US" sz="2600" dirty="0"/>
+          </a:p>
+        </p:txBody>
+      </p:sp>
+      <p:sp>
+        <p:nvSpPr>
+          <p:cNvPr id="4" name="Text 2"/>
+          <p:cNvSpPr/>
+          <p:nvPr/>
+        </p:nvSpPr>
+        <p:spPr>
+          <a:xfrm>
+            <a:off x="566928" y="1417320"/>
+            <a:ext cx="11057839" cy="914400"/>
+          </a:xfrm>
+          <a:prstGeom prst="rect">
+            <a:avLst/>
+          </a:prstGeom>
+          <a:noFill/>
+          <a:ln/>
+        </p:spPr>
+        <p:txBody>
+          <a:bodyPr wrap="square" lIns="0" tIns="0" rIns="0" bIns="0" rtlCol="0" anchor="t"/>
+          <a:lstStyle/>
+          <a:p>
+            <a:pPr algn="l" indent="0" marL="0">
+              <a:lnSpc>
+                <a:spcPct val="105000"/>
+              </a:lnSpc>
+              <a:buNone/>
+            </a:pPr>
+            <a:r>
+              <a:rPr lang="en-US" sz="1450" b="1" dirty="0">
+                <a:solidFill>
+                  <a:srgbClr val="1B2A38"/>
+                </a:solidFill>
+                <a:latin typeface="Calibri" pitchFamily="34" charset="0"/>
+                <a:ea typeface="Calibri" pitchFamily="34" charset="-122"/>
+                <a:cs typeface="Calibri" pitchFamily="34" charset="-120"/>
+              </a:rPr>
+              <a:t>A drug raises serum creatinine without reducing true GFR. The mechanism is:</a:t>
+            </a:r>
+            <a:endParaRPr lang="en-US" sz="1450" dirty="0"/>
+          </a:p>
+        </p:txBody>
+      </p:sp>
+      <p:sp>
+        <p:nvSpPr>
+          <p:cNvPr id="5" name="Text 3"/>
+          <p:cNvSpPr/>
+          <p:nvPr/>
+        </p:nvSpPr>
+        <p:spPr>
+          <a:xfrm>
+            <a:off x="658368" y="2395728"/>
+            <a:ext cx="6192390" cy="3017520"/>
+          </a:xfrm>
+          <a:prstGeom prst="rect">
+            <a:avLst/>
+          </a:prstGeom>
+          <a:noFill/>
+          <a:ln/>
+        </p:spPr>
+        <p:txBody>
+          <a:bodyPr wrap="square" lIns="0" tIns="0" rIns="0" bIns="0" rtlCol="0" anchor="t"/>
+          <a:lstStyle/>
+          <a:p>
+            <a:pPr algn="l" indent="0" marL="0">
+              <a:spcAft>
+                <a:spcPts val="600"/>
+              </a:spcAft>
+              <a:buNone/>
+            </a:pPr>
+            <a:r>
+              <a:rPr lang="en-US" sz="1350" dirty="0">
+                <a:solidFill>
+                  <a:srgbClr val="33444F"/>
+                </a:solidFill>
+                <a:latin typeface="Calibri" pitchFamily="34" charset="0"/>
+                <a:ea typeface="Calibri" pitchFamily="34" charset="-122"/>
+                <a:cs typeface="Calibri" pitchFamily="34" charset="-120"/>
+              </a:rPr>
+              <a:t>A. Increased muscle breakdown</a:t>
+            </a:r>
+            <a:endParaRPr lang="en-US" sz="1350" dirty="0"/>
+          </a:p>
+          <a:p>
+            <a:pPr algn="l" indent="0" marL="0">
+              <a:spcAft>
+                <a:spcPts val="600"/>
+              </a:spcAft>
+              <a:buNone/>
+            </a:pPr>
+            <a:r>
+              <a:rPr lang="en-US" sz="1350" b="1" dirty="0">
+                <a:solidFill>
+                  <a:srgbClr val="0D4A92"/>
+                </a:solidFill>
+                <a:latin typeface="Calibri" pitchFamily="34" charset="0"/>
+                <a:ea typeface="Calibri" pitchFamily="34" charset="-122"/>
+                <a:cs typeface="Calibri" pitchFamily="34" charset="-120"/>
+              </a:rPr>
+              <a:t>B. Inhibition of tubular creatinine secretion</a:t>
+            </a:r>
+            <a:endParaRPr lang="en-US" sz="1350" dirty="0"/>
+          </a:p>
+          <a:p>
+            <a:pPr algn="l" indent="0" marL="0">
+              <a:spcAft>
+                <a:spcPts val="600"/>
+              </a:spcAft>
+              <a:buNone/>
+            </a:pPr>
+            <a:r>
+              <a:rPr lang="en-US" sz="1350" dirty="0">
+                <a:solidFill>
+                  <a:srgbClr val="33444F"/>
+                </a:solidFill>
+                <a:latin typeface="Calibri" pitchFamily="34" charset="0"/>
+                <a:ea typeface="Calibri" pitchFamily="34" charset="-122"/>
+                <a:cs typeface="Calibri" pitchFamily="34" charset="-120"/>
+              </a:rPr>
+              <a:t>C. Hemoconcentration</a:t>
+            </a:r>
+            <a:endParaRPr lang="en-US" sz="1350" dirty="0"/>
+          </a:p>
+          <a:p>
+            <a:pPr algn="l" indent="0" marL="0">
+              <a:spcAft>
+                <a:spcPts val="600"/>
+              </a:spcAft>
+              <a:buNone/>
+            </a:pPr>
+            <a:r>
+              <a:rPr lang="en-US" sz="1350" dirty="0">
+                <a:solidFill>
+                  <a:srgbClr val="33444F"/>
+                </a:solidFill>
+                <a:latin typeface="Calibri" pitchFamily="34" charset="0"/>
+                <a:ea typeface="Calibri" pitchFamily="34" charset="-122"/>
+                <a:cs typeface="Calibri" pitchFamily="34" charset="-120"/>
+              </a:rPr>
+              <a:t>D. Assay cross-reactivity only</a:t>
+            </a:r>
+            <a:endParaRPr lang="en-US" sz="1350" dirty="0"/>
+          </a:p>
+          <a:p>
+            <a:pPr algn="l" indent="0" marL="0">
+              <a:spcAft>
+                <a:spcPts val="600"/>
+              </a:spcAft>
+              <a:buNone/>
+            </a:pPr>
+            <a:r>
+              <a:rPr lang="en-US" sz="1350" dirty="0">
+                <a:solidFill>
+                  <a:srgbClr val="33444F"/>
+                </a:solidFill>
+                <a:latin typeface="Calibri" pitchFamily="34" charset="0"/>
+                <a:ea typeface="Calibri" pitchFamily="34" charset="-122"/>
+                <a:cs typeface="Calibri" pitchFamily="34" charset="-120"/>
+              </a:rPr>
+              <a:t>E. Increased dietary protein</a:t>
+            </a:r>
+            <a:endParaRPr lang="en-US" sz="1350" dirty="0"/>
+          </a:p>
+        </p:txBody>
+      </p:sp>
+      <p:sp>
+        <p:nvSpPr>
+          <p:cNvPr id="6" name="Shape 4"/>
+          <p:cNvSpPr/>
+          <p:nvPr/>
+        </p:nvSpPr>
+        <p:spPr>
+          <a:xfrm>
+            <a:off x="7201632" y="2395728"/>
+            <a:ext cx="4423136" cy="3246120"/>
+          </a:xfrm>
+          <a:prstGeom prst="roundRect">
+            <a:avLst>
+              <a:gd name="adj" fmla="val 2535"/>
+            </a:avLst>
+          </a:prstGeom>
+          <a:solidFill>
+            <a:srgbClr val="E7EFFA"/>
+          </a:solidFill>
+          <a:ln/>
+          <a:effectLst>
+            <a:outerShdw sx="100000" sy="100000" kx="0" ky="0" algn="bl" rotWithShape="0" blurRad="88900" dist="25400" dir="5400000">
+              <a:srgbClr val="22303C">
+                <a:alpha val="12000"/>
+              </a:srgbClr>
+            </a:outerShdw>
+          </a:effectLst>
+        </p:spPr>
+      </p:sp>
+      <p:sp>
+        <p:nvSpPr>
+          <p:cNvPr id="7" name="Text 5"/>
+          <p:cNvSpPr/>
+          <p:nvPr/>
+        </p:nvSpPr>
+        <p:spPr>
+          <a:xfrm>
+            <a:off x="7439376" y="2578608"/>
+            <a:ext cx="3965936" cy="457200"/>
+          </a:xfrm>
+          <a:prstGeom prst="rect">
+            <a:avLst/>
+          </a:prstGeom>
+          <a:noFill/>
+          <a:ln/>
+        </p:spPr>
+        <p:txBody>
+          <a:bodyPr wrap="square" lIns="0" tIns="0" rIns="0" bIns="0" rtlCol="0" anchor="ctr"/>
+          <a:lstStyle/>
+          <a:p>
+            <a:pPr indent="0" marL="0">
+              <a:buNone/>
+            </a:pPr>
+            <a:r>
+              <a:rPr lang="en-US" sz="1500" b="1" dirty="0">
+                <a:solidFill>
+                  <a:srgbClr val="1565C0"/>
+                </a:solidFill>
+                <a:latin typeface="Calibri" pitchFamily="34" charset="0"/>
+                <a:ea typeface="Calibri" pitchFamily="34" charset="-122"/>
+                <a:cs typeface="Calibri" pitchFamily="34" charset="-120"/>
+              </a:rPr>
+              <a:t>ANSWER  </a:t>
+            </a:r>
+            <a:pPr indent="0" marL="0">
+              <a:buNone/>
+            </a:pPr>
+            <a:r>
+              <a:rPr lang="en-US" sz="1500" b="1" dirty="0">
+                <a:solidFill>
+                  <a:srgbClr val="1B2A38"/>
+                </a:solidFill>
+                <a:latin typeface="Calibri" pitchFamily="34" charset="0"/>
+                <a:ea typeface="Calibri" pitchFamily="34" charset="-122"/>
+                <a:cs typeface="Calibri" pitchFamily="34" charset="-120"/>
+              </a:rPr>
+              <a:t>B — Inhibition of tubular secretion</a:t>
+            </a:r>
+            <a:endParaRPr lang="en-US" sz="1500" dirty="0"/>
+          </a:p>
+        </p:txBody>
+      </p:sp>
+      <p:sp>
+        <p:nvSpPr>
+          <p:cNvPr id="8" name="Text 6"/>
+          <p:cNvSpPr/>
+          <p:nvPr/>
+        </p:nvSpPr>
+        <p:spPr>
+          <a:xfrm>
+            <a:off x="7439376" y="3127248"/>
+            <a:ext cx="3947648" cy="2377440"/>
+          </a:xfrm>
+          <a:prstGeom prst="rect">
+            <a:avLst/>
+          </a:prstGeom>
+          <a:noFill/>
+          <a:ln/>
+        </p:spPr>
+        <p:txBody>
+          <a:bodyPr wrap="square" lIns="0" tIns="0" rIns="0" bIns="0" rtlCol="0" anchor="t"/>
+          <a:lstStyle/>
+          <a:p>
+            <a:pPr algn="l" indent="0" marL="0">
+              <a:lnSpc>
+                <a:spcPct val="108000"/>
+              </a:lnSpc>
+              <a:buNone/>
+            </a:pPr>
+            <a:r>
+              <a:rPr lang="en-US" sz="1250" dirty="0">
+                <a:solidFill>
+                  <a:srgbClr val="33444F"/>
+                </a:solidFill>
+                <a:latin typeface="Calibri" pitchFamily="34" charset="0"/>
+                <a:ea typeface="Calibri" pitchFamily="34" charset="-122"/>
+                <a:cs typeface="Calibri" pitchFamily="34" charset="-120"/>
+              </a:rPr>
+              <a:t>Trimethoprim and cimetidine block tubular creatinine secretion, raising serum creatinine without changing GFR.</a:t>
+            </a:r>
+            <a:endParaRPr lang="en-US" sz="1250" dirty="0"/>
+          </a:p>
+        </p:txBody>
+      </p:sp>
+      <p:sp>
+        <p:nvSpPr>
+          <p:cNvPr id="9" name="Text 7"/>
+          <p:cNvSpPr/>
+          <p:nvPr/>
+        </p:nvSpPr>
+        <p:spPr>
+          <a:xfrm>
+            <a:off x="566928" y="6473952"/>
+            <a:ext cx="7772400" cy="274320"/>
+          </a:xfrm>
+          <a:prstGeom prst="rect">
+            <a:avLst/>
+          </a:prstGeom>
+          <a:noFill/>
+          <a:ln/>
+        </p:spPr>
+        <p:txBody>
+          <a:bodyPr wrap="square" lIns="0" tIns="0" rIns="0" bIns="0" rtlCol="0" anchor="ctr"/>
+          <a:lstStyle/>
+          <a:p>
+            <a:pPr algn="l" indent="0" marL="0">
+              <a:buNone/>
+            </a:pPr>
+            <a:r>
+              <a:rPr lang="en-US" sz="850" dirty="0">
+                <a:solidFill>
+                  <a:srgbClr val="9AA8B4"/>
+                </a:solidFill>
+                <a:latin typeface="Calibri" pitchFamily="34" charset="0"/>
+                <a:ea typeface="Calibri" pitchFamily="34" charset="-122"/>
+                <a:cs typeface="Calibri" pitchFamily="34" charset="-120"/>
+              </a:rPr>
+              <a:t>Makassed General Hospital  ·  Department of Laboratory Medicine</a:t>
+            </a:r>
+            <a:endParaRPr lang="en-US" sz="850" dirty="0"/>
+          </a:p>
+        </p:txBody>
+      </p:sp>
+      <p:sp>
+        <p:nvSpPr>
+          <p:cNvPr id="10" name="Text 8"/>
+          <p:cNvSpPr/>
+          <p:nvPr/>
+        </p:nvSpPr>
+        <p:spPr>
+          <a:xfrm>
+            <a:off x="9814255" y="6473952"/>
+            <a:ext cx="1828800" cy="274320"/>
+          </a:xfrm>
+          <a:prstGeom prst="rect">
+            <a:avLst/>
+          </a:prstGeom>
+          <a:noFill/>
+          <a:ln/>
+        </p:spPr>
+        <p:txBody>
+          <a:bodyPr wrap="square" lIns="0" tIns="0" rIns="0" bIns="0" rtlCol="0" anchor="ctr"/>
+          <a:lstStyle/>
+          <a:p>
+            <a:pPr algn="r" indent="0" marL="0">
+              <a:buNone/>
+            </a:pPr>
+            <a:r>
+              <a:rPr lang="en-US" sz="850" dirty="0">
+                <a:solidFill>
+                  <a:srgbClr val="9AA8B4"/>
+                </a:solidFill>
+                <a:latin typeface="Calibri" pitchFamily="34" charset="0"/>
+                <a:ea typeface="Calibri" pitchFamily="34" charset="-122"/>
+                <a:cs typeface="Calibri" pitchFamily="34" charset="-120"/>
+              </a:rPr>
+              <a:t>CP Lecture Series</a:t>
+            </a:r>
+            <a:pPr algn="r" indent="0" marL="0">
+              <a:buNone/>
+            </a:pPr>
+            <a:r>
+              <a:rPr lang="en-US" sz="850" dirty="0">
+                <a:solidFill>
+                  <a:srgbClr val="DCE4EC"/>
+                </a:solidFill>
+                <a:latin typeface="Calibri" pitchFamily="34" charset="0"/>
+                <a:ea typeface="Calibri" pitchFamily="34" charset="-122"/>
+                <a:cs typeface="Calibri" pitchFamily="34" charset="-120"/>
+              </a:rPr>
+              <a:t>   ·   </a:t>
+            </a:r>
+            <a:pPr algn="r" indent="0" marL="0">
+              <a:buNone/>
+            </a:pPr>
+            <a:r>
+              <a:rPr lang="en-US" sz="850" b="1" dirty="0">
+                <a:solidFill>
+                  <a:srgbClr val="1565C0"/>
+                </a:solidFill>
+                <a:latin typeface="Calibri" pitchFamily="34" charset="0"/>
+                <a:ea typeface="Calibri" pitchFamily="34" charset="-122"/>
+                <a:cs typeface="Calibri" pitchFamily="34" charset="-120"/>
+              </a:rPr>
+              <a:t>20</a:t>
+            </a:r>
+            <a:endParaRPr lang="en-US" sz="850" dirty="0"/>
+          </a:p>
+        </p:txBody>
+      </p:sp>
+    </p:spTree>
+  </p:cSld>
+  <p:clrMapOvr>
+    <a:masterClrMapping/>
+  </p:clrMapOvr>
+</p:sld>
+</file>
+
+<file path=ppt/slides/slide24.xml><?xml version="1.0" encoding="utf-8"?>
+<p:sld xmlns:a="http://schemas.openxmlformats.org/drawingml/2006/main" xmlns:r="http://schemas.openxmlformats.org/officeDocument/2006/relationships" xmlns:p="http://schemas.openxmlformats.org/presentationml/2006/main">
+  <p:cSld name="Slide 24">
+    <p:bg>
+      <p:bgPr>
+        <a:solidFill>
+          <a:srgbClr val="FFFFFF"/>
+        </a:solidFill>
+      </p:bgPr>
+    </p:bg>
+    <p:spTree>
+      <p:nvGrpSpPr>
+        <p:cNvPr id="1" name=""/>
+        <p:cNvGrpSpPr/>
+        <p:nvPr/>
+      </p:nvGrpSpPr>
+      <p:grpSpPr>
+        <a:xfrm>
+          <a:off x="0" y="0"/>
+          <a:ext cx="0" cy="0"/>
+          <a:chOff x="0" y="0"/>
+          <a:chExt cx="0" cy="0"/>
+        </a:xfrm>
+      </p:grpSpPr>
+      <p:sp>
+        <p:nvSpPr>
+          <p:cNvPr id="2" name="Text 0"/>
+          <p:cNvSpPr/>
+          <p:nvPr/>
+        </p:nvSpPr>
+        <p:spPr>
+          <a:xfrm>
+            <a:off x="566928" y="329184"/>
+            <a:ext cx="10515600" cy="310896"/>
+          </a:xfrm>
+          <a:prstGeom prst="rect">
+            <a:avLst/>
+          </a:prstGeom>
+          <a:noFill/>
+          <a:ln/>
+        </p:spPr>
+        <p:txBody>
+          <a:bodyPr wrap="square" lIns="0" tIns="0" rIns="0" bIns="0" rtlCol="0" anchor="ctr"/>
+          <a:lstStyle/>
+          <a:p>
+            <a:pPr algn="l" indent="0" marL="0">
+              <a:buNone/>
+            </a:pPr>
+            <a:r>
+              <a:rPr lang="en-US" sz="1100" b="1" spc="150" kern="0" dirty="0">
+                <a:solidFill>
+                  <a:srgbClr val="1565C0"/>
+                </a:solidFill>
+                <a:latin typeface="Calibri" pitchFamily="34" charset="0"/>
+                <a:ea typeface="Calibri" pitchFamily="34" charset="-122"/>
+                <a:cs typeface="Calibri" pitchFamily="34" charset="-120"/>
+              </a:rPr>
+              <a:t>CLINICAL CHEMISTRY   ·   BOARD REVIEW  ·  Q4</a:t>
+            </a:r>
+            <a:endParaRPr lang="en-US" sz="1100" dirty="0"/>
+          </a:p>
+        </p:txBody>
+      </p:sp>
+      <p:sp>
+        <p:nvSpPr>
+          <p:cNvPr id="3" name="Text 1"/>
+          <p:cNvSpPr/>
+          <p:nvPr/>
+        </p:nvSpPr>
+        <p:spPr>
+          <a:xfrm>
+            <a:off x="566928" y="713232"/>
+            <a:ext cx="11064240" cy="749808"/>
+          </a:xfrm>
+          <a:prstGeom prst="rect">
+            <a:avLst/>
+          </a:prstGeom>
+          <a:noFill/>
+          <a:ln/>
+        </p:spPr>
+        <p:txBody>
+          <a:bodyPr wrap="square" lIns="0" tIns="0" rIns="0" bIns="0" rtlCol="0" anchor="ctr"/>
+          <a:lstStyle/>
+          <a:p>
+            <a:pPr algn="l" indent="0" marL="0">
+              <a:buNone/>
+            </a:pPr>
+            <a:r>
+              <a:rPr lang="en-US" sz="2600" b="1" dirty="0">
+                <a:solidFill>
+                  <a:srgbClr val="0E3A5F"/>
+                </a:solidFill>
+                <a:latin typeface="Calibri" pitchFamily="34" charset="0"/>
+                <a:ea typeface="Calibri" pitchFamily="34" charset="-122"/>
+                <a:cs typeface="Calibri" pitchFamily="34" charset="-120"/>
+              </a:rPr>
+              <a:t>Board-Style Review</a:t>
+            </a:r>
+            <a:endParaRPr lang="en-US" sz="2600" dirty="0"/>
+          </a:p>
+        </p:txBody>
+      </p:sp>
+      <p:sp>
+        <p:nvSpPr>
+          <p:cNvPr id="4" name="Text 2"/>
+          <p:cNvSpPr/>
+          <p:nvPr/>
+        </p:nvSpPr>
+        <p:spPr>
+          <a:xfrm>
+            <a:off x="566928" y="1417320"/>
+            <a:ext cx="11057839" cy="914400"/>
+          </a:xfrm>
+          <a:prstGeom prst="rect">
+            <a:avLst/>
+          </a:prstGeom>
+          <a:noFill/>
+          <a:ln/>
+        </p:spPr>
+        <p:txBody>
+          <a:bodyPr wrap="square" lIns="0" tIns="0" rIns="0" bIns="0" rtlCol="0" anchor="t"/>
+          <a:lstStyle/>
+          <a:p>
+            <a:pPr algn="l" indent="0" marL="0">
+              <a:lnSpc>
+                <a:spcPct val="105000"/>
+              </a:lnSpc>
+              <a:buNone/>
+            </a:pPr>
+            <a:r>
+              <a:rPr lang="en-US" sz="1450" b="1" dirty="0">
+                <a:solidFill>
+                  <a:srgbClr val="1B2A38"/>
+                </a:solidFill>
+                <a:latin typeface="Calibri" pitchFamily="34" charset="0"/>
+                <a:ea typeface="Calibri" pitchFamily="34" charset="-122"/>
+                <a:cs typeface="Calibri" pitchFamily="34" charset="-120"/>
+              </a:rPr>
+              <a:t>Which finding best supports a PRE-renal cause of acute kidney injury?</a:t>
+            </a:r>
+            <a:endParaRPr lang="en-US" sz="1450" dirty="0"/>
+          </a:p>
+        </p:txBody>
+      </p:sp>
+      <p:sp>
+        <p:nvSpPr>
+          <p:cNvPr id="5" name="Text 3"/>
+          <p:cNvSpPr/>
+          <p:nvPr/>
+        </p:nvSpPr>
+        <p:spPr>
+          <a:xfrm>
+            <a:off x="658368" y="2395728"/>
+            <a:ext cx="6192390" cy="3017520"/>
+          </a:xfrm>
+          <a:prstGeom prst="rect">
+            <a:avLst/>
+          </a:prstGeom>
+          <a:noFill/>
+          <a:ln/>
+        </p:spPr>
+        <p:txBody>
+          <a:bodyPr wrap="square" lIns="0" tIns="0" rIns="0" bIns="0" rtlCol="0" anchor="t"/>
+          <a:lstStyle/>
+          <a:p>
+            <a:pPr algn="l" indent="0" marL="0">
+              <a:spcAft>
+                <a:spcPts val="600"/>
+              </a:spcAft>
+              <a:buNone/>
+            </a:pPr>
+            <a:r>
+              <a:rPr lang="en-US" sz="1350" dirty="0">
+                <a:solidFill>
+                  <a:srgbClr val="33444F"/>
+                </a:solidFill>
+                <a:latin typeface="Calibri" pitchFamily="34" charset="0"/>
+                <a:ea typeface="Calibri" pitchFamily="34" charset="-122"/>
+                <a:cs typeface="Calibri" pitchFamily="34" charset="-120"/>
+              </a:rPr>
+              <a:t>A. Muddy-brown granular casts</a:t>
+            </a:r>
+            <a:endParaRPr lang="en-US" sz="1350" dirty="0"/>
+          </a:p>
+          <a:p>
+            <a:pPr algn="l" indent="0" marL="0">
+              <a:spcAft>
+                <a:spcPts val="600"/>
+              </a:spcAft>
+              <a:buNone/>
+            </a:pPr>
+            <a:r>
+              <a:rPr lang="en-US" sz="1350" dirty="0">
+                <a:solidFill>
+                  <a:srgbClr val="33444F"/>
+                </a:solidFill>
+                <a:latin typeface="Calibri" pitchFamily="34" charset="0"/>
+                <a:ea typeface="Calibri" pitchFamily="34" charset="-122"/>
+                <a:cs typeface="Calibri" pitchFamily="34" charset="-120"/>
+              </a:rPr>
+              <a:t>B. FeNa &amp;gt; 2%</a:t>
+            </a:r>
+            <a:endParaRPr lang="en-US" sz="1350" dirty="0"/>
+          </a:p>
+          <a:p>
+            <a:pPr algn="l" indent="0" marL="0">
+              <a:spcAft>
+                <a:spcPts val="600"/>
+              </a:spcAft>
+              <a:buNone/>
+            </a:pPr>
+            <a:r>
+              <a:rPr lang="en-US" sz="1350" b="1" dirty="0">
+                <a:solidFill>
+                  <a:srgbClr val="0D4A92"/>
+                </a:solidFill>
+                <a:latin typeface="Calibri" pitchFamily="34" charset="0"/>
+                <a:ea typeface="Calibri" pitchFamily="34" charset="-122"/>
+                <a:cs typeface="Calibri" pitchFamily="34" charset="-120"/>
+              </a:rPr>
+              <a:t>C. BUN:creatinine &amp;gt; 20:1 with bland urine</a:t>
+            </a:r>
+            <a:endParaRPr lang="en-US" sz="1350" dirty="0"/>
+          </a:p>
+          <a:p>
+            <a:pPr algn="l" indent="0" marL="0">
+              <a:spcAft>
+                <a:spcPts val="600"/>
+              </a:spcAft>
+              <a:buNone/>
+            </a:pPr>
+            <a:r>
+              <a:rPr lang="en-US" sz="1350" dirty="0">
+                <a:solidFill>
+                  <a:srgbClr val="33444F"/>
+                </a:solidFill>
+                <a:latin typeface="Calibri" pitchFamily="34" charset="0"/>
+                <a:ea typeface="Calibri" pitchFamily="34" charset="-122"/>
+                <a:cs typeface="Calibri" pitchFamily="34" charset="-120"/>
+              </a:rPr>
+              <a:t>D. Hydronephrosis on imaging</a:t>
+            </a:r>
+            <a:endParaRPr lang="en-US" sz="1350" dirty="0"/>
+          </a:p>
+          <a:p>
+            <a:pPr algn="l" indent="0" marL="0">
+              <a:spcAft>
+                <a:spcPts val="600"/>
+              </a:spcAft>
+              <a:buNone/>
+            </a:pPr>
+            <a:r>
+              <a:rPr lang="en-US" sz="1350" dirty="0">
+                <a:solidFill>
+                  <a:srgbClr val="33444F"/>
+                </a:solidFill>
+                <a:latin typeface="Calibri" pitchFamily="34" charset="0"/>
+                <a:ea typeface="Calibri" pitchFamily="34" charset="-122"/>
+                <a:cs typeface="Calibri" pitchFamily="34" charset="-120"/>
+              </a:rPr>
+              <a:t>E. Eosinophiluria</a:t>
+            </a:r>
+            <a:endParaRPr lang="en-US" sz="1350" dirty="0"/>
+          </a:p>
+        </p:txBody>
+      </p:sp>
+      <p:sp>
+        <p:nvSpPr>
+          <p:cNvPr id="6" name="Shape 4"/>
+          <p:cNvSpPr/>
+          <p:nvPr/>
+        </p:nvSpPr>
+        <p:spPr>
+          <a:xfrm>
+            <a:off x="7201632" y="2395728"/>
+            <a:ext cx="4423136" cy="3246120"/>
+          </a:xfrm>
+          <a:prstGeom prst="roundRect">
+            <a:avLst>
+              <a:gd name="adj" fmla="val 2535"/>
+            </a:avLst>
+          </a:prstGeom>
+          <a:solidFill>
+            <a:srgbClr val="E7EFFA"/>
+          </a:solidFill>
+          <a:ln/>
+          <a:effectLst>
+            <a:outerShdw sx="100000" sy="100000" kx="0" ky="0" algn="bl" rotWithShape="0" blurRad="88900" dist="25400" dir="5400000">
+              <a:srgbClr val="22303C">
+                <a:alpha val="12000"/>
+              </a:srgbClr>
+            </a:outerShdw>
+          </a:effectLst>
+        </p:spPr>
+      </p:sp>
+      <p:sp>
+        <p:nvSpPr>
+          <p:cNvPr id="7" name="Text 5"/>
+          <p:cNvSpPr/>
+          <p:nvPr/>
+        </p:nvSpPr>
+        <p:spPr>
+          <a:xfrm>
+            <a:off x="7439376" y="2578608"/>
+            <a:ext cx="3965936" cy="457200"/>
+          </a:xfrm>
+          <a:prstGeom prst="rect">
+            <a:avLst/>
+          </a:prstGeom>
+          <a:noFill/>
+          <a:ln/>
+        </p:spPr>
+        <p:txBody>
+          <a:bodyPr wrap="square" lIns="0" tIns="0" rIns="0" bIns="0" rtlCol="0" anchor="ctr"/>
+          <a:lstStyle/>
+          <a:p>
+            <a:pPr indent="0" marL="0">
+              <a:buNone/>
+            </a:pPr>
+            <a:r>
+              <a:rPr lang="en-US" sz="1500" b="1" dirty="0">
+                <a:solidFill>
+                  <a:srgbClr val="1565C0"/>
+                </a:solidFill>
+                <a:latin typeface="Calibri" pitchFamily="34" charset="0"/>
+                <a:ea typeface="Calibri" pitchFamily="34" charset="-122"/>
+                <a:cs typeface="Calibri" pitchFamily="34" charset="-120"/>
+              </a:rPr>
+              <a:t>ANSWER  </a:t>
+            </a:r>
+            <a:pPr indent="0" marL="0">
+              <a:buNone/>
+            </a:pPr>
+            <a:r>
+              <a:rPr lang="en-US" sz="1500" b="1" dirty="0">
+                <a:solidFill>
+                  <a:srgbClr val="1B2A38"/>
+                </a:solidFill>
+                <a:latin typeface="Calibri" pitchFamily="34" charset="0"/>
+                <a:ea typeface="Calibri" pitchFamily="34" charset="-122"/>
+                <a:cs typeface="Calibri" pitchFamily="34" charset="-120"/>
+              </a:rPr>
+              <a:t>C — BUN:Cr &amp;gt; 20:1 with bland urine</a:t>
+            </a:r>
+            <a:endParaRPr lang="en-US" sz="1500" dirty="0"/>
+          </a:p>
+        </p:txBody>
+      </p:sp>
+      <p:sp>
+        <p:nvSpPr>
+          <p:cNvPr id="8" name="Text 6"/>
+          <p:cNvSpPr/>
+          <p:nvPr/>
+        </p:nvSpPr>
+        <p:spPr>
+          <a:xfrm>
+            <a:off x="7439376" y="3127248"/>
+            <a:ext cx="3947648" cy="2377440"/>
+          </a:xfrm>
+          <a:prstGeom prst="rect">
+            <a:avLst/>
+          </a:prstGeom>
+          <a:noFill/>
+          <a:ln/>
+        </p:spPr>
+        <p:txBody>
+          <a:bodyPr wrap="square" lIns="0" tIns="0" rIns="0" bIns="0" rtlCol="0" anchor="t"/>
+          <a:lstStyle/>
+          <a:p>
+            <a:pPr algn="l" indent="0" marL="0">
+              <a:lnSpc>
+                <a:spcPct val="108000"/>
+              </a:lnSpc>
+              <a:buNone/>
+            </a:pPr>
+            <a:r>
+              <a:rPr lang="en-US" sz="1250" dirty="0">
+                <a:solidFill>
+                  <a:srgbClr val="33444F"/>
+                </a:solidFill>
+                <a:latin typeface="Calibri" pitchFamily="34" charset="0"/>
+                <a:ea typeface="Calibri" pitchFamily="34" charset="-122"/>
+                <a:cs typeface="Calibri" pitchFamily="34" charset="-120"/>
+              </a:rPr>
+              <a:t>Pre-renal azotemia shows a high BUN:creatinine ratio, low FeNa, and bland urine; muddy-brown casts and high FeNa indicate ATN.</a:t>
+            </a:r>
+            <a:endParaRPr lang="en-US" sz="1250" dirty="0"/>
+          </a:p>
+        </p:txBody>
+      </p:sp>
+      <p:sp>
+        <p:nvSpPr>
+          <p:cNvPr id="9" name="Text 7"/>
+          <p:cNvSpPr/>
+          <p:nvPr/>
+        </p:nvSpPr>
+        <p:spPr>
+          <a:xfrm>
+            <a:off x="566928" y="6473952"/>
+            <a:ext cx="7772400" cy="274320"/>
+          </a:xfrm>
+          <a:prstGeom prst="rect">
+            <a:avLst/>
+          </a:prstGeom>
+          <a:noFill/>
+          <a:ln/>
+        </p:spPr>
+        <p:txBody>
+          <a:bodyPr wrap="square" lIns="0" tIns="0" rIns="0" bIns="0" rtlCol="0" anchor="ctr"/>
+          <a:lstStyle/>
+          <a:p>
+            <a:pPr algn="l" indent="0" marL="0">
+              <a:buNone/>
+            </a:pPr>
+            <a:r>
+              <a:rPr lang="en-US" sz="850" dirty="0">
+                <a:solidFill>
+                  <a:srgbClr val="9AA8B4"/>
+                </a:solidFill>
+                <a:latin typeface="Calibri" pitchFamily="34" charset="0"/>
+                <a:ea typeface="Calibri" pitchFamily="34" charset="-122"/>
+                <a:cs typeface="Calibri" pitchFamily="34" charset="-120"/>
+              </a:rPr>
+              <a:t>Makassed General Hospital  ·  Department of Laboratory Medicine</a:t>
+            </a:r>
+            <a:endParaRPr lang="en-US" sz="850" dirty="0"/>
+          </a:p>
+        </p:txBody>
+      </p:sp>
+      <p:sp>
+        <p:nvSpPr>
+          <p:cNvPr id="10" name="Text 8"/>
+          <p:cNvSpPr/>
+          <p:nvPr/>
+        </p:nvSpPr>
+        <p:spPr>
+          <a:xfrm>
+            <a:off x="9814255" y="6473952"/>
+            <a:ext cx="1828800" cy="274320"/>
+          </a:xfrm>
+          <a:prstGeom prst="rect">
+            <a:avLst/>
+          </a:prstGeom>
+          <a:noFill/>
+          <a:ln/>
+        </p:spPr>
+        <p:txBody>
+          <a:bodyPr wrap="square" lIns="0" tIns="0" rIns="0" bIns="0" rtlCol="0" anchor="ctr"/>
+          <a:lstStyle/>
+          <a:p>
+            <a:pPr algn="r" indent="0" marL="0">
+              <a:buNone/>
+            </a:pPr>
+            <a:r>
+              <a:rPr lang="en-US" sz="850" dirty="0">
+                <a:solidFill>
+                  <a:srgbClr val="9AA8B4"/>
+                </a:solidFill>
+                <a:latin typeface="Calibri" pitchFamily="34" charset="0"/>
+                <a:ea typeface="Calibri" pitchFamily="34" charset="-122"/>
+                <a:cs typeface="Calibri" pitchFamily="34" charset="-120"/>
+              </a:rPr>
+              <a:t>CP Lecture Series</a:t>
+            </a:r>
+            <a:pPr algn="r" indent="0" marL="0">
+              <a:buNone/>
+            </a:pPr>
+            <a:r>
+              <a:rPr lang="en-US" sz="850" dirty="0">
+                <a:solidFill>
+                  <a:srgbClr val="DCE4EC"/>
+                </a:solidFill>
+                <a:latin typeface="Calibri" pitchFamily="34" charset="0"/>
+                <a:ea typeface="Calibri" pitchFamily="34" charset="-122"/>
+                <a:cs typeface="Calibri" pitchFamily="34" charset="-120"/>
+              </a:rPr>
+              <a:t>   ·   </a:t>
+            </a:r>
+            <a:pPr algn="r" indent="0" marL="0">
+              <a:buNone/>
+            </a:pPr>
+            <a:r>
+              <a:rPr lang="en-US" sz="850" b="1" dirty="0">
+                <a:solidFill>
+                  <a:srgbClr val="1565C0"/>
+                </a:solidFill>
+                <a:latin typeface="Calibri" pitchFamily="34" charset="0"/>
+                <a:ea typeface="Calibri" pitchFamily="34" charset="-122"/>
+                <a:cs typeface="Calibri" pitchFamily="34" charset="-120"/>
+              </a:rPr>
+              <a:t>21</a:t>
+            </a:r>
+            <a:endParaRPr lang="en-US" sz="850" dirty="0"/>
+          </a:p>
+        </p:txBody>
+      </p:sp>
+    </p:spTree>
+  </p:cSld>
+  <p:clrMapOvr>
+    <a:masterClrMapping/>
+  </p:clrMapOvr>
+</p:sld>
+</file>
+
+<file path=ppt/slides/slide25.xml><?xml version="1.0" encoding="utf-8"?>
+<p:sld xmlns:a="http://schemas.openxmlformats.org/drawingml/2006/main" xmlns:r="http://schemas.openxmlformats.org/officeDocument/2006/relationships" xmlns:p="http://schemas.openxmlformats.org/presentationml/2006/main">
+  <p:cSld name="Slide 25">
+    <p:bg>
+      <p:bgPr>
+        <a:solidFill>
+          <a:srgbClr val="0A2A45"/>
+        </a:solidFill>
+      </p:bgPr>
+    </p:bg>
+    <p:spTree>
+      <p:nvGrpSpPr>
+        <p:cNvPr id="1" name=""/>
+        <p:cNvGrpSpPr/>
+        <p:nvPr/>
+      </p:nvGrpSpPr>
+      <p:grpSpPr>
+        <a:xfrm>
+          <a:off x="0" y="0"/>
+          <a:ext cx="0" cy="0"/>
+          <a:chOff x="0" y="0"/>
+          <a:chExt cx="0" cy="0"/>
+        </a:xfrm>
+      </p:grpSpPr>
+      <p:sp>
+        <p:nvSpPr>
+          <p:cNvPr id="2" name="Text 0"/>
+          <p:cNvSpPr/>
+          <p:nvPr/>
+        </p:nvSpPr>
+        <p:spPr>
+          <a:xfrm>
+            <a:off x="566928" y="329184"/>
+            <a:ext cx="10058400" cy="310896"/>
+          </a:xfrm>
+          <a:prstGeom prst="rect">
+            <a:avLst/>
+          </a:prstGeom>
+          <a:noFill/>
+          <a:ln/>
+        </p:spPr>
+        <p:txBody>
+          <a:bodyPr wrap="square" lIns="0" tIns="0" rIns="0" bIns="0" rtlCol="0" anchor="ctr"/>
+          <a:lstStyle/>
+          <a:p>
+            <a:pPr indent="0" marL="0">
+              <a:buNone/>
+            </a:pPr>
+            <a:r>
+              <a:rPr lang="en-US" sz="1100" b="1" spc="150" kern="0" dirty="0">
+                <a:solidFill>
+                  <a:srgbClr val="1565C0"/>
+                </a:solidFill>
+                <a:latin typeface="Calibri" pitchFamily="34" charset="0"/>
+                <a:ea typeface="Calibri" pitchFamily="34" charset="-122"/>
+                <a:cs typeface="Calibri" pitchFamily="34" charset="-120"/>
+              </a:rPr>
+              <a:t>CLINICAL CHEMISTRY</a:t>
+            </a:r>
+            <a:endParaRPr lang="en-US" sz="1100" dirty="0"/>
+          </a:p>
+        </p:txBody>
+      </p:sp>
+      <p:sp>
+        <p:nvSpPr>
+          <p:cNvPr id="3" name="Text 1"/>
+          <p:cNvSpPr/>
+          <p:nvPr/>
+        </p:nvSpPr>
+        <p:spPr>
+          <a:xfrm>
+            <a:off x="566928" y="676656"/>
+            <a:ext cx="10972800" cy="749808"/>
+          </a:xfrm>
+          <a:prstGeom prst="rect">
+            <a:avLst/>
+          </a:prstGeom>
+          <a:noFill/>
+          <a:ln/>
+        </p:spPr>
+        <p:txBody>
+          <a:bodyPr wrap="square" lIns="0" tIns="0" rIns="0" bIns="0" rtlCol="0" anchor="ctr"/>
+          <a:lstStyle/>
+          <a:p>
+            <a:pPr indent="0" marL="0">
+              <a:buNone/>
+            </a:pPr>
+            <a:r>
+              <a:rPr lang="en-US" sz="3000" b="1" dirty="0">
+                <a:solidFill>
+                  <a:srgbClr val="FFFFFF"/>
+                </a:solidFill>
+                <a:latin typeface="Calibri" pitchFamily="34" charset="0"/>
+                <a:ea typeface="Calibri" pitchFamily="34" charset="-122"/>
+                <a:cs typeface="Calibri" pitchFamily="34" charset="-120"/>
+              </a:rPr>
+              <a:t>Key Take-Home Points</a:t>
+            </a:r>
+            <a:endParaRPr lang="en-US" sz="3000" dirty="0"/>
+          </a:p>
+        </p:txBody>
+      </p:sp>
+      <p:sp>
+        <p:nvSpPr>
+          <p:cNvPr id="4" name="Shape 2"/>
+          <p:cNvSpPr/>
+          <p:nvPr/>
+        </p:nvSpPr>
+        <p:spPr>
+          <a:xfrm>
+            <a:off x="566928" y="1517904"/>
+            <a:ext cx="11057839" cy="841248"/>
+          </a:xfrm>
+          <a:prstGeom prst="roundRect">
+            <a:avLst>
+              <a:gd name="adj" fmla="val 7609"/>
+            </a:avLst>
+          </a:prstGeom>
+          <a:solidFill>
+            <a:srgbClr val="143651"/>
+          </a:solidFill>
+          <a:ln/>
+        </p:spPr>
+      </p:sp>
+      <p:sp>
+        <p:nvSpPr>
+          <p:cNvPr id="5" name="Shape 3"/>
+          <p:cNvSpPr/>
+          <p:nvPr/>
+        </p:nvSpPr>
+        <p:spPr>
+          <a:xfrm>
+            <a:off x="749808" y="1755648"/>
+            <a:ext cx="365760" cy="365760"/>
+          </a:xfrm>
+          <a:prstGeom prst="ellipse">
+            <a:avLst/>
+          </a:prstGeom>
+          <a:solidFill>
+            <a:srgbClr val="1565C0"/>
+          </a:solidFill>
+          <a:ln/>
+          <a:effectLst>
+            <a:outerShdw sx="100000" sy="100000" kx="0" ky="0" algn="bl" rotWithShape="0" blurRad="88900" dist="25400" dir="5400000">
+              <a:srgbClr val="22303C">
+                <a:alpha val="12000"/>
+              </a:srgbClr>
+            </a:outerShdw>
+          </a:effectLst>
+        </p:spPr>
+      </p:sp>
+      <p:sp>
+        <p:nvSpPr>
+          <p:cNvPr id="6" name="Text 4"/>
+          <p:cNvSpPr/>
+          <p:nvPr/>
+        </p:nvSpPr>
+        <p:spPr>
+          <a:xfrm>
+            <a:off x="749808" y="1755648"/>
+            <a:ext cx="365760" cy="365760"/>
+          </a:xfrm>
+          <a:prstGeom prst="rect">
+            <a:avLst/>
+          </a:prstGeom>
+          <a:noFill/>
+          <a:ln/>
+        </p:spPr>
+        <p:txBody>
+          <a:bodyPr wrap="square" lIns="0" tIns="0" rIns="0" bIns="0" rtlCol="0" anchor="ctr"/>
+          <a:lstStyle/>
+          <a:p>
+            <a:pPr algn="ctr" indent="0" marL="0">
+              <a:buNone/>
+            </a:pPr>
+            <a:r>
+              <a:rPr lang="en-US" sz="1500" b="1" dirty="0">
+                <a:solidFill>
+                  <a:srgbClr val="FFFFFF"/>
+                </a:solidFill>
+                <a:latin typeface="Calibri" pitchFamily="34" charset="0"/>
+                <a:ea typeface="Calibri" pitchFamily="34" charset="-122"/>
+                <a:cs typeface="Calibri" pitchFamily="34" charset="-120"/>
+              </a:rPr>
+              <a:t>1</a:t>
+            </a:r>
+            <a:endParaRPr lang="en-US" sz="1500" dirty="0"/>
+          </a:p>
+        </p:txBody>
+      </p:sp>
+      <p:sp>
+        <p:nvSpPr>
+          <p:cNvPr id="7" name="Text 5"/>
+          <p:cNvSpPr/>
+          <p:nvPr/>
+        </p:nvSpPr>
+        <p:spPr>
+          <a:xfrm>
+            <a:off x="1280160" y="1517904"/>
+            <a:ext cx="10143439" cy="841248"/>
+          </a:xfrm>
+          <a:prstGeom prst="rect">
+            <a:avLst/>
+          </a:prstGeom>
+          <a:noFill/>
+          <a:ln/>
+        </p:spPr>
+        <p:txBody>
+          <a:bodyPr wrap="square" lIns="0" tIns="0" rIns="0" bIns="0" rtlCol="0" anchor="ctr"/>
+          <a:lstStyle/>
+          <a:p>
+            <a:pPr algn="l" indent="0" marL="0">
+              <a:buNone/>
+            </a:pPr>
+            <a:r>
+              <a:rPr lang="en-US" sz="1350" dirty="0">
+                <a:solidFill>
+                  <a:srgbClr val="E7EEF4"/>
+                </a:solidFill>
+                <a:latin typeface="Calibri" pitchFamily="34" charset="0"/>
+                <a:ea typeface="Calibri" pitchFamily="34" charset="-122"/>
+                <a:cs typeface="Calibri" pitchFamily="34" charset="-120"/>
+              </a:rPr>
+              <a:t>Creatinine rises late; use eGFR (race-free CKD-EPI) and cystatin C when creatinine is unreliable; know KDIGO AKI.</a:t>
+            </a:r>
+            <a:endParaRPr lang="en-US" sz="1350" dirty="0"/>
+          </a:p>
+        </p:txBody>
+      </p:sp>
+      <p:sp>
+        <p:nvSpPr>
+          <p:cNvPr id="8" name="Shape 6"/>
+          <p:cNvSpPr/>
+          <p:nvPr/>
+        </p:nvSpPr>
+        <p:spPr>
+          <a:xfrm>
+            <a:off x="566928" y="2505456"/>
+            <a:ext cx="11057839" cy="841248"/>
+          </a:xfrm>
+          <a:prstGeom prst="roundRect">
+            <a:avLst>
+              <a:gd name="adj" fmla="val 7609"/>
+            </a:avLst>
+          </a:prstGeom>
+          <a:solidFill>
+            <a:srgbClr val="143651"/>
+          </a:solidFill>
+          <a:ln/>
+        </p:spPr>
+      </p:sp>
+      <p:sp>
+        <p:nvSpPr>
+          <p:cNvPr id="9" name="Shape 7"/>
+          <p:cNvSpPr/>
+          <p:nvPr/>
+        </p:nvSpPr>
+        <p:spPr>
+          <a:xfrm>
+            <a:off x="749808" y="2743200"/>
+            <a:ext cx="365760" cy="365760"/>
+          </a:xfrm>
+          <a:prstGeom prst="ellipse">
+            <a:avLst/>
+          </a:prstGeom>
+          <a:solidFill>
+            <a:srgbClr val="1565C0"/>
+          </a:solidFill>
+          <a:ln/>
+          <a:effectLst>
+            <a:outerShdw sx="100000" sy="100000" kx="0" ky="0" algn="bl" rotWithShape="0" blurRad="88900" dist="25400" dir="5400000">
+              <a:srgbClr val="22303C">
+                <a:alpha val="12000"/>
+              </a:srgbClr>
+            </a:outerShdw>
+          </a:effectLst>
+        </p:spPr>
+      </p:sp>
+      <p:sp>
+        <p:nvSpPr>
+          <p:cNvPr id="10" name="Text 8"/>
+          <p:cNvSpPr/>
+          <p:nvPr/>
+        </p:nvSpPr>
+        <p:spPr>
+          <a:xfrm>
+            <a:off x="749808" y="2743200"/>
+            <a:ext cx="365760" cy="365760"/>
+          </a:xfrm>
+          <a:prstGeom prst="rect">
+            <a:avLst/>
+          </a:prstGeom>
+          <a:noFill/>
+          <a:ln/>
+        </p:spPr>
+        <p:txBody>
+          <a:bodyPr wrap="square" lIns="0" tIns="0" rIns="0" bIns="0" rtlCol="0" anchor="ctr"/>
+          <a:lstStyle/>
+          <a:p>
+            <a:pPr algn="ctr" indent="0" marL="0">
+              <a:buNone/>
+            </a:pPr>
+            <a:r>
+              <a:rPr lang="en-US" sz="1500" b="1" dirty="0">
+                <a:solidFill>
+                  <a:srgbClr val="FFFFFF"/>
+                </a:solidFill>
+                <a:latin typeface="Calibri" pitchFamily="34" charset="0"/>
+                <a:ea typeface="Calibri" pitchFamily="34" charset="-122"/>
+                <a:cs typeface="Calibri" pitchFamily="34" charset="-120"/>
+              </a:rPr>
+              <a:t>2</a:t>
+            </a:r>
+            <a:endParaRPr lang="en-US" sz="1500" dirty="0"/>
+          </a:p>
+        </p:txBody>
+      </p:sp>
+      <p:sp>
+        <p:nvSpPr>
+          <p:cNvPr id="11" name="Text 9"/>
+          <p:cNvSpPr/>
+          <p:nvPr/>
+        </p:nvSpPr>
+        <p:spPr>
+          <a:xfrm>
+            <a:off x="1280160" y="2505456"/>
+            <a:ext cx="10143439" cy="841248"/>
+          </a:xfrm>
+          <a:prstGeom prst="rect">
+            <a:avLst/>
+          </a:prstGeom>
+          <a:noFill/>
+          <a:ln/>
+        </p:spPr>
+        <p:txBody>
+          <a:bodyPr wrap="square" lIns="0" tIns="0" rIns="0" bIns="0" rtlCol="0" anchor="ctr"/>
+          <a:lstStyle/>
+          <a:p>
+            <a:pPr algn="l" indent="0" marL="0">
+              <a:buNone/>
+            </a:pPr>
+            <a:r>
+              <a:rPr lang="en-US" sz="1350" dirty="0">
+                <a:solidFill>
+                  <a:srgbClr val="E7EEF4"/>
+                </a:solidFill>
+                <a:latin typeface="Calibri" pitchFamily="34" charset="0"/>
+                <a:ea typeface="Calibri" pitchFamily="34" charset="-122"/>
+                <a:cs typeface="Calibri" pitchFamily="34" charset="-120"/>
+              </a:rPr>
+              <a:t>Read LFTs as a pattern and separate injury (ALT/AST/ALP) from function (albumin, PT/INR, bilirubin); GGT localizes a high ALP.</a:t>
+            </a:r>
+            <a:endParaRPr lang="en-US" sz="1350" dirty="0"/>
+          </a:p>
+        </p:txBody>
+      </p:sp>
+      <p:sp>
+        <p:nvSpPr>
+          <p:cNvPr id="12" name="Shape 10"/>
+          <p:cNvSpPr/>
+          <p:nvPr/>
+        </p:nvSpPr>
+        <p:spPr>
+          <a:xfrm>
+            <a:off x="566928" y="3493008"/>
+            <a:ext cx="11057839" cy="841248"/>
+          </a:xfrm>
+          <a:prstGeom prst="roundRect">
+            <a:avLst>
+              <a:gd name="adj" fmla="val 7609"/>
+            </a:avLst>
+          </a:prstGeom>
+          <a:solidFill>
+            <a:srgbClr val="143651"/>
+          </a:solidFill>
+          <a:ln/>
+        </p:spPr>
+      </p:sp>
+      <p:sp>
+        <p:nvSpPr>
+          <p:cNvPr id="13" name="Shape 11"/>
+          <p:cNvSpPr/>
+          <p:nvPr/>
+        </p:nvSpPr>
+        <p:spPr>
+          <a:xfrm>
+            <a:off x="749808" y="3730752"/>
+            <a:ext cx="365760" cy="365760"/>
+          </a:xfrm>
+          <a:prstGeom prst="ellipse">
+            <a:avLst/>
+          </a:prstGeom>
+          <a:solidFill>
+            <a:srgbClr val="1565C0"/>
+          </a:solidFill>
+          <a:ln/>
+          <a:effectLst>
+            <a:outerShdw sx="100000" sy="100000" kx="0" ky="0" algn="bl" rotWithShape="0" blurRad="88900" dist="25400" dir="5400000">
+              <a:srgbClr val="22303C">
+                <a:alpha val="12000"/>
+              </a:srgbClr>
+            </a:outerShdw>
+          </a:effectLst>
+        </p:spPr>
+      </p:sp>
+      <p:sp>
+        <p:nvSpPr>
+          <p:cNvPr id="14" name="Text 12"/>
+          <p:cNvSpPr/>
+          <p:nvPr/>
+        </p:nvSpPr>
+        <p:spPr>
+          <a:xfrm>
+            <a:off x="749808" y="3730752"/>
+            <a:ext cx="365760" cy="365760"/>
+          </a:xfrm>
+          <a:prstGeom prst="rect">
+            <a:avLst/>
+          </a:prstGeom>
+          <a:noFill/>
+          <a:ln/>
+        </p:spPr>
+        <p:txBody>
+          <a:bodyPr wrap="square" lIns="0" tIns="0" rIns="0" bIns="0" rtlCol="0" anchor="ctr"/>
+          <a:lstStyle/>
+          <a:p>
+            <a:pPr algn="ctr" indent="0" marL="0">
+              <a:buNone/>
+            </a:pPr>
+            <a:r>
+              <a:rPr lang="en-US" sz="1500" b="1" dirty="0">
+                <a:solidFill>
+                  <a:srgbClr val="FFFFFF"/>
+                </a:solidFill>
+                <a:latin typeface="Calibri" pitchFamily="34" charset="0"/>
+                <a:ea typeface="Calibri" pitchFamily="34" charset="-122"/>
+                <a:cs typeface="Calibri" pitchFamily="34" charset="-120"/>
+              </a:rPr>
+              <a:t>3</a:t>
+            </a:r>
+            <a:endParaRPr lang="en-US" sz="1500" dirty="0"/>
+          </a:p>
+        </p:txBody>
+      </p:sp>
+      <p:sp>
+        <p:nvSpPr>
+          <p:cNvPr id="15" name="Text 13"/>
+          <p:cNvSpPr/>
+          <p:nvPr/>
+        </p:nvSpPr>
+        <p:spPr>
+          <a:xfrm>
+            <a:off x="1280160" y="3493008"/>
+            <a:ext cx="10143439" cy="841248"/>
+          </a:xfrm>
+          <a:prstGeom prst="rect">
+            <a:avLst/>
+          </a:prstGeom>
+          <a:noFill/>
+          <a:ln/>
+        </p:spPr>
+        <p:txBody>
+          <a:bodyPr wrap="square" lIns="0" tIns="0" rIns="0" bIns="0" rtlCol="0" anchor="ctr"/>
+          <a:lstStyle/>
+          <a:p>
+            <a:pPr algn="l" indent="0" marL="0">
+              <a:buNone/>
+            </a:pPr>
+            <a:r>
+              <a:rPr lang="en-US" sz="1350" dirty="0">
+                <a:solidFill>
+                  <a:srgbClr val="E7EEF4"/>
+                </a:solidFill>
+                <a:latin typeface="Calibri" pitchFamily="34" charset="0"/>
+                <a:ea typeface="Calibri" pitchFamily="34" charset="-122"/>
+                <a:cs typeface="Calibri" pitchFamily="34" charset="-120"/>
+              </a:rPr>
+              <a:t>High-sensitivity troponin: the serial delta defines acute injury; stable elevation = chronic.</a:t>
+            </a:r>
+            <a:endParaRPr lang="en-US" sz="1350" dirty="0"/>
+          </a:p>
+        </p:txBody>
+      </p:sp>
+      <p:sp>
+        <p:nvSpPr>
+          <p:cNvPr id="16" name="Shape 14"/>
+          <p:cNvSpPr/>
+          <p:nvPr/>
+        </p:nvSpPr>
+        <p:spPr>
+          <a:xfrm>
+            <a:off x="566928" y="4480560"/>
+            <a:ext cx="11057839" cy="841248"/>
+          </a:xfrm>
+          <a:prstGeom prst="roundRect">
+            <a:avLst>
+              <a:gd name="adj" fmla="val 7609"/>
+            </a:avLst>
+          </a:prstGeom>
+          <a:solidFill>
+            <a:srgbClr val="143651"/>
+          </a:solidFill>
+          <a:ln/>
+        </p:spPr>
+      </p:sp>
+      <p:sp>
+        <p:nvSpPr>
+          <p:cNvPr id="17" name="Shape 15"/>
+          <p:cNvSpPr/>
+          <p:nvPr/>
+        </p:nvSpPr>
+        <p:spPr>
+          <a:xfrm>
+            <a:off x="749808" y="4718304"/>
+            <a:ext cx="365760" cy="365760"/>
+          </a:xfrm>
+          <a:prstGeom prst="ellipse">
+            <a:avLst/>
+          </a:prstGeom>
+          <a:solidFill>
+            <a:srgbClr val="1565C0"/>
+          </a:solidFill>
+          <a:ln/>
+          <a:effectLst>
+            <a:outerShdw sx="100000" sy="100000" kx="0" ky="0" algn="bl" rotWithShape="0" blurRad="88900" dist="25400" dir="5400000">
+              <a:srgbClr val="22303C">
+                <a:alpha val="12000"/>
+              </a:srgbClr>
+            </a:outerShdw>
+          </a:effectLst>
+        </p:spPr>
+      </p:sp>
+      <p:sp>
+        <p:nvSpPr>
+          <p:cNvPr id="18" name="Text 16"/>
+          <p:cNvSpPr/>
+          <p:nvPr/>
+        </p:nvSpPr>
+        <p:spPr>
+          <a:xfrm>
+            <a:off x="749808" y="4718304"/>
+            <a:ext cx="365760" cy="365760"/>
+          </a:xfrm>
+          <a:prstGeom prst="rect">
+            <a:avLst/>
+          </a:prstGeom>
+          <a:noFill/>
+          <a:ln/>
+        </p:spPr>
+        <p:txBody>
+          <a:bodyPr wrap="square" lIns="0" tIns="0" rIns="0" bIns="0" rtlCol="0" anchor="ctr"/>
+          <a:lstStyle/>
+          <a:p>
+            <a:pPr algn="ctr" indent="0" marL="0">
+              <a:buNone/>
+            </a:pPr>
+            <a:r>
+              <a:rPr lang="en-US" sz="1500" b="1" dirty="0">
+                <a:solidFill>
+                  <a:srgbClr val="FFFFFF"/>
+                </a:solidFill>
+                <a:latin typeface="Calibri" pitchFamily="34" charset="0"/>
+                <a:ea typeface="Calibri" pitchFamily="34" charset="-122"/>
+                <a:cs typeface="Calibri" pitchFamily="34" charset="-120"/>
+              </a:rPr>
+              <a:t>4</a:t>
+            </a:r>
+            <a:endParaRPr lang="en-US" sz="1500" dirty="0"/>
+          </a:p>
+        </p:txBody>
+      </p:sp>
+      <p:sp>
+        <p:nvSpPr>
+          <p:cNvPr id="19" name="Text 17"/>
+          <p:cNvSpPr/>
+          <p:nvPr/>
+        </p:nvSpPr>
+        <p:spPr>
+          <a:xfrm>
+            <a:off x="1280160" y="4480560"/>
+            <a:ext cx="10143439" cy="841248"/>
+          </a:xfrm>
+          <a:prstGeom prst="rect">
+            <a:avLst/>
+          </a:prstGeom>
+          <a:noFill/>
+          <a:ln/>
+        </p:spPr>
+        <p:txBody>
+          <a:bodyPr wrap="square" lIns="0" tIns="0" rIns="0" bIns="0" rtlCol="0" anchor="ctr"/>
+          <a:lstStyle/>
+          <a:p>
+            <a:pPr algn="l" indent="0" marL="0">
+              <a:buNone/>
+            </a:pPr>
+            <a:r>
+              <a:rPr lang="en-US" sz="1350" dirty="0">
+                <a:solidFill>
+                  <a:srgbClr val="E7EEF4"/>
+                </a:solidFill>
+                <a:latin typeface="Calibri" pitchFamily="34" charset="0"/>
+                <a:ea typeface="Calibri" pitchFamily="34" charset="-122"/>
+                <a:cs typeface="Calibri" pitchFamily="34" charset="-120"/>
+              </a:rPr>
+              <a:t>Use BNP/NT-proBNP mainly to rule out heart failure; adjust for age, renal function, obesity.</a:t>
+            </a:r>
+            <a:endParaRPr lang="en-US" sz="1350" dirty="0"/>
+          </a:p>
+        </p:txBody>
+      </p:sp>
+      <p:sp>
+        <p:nvSpPr>
+          <p:cNvPr id="20" name="Shape 18"/>
+          <p:cNvSpPr/>
+          <p:nvPr/>
+        </p:nvSpPr>
+        <p:spPr>
+          <a:xfrm>
+            <a:off x="566928" y="5468112"/>
+            <a:ext cx="11057839" cy="841248"/>
+          </a:xfrm>
+          <a:prstGeom prst="roundRect">
+            <a:avLst>
+              <a:gd name="adj" fmla="val 7609"/>
+            </a:avLst>
+          </a:prstGeom>
+          <a:solidFill>
+            <a:srgbClr val="143651"/>
+          </a:solidFill>
+          <a:ln/>
+        </p:spPr>
+      </p:sp>
+      <p:sp>
+        <p:nvSpPr>
+          <p:cNvPr id="21" name="Shape 19"/>
+          <p:cNvSpPr/>
+          <p:nvPr/>
+        </p:nvSpPr>
+        <p:spPr>
+          <a:xfrm>
+            <a:off x="749808" y="5705856"/>
+            <a:ext cx="365760" cy="365760"/>
+          </a:xfrm>
+          <a:prstGeom prst="ellipse">
+            <a:avLst/>
+          </a:prstGeom>
+          <a:solidFill>
+            <a:srgbClr val="1565C0"/>
+          </a:solidFill>
+          <a:ln/>
+          <a:effectLst>
+            <a:outerShdw sx="100000" sy="100000" kx="0" ky="0" algn="bl" rotWithShape="0" blurRad="88900" dist="25400" dir="5400000">
+              <a:srgbClr val="22303C">
+                <a:alpha val="12000"/>
+              </a:srgbClr>
+            </a:outerShdw>
+          </a:effectLst>
+        </p:spPr>
+      </p:sp>
+      <p:sp>
+        <p:nvSpPr>
+          <p:cNvPr id="22" name="Text 20"/>
+          <p:cNvSpPr/>
+          <p:nvPr/>
+        </p:nvSpPr>
+        <p:spPr>
+          <a:xfrm>
+            <a:off x="749808" y="5705856"/>
+            <a:ext cx="365760" cy="365760"/>
+          </a:xfrm>
+          <a:prstGeom prst="rect">
+            <a:avLst/>
+          </a:prstGeom>
+          <a:noFill/>
+          <a:ln/>
+        </p:spPr>
+        <p:txBody>
+          <a:bodyPr wrap="square" lIns="0" tIns="0" rIns="0" bIns="0" rtlCol="0" anchor="ctr"/>
+          <a:lstStyle/>
+          <a:p>
+            <a:pPr algn="ctr" indent="0" marL="0">
+              <a:buNone/>
+            </a:pPr>
+            <a:r>
+              <a:rPr lang="en-US" sz="1500" b="1" dirty="0">
+                <a:solidFill>
+                  <a:srgbClr val="FFFFFF"/>
+                </a:solidFill>
+                <a:latin typeface="Calibri" pitchFamily="34" charset="0"/>
+                <a:ea typeface="Calibri" pitchFamily="34" charset="-122"/>
+                <a:cs typeface="Calibri" pitchFamily="34" charset="-120"/>
+              </a:rPr>
+              <a:t>5</a:t>
+            </a:r>
+            <a:endParaRPr lang="en-US" sz="1500" dirty="0"/>
+          </a:p>
+        </p:txBody>
+      </p:sp>
+      <p:sp>
+        <p:nvSpPr>
+          <p:cNvPr id="23" name="Text 21"/>
+          <p:cNvSpPr/>
+          <p:nvPr/>
+        </p:nvSpPr>
+        <p:spPr>
+          <a:xfrm>
+            <a:off x="1280160" y="5468112"/>
+            <a:ext cx="10143439" cy="841248"/>
+          </a:xfrm>
+          <a:prstGeom prst="rect">
+            <a:avLst/>
+          </a:prstGeom>
+          <a:noFill/>
+          <a:ln/>
+        </p:spPr>
+        <p:txBody>
+          <a:bodyPr wrap="square" lIns="0" tIns="0" rIns="0" bIns="0" rtlCol="0" anchor="ctr"/>
+          <a:lstStyle/>
+          <a:p>
+            <a:pPr algn="l" indent="0" marL="0">
+              <a:buNone/>
+            </a:pPr>
+            <a:r>
+              <a:rPr lang="en-US" sz="1350" dirty="0">
+                <a:solidFill>
+                  <a:srgbClr val="E7EEF4"/>
+                </a:solidFill>
+                <a:latin typeface="Calibri" pitchFamily="34" charset="0"/>
+                <a:ea typeface="Calibri" pitchFamily="34" charset="-122"/>
+                <a:cs typeface="Calibri" pitchFamily="34" charset="-120"/>
+              </a:rPr>
+              <a:t>Suspect macro-analytes (macro-CK, macroprolactin) for isolated, clinically silent elevations.</a:t>
+            </a:r>
+            <a:endParaRPr lang="en-US" sz="1350" dirty="0"/>
+          </a:p>
+        </p:txBody>
+      </p:sp>
+      <p:sp>
+        <p:nvSpPr>
+          <p:cNvPr id="24" name="Text 22"/>
+          <p:cNvSpPr/>
+          <p:nvPr/>
+        </p:nvSpPr>
+        <p:spPr>
+          <a:xfrm>
+            <a:off x="566928" y="6473952"/>
+            <a:ext cx="8229600" cy="274320"/>
+          </a:xfrm>
+          <a:prstGeom prst="rect">
+            <a:avLst/>
+          </a:prstGeom>
+          <a:noFill/>
+          <a:ln/>
+        </p:spPr>
+        <p:txBody>
+          <a:bodyPr wrap="square" lIns="0" tIns="0" rIns="0" bIns="0" rtlCol="0" anchor="ctr"/>
+          <a:lstStyle/>
+          <a:p>
+            <a:pPr indent="0" marL="0">
+              <a:buNone/>
+            </a:pPr>
+            <a:r>
+              <a:rPr lang="en-US" sz="850" dirty="0">
+                <a:solidFill>
+                  <a:srgbClr val="5E7488"/>
+                </a:solidFill>
+                <a:latin typeface="Calibri" pitchFamily="34" charset="0"/>
+                <a:ea typeface="Calibri" pitchFamily="34" charset="-122"/>
+                <a:cs typeface="Calibri" pitchFamily="34" charset="-120"/>
+              </a:rPr>
+              <a:t>Makassed General Hospital  ·  Department of Laboratory Medicine</a:t>
+            </a:r>
+            <a:endParaRPr lang="en-US" sz="850" dirty="0"/>
+          </a:p>
+        </p:txBody>
+      </p:sp>
+      <p:sp>
+        <p:nvSpPr>
+          <p:cNvPr id="25" name="Text 23"/>
+          <p:cNvSpPr/>
+          <p:nvPr/>
+        </p:nvSpPr>
+        <p:spPr>
+          <a:xfrm>
+            <a:off x="11002975" y="6473952"/>
+            <a:ext cx="640080" cy="274320"/>
+          </a:xfrm>
+          <a:prstGeom prst="rect">
+            <a:avLst/>
+          </a:prstGeom>
+          <a:noFill/>
+          <a:ln/>
+        </p:spPr>
+        <p:txBody>
+          <a:bodyPr wrap="square" lIns="0" tIns="0" rIns="0" bIns="0" rtlCol="0" anchor="ctr"/>
+          <a:lstStyle/>
+          <a:p>
+            <a:pPr algn="r" indent="0" marL="0">
+              <a:buNone/>
+            </a:pPr>
+            <a:r>
+              <a:rPr lang="en-US" sz="850" b="1" dirty="0">
+                <a:solidFill>
+                  <a:srgbClr val="1565C0"/>
+                </a:solidFill>
+                <a:latin typeface="Calibri" pitchFamily="34" charset="0"/>
+                <a:ea typeface="Calibri" pitchFamily="34" charset="-122"/>
+                <a:cs typeface="Calibri" pitchFamily="34" charset="-120"/>
+              </a:rPr>
+              <a:t>22</a:t>
+            </a:r>
+            <a:endParaRPr lang="en-US" sz="850" dirty="0"/>
+          </a:p>
+        </p:txBody>
+      </p:sp>
+    </p:spTree>
+  </p:cSld>
+  <p:clrMapOvr>
+    <a:masterClrMapping/>
+  </p:clrMapOvr>
+</p:sld>
+</file>
+
+<file path=ppt/slides/slide26.xml><?xml version="1.0" encoding="utf-8"?>
+<p:sld xmlns:a="http://schemas.openxmlformats.org/drawingml/2006/main" xmlns:r="http://schemas.openxmlformats.org/officeDocument/2006/relationships" xmlns:p="http://schemas.openxmlformats.org/presentationml/2006/main">
+  <p:cSld name="Slide 26">
+    <p:bg>
+      <p:bgPr>
+        <a:solidFill>
+          <a:srgbClr val="FFFFFF"/>
+        </a:solidFill>
+      </p:bgPr>
+    </p:bg>
+    <p:spTree>
+      <p:nvGrpSpPr>
+        <p:cNvPr id="1" name=""/>
+        <p:cNvGrpSpPr/>
+        <p:nvPr/>
+      </p:nvGrpSpPr>
+      <p:grpSpPr>
+        <a:xfrm>
+          <a:off x="0" y="0"/>
+          <a:ext cx="0" cy="0"/>
+          <a:chOff x="0" y="0"/>
+          <a:chExt cx="0" cy="0"/>
+        </a:xfrm>
+      </p:grpSpPr>
+      <p:sp>
+        <p:nvSpPr>
+          <p:cNvPr id="2" name="Text 0"/>
+          <p:cNvSpPr/>
+          <p:nvPr/>
+        </p:nvSpPr>
+        <p:spPr>
+          <a:xfrm>
+            <a:off x="566928" y="329184"/>
+            <a:ext cx="10515600" cy="310896"/>
+          </a:xfrm>
+          <a:prstGeom prst="rect">
+            <a:avLst/>
+          </a:prstGeom>
+          <a:noFill/>
+          <a:ln/>
+        </p:spPr>
+        <p:txBody>
+          <a:bodyPr wrap="square" lIns="0" tIns="0" rIns="0" bIns="0" rtlCol="0" anchor="ctr"/>
+          <a:lstStyle/>
+          <a:p>
+            <a:pPr algn="l" indent="0" marL="0">
+              <a:buNone/>
+            </a:pPr>
+            <a:r>
+              <a:rPr lang="en-US" sz="1100" b="1" spc="150" kern="0" dirty="0">
+                <a:solidFill>
+                  <a:srgbClr val="1565C0"/>
+                </a:solidFill>
+                <a:latin typeface="Calibri" pitchFamily="34" charset="0"/>
+                <a:ea typeface="Calibri" pitchFamily="34" charset="-122"/>
+                <a:cs typeface="Calibri" pitchFamily="34" charset="-120"/>
+              </a:rPr>
               <a:t>CLINICAL CHEMISTRY   ·   REFERENCES &amp; FURTHER READING</a:t>
             </a:r>
             <a:endParaRPr lang="en-US" sz="1100" dirty="0"/>
@@ -9243,7 +11934,7 @@
                 <a:ea typeface="Calibri" pitchFamily="34" charset="-122"/>
                 <a:cs typeface="Calibri" pitchFamily="34" charset="-120"/>
               </a:rPr>
-              <a:t>3.   Inker LA, et al. New creatinine- and cystatin C-based equations (race-free). N Engl J Med. 2021.</a:t>
+              <a:t>3.   Inker LA, et al. New creatinine- and cystatin C-based eGFR equations. N Engl J Med. 2021.</a:t>
             </a:r>
             <a:endParaRPr lang="en-US" sz="1150" dirty="0"/>
           </a:p>
@@ -9263,7 +11954,7 @@
                 <a:ea typeface="Calibri" pitchFamily="34" charset="-122"/>
                 <a:cs typeface="Calibri" pitchFamily="34" charset="-120"/>
               </a:rPr>
-              <a:t>4.   CLSI C56: Hemolysis, Icterus, and Lipemia/Turbidity Indices.</a:t>
+              <a:t>4.   KDIGO Clinical Practice Guideline for Acute Kidney Injury.</a:t>
             </a:r>
             <a:endParaRPr lang="en-US" sz="1150" dirty="0"/>
           </a:p>
@@ -9369,7 +12060,7 @@
                 <a:ea typeface="Calibri" pitchFamily="34" charset="-122"/>
                 <a:cs typeface="Calibri" pitchFamily="34" charset="-120"/>
               </a:rPr>
-              <a:t>18</a:t>
+              <a:t>23</a:t>
             </a:r>
             <a:endParaRPr lang="en-US" sz="850" dirty="0"/>
           </a:p>
@@ -9747,7 +12438,7 @@
                 <a:ea typeface="Calibri" pitchFamily="34" charset="-122"/>
                 <a:cs typeface="Calibri" pitchFamily="34" charset="-120"/>
               </a:rPr>
-              <a:t>Read hepatocellular versus cholestatic LFT patterns.</a:t>
+              <a:t>Apply the KDIGO concept of acute kidney injury.</a:t>
             </a:r>
             <a:endParaRPr lang="en-US" sz="1350" dirty="0"/>
           </a:p>
@@ -9881,7 +12572,7 @@
                 <a:ea typeface="Calibri" pitchFamily="34" charset="-122"/>
                 <a:cs typeface="Calibri" pitchFamily="34" charset="-120"/>
               </a:rPr>
-              <a:t>Apply high-sensitivity troponin kinetics to acute coronary evaluation.</a:t>
+              <a:t>Read hepatocellular versus cholestatic LFT patterns and synthetic function.</a:t>
             </a:r>
             <a:endParaRPr lang="en-US" sz="1350" dirty="0"/>
           </a:p>
@@ -10015,7 +12706,7 @@
                 <a:ea typeface="Calibri" pitchFamily="34" charset="-122"/>
                 <a:cs typeface="Calibri" pitchFamily="34" charset="-120"/>
               </a:rPr>
-              <a:t>Use natriuretic peptides appropriately.</a:t>
+              <a:t>Apply high-sensitivity troponin kinetics and the universal MI definition.</a:t>
             </a:r>
             <a:endParaRPr lang="en-US" sz="1350" dirty="0"/>
           </a:p>
@@ -10149,7 +12840,7 @@
                 <a:ea typeface="Calibri" pitchFamily="34" charset="-122"/>
                 <a:cs typeface="Calibri" pitchFamily="34" charset="-120"/>
               </a:rPr>
-              <a:t>Recognize analyte-specific interferences (macro-CK, macroprolactin).</a:t>
+              <a:t>Use natriuretic peptides appropriately.</a:t>
             </a:r>
             <a:endParaRPr lang="en-US" sz="1350" dirty="0"/>
           </a:p>
@@ -10283,7 +12974,7 @@
                 <a:ea typeface="Calibri" pitchFamily="34" charset="-122"/>
                 <a:cs typeface="Calibri" pitchFamily="34" charset="-120"/>
               </a:rPr>
-              <a:t>Identify common biomarker misuse.</a:t>
+              <a:t>Recognize macro-analytes and biomarker misuse.</a:t>
             </a:r>
             <a:endParaRPr lang="en-US" sz="1350" dirty="0"/>
           </a:p>
@@ -10647,7 +13338,7 @@
                 <a:ea typeface="Calibri" pitchFamily="34" charset="-122"/>
                 <a:cs typeface="Calibri" pitchFamily="34" charset="-120"/>
               </a:rPr>
-              <a:t>   —  creatinine, eGFR, cystatin C</a:t>
+              <a:t>   —  creatinine, eGFR, cystatin C, AKI</a:t>
             </a:r>
             <a:endParaRPr lang="en-US" sz="1400" dirty="0"/>
           </a:p>
@@ -10788,7 +13479,7 @@
                 <a:ea typeface="Calibri" pitchFamily="34" charset="-122"/>
                 <a:cs typeface="Calibri" pitchFamily="34" charset="-120"/>
               </a:rPr>
-              <a:t>   —  hepatocellular vs cholestatic</a:t>
+              <a:t>   —  hepatocellular vs cholestatic; function</a:t>
             </a:r>
             <a:endParaRPr lang="en-US" sz="1400" dirty="0"/>
           </a:p>
@@ -11211,7 +13902,7 @@
                 <a:ea typeface="Calibri" pitchFamily="34" charset="-122"/>
                 <a:cs typeface="Calibri" pitchFamily="34" charset="-120"/>
               </a:rPr>
-              <a:t>Cases &amp; board</a:t>
+              <a:t>Cases &amp; board review</a:t>
             </a:r>
             <a:endParaRPr lang="en-US" sz="1400" dirty="0"/>
           </a:p>
@@ -11510,7 +14201,7 @@
                 <a:ea typeface="Calibri" pitchFamily="34" charset="-122"/>
                 <a:cs typeface="Calibri" pitchFamily="34" charset="-120"/>
               </a:rPr>
-              <a:t>Renal &amp; Liver Markers</a:t>
+              <a:t>Renal Markers</a:t>
             </a:r>
             <a:endParaRPr lang="en-US" sz="3800" dirty="0"/>
           </a:p>
@@ -11752,7 +14443,7 @@
                 <a:ea typeface="Calibri" pitchFamily="34" charset="-122"/>
                 <a:cs typeface="Calibri" pitchFamily="34" charset="-120"/>
               </a:rPr>
-              <a:t>eGFR equations (CKD-EPI) estimate function; the 2021 race-free equation is now standard.</a:t>
+              <a:t>eGFR (CKD-EPI; 2021 race-free equation) estimates function.</a:t>
             </a:r>
             <a:endParaRPr lang="en-US" sz="1250" dirty="0"/>
           </a:p>
@@ -11773,7 +14464,7 @@
                 <a:ea typeface="Calibri" pitchFamily="34" charset="-122"/>
                 <a:cs typeface="Calibri" pitchFamily="34" charset="-120"/>
               </a:rPr>
-              <a:t>Acute kidney injury is defined by a rise in creatinine and/or fall in urine output.</a:t>
+              <a:t>Drugs (trimethoprim, cimetidine) raise creatinine by blocking secretion without changing GFR.</a:t>
             </a:r>
             <a:endParaRPr lang="en-US" sz="1250" dirty="0"/>
           </a:p>
@@ -11794,7 +14485,7 @@
                 <a:ea typeface="Calibri" pitchFamily="34" charset="-122"/>
                 <a:cs typeface="Calibri" pitchFamily="34" charset="-120"/>
               </a:rPr>
-              <a:t>Drugs (e.g., trimethoprim, cimetidine) raise creatinine by blocking secretion without changing GFR.</a:t>
+              <a:t>Creatinine lags acute changes — a 'normal' value early in AKI is misleading.</a:t>
             </a:r>
             <a:endParaRPr lang="en-US" sz="1250" dirty="0"/>
           </a:p>
@@ -11926,7 +14617,7 @@
                 <a:ea typeface="Calibri" pitchFamily="34" charset="-122"/>
                 <a:cs typeface="Calibri" pitchFamily="34" charset="-120"/>
               </a:rPr>
-              <a:t>Useful when creatinine is unreliable (extremes of muscle, amputees, cirrhosis).</a:t>
+              <a:t>Useful when creatinine is unreliable (extremes of muscle, cirrhosis, amputees).</a:t>
             </a:r>
             <a:endParaRPr lang="en-US" sz="1250" dirty="0"/>
           </a:p>
@@ -12145,7 +14836,7 @@
                 <a:ea typeface="Calibri" pitchFamily="34" charset="-122"/>
                 <a:cs typeface="Calibri" pitchFamily="34" charset="-120"/>
               </a:rPr>
-              <a:t>CLINICAL CHEMISTRY   ·   LIVER</a:t>
+              <a:t>CLINICAL CHEMISTRY   ·   RENAL</a:t>
             </a:r>
             <a:endParaRPr lang="en-US" sz="1100" dirty="0"/>
           </a:p>
@@ -12184,7 +14875,7 @@
                 <a:ea typeface="Calibri" pitchFamily="34" charset="-122"/>
                 <a:cs typeface="Calibri" pitchFamily="34" charset="-120"/>
               </a:rPr>
-              <a:t>Reading the LFT Pattern</a:t>
+              <a:t>Acute Kidney Injury</a:t>
             </a:r>
             <a:endParaRPr lang="en-US" sz="3000" dirty="0"/>
           </a:p>
@@ -12252,7 +14943,7 @@
                 <a:ea typeface="Calibri" pitchFamily="34" charset="-122"/>
                 <a:cs typeface="Calibri" pitchFamily="34" charset="-120"/>
               </a:rPr>
-              <a:t>HEPATOCELLULAR VS CHOLESTATIC</a:t>
+              <a:t>DEFINING AKI (KDIGO)</a:t>
             </a:r>
             <a:endParaRPr lang="en-US" sz="1200" dirty="0"/>
           </a:p>
@@ -12295,7 +14986,7 @@
                 <a:ea typeface="Calibri" pitchFamily="34" charset="-122"/>
                 <a:cs typeface="Calibri" pitchFamily="34" charset="-120"/>
               </a:rPr>
-              <a:t>Hepatocellular: ALT/AST predominate (viral, toxic, ischemic, autoimmune).</a:t>
+              <a:t>↑ creatinine ≥ 0.3 mg/dL in 48 h, or ≥1.5× baseline within 7 days, or oliguria.</a:t>
             </a:r>
             <a:endParaRPr lang="en-US" sz="1250" dirty="0"/>
           </a:p>
@@ -12316,7 +15007,7 @@
                 <a:ea typeface="Calibri" pitchFamily="34" charset="-122"/>
                 <a:cs typeface="Calibri" pitchFamily="34" charset="-120"/>
               </a:rPr>
-              <a:t>AST:ALT &gt; 2 with modest elevations suggests alcoholic liver disease.</a:t>
+              <a:t>Staged by the magnitude of creatinine rise and urine output.</a:t>
             </a:r>
             <a:endParaRPr lang="en-US" sz="1250" dirty="0"/>
           </a:p>
@@ -12337,7 +15028,7 @@
                 <a:ea typeface="Calibri" pitchFamily="34" charset="-122"/>
                 <a:cs typeface="Calibri" pitchFamily="34" charset="-120"/>
               </a:rPr>
-              <a:t>Cholestatic: ALP and GGT predominate (obstruction, PBC, drugs).</a:t>
+              <a:t>Creatinine lags — so early AKI may have a still-'normal' value.</a:t>
             </a:r>
             <a:endParaRPr lang="en-US" sz="1250" dirty="0"/>
           </a:p>
@@ -12358,7 +15049,7 @@
                 <a:ea typeface="Calibri" pitchFamily="34" charset="-122"/>
                 <a:cs typeface="Calibri" pitchFamily="34" charset="-120"/>
               </a:rPr>
-              <a:t>GGT confirms the hepatic origin of an elevated ALP (vs bone).</a:t>
+              <a:t>Urinalysis and urine indices help localize the cause.</a:t>
             </a:r>
             <a:endParaRPr lang="en-US" sz="1250" dirty="0"/>
           </a:p>
@@ -12426,7 +15117,7 @@
                 <a:ea typeface="Calibri" pitchFamily="34" charset="-122"/>
                 <a:cs typeface="Calibri" pitchFamily="34" charset="-120"/>
               </a:rPr>
-              <a:t>FUNCTION VS INJURY</a:t>
+              <a:t>PRE-RENAL VS INTRINSIC</a:t>
             </a:r>
             <a:endParaRPr lang="en-US" sz="1200" dirty="0"/>
           </a:p>
@@ -12469,7 +15160,7 @@
                 <a:ea typeface="Calibri" pitchFamily="34" charset="-122"/>
                 <a:cs typeface="Calibri" pitchFamily="34" charset="-120"/>
               </a:rPr>
-              <a:t>ALT/AST/ALP measure injury; bilirubin, albumin, and PT/INR measure FUNCTION.</a:t>
+              <a:t>Pre-renal: BUN:creatinine often &amp;gt; 20:1; bland urine; low FeNa.</a:t>
             </a:r>
             <a:endParaRPr lang="en-US" sz="1250" dirty="0"/>
           </a:p>
@@ -12490,7 +15181,7 @@
                 <a:ea typeface="Calibri" pitchFamily="34" charset="-122"/>
                 <a:cs typeface="Calibri" pitchFamily="34" charset="-120"/>
               </a:rPr>
-              <a:t>Synthetic failure: low albumin, prolonged PT/INR.</a:t>
+              <a:t>Intrinsic (ATN): muddy-brown casts; FeNa often &amp;gt; 2%.</a:t>
             </a:r>
             <a:endParaRPr lang="en-US" sz="1250" dirty="0"/>
           </a:p>
@@ -12511,7 +15202,7 @@
                 <a:ea typeface="Calibri" pitchFamily="34" charset="-122"/>
                 <a:cs typeface="Calibri" pitchFamily="34" charset="-120"/>
               </a:rPr>
-              <a:t>Isolated unconjugated hyperbilirubinemia: hemolysis or Gilbert syndrome.</a:t>
+              <a:t>Post-renal: obstruction — imaging.</a:t>
             </a:r>
             <a:endParaRPr lang="en-US" sz="1250" dirty="0"/>
           </a:p>
@@ -12532,7 +15223,7 @@
                 <a:ea typeface="Calibri" pitchFamily="34" charset="-122"/>
                 <a:cs typeface="Calibri" pitchFamily="34" charset="-120"/>
               </a:rPr>
-              <a:t>Conjugated hyperbilirubinemia points to hepatobiliary disease.</a:t>
+              <a:t>Interpret FeNa cautiously (diuretics, CKD).</a:t>
             </a:r>
             <a:endParaRPr lang="en-US" sz="1250" dirty="0"/>
           </a:p>
@@ -12831,7 +15522,7 @@
                 <a:ea typeface="Calibri" pitchFamily="34" charset="-122"/>
                 <a:cs typeface="Calibri" pitchFamily="34" charset="-120"/>
               </a:rPr>
-              <a:t>Cardiac Biomarkers</a:t>
+              <a:t>Liver &amp; Cardiac Markers</a:t>
             </a:r>
             <a:endParaRPr lang="en-US" sz="3800" dirty="0"/>
           </a:p>
@@ -12902,7 +15593,7 @@
                 <a:ea typeface="Calibri" pitchFamily="34" charset="-122"/>
                 <a:cs typeface="Calibri" pitchFamily="34" charset="-120"/>
               </a:rPr>
-              <a:t>CLINICAL CHEMISTRY   ·   CARDIAC</a:t>
+              <a:t>CLINICAL CHEMISTRY   ·   LIVER</a:t>
             </a:r>
             <a:endParaRPr lang="en-US" sz="1100" dirty="0"/>
           </a:p>
@@ -12941,7 +15632,7 @@
                 <a:ea typeface="Calibri" pitchFamily="34" charset="-122"/>
                 <a:cs typeface="Calibri" pitchFamily="34" charset="-120"/>
               </a:rPr>
-              <a:t>High-Sensitivity Troponin Kinetics</a:t>
+              <a:t>Reading the Liver Panel as a Pattern</a:t>
             </a:r>
             <a:endParaRPr lang="en-US" sz="3000" dirty="0"/>
           </a:p>
@@ -12955,12 +15646,12 @@
         </p:nvSpPr>
         <p:spPr>
           <a:xfrm>
-            <a:off x="1249528" y="1481328"/>
-            <a:ext cx="9692640" cy="4151376"/>
+            <a:off x="1066648" y="1481328"/>
+            <a:ext cx="10058400" cy="3886200"/>
           </a:xfrm>
           <a:prstGeom prst="roundRect">
             <a:avLst>
-              <a:gd name="adj" fmla="val 1982"/>
+              <a:gd name="adj" fmla="val 2118"/>
             </a:avLst>
           </a:prstGeom>
           <a:solidFill>
@@ -12983,7 +15674,7 @@
       </p:sp>
       <p:pic>
         <p:nvPicPr>
-          <p:cNvPr id="5" name="Image 0" descr="/tmp/cp_work2/art/chem_troponin.png">    </p:cNvPr>
+          <p:cNvPr id="5" name="Image 0" descr="/tmp/cp_work2/art/chem_lft.png">    </p:cNvPr>
           <p:cNvPicPr>
             <a:picLocks noChangeAspect="1"/>
           </p:cNvPicPr>
@@ -12997,8 +15688,8 @@
         </p:blipFill>
         <p:spPr>
           <a:xfrm>
-            <a:off x="1377544" y="1609344"/>
-            <a:ext cx="9436608" cy="3895344"/>
+            <a:off x="1194664" y="1609344"/>
+            <a:ext cx="9802368" cy="3630168"/>
           </a:xfrm>
           <a:prstGeom prst="rect">
             <a:avLst/>
@@ -13013,7 +15704,7 @@
         </p:nvSpPr>
         <p:spPr>
           <a:xfrm>
-            <a:off x="566928" y="5705856"/>
+            <a:off x="566928" y="5440680"/>
             <a:ext cx="11057839" cy="365760"/>
           </a:xfrm>
           <a:prstGeom prst="rect">
@@ -13038,7 +15729,7 @@
                 <a:ea typeface="Calibri" pitchFamily="34" charset="-122"/>
                 <a:cs typeface="Calibri" pitchFamily="34" charset="-120"/>
               </a:rPr>
-              <a:t>Original schematic. Acute injury produces a rise-and-fall around the 99th-percentile upper reference limit; chronic elevation is stable.</a:t>
+              <a:t>Original schematic. Separate hepatocellular from cholestatic injury, and injury markers from synthetic function.</a:t>
             </a:r>
             <a:endParaRPr lang="en-US" sz="1150" dirty="0"/>
           </a:p>

--- a/decks/Chem_03_Renal-Liver-Cardiac-Biomarkers.pptx
+++ b/decks/Chem_03_Renal-Liver-Cardiac-Biomarkers.pptx
@@ -26,9 +26,13 @@
     <p:sldId id="274" r:id="rId20"/>
     <p:sldId id="275" r:id="rId21"/>
     <p:sldId id="276" r:id="rId22"/>
+    <p:sldId id="285" r:id="rId36"/>
     <p:sldId id="277" r:id="rId23"/>
+    <p:sldId id="284" r:id="rId35"/>
     <p:sldId id="278" r:id="rId24"/>
+    <p:sldId id="283" r:id="rId34"/>
     <p:sldId id="279" r:id="rId25"/>
+    <p:sldId id="282" r:id="rId33"/>
     <p:sldId id="280" r:id="rId26"/>
     <p:sldId id="281" r:id="rId27"/>
   </p:sldIdLst>
@@ -3121,6 +3125,10 @@
           </a:solidFill>
           <a:ln/>
         </p:spPr>
+        <p:txBody>
+          <a:bodyPr/>
+          <a:p/>
+        </p:txBody>
       </p:sp>
       <p:sp>
         <p:nvSpPr>
@@ -3143,6 +3151,10 @@
           </a:solidFill>
           <a:ln/>
         </p:spPr>
+        <p:txBody>
+          <a:bodyPr/>
+          <a:p/>
+        </p:txBody>
       </p:sp>
       <p:sp>
         <p:nvSpPr>
@@ -3165,6 +3177,10 @@
           </a:solidFill>
           <a:ln/>
         </p:spPr>
+        <p:txBody>
+          <a:bodyPr/>
+          <a:p/>
+        </p:txBody>
       </p:sp>
       <p:sp>
         <p:nvSpPr>
@@ -3187,6 +3203,10 @@
           </a:solidFill>
           <a:ln/>
         </p:spPr>
+        <p:txBody>
+          <a:bodyPr/>
+          <a:p/>
+        </p:txBody>
       </p:sp>
       <p:sp>
         <p:nvSpPr>
@@ -3603,6 +3623,10 @@
             </a:outerShdw>
           </a:effectLst>
         </p:spPr>
+        <p:txBody>
+          <a:bodyPr/>
+          <a:p/>
+        </p:txBody>
       </p:sp>
       <p:sp>
         <p:nvSpPr>
@@ -3777,6 +3801,10 @@
             </a:outerShdw>
           </a:effectLst>
         </p:spPr>
+        <p:txBody>
+          <a:bodyPr/>
+          <a:p/>
+        </p:txBody>
       </p:sp>
       <p:sp>
         <p:nvSpPr>
@@ -4172,6 +4200,10 @@
             </a:outerShdw>
           </a:effectLst>
         </p:spPr>
+        <p:txBody>
+          <a:bodyPr/>
+          <a:p/>
+        </p:txBody>
       </p:sp>
       <p:pic>
         <p:nvPicPr>
@@ -4480,6 +4512,10 @@
             </a:outerShdw>
           </a:effectLst>
         </p:spPr>
+        <p:txBody>
+          <a:bodyPr/>
+          <a:p/>
+        </p:txBody>
       </p:sp>
       <p:sp>
         <p:nvSpPr>
@@ -4654,6 +4690,10 @@
             </a:outerShdw>
           </a:effectLst>
         </p:spPr>
+        <p:txBody>
+          <a:bodyPr/>
+          <a:p/>
+        </p:txBody>
       </p:sp>
       <p:sp>
         <p:nvSpPr>
@@ -4959,6 +4999,10 @@
           </a:solidFill>
           <a:ln/>
         </p:spPr>
+        <p:txBody>
+          <a:bodyPr/>
+          <a:p/>
+        </p:txBody>
       </p:sp>
       <p:sp>
         <p:nvSpPr>
@@ -4981,6 +5025,10 @@
           </a:solidFill>
           <a:ln/>
         </p:spPr>
+        <p:txBody>
+          <a:bodyPr/>
+          <a:p/>
+        </p:txBody>
       </p:sp>
       <p:sp>
         <p:nvSpPr>
@@ -5237,6 +5285,10 @@
             </a:outerShdw>
           </a:effectLst>
         </p:spPr>
+        <p:txBody>
+          <a:bodyPr/>
+          <a:p/>
+        </p:txBody>
       </p:sp>
       <p:sp>
         <p:nvSpPr>
@@ -5411,6 +5463,10 @@
             </a:outerShdw>
           </a:effectLst>
         </p:spPr>
+        <p:txBody>
+          <a:bodyPr/>
+          <a:p/>
+        </p:txBody>
       </p:sp>
       <p:sp>
         <p:nvSpPr>
@@ -5801,6 +5857,10 @@
             </a:outerShdw>
           </a:effectLst>
         </p:spPr>
+        <p:txBody>
+          <a:bodyPr/>
+          <a:p/>
+        </p:txBody>
       </p:sp>
       <p:sp>
         <p:nvSpPr>
@@ -5911,6 +5971,10 @@
             </a:outerShdw>
           </a:effectLst>
         </p:spPr>
+        <p:txBody>
+          <a:bodyPr/>
+          <a:p/>
+        </p:txBody>
       </p:sp>
       <p:sp>
         <p:nvSpPr>
@@ -6340,6 +6404,10 @@
             </a:outerShdw>
           </a:effectLst>
         </p:spPr>
+        <p:txBody>
+          <a:bodyPr/>
+          <a:p/>
+        </p:txBody>
       </p:sp>
       <p:sp>
         <p:nvSpPr>
@@ -6666,6 +6734,10 @@
             </a:outerShdw>
           </a:effectLst>
         </p:spPr>
+        <p:txBody>
+          <a:bodyPr/>
+          <a:p/>
+        </p:txBody>
       </p:sp>
       <p:sp>
         <p:nvSpPr>
@@ -6776,6 +6848,10 @@
             </a:outerShdw>
           </a:effectLst>
         </p:spPr>
+        <p:txBody>
+          <a:bodyPr/>
+          <a:p/>
+        </p:txBody>
       </p:sp>
       <p:sp>
         <p:nvSpPr>
@@ -7205,6 +7281,10 @@
             </a:outerShdw>
           </a:effectLst>
         </p:spPr>
+        <p:txBody>
+          <a:bodyPr/>
+          <a:p/>
+        </p:txBody>
       </p:sp>
       <p:sp>
         <p:nvSpPr>
@@ -7531,6 +7611,10 @@
             </a:outerShdw>
           </a:effectLst>
         </p:spPr>
+        <p:txBody>
+          <a:bodyPr/>
+          <a:p/>
+        </p:txBody>
       </p:sp>
       <p:sp>
         <p:nvSpPr>
@@ -7641,6 +7725,10 @@
             </a:outerShdw>
           </a:effectLst>
         </p:spPr>
+        <p:txBody>
+          <a:bodyPr/>
+          <a:p/>
+        </p:txBody>
       </p:sp>
       <p:sp>
         <p:nvSpPr>
@@ -7964,6 +8052,10 @@
             </a:outerShdw>
           </a:effectLst>
         </p:spPr>
+        <p:txBody>
+          <a:bodyPr/>
+          <a:p/>
+        </p:txBody>
       </p:sp>
       <p:sp>
         <p:nvSpPr>
@@ -8071,6 +8163,10 @@
             </a:outerShdw>
           </a:effectLst>
         </p:spPr>
+        <p:txBody>
+          <a:bodyPr/>
+          <a:p/>
+        </p:txBody>
       </p:sp>
       <p:sp>
         <p:nvSpPr>
@@ -8178,6 +8274,10 @@
             </a:outerShdw>
           </a:effectLst>
         </p:spPr>
+        <p:txBody>
+          <a:bodyPr/>
+          <a:p/>
+        </p:txBody>
       </p:sp>
       <p:sp>
         <p:nvSpPr>
@@ -8285,6 +8385,10 @@
             </a:outerShdw>
           </a:effectLst>
         </p:spPr>
+        <p:txBody>
+          <a:bodyPr/>
+          <a:p/>
+        </p:txBody>
       </p:sp>
       <p:sp>
         <p:nvSpPr>
@@ -8721,6 +8825,10 @@
             </a:outerShdw>
           </a:effectLst>
         </p:spPr>
+        <p:txBody>
+          <a:bodyPr/>
+          <a:p/>
+        </p:txBody>
       </p:sp>
       <p:sp>
         <p:nvSpPr>
@@ -9109,9 +9217,9 @@
               <a:buNone/>
             </a:pPr>
             <a:r>
-              <a:rPr lang="en-US" sz="1350" b="1" dirty="0">
-                <a:solidFill>
-                  <a:srgbClr val="0D4A92"/>
+              <a:rPr lang="en-US" sz="1350" b="0" dirty="0">
+                <a:solidFill>
+                  <a:srgbClr val="33444F"/>
                 </a:solidFill>
                 <a:latin typeface="Calibri" pitchFamily="34" charset="0"/>
                 <a:ea typeface="Calibri" pitchFamily="34" charset="-122"/>
@@ -9180,130 +9288,6 @@
               <a:t>E. Elevated creatinine</a:t>
             </a:r>
             <a:endParaRPr lang="en-US" sz="1350" dirty="0"/>
-          </a:p>
-        </p:txBody>
-      </p:sp>
-      <p:sp>
-        <p:nvSpPr>
-          <p:cNvPr id="6" name="Shape 4"/>
-          <p:cNvSpPr/>
-          <p:nvPr/>
-        </p:nvSpPr>
-        <p:spPr>
-          <a:xfrm>
-            <a:off x="7201632" y="2395728"/>
-            <a:ext cx="4423136" cy="3246120"/>
-          </a:xfrm>
-          <a:prstGeom prst="roundRect">
-            <a:avLst>
-              <a:gd name="adj" fmla="val 2535"/>
-            </a:avLst>
-          </a:prstGeom>
-          <a:solidFill>
-            <a:srgbClr val="E7EFFA"/>
-          </a:solidFill>
-          <a:ln/>
-          <a:effectLst>
-            <a:outerShdw sx="100000" sy="100000" kx="0" ky="0" algn="bl" rotWithShape="0" blurRad="88900" dist="25400" dir="5400000">
-              <a:srgbClr val="22303C">
-                <a:alpha val="12000"/>
-              </a:srgbClr>
-            </a:outerShdw>
-          </a:effectLst>
-        </p:spPr>
-      </p:sp>
-      <p:sp>
-        <p:nvSpPr>
-          <p:cNvPr id="7" name="Text 5"/>
-          <p:cNvSpPr/>
-          <p:nvPr/>
-        </p:nvSpPr>
-        <p:spPr>
-          <a:xfrm>
-            <a:off x="7439376" y="2578608"/>
-            <a:ext cx="3965936" cy="457200"/>
-          </a:xfrm>
-          <a:prstGeom prst="rect">
-            <a:avLst/>
-          </a:prstGeom>
-          <a:noFill/>
-          <a:ln/>
-        </p:spPr>
-        <p:txBody>
-          <a:bodyPr wrap="square" lIns="0" tIns="0" rIns="0" bIns="0" rtlCol="0" anchor="ctr"/>
-          <a:lstStyle/>
-          <a:p>
-            <a:pPr indent="0" marL="0">
-              <a:buNone/>
-            </a:pPr>
-            <a:r>
-              <a:rPr lang="en-US" sz="1500" b="1" dirty="0">
-                <a:solidFill>
-                  <a:srgbClr val="1565C0"/>
-                </a:solidFill>
-                <a:latin typeface="Calibri" pitchFamily="34" charset="0"/>
-                <a:ea typeface="Calibri" pitchFamily="34" charset="-122"/>
-                <a:cs typeface="Calibri" pitchFamily="34" charset="-120"/>
-              </a:rPr>
-              <a:t>ANSWER  </a:t>
-            </a:r>
-            <a:pPr indent="0" marL="0">
-              <a:buNone/>
-            </a:pPr>
-            <a:r>
-              <a:rPr lang="en-US" sz="1500" b="1" dirty="0">
-                <a:solidFill>
-                  <a:srgbClr val="1B2A38"/>
-                </a:solidFill>
-                <a:latin typeface="Calibri" pitchFamily="34" charset="0"/>
-                <a:ea typeface="Calibri" pitchFamily="34" charset="-122"/>
-                <a:cs typeface="Calibri" pitchFamily="34" charset="-120"/>
-              </a:rPr>
-              <a:t>B — A dynamic rise/fall on serial testing</a:t>
-            </a:r>
-            <a:endParaRPr lang="en-US" sz="1500" dirty="0"/>
-          </a:p>
-        </p:txBody>
-      </p:sp>
-      <p:sp>
-        <p:nvSpPr>
-          <p:cNvPr id="8" name="Text 6"/>
-          <p:cNvSpPr/>
-          <p:nvPr/>
-        </p:nvSpPr>
-        <p:spPr>
-          <a:xfrm>
-            <a:off x="7439376" y="3127248"/>
-            <a:ext cx="3947648" cy="2377440"/>
-          </a:xfrm>
-          <a:prstGeom prst="rect">
-            <a:avLst/>
-          </a:prstGeom>
-          <a:noFill/>
-          <a:ln/>
-        </p:spPr>
-        <p:txBody>
-          <a:bodyPr wrap="square" lIns="0" tIns="0" rIns="0" bIns="0" rtlCol="0" anchor="t"/>
-          <a:lstStyle/>
-          <a:p>
-            <a:pPr algn="l" indent="0" marL="0">
-              <a:lnSpc>
-                <a:spcPct val="108000"/>
-              </a:lnSpc>
-              <a:buNone/>
-            </a:pPr>
-            <a:r>
-              <a:rPr lang="en-US" sz="1250" dirty="0">
-                <a:solidFill>
-                  <a:srgbClr val="33444F"/>
-                </a:solidFill>
-                <a:latin typeface="Calibri" pitchFamily="34" charset="0"/>
-                <a:ea typeface="Calibri" pitchFamily="34" charset="-122"/>
-                <a:cs typeface="Calibri" pitchFamily="34" charset="-120"/>
-              </a:rPr>
-              <a:t>Acute injury shows a changing pattern around the URL; chronic conditions show stable elevations.</a:t>
-            </a:r>
-            <a:endParaRPr lang="en-US" sz="1250" dirty="0"/>
           </a:p>
         </p:txBody>
       </p:sp>
@@ -9633,9 +9617,9 @@
               <a:buNone/>
             </a:pPr>
             <a:r>
-              <a:rPr lang="en-US" sz="1350" b="1" dirty="0">
-                <a:solidFill>
-                  <a:srgbClr val="0D4A92"/>
+              <a:rPr lang="en-US" sz="1350" b="0" dirty="0">
+                <a:solidFill>
+                  <a:srgbClr val="33444F"/>
                 </a:solidFill>
                 <a:latin typeface="Calibri" pitchFamily="34" charset="0"/>
                 <a:ea typeface="Calibri" pitchFamily="34" charset="-122"/>
@@ -9684,130 +9668,6 @@
               <a:t>E. Muscle</a:t>
             </a:r>
             <a:endParaRPr lang="en-US" sz="1350" dirty="0"/>
-          </a:p>
-        </p:txBody>
-      </p:sp>
-      <p:sp>
-        <p:nvSpPr>
-          <p:cNvPr id="6" name="Shape 4"/>
-          <p:cNvSpPr/>
-          <p:nvPr/>
-        </p:nvSpPr>
-        <p:spPr>
-          <a:xfrm>
-            <a:off x="7201632" y="2395728"/>
-            <a:ext cx="4423136" cy="3246120"/>
-          </a:xfrm>
-          <a:prstGeom prst="roundRect">
-            <a:avLst>
-              <a:gd name="adj" fmla="val 2535"/>
-            </a:avLst>
-          </a:prstGeom>
-          <a:solidFill>
-            <a:srgbClr val="E7EFFA"/>
-          </a:solidFill>
-          <a:ln/>
-          <a:effectLst>
-            <a:outerShdw sx="100000" sy="100000" kx="0" ky="0" algn="bl" rotWithShape="0" blurRad="88900" dist="25400" dir="5400000">
-              <a:srgbClr val="22303C">
-                <a:alpha val="12000"/>
-              </a:srgbClr>
-            </a:outerShdw>
-          </a:effectLst>
-        </p:spPr>
-      </p:sp>
-      <p:sp>
-        <p:nvSpPr>
-          <p:cNvPr id="7" name="Text 5"/>
-          <p:cNvSpPr/>
-          <p:nvPr/>
-        </p:nvSpPr>
-        <p:spPr>
-          <a:xfrm>
-            <a:off x="7439376" y="2578608"/>
-            <a:ext cx="3965936" cy="457200"/>
-          </a:xfrm>
-          <a:prstGeom prst="rect">
-            <a:avLst/>
-          </a:prstGeom>
-          <a:noFill/>
-          <a:ln/>
-        </p:spPr>
-        <p:txBody>
-          <a:bodyPr wrap="square" lIns="0" tIns="0" rIns="0" bIns="0" rtlCol="0" anchor="ctr"/>
-          <a:lstStyle/>
-          <a:p>
-            <a:pPr indent="0" marL="0">
-              <a:buNone/>
-            </a:pPr>
-            <a:r>
-              <a:rPr lang="en-US" sz="1500" b="1" dirty="0">
-                <a:solidFill>
-                  <a:srgbClr val="1565C0"/>
-                </a:solidFill>
-                <a:latin typeface="Calibri" pitchFamily="34" charset="0"/>
-                <a:ea typeface="Calibri" pitchFamily="34" charset="-122"/>
-                <a:cs typeface="Calibri" pitchFamily="34" charset="-120"/>
-              </a:rPr>
-              <a:t>ANSWER  </a:t>
-            </a:r>
-            <a:pPr indent="0" marL="0">
-              <a:buNone/>
-            </a:pPr>
-            <a:r>
-              <a:rPr lang="en-US" sz="1500" b="1" dirty="0">
-                <a:solidFill>
-                  <a:srgbClr val="1B2A38"/>
-                </a:solidFill>
-                <a:latin typeface="Calibri" pitchFamily="34" charset="0"/>
-                <a:ea typeface="Calibri" pitchFamily="34" charset="-122"/>
-                <a:cs typeface="Calibri" pitchFamily="34" charset="-120"/>
-              </a:rPr>
-              <a:t>C — Bone (non-hepatic)</a:t>
-            </a:r>
-            <a:endParaRPr lang="en-US" sz="1500" dirty="0"/>
-          </a:p>
-        </p:txBody>
-      </p:sp>
-      <p:sp>
-        <p:nvSpPr>
-          <p:cNvPr id="8" name="Text 6"/>
-          <p:cNvSpPr/>
-          <p:nvPr/>
-        </p:nvSpPr>
-        <p:spPr>
-          <a:xfrm>
-            <a:off x="7439376" y="3127248"/>
-            <a:ext cx="3947648" cy="2377440"/>
-          </a:xfrm>
-          <a:prstGeom prst="rect">
-            <a:avLst/>
-          </a:prstGeom>
-          <a:noFill/>
-          <a:ln/>
-        </p:spPr>
-        <p:txBody>
-          <a:bodyPr wrap="square" lIns="0" tIns="0" rIns="0" bIns="0" rtlCol="0" anchor="t"/>
-          <a:lstStyle/>
-          <a:p>
-            <a:pPr algn="l" indent="0" marL="0">
-              <a:lnSpc>
-                <a:spcPct val="108000"/>
-              </a:lnSpc>
-              <a:buNone/>
-            </a:pPr>
-            <a:r>
-              <a:rPr lang="en-US" sz="1250" dirty="0">
-                <a:solidFill>
-                  <a:srgbClr val="33444F"/>
-                </a:solidFill>
-                <a:latin typeface="Calibri" pitchFamily="34" charset="0"/>
-                <a:ea typeface="Calibri" pitchFamily="34" charset="-122"/>
-                <a:cs typeface="Calibri" pitchFamily="34" charset="-120"/>
-              </a:rPr>
-              <a:t>GGT confirms a hepatic source of ALP; a normal GGT points to bone, placenta, or intestine.</a:t>
-            </a:r>
-            <a:endParaRPr lang="en-US" sz="1250" dirty="0"/>
           </a:p>
         </p:txBody>
       </p:sp>
@@ -10117,9 +9977,9 @@
               <a:buNone/>
             </a:pPr>
             <a:r>
-              <a:rPr lang="en-US" sz="1350" b="1" dirty="0">
-                <a:solidFill>
-                  <a:srgbClr val="0D4A92"/>
+              <a:rPr lang="en-US" sz="1350" b="0" dirty="0">
+                <a:solidFill>
+                  <a:srgbClr val="33444F"/>
                 </a:solidFill>
                 <a:latin typeface="Calibri" pitchFamily="34" charset="0"/>
                 <a:ea typeface="Calibri" pitchFamily="34" charset="-122"/>
@@ -10188,130 +10048,6 @@
               <a:t>E. Increased dietary protein</a:t>
             </a:r>
             <a:endParaRPr lang="en-US" sz="1350" dirty="0"/>
-          </a:p>
-        </p:txBody>
-      </p:sp>
-      <p:sp>
-        <p:nvSpPr>
-          <p:cNvPr id="6" name="Shape 4"/>
-          <p:cNvSpPr/>
-          <p:nvPr/>
-        </p:nvSpPr>
-        <p:spPr>
-          <a:xfrm>
-            <a:off x="7201632" y="2395728"/>
-            <a:ext cx="4423136" cy="3246120"/>
-          </a:xfrm>
-          <a:prstGeom prst="roundRect">
-            <a:avLst>
-              <a:gd name="adj" fmla="val 2535"/>
-            </a:avLst>
-          </a:prstGeom>
-          <a:solidFill>
-            <a:srgbClr val="E7EFFA"/>
-          </a:solidFill>
-          <a:ln/>
-          <a:effectLst>
-            <a:outerShdw sx="100000" sy="100000" kx="0" ky="0" algn="bl" rotWithShape="0" blurRad="88900" dist="25400" dir="5400000">
-              <a:srgbClr val="22303C">
-                <a:alpha val="12000"/>
-              </a:srgbClr>
-            </a:outerShdw>
-          </a:effectLst>
-        </p:spPr>
-      </p:sp>
-      <p:sp>
-        <p:nvSpPr>
-          <p:cNvPr id="7" name="Text 5"/>
-          <p:cNvSpPr/>
-          <p:nvPr/>
-        </p:nvSpPr>
-        <p:spPr>
-          <a:xfrm>
-            <a:off x="7439376" y="2578608"/>
-            <a:ext cx="3965936" cy="457200"/>
-          </a:xfrm>
-          <a:prstGeom prst="rect">
-            <a:avLst/>
-          </a:prstGeom>
-          <a:noFill/>
-          <a:ln/>
-        </p:spPr>
-        <p:txBody>
-          <a:bodyPr wrap="square" lIns="0" tIns="0" rIns="0" bIns="0" rtlCol="0" anchor="ctr"/>
-          <a:lstStyle/>
-          <a:p>
-            <a:pPr indent="0" marL="0">
-              <a:buNone/>
-            </a:pPr>
-            <a:r>
-              <a:rPr lang="en-US" sz="1500" b="1" dirty="0">
-                <a:solidFill>
-                  <a:srgbClr val="1565C0"/>
-                </a:solidFill>
-                <a:latin typeface="Calibri" pitchFamily="34" charset="0"/>
-                <a:ea typeface="Calibri" pitchFamily="34" charset="-122"/>
-                <a:cs typeface="Calibri" pitchFamily="34" charset="-120"/>
-              </a:rPr>
-              <a:t>ANSWER  </a:t>
-            </a:r>
-            <a:pPr indent="0" marL="0">
-              <a:buNone/>
-            </a:pPr>
-            <a:r>
-              <a:rPr lang="en-US" sz="1500" b="1" dirty="0">
-                <a:solidFill>
-                  <a:srgbClr val="1B2A38"/>
-                </a:solidFill>
-                <a:latin typeface="Calibri" pitchFamily="34" charset="0"/>
-                <a:ea typeface="Calibri" pitchFamily="34" charset="-122"/>
-                <a:cs typeface="Calibri" pitchFamily="34" charset="-120"/>
-              </a:rPr>
-              <a:t>B — Inhibition of tubular secretion</a:t>
-            </a:r>
-            <a:endParaRPr lang="en-US" sz="1500" dirty="0"/>
-          </a:p>
-        </p:txBody>
-      </p:sp>
-      <p:sp>
-        <p:nvSpPr>
-          <p:cNvPr id="8" name="Text 6"/>
-          <p:cNvSpPr/>
-          <p:nvPr/>
-        </p:nvSpPr>
-        <p:spPr>
-          <a:xfrm>
-            <a:off x="7439376" y="3127248"/>
-            <a:ext cx="3947648" cy="2377440"/>
-          </a:xfrm>
-          <a:prstGeom prst="rect">
-            <a:avLst/>
-          </a:prstGeom>
-          <a:noFill/>
-          <a:ln/>
-        </p:spPr>
-        <p:txBody>
-          <a:bodyPr wrap="square" lIns="0" tIns="0" rIns="0" bIns="0" rtlCol="0" anchor="t"/>
-          <a:lstStyle/>
-          <a:p>
-            <a:pPr algn="l" indent="0" marL="0">
-              <a:lnSpc>
-                <a:spcPct val="108000"/>
-              </a:lnSpc>
-              <a:buNone/>
-            </a:pPr>
-            <a:r>
-              <a:rPr lang="en-US" sz="1250" dirty="0">
-                <a:solidFill>
-                  <a:srgbClr val="33444F"/>
-                </a:solidFill>
-                <a:latin typeface="Calibri" pitchFamily="34" charset="0"/>
-                <a:ea typeface="Calibri" pitchFamily="34" charset="-122"/>
-                <a:cs typeface="Calibri" pitchFamily="34" charset="-120"/>
-              </a:rPr>
-              <a:t>Trimethoprim and cimetidine block tubular creatinine secretion, raising serum creatinine without changing GFR.</a:t>
-            </a:r>
-            <a:endParaRPr lang="en-US" sz="1250" dirty="0"/>
           </a:p>
         </p:txBody>
       </p:sp>
@@ -10641,9 +10377,9 @@
               <a:buNone/>
             </a:pPr>
             <a:r>
-              <a:rPr lang="en-US" sz="1350" b="1" dirty="0">
-                <a:solidFill>
-                  <a:srgbClr val="0D4A92"/>
+              <a:rPr lang="en-US" sz="1350" b="0" dirty="0">
+                <a:solidFill>
+                  <a:srgbClr val="33444F"/>
                 </a:solidFill>
                 <a:latin typeface="Calibri" pitchFamily="34" charset="0"/>
                 <a:ea typeface="Calibri" pitchFamily="34" charset="-122"/>
@@ -10692,130 +10428,6 @@
               <a:t>E. Eosinophiluria</a:t>
             </a:r>
             <a:endParaRPr lang="en-US" sz="1350" dirty="0"/>
-          </a:p>
-        </p:txBody>
-      </p:sp>
-      <p:sp>
-        <p:nvSpPr>
-          <p:cNvPr id="6" name="Shape 4"/>
-          <p:cNvSpPr/>
-          <p:nvPr/>
-        </p:nvSpPr>
-        <p:spPr>
-          <a:xfrm>
-            <a:off x="7201632" y="2395728"/>
-            <a:ext cx="4423136" cy="3246120"/>
-          </a:xfrm>
-          <a:prstGeom prst="roundRect">
-            <a:avLst>
-              <a:gd name="adj" fmla="val 2535"/>
-            </a:avLst>
-          </a:prstGeom>
-          <a:solidFill>
-            <a:srgbClr val="E7EFFA"/>
-          </a:solidFill>
-          <a:ln/>
-          <a:effectLst>
-            <a:outerShdw sx="100000" sy="100000" kx="0" ky="0" algn="bl" rotWithShape="0" blurRad="88900" dist="25400" dir="5400000">
-              <a:srgbClr val="22303C">
-                <a:alpha val="12000"/>
-              </a:srgbClr>
-            </a:outerShdw>
-          </a:effectLst>
-        </p:spPr>
-      </p:sp>
-      <p:sp>
-        <p:nvSpPr>
-          <p:cNvPr id="7" name="Text 5"/>
-          <p:cNvSpPr/>
-          <p:nvPr/>
-        </p:nvSpPr>
-        <p:spPr>
-          <a:xfrm>
-            <a:off x="7439376" y="2578608"/>
-            <a:ext cx="3965936" cy="457200"/>
-          </a:xfrm>
-          <a:prstGeom prst="rect">
-            <a:avLst/>
-          </a:prstGeom>
-          <a:noFill/>
-          <a:ln/>
-        </p:spPr>
-        <p:txBody>
-          <a:bodyPr wrap="square" lIns="0" tIns="0" rIns="0" bIns="0" rtlCol="0" anchor="ctr"/>
-          <a:lstStyle/>
-          <a:p>
-            <a:pPr indent="0" marL="0">
-              <a:buNone/>
-            </a:pPr>
-            <a:r>
-              <a:rPr lang="en-US" sz="1500" b="1" dirty="0">
-                <a:solidFill>
-                  <a:srgbClr val="1565C0"/>
-                </a:solidFill>
-                <a:latin typeface="Calibri" pitchFamily="34" charset="0"/>
-                <a:ea typeface="Calibri" pitchFamily="34" charset="-122"/>
-                <a:cs typeface="Calibri" pitchFamily="34" charset="-120"/>
-              </a:rPr>
-              <a:t>ANSWER  </a:t>
-            </a:r>
-            <a:pPr indent="0" marL="0">
-              <a:buNone/>
-            </a:pPr>
-            <a:r>
-              <a:rPr lang="en-US" sz="1500" b="1" dirty="0">
-                <a:solidFill>
-                  <a:srgbClr val="1B2A38"/>
-                </a:solidFill>
-                <a:latin typeface="Calibri" pitchFamily="34" charset="0"/>
-                <a:ea typeface="Calibri" pitchFamily="34" charset="-122"/>
-                <a:cs typeface="Calibri" pitchFamily="34" charset="-120"/>
-              </a:rPr>
-              <a:t>C — BUN:Cr &amp;gt; 20:1 with bland urine</a:t>
-            </a:r>
-            <a:endParaRPr lang="en-US" sz="1500" dirty="0"/>
-          </a:p>
-        </p:txBody>
-      </p:sp>
-      <p:sp>
-        <p:nvSpPr>
-          <p:cNvPr id="8" name="Text 6"/>
-          <p:cNvSpPr/>
-          <p:nvPr/>
-        </p:nvSpPr>
-        <p:spPr>
-          <a:xfrm>
-            <a:off x="7439376" y="3127248"/>
-            <a:ext cx="3947648" cy="2377440"/>
-          </a:xfrm>
-          <a:prstGeom prst="rect">
-            <a:avLst/>
-          </a:prstGeom>
-          <a:noFill/>
-          <a:ln/>
-        </p:spPr>
-        <p:txBody>
-          <a:bodyPr wrap="square" lIns="0" tIns="0" rIns="0" bIns="0" rtlCol="0" anchor="t"/>
-          <a:lstStyle/>
-          <a:p>
-            <a:pPr algn="l" indent="0" marL="0">
-              <a:lnSpc>
-                <a:spcPct val="108000"/>
-              </a:lnSpc>
-              <a:buNone/>
-            </a:pPr>
-            <a:r>
-              <a:rPr lang="en-US" sz="1250" dirty="0">
-                <a:solidFill>
-                  <a:srgbClr val="33444F"/>
-                </a:solidFill>
-                <a:latin typeface="Calibri" pitchFamily="34" charset="0"/>
-                <a:ea typeface="Calibri" pitchFamily="34" charset="-122"/>
-                <a:cs typeface="Calibri" pitchFamily="34" charset="-120"/>
-              </a:rPr>
-              <a:t>Pre-renal azotemia shows a high BUN:creatinine ratio, low FeNa, and bland urine; muddy-brown casts and high FeNa indicate ATN.</a:t>
-            </a:r>
-            <a:endParaRPr lang="en-US" sz="1250" dirty="0"/>
           </a:p>
         </p:txBody>
       </p:sp>
@@ -11056,6 +10668,10 @@
           </a:solidFill>
           <a:ln/>
         </p:spPr>
+        <p:txBody>
+          <a:bodyPr/>
+          <a:p/>
+        </p:txBody>
       </p:sp>
       <p:sp>
         <p:nvSpPr>
@@ -11083,6 +10699,10 @@
             </a:outerShdw>
           </a:effectLst>
         </p:spPr>
+        <p:txBody>
+          <a:bodyPr/>
+          <a:p/>
+        </p:txBody>
       </p:sp>
       <p:sp>
         <p:nvSpPr>
@@ -11183,6 +10803,10 @@
           </a:solidFill>
           <a:ln/>
         </p:spPr>
+        <p:txBody>
+          <a:bodyPr/>
+          <a:p/>
+        </p:txBody>
       </p:sp>
       <p:sp>
         <p:nvSpPr>
@@ -11210,6 +10834,10 @@
             </a:outerShdw>
           </a:effectLst>
         </p:spPr>
+        <p:txBody>
+          <a:bodyPr/>
+          <a:p/>
+        </p:txBody>
       </p:sp>
       <p:sp>
         <p:nvSpPr>
@@ -11310,6 +10938,10 @@
           </a:solidFill>
           <a:ln/>
         </p:spPr>
+        <p:txBody>
+          <a:bodyPr/>
+          <a:p/>
+        </p:txBody>
       </p:sp>
       <p:sp>
         <p:nvSpPr>
@@ -11337,6 +10969,10 @@
             </a:outerShdw>
           </a:effectLst>
         </p:spPr>
+        <p:txBody>
+          <a:bodyPr/>
+          <a:p/>
+        </p:txBody>
       </p:sp>
       <p:sp>
         <p:nvSpPr>
@@ -11437,6 +11073,10 @@
           </a:solidFill>
           <a:ln/>
         </p:spPr>
+        <p:txBody>
+          <a:bodyPr/>
+          <a:p/>
+        </p:txBody>
       </p:sp>
       <p:sp>
         <p:nvSpPr>
@@ -11464,6 +11104,10 @@
             </a:outerShdw>
           </a:effectLst>
         </p:spPr>
+        <p:txBody>
+          <a:bodyPr/>
+          <a:p/>
+        </p:txBody>
       </p:sp>
       <p:sp>
         <p:nvSpPr>
@@ -11564,6 +11208,10 @@
           </a:solidFill>
           <a:ln/>
         </p:spPr>
+        <p:txBody>
+          <a:bodyPr/>
+          <a:p/>
+        </p:txBody>
       </p:sp>
       <p:sp>
         <p:nvSpPr>
@@ -11591,6 +11239,10 @@
             </a:outerShdw>
           </a:effectLst>
         </p:spPr>
+        <p:txBody>
+          <a:bodyPr/>
+          <a:p/>
+        </p:txBody>
       </p:sp>
       <p:sp>
         <p:nvSpPr>
@@ -12074,6 +11726,1488 @@
 </p:sld>
 </file>
 
+<file path=ppt/slides/slide27.xml><?xml version="1.0" encoding="utf-8"?>
+<p:sld xmlns:a="http://schemas.openxmlformats.org/drawingml/2006/main" xmlns:p="http://schemas.openxmlformats.org/presentationml/2006/main" xmlns:r="http://schemas.openxmlformats.org/officeDocument/2006/relationships">
+  <p:cSld>
+    <p:spTree>
+      <p:nvGrpSpPr>
+        <p:cNvPr id="1" name=""/>
+        <p:cNvGrpSpPr/>
+        <p:nvPr/>
+      </p:nvGrpSpPr>
+      <p:grpSpPr/>
+      <p:sp>
+        <p:nvSpPr>
+          <p:cNvPr id="2" name="Text 0"/>
+          <p:cNvSpPr/>
+          <p:nvPr/>
+        </p:nvSpPr>
+        <p:spPr>
+          <a:xfrm>
+            <a:off x="566928" y="329184"/>
+            <a:ext cx="10515600" cy="310896"/>
+          </a:xfrm>
+          <a:prstGeom prst="rect">
+            <a:avLst/>
+          </a:prstGeom>
+          <a:noFill/>
+          <a:ln/>
+        </p:spPr>
+        <p:txBody>
+          <a:bodyPr wrap="square" lIns="0" tIns="0" rIns="0" bIns="0" rtlCol="0" anchor="ctr"/>
+          <a:lstStyle/>
+          <a:p>
+            <a:pPr algn="l" indent="0" marL="0">
+              <a:buNone/>
+            </a:pPr>
+            <a:r>
+              <a:rPr lang="en-US" sz="1100" b="1" spc="150" kern="0" dirty="0">
+                <a:solidFill>
+                  <a:srgbClr val="1565C0"/>
+                </a:solidFill>
+                <a:latin typeface="Calibri" pitchFamily="34" charset="0"/>
+                <a:ea typeface="Calibri" pitchFamily="34" charset="-122"/>
+                <a:cs typeface="Calibri" pitchFamily="34" charset="-120"/>
+              </a:rPr>
+              <a:t>CLINICAL CHEMISTRY   ·   BOARD REVIEW  ·  Q4</a:t>
+            </a:r>
+            <a:endParaRPr lang="en-US" sz="1100" dirty="0"/>
+          </a:p>
+        </p:txBody>
+      </p:sp>
+      <p:sp>
+        <p:nvSpPr>
+          <p:cNvPr id="3" name="Text 1"/>
+          <p:cNvSpPr/>
+          <p:nvPr/>
+        </p:nvSpPr>
+        <p:spPr>
+          <a:xfrm>
+            <a:off x="566928" y="713232"/>
+            <a:ext cx="11064240" cy="749808"/>
+          </a:xfrm>
+          <a:prstGeom prst="rect">
+            <a:avLst/>
+          </a:prstGeom>
+          <a:noFill/>
+          <a:ln/>
+        </p:spPr>
+        <p:txBody>
+          <a:bodyPr wrap="square" lIns="0" tIns="0" rIns="0" bIns="0" rtlCol="0" anchor="ctr"/>
+          <a:lstStyle/>
+          <a:p>
+            <a:pPr algn="l" indent="0" marL="0">
+              <a:buNone/>
+            </a:pPr>
+            <a:r>
+              <a:rPr lang="en-US" sz="2600" b="1" dirty="0">
+                <a:solidFill>
+                  <a:srgbClr val="0E3A5F"/>
+                </a:solidFill>
+                <a:latin typeface="Calibri" pitchFamily="34" charset="0"/>
+                <a:ea typeface="Calibri" pitchFamily="34" charset="-122"/>
+                <a:cs typeface="Calibri" pitchFamily="34" charset="-120"/>
+              </a:rPr>
+              <a:t>Board-Style Review</a:t>
+            </a:r>
+            <a:endParaRPr lang="en-US" sz="2600" dirty="0"/>
+          </a:p>
+        </p:txBody>
+      </p:sp>
+      <p:sp>
+        <p:nvSpPr>
+          <p:cNvPr id="4" name="Text 2"/>
+          <p:cNvSpPr/>
+          <p:nvPr/>
+        </p:nvSpPr>
+        <p:spPr>
+          <a:xfrm>
+            <a:off x="566928" y="1417320"/>
+            <a:ext cx="11057839" cy="914400"/>
+          </a:xfrm>
+          <a:prstGeom prst="rect">
+            <a:avLst/>
+          </a:prstGeom>
+          <a:noFill/>
+          <a:ln/>
+        </p:spPr>
+        <p:txBody>
+          <a:bodyPr wrap="square" lIns="0" tIns="0" rIns="0" bIns="0" rtlCol="0" anchor="t"/>
+          <a:lstStyle/>
+          <a:p>
+            <a:pPr algn="l" indent="0" marL="0">
+              <a:lnSpc>
+                <a:spcPct val="105000"/>
+              </a:lnSpc>
+              <a:buNone/>
+            </a:pPr>
+            <a:r>
+              <a:rPr lang="en-US" sz="1450" b="1" dirty="0">
+                <a:solidFill>
+                  <a:srgbClr val="1B2A38"/>
+                </a:solidFill>
+                <a:latin typeface="Calibri" pitchFamily="34" charset="0"/>
+                <a:ea typeface="Calibri" pitchFamily="34" charset="-122"/>
+                <a:cs typeface="Calibri" pitchFamily="34" charset="-120"/>
+              </a:rPr>
+              <a:t>Which finding best supports a PRE-renal cause of acute kidney injury?</a:t>
+            </a:r>
+            <a:endParaRPr lang="en-US" sz="1450" dirty="0"/>
+          </a:p>
+        </p:txBody>
+      </p:sp>
+      <p:sp>
+        <p:nvSpPr>
+          <p:cNvPr id="5" name="Text 3"/>
+          <p:cNvSpPr/>
+          <p:nvPr/>
+        </p:nvSpPr>
+        <p:spPr>
+          <a:xfrm>
+            <a:off x="658368" y="2395728"/>
+            <a:ext cx="6192390" cy="3017520"/>
+          </a:xfrm>
+          <a:prstGeom prst="rect">
+            <a:avLst/>
+          </a:prstGeom>
+          <a:noFill/>
+          <a:ln/>
+        </p:spPr>
+        <p:txBody>
+          <a:bodyPr wrap="square" lIns="0" tIns="0" rIns="0" bIns="0" rtlCol="0" anchor="t"/>
+          <a:lstStyle/>
+          <a:p>
+            <a:pPr algn="l" indent="0" marL="0">
+              <a:spcAft>
+                <a:spcPts val="600"/>
+              </a:spcAft>
+              <a:buNone/>
+            </a:pPr>
+            <a:r>
+              <a:rPr lang="en-US" sz="1350" dirty="0">
+                <a:solidFill>
+                  <a:srgbClr val="33444F"/>
+                </a:solidFill>
+                <a:latin typeface="Calibri" pitchFamily="34" charset="0"/>
+                <a:ea typeface="Calibri" pitchFamily="34" charset="-122"/>
+                <a:cs typeface="Calibri" pitchFamily="34" charset="-120"/>
+              </a:rPr>
+              <a:t>A. Muddy-brown granular casts</a:t>
+            </a:r>
+            <a:endParaRPr lang="en-US" sz="1350" dirty="0"/>
+          </a:p>
+          <a:p>
+            <a:pPr algn="l" indent="0" marL="0">
+              <a:spcAft>
+                <a:spcPts val="600"/>
+              </a:spcAft>
+              <a:buNone/>
+            </a:pPr>
+            <a:r>
+              <a:rPr lang="en-US" sz="1350" dirty="0">
+                <a:solidFill>
+                  <a:srgbClr val="33444F"/>
+                </a:solidFill>
+                <a:latin typeface="Calibri" pitchFamily="34" charset="0"/>
+                <a:ea typeface="Calibri" pitchFamily="34" charset="-122"/>
+                <a:cs typeface="Calibri" pitchFamily="34" charset="-120"/>
+              </a:rPr>
+              <a:t>B. FeNa &amp;gt; 2%</a:t>
+            </a:r>
+            <a:endParaRPr lang="en-US" sz="1350" dirty="0"/>
+          </a:p>
+          <a:p>
+            <a:pPr algn="l" indent="0" marL="0">
+              <a:spcAft>
+                <a:spcPts val="600"/>
+              </a:spcAft>
+              <a:buNone/>
+            </a:pPr>
+            <a:r>
+              <a:rPr lang="en-US" sz="1350" b="1" dirty="0">
+                <a:solidFill>
+                  <a:srgbClr val="0D4A92"/>
+                </a:solidFill>
+                <a:latin typeface="Calibri" pitchFamily="34" charset="0"/>
+                <a:ea typeface="Calibri" pitchFamily="34" charset="-122"/>
+                <a:cs typeface="Calibri" pitchFamily="34" charset="-120"/>
+              </a:rPr>
+              <a:t>C. BUN:creatinine &amp;gt; 20:1 with bland urine</a:t>
+            </a:r>
+            <a:endParaRPr lang="en-US" sz="1350" dirty="0"/>
+          </a:p>
+          <a:p>
+            <a:pPr algn="l" indent="0" marL="0">
+              <a:spcAft>
+                <a:spcPts val="600"/>
+              </a:spcAft>
+              <a:buNone/>
+            </a:pPr>
+            <a:r>
+              <a:rPr lang="en-US" sz="1350" dirty="0">
+                <a:solidFill>
+                  <a:srgbClr val="33444F"/>
+                </a:solidFill>
+                <a:latin typeface="Calibri" pitchFamily="34" charset="0"/>
+                <a:ea typeface="Calibri" pitchFamily="34" charset="-122"/>
+                <a:cs typeface="Calibri" pitchFamily="34" charset="-120"/>
+              </a:rPr>
+              <a:t>D. Hydronephrosis on imaging</a:t>
+            </a:r>
+            <a:endParaRPr lang="en-US" sz="1350" dirty="0"/>
+          </a:p>
+          <a:p>
+            <a:pPr algn="l" indent="0" marL="0">
+              <a:spcAft>
+                <a:spcPts val="600"/>
+              </a:spcAft>
+              <a:buNone/>
+            </a:pPr>
+            <a:r>
+              <a:rPr lang="en-US" sz="1350" dirty="0">
+                <a:solidFill>
+                  <a:srgbClr val="33444F"/>
+                </a:solidFill>
+                <a:latin typeface="Calibri" pitchFamily="34" charset="0"/>
+                <a:ea typeface="Calibri" pitchFamily="34" charset="-122"/>
+                <a:cs typeface="Calibri" pitchFamily="34" charset="-120"/>
+              </a:rPr>
+              <a:t>E. Eosinophiluria</a:t>
+            </a:r>
+            <a:endParaRPr lang="en-US" sz="1350" dirty="0"/>
+          </a:p>
+        </p:txBody>
+      </p:sp>
+      <p:sp>
+        <p:nvSpPr>
+          <p:cNvPr id="6" name="Shape 4"/>
+          <p:cNvSpPr/>
+          <p:nvPr/>
+        </p:nvSpPr>
+        <p:spPr>
+          <a:xfrm>
+            <a:off x="7201632" y="2395728"/>
+            <a:ext cx="4423136" cy="3246120"/>
+          </a:xfrm>
+          <a:prstGeom prst="roundRect">
+            <a:avLst>
+              <a:gd name="adj" fmla="val 2535"/>
+            </a:avLst>
+          </a:prstGeom>
+          <a:solidFill>
+            <a:srgbClr val="E7EFFA"/>
+          </a:solidFill>
+          <a:ln/>
+          <a:effectLst>
+            <a:outerShdw sx="100000" sy="100000" kx="0" ky="0" algn="bl" rotWithShape="0" blurRad="88900" dist="25400" dir="5400000">
+              <a:srgbClr val="22303C">
+                <a:alpha val="12000"/>
+              </a:srgbClr>
+            </a:outerShdw>
+          </a:effectLst>
+        </p:spPr>
+        <p:txBody>
+          <a:bodyPr/>
+          <a:p/>
+        </p:txBody>
+      </p:sp>
+      <p:sp>
+        <p:nvSpPr>
+          <p:cNvPr id="7" name="Text 5"/>
+          <p:cNvSpPr/>
+          <p:nvPr/>
+        </p:nvSpPr>
+        <p:spPr>
+          <a:xfrm>
+            <a:off x="7439376" y="2578608"/>
+            <a:ext cx="3965936" cy="457200"/>
+          </a:xfrm>
+          <a:prstGeom prst="rect">
+            <a:avLst/>
+          </a:prstGeom>
+          <a:noFill/>
+          <a:ln/>
+        </p:spPr>
+        <p:txBody>
+          <a:bodyPr wrap="square" lIns="0" tIns="0" rIns="0" bIns="0" rtlCol="0" anchor="ctr"/>
+          <a:lstStyle/>
+          <a:p>
+            <a:pPr indent="0" marL="0">
+              <a:buNone/>
+            </a:pPr>
+            <a:r>
+              <a:rPr lang="en-US" sz="1500" b="1" dirty="0">
+                <a:solidFill>
+                  <a:srgbClr val="1565C0"/>
+                </a:solidFill>
+                <a:latin typeface="Calibri" pitchFamily="34" charset="0"/>
+                <a:ea typeface="Calibri" pitchFamily="34" charset="-122"/>
+                <a:cs typeface="Calibri" pitchFamily="34" charset="-120"/>
+              </a:rPr>
+              <a:t>ANSWER  </a:t>
+            </a:r>
+            <a:pPr indent="0" marL="0">
+              <a:buNone/>
+            </a:pPr>
+            <a:r>
+              <a:rPr lang="en-US" sz="1500" b="1" dirty="0">
+                <a:solidFill>
+                  <a:srgbClr val="1B2A38"/>
+                </a:solidFill>
+                <a:latin typeface="Calibri" pitchFamily="34" charset="0"/>
+                <a:ea typeface="Calibri" pitchFamily="34" charset="-122"/>
+                <a:cs typeface="Calibri" pitchFamily="34" charset="-120"/>
+              </a:rPr>
+              <a:t>C — BUN:Cr &amp;gt; 20:1 with bland urine</a:t>
+            </a:r>
+            <a:endParaRPr lang="en-US" sz="1500" dirty="0"/>
+          </a:p>
+        </p:txBody>
+      </p:sp>
+      <p:sp>
+        <p:nvSpPr>
+          <p:cNvPr id="8" name="Text 6"/>
+          <p:cNvSpPr/>
+          <p:nvPr/>
+        </p:nvSpPr>
+        <p:spPr>
+          <a:xfrm>
+            <a:off x="7439376" y="3127248"/>
+            <a:ext cx="3947648" cy="2377440"/>
+          </a:xfrm>
+          <a:prstGeom prst="rect">
+            <a:avLst/>
+          </a:prstGeom>
+          <a:noFill/>
+          <a:ln/>
+        </p:spPr>
+        <p:txBody>
+          <a:bodyPr wrap="square" lIns="0" tIns="0" rIns="0" bIns="0" rtlCol="0" anchor="t"/>
+          <a:lstStyle/>
+          <a:p>
+            <a:pPr algn="l" indent="0" marL="0">
+              <a:lnSpc>
+                <a:spcPct val="108000"/>
+              </a:lnSpc>
+              <a:buNone/>
+            </a:pPr>
+            <a:r>
+              <a:rPr lang="en-US" sz="1250" dirty="0">
+                <a:solidFill>
+                  <a:srgbClr val="33444F"/>
+                </a:solidFill>
+                <a:latin typeface="Calibri" pitchFamily="34" charset="0"/>
+                <a:ea typeface="Calibri" pitchFamily="34" charset="-122"/>
+                <a:cs typeface="Calibri" pitchFamily="34" charset="-120"/>
+              </a:rPr>
+              <a:t>Pre-renal azotemia shows a high BUN:creatinine ratio, low FeNa, and bland urine; muddy-brown casts and high FeNa indicate ATN.</a:t>
+            </a:r>
+            <a:endParaRPr lang="en-US" sz="1250" dirty="0"/>
+          </a:p>
+        </p:txBody>
+      </p:sp>
+      <p:sp>
+        <p:nvSpPr>
+          <p:cNvPr id="9" name="Text 7"/>
+          <p:cNvSpPr/>
+          <p:nvPr/>
+        </p:nvSpPr>
+        <p:spPr>
+          <a:xfrm>
+            <a:off x="566928" y="6473952"/>
+            <a:ext cx="7772400" cy="274320"/>
+          </a:xfrm>
+          <a:prstGeom prst="rect">
+            <a:avLst/>
+          </a:prstGeom>
+          <a:noFill/>
+          <a:ln/>
+        </p:spPr>
+        <p:txBody>
+          <a:bodyPr wrap="square" lIns="0" tIns="0" rIns="0" bIns="0" rtlCol="0" anchor="ctr"/>
+          <a:lstStyle/>
+          <a:p>
+            <a:pPr algn="l" indent="0" marL="0">
+              <a:buNone/>
+            </a:pPr>
+            <a:r>
+              <a:rPr lang="en-US" sz="850" dirty="0">
+                <a:solidFill>
+                  <a:srgbClr val="9AA8B4"/>
+                </a:solidFill>
+                <a:latin typeface="Calibri" pitchFamily="34" charset="0"/>
+                <a:ea typeface="Calibri" pitchFamily="34" charset="-122"/>
+                <a:cs typeface="Calibri" pitchFamily="34" charset="-120"/>
+              </a:rPr>
+              <a:t>Makassed General Hospital  ·  Department of Laboratory Medicine</a:t>
+            </a:r>
+            <a:endParaRPr lang="en-US" sz="850" dirty="0"/>
+          </a:p>
+        </p:txBody>
+      </p:sp>
+      <p:sp>
+        <p:nvSpPr>
+          <p:cNvPr id="10" name="Text 8"/>
+          <p:cNvSpPr/>
+          <p:nvPr/>
+        </p:nvSpPr>
+        <p:spPr>
+          <a:xfrm>
+            <a:off x="9814255" y="6473952"/>
+            <a:ext cx="1828800" cy="274320"/>
+          </a:xfrm>
+          <a:prstGeom prst="rect">
+            <a:avLst/>
+          </a:prstGeom>
+          <a:noFill/>
+          <a:ln/>
+        </p:spPr>
+        <p:txBody>
+          <a:bodyPr wrap="square" lIns="0" tIns="0" rIns="0" bIns="0" rtlCol="0" anchor="ctr"/>
+          <a:lstStyle/>
+          <a:p>
+            <a:pPr algn="r" indent="0" marL="0">
+              <a:buNone/>
+            </a:pPr>
+            <a:r>
+              <a:rPr lang="en-US" sz="850" dirty="0">
+                <a:solidFill>
+                  <a:srgbClr val="9AA8B4"/>
+                </a:solidFill>
+                <a:latin typeface="Calibri" pitchFamily="34" charset="0"/>
+                <a:ea typeface="Calibri" pitchFamily="34" charset="-122"/>
+                <a:cs typeface="Calibri" pitchFamily="34" charset="-120"/>
+              </a:rPr>
+              <a:t>CP Lecture Series</a:t>
+            </a:r>
+            <a:pPr algn="r" indent="0" marL="0">
+              <a:buNone/>
+            </a:pPr>
+            <a:r>
+              <a:rPr lang="en-US" sz="850" dirty="0">
+                <a:solidFill>
+                  <a:srgbClr val="DCE4EC"/>
+                </a:solidFill>
+                <a:latin typeface="Calibri" pitchFamily="34" charset="0"/>
+                <a:ea typeface="Calibri" pitchFamily="34" charset="-122"/>
+                <a:cs typeface="Calibri" pitchFamily="34" charset="-120"/>
+              </a:rPr>
+              <a:t>   ·   </a:t>
+            </a:r>
+            <a:pPr algn="r" indent="0" marL="0">
+              <a:buNone/>
+            </a:pPr>
+            <a:r>
+              <a:rPr lang="en-US" sz="850" b="1" dirty="0">
+                <a:solidFill>
+                  <a:srgbClr val="1565C0"/>
+                </a:solidFill>
+                <a:latin typeface="Calibri" pitchFamily="34" charset="0"/>
+                <a:ea typeface="Calibri" pitchFamily="34" charset="-122"/>
+                <a:cs typeface="Calibri" pitchFamily="34" charset="-120"/>
+              </a:rPr>
+              <a:t>21</a:t>
+            </a:r>
+            <a:endParaRPr lang="en-US" sz="850" dirty="0"/>
+          </a:p>
+        </p:txBody>
+      </p:sp>
+    </p:spTree>
+  </p:cSld>
+  <p:clrMapOvr>
+    <a:masterClrMapping/>
+  </p:clrMapOvr>
+</p:sld>
+</file>
+
+<file path=ppt/slides/slide28.xml><?xml version="1.0" encoding="utf-8"?>
+<p:sld xmlns:a="http://schemas.openxmlformats.org/drawingml/2006/main" xmlns:p="http://schemas.openxmlformats.org/presentationml/2006/main" xmlns:r="http://schemas.openxmlformats.org/officeDocument/2006/relationships">
+  <p:cSld>
+    <p:spTree>
+      <p:nvGrpSpPr>
+        <p:cNvPr id="1" name=""/>
+        <p:cNvGrpSpPr/>
+        <p:nvPr/>
+      </p:nvGrpSpPr>
+      <p:grpSpPr/>
+      <p:sp>
+        <p:nvSpPr>
+          <p:cNvPr id="2" name="Text 0"/>
+          <p:cNvSpPr/>
+          <p:nvPr/>
+        </p:nvSpPr>
+        <p:spPr>
+          <a:xfrm>
+            <a:off x="566928" y="329184"/>
+            <a:ext cx="10515600" cy="310896"/>
+          </a:xfrm>
+          <a:prstGeom prst="rect">
+            <a:avLst/>
+          </a:prstGeom>
+          <a:noFill/>
+          <a:ln/>
+        </p:spPr>
+        <p:txBody>
+          <a:bodyPr wrap="square" lIns="0" tIns="0" rIns="0" bIns="0" rtlCol="0" anchor="ctr"/>
+          <a:lstStyle/>
+          <a:p>
+            <a:pPr algn="l" indent="0" marL="0">
+              <a:buNone/>
+            </a:pPr>
+            <a:r>
+              <a:rPr lang="en-US" sz="1100" b="1" spc="150" kern="0" dirty="0">
+                <a:solidFill>
+                  <a:srgbClr val="1565C0"/>
+                </a:solidFill>
+                <a:latin typeface="Calibri" pitchFamily="34" charset="0"/>
+                <a:ea typeface="Calibri" pitchFamily="34" charset="-122"/>
+                <a:cs typeface="Calibri" pitchFamily="34" charset="-120"/>
+              </a:rPr>
+              <a:t>CLINICAL CHEMISTRY   ·   BOARD REVIEW  ·  Q3</a:t>
+            </a:r>
+            <a:endParaRPr lang="en-US" sz="1100" dirty="0"/>
+          </a:p>
+        </p:txBody>
+      </p:sp>
+      <p:sp>
+        <p:nvSpPr>
+          <p:cNvPr id="3" name="Text 1"/>
+          <p:cNvSpPr/>
+          <p:nvPr/>
+        </p:nvSpPr>
+        <p:spPr>
+          <a:xfrm>
+            <a:off x="566928" y="713232"/>
+            <a:ext cx="11064240" cy="749808"/>
+          </a:xfrm>
+          <a:prstGeom prst="rect">
+            <a:avLst/>
+          </a:prstGeom>
+          <a:noFill/>
+          <a:ln/>
+        </p:spPr>
+        <p:txBody>
+          <a:bodyPr wrap="square" lIns="0" tIns="0" rIns="0" bIns="0" rtlCol="0" anchor="ctr"/>
+          <a:lstStyle/>
+          <a:p>
+            <a:pPr algn="l" indent="0" marL="0">
+              <a:buNone/>
+            </a:pPr>
+            <a:r>
+              <a:rPr lang="en-US" sz="2600" b="1" dirty="0">
+                <a:solidFill>
+                  <a:srgbClr val="0E3A5F"/>
+                </a:solidFill>
+                <a:latin typeface="Calibri" pitchFamily="34" charset="0"/>
+                <a:ea typeface="Calibri" pitchFamily="34" charset="-122"/>
+                <a:cs typeface="Calibri" pitchFamily="34" charset="-120"/>
+              </a:rPr>
+              <a:t>Board-Style Review</a:t>
+            </a:r>
+            <a:endParaRPr lang="en-US" sz="2600" dirty="0"/>
+          </a:p>
+        </p:txBody>
+      </p:sp>
+      <p:sp>
+        <p:nvSpPr>
+          <p:cNvPr id="4" name="Text 2"/>
+          <p:cNvSpPr/>
+          <p:nvPr/>
+        </p:nvSpPr>
+        <p:spPr>
+          <a:xfrm>
+            <a:off x="566928" y="1417320"/>
+            <a:ext cx="11057839" cy="914400"/>
+          </a:xfrm>
+          <a:prstGeom prst="rect">
+            <a:avLst/>
+          </a:prstGeom>
+          <a:noFill/>
+          <a:ln/>
+        </p:spPr>
+        <p:txBody>
+          <a:bodyPr wrap="square" lIns="0" tIns="0" rIns="0" bIns="0" rtlCol="0" anchor="t"/>
+          <a:lstStyle/>
+          <a:p>
+            <a:pPr algn="l" indent="0" marL="0">
+              <a:lnSpc>
+                <a:spcPct val="105000"/>
+              </a:lnSpc>
+              <a:buNone/>
+            </a:pPr>
+            <a:r>
+              <a:rPr lang="en-US" sz="1450" b="1" dirty="0">
+                <a:solidFill>
+                  <a:srgbClr val="1B2A38"/>
+                </a:solidFill>
+                <a:latin typeface="Calibri" pitchFamily="34" charset="0"/>
+                <a:ea typeface="Calibri" pitchFamily="34" charset="-122"/>
+                <a:cs typeface="Calibri" pitchFamily="34" charset="-120"/>
+              </a:rPr>
+              <a:t>A drug raises serum creatinine without reducing true GFR. The mechanism is:</a:t>
+            </a:r>
+            <a:endParaRPr lang="en-US" sz="1450" dirty="0"/>
+          </a:p>
+        </p:txBody>
+      </p:sp>
+      <p:sp>
+        <p:nvSpPr>
+          <p:cNvPr id="5" name="Text 3"/>
+          <p:cNvSpPr/>
+          <p:nvPr/>
+        </p:nvSpPr>
+        <p:spPr>
+          <a:xfrm>
+            <a:off x="658368" y="2395728"/>
+            <a:ext cx="6192390" cy="3017520"/>
+          </a:xfrm>
+          <a:prstGeom prst="rect">
+            <a:avLst/>
+          </a:prstGeom>
+          <a:noFill/>
+          <a:ln/>
+        </p:spPr>
+        <p:txBody>
+          <a:bodyPr wrap="square" lIns="0" tIns="0" rIns="0" bIns="0" rtlCol="0" anchor="t"/>
+          <a:lstStyle/>
+          <a:p>
+            <a:pPr algn="l" indent="0" marL="0">
+              <a:spcAft>
+                <a:spcPts val="600"/>
+              </a:spcAft>
+              <a:buNone/>
+            </a:pPr>
+            <a:r>
+              <a:rPr lang="en-US" sz="1350" dirty="0">
+                <a:solidFill>
+                  <a:srgbClr val="33444F"/>
+                </a:solidFill>
+                <a:latin typeface="Calibri" pitchFamily="34" charset="0"/>
+                <a:ea typeface="Calibri" pitchFamily="34" charset="-122"/>
+                <a:cs typeface="Calibri" pitchFamily="34" charset="-120"/>
+              </a:rPr>
+              <a:t>A. Increased muscle breakdown</a:t>
+            </a:r>
+            <a:endParaRPr lang="en-US" sz="1350" dirty="0"/>
+          </a:p>
+          <a:p>
+            <a:pPr algn="l" indent="0" marL="0">
+              <a:spcAft>
+                <a:spcPts val="600"/>
+              </a:spcAft>
+              <a:buNone/>
+            </a:pPr>
+            <a:r>
+              <a:rPr lang="en-US" sz="1350" b="1" dirty="0">
+                <a:solidFill>
+                  <a:srgbClr val="0D4A92"/>
+                </a:solidFill>
+                <a:latin typeface="Calibri" pitchFamily="34" charset="0"/>
+                <a:ea typeface="Calibri" pitchFamily="34" charset="-122"/>
+                <a:cs typeface="Calibri" pitchFamily="34" charset="-120"/>
+              </a:rPr>
+              <a:t>B. Inhibition of tubular creatinine secretion</a:t>
+            </a:r>
+            <a:endParaRPr lang="en-US" sz="1350" dirty="0"/>
+          </a:p>
+          <a:p>
+            <a:pPr algn="l" indent="0" marL="0">
+              <a:spcAft>
+                <a:spcPts val="600"/>
+              </a:spcAft>
+              <a:buNone/>
+            </a:pPr>
+            <a:r>
+              <a:rPr lang="en-US" sz="1350" dirty="0">
+                <a:solidFill>
+                  <a:srgbClr val="33444F"/>
+                </a:solidFill>
+                <a:latin typeface="Calibri" pitchFamily="34" charset="0"/>
+                <a:ea typeface="Calibri" pitchFamily="34" charset="-122"/>
+                <a:cs typeface="Calibri" pitchFamily="34" charset="-120"/>
+              </a:rPr>
+              <a:t>C. Hemoconcentration</a:t>
+            </a:r>
+            <a:endParaRPr lang="en-US" sz="1350" dirty="0"/>
+          </a:p>
+          <a:p>
+            <a:pPr algn="l" indent="0" marL="0">
+              <a:spcAft>
+                <a:spcPts val="600"/>
+              </a:spcAft>
+              <a:buNone/>
+            </a:pPr>
+            <a:r>
+              <a:rPr lang="en-US" sz="1350" dirty="0">
+                <a:solidFill>
+                  <a:srgbClr val="33444F"/>
+                </a:solidFill>
+                <a:latin typeface="Calibri" pitchFamily="34" charset="0"/>
+                <a:ea typeface="Calibri" pitchFamily="34" charset="-122"/>
+                <a:cs typeface="Calibri" pitchFamily="34" charset="-120"/>
+              </a:rPr>
+              <a:t>D. Assay cross-reactivity only</a:t>
+            </a:r>
+            <a:endParaRPr lang="en-US" sz="1350" dirty="0"/>
+          </a:p>
+          <a:p>
+            <a:pPr algn="l" indent="0" marL="0">
+              <a:spcAft>
+                <a:spcPts val="600"/>
+              </a:spcAft>
+              <a:buNone/>
+            </a:pPr>
+            <a:r>
+              <a:rPr lang="en-US" sz="1350" dirty="0">
+                <a:solidFill>
+                  <a:srgbClr val="33444F"/>
+                </a:solidFill>
+                <a:latin typeface="Calibri" pitchFamily="34" charset="0"/>
+                <a:ea typeface="Calibri" pitchFamily="34" charset="-122"/>
+                <a:cs typeface="Calibri" pitchFamily="34" charset="-120"/>
+              </a:rPr>
+              <a:t>E. Increased dietary protein</a:t>
+            </a:r>
+            <a:endParaRPr lang="en-US" sz="1350" dirty="0"/>
+          </a:p>
+        </p:txBody>
+      </p:sp>
+      <p:sp>
+        <p:nvSpPr>
+          <p:cNvPr id="6" name="Shape 4"/>
+          <p:cNvSpPr/>
+          <p:nvPr/>
+        </p:nvSpPr>
+        <p:spPr>
+          <a:xfrm>
+            <a:off x="7201632" y="2395728"/>
+            <a:ext cx="4423136" cy="3246120"/>
+          </a:xfrm>
+          <a:prstGeom prst="roundRect">
+            <a:avLst>
+              <a:gd name="adj" fmla="val 2535"/>
+            </a:avLst>
+          </a:prstGeom>
+          <a:solidFill>
+            <a:srgbClr val="E7EFFA"/>
+          </a:solidFill>
+          <a:ln/>
+          <a:effectLst>
+            <a:outerShdw sx="100000" sy="100000" kx="0" ky="0" algn="bl" rotWithShape="0" blurRad="88900" dist="25400" dir="5400000">
+              <a:srgbClr val="22303C">
+                <a:alpha val="12000"/>
+              </a:srgbClr>
+            </a:outerShdw>
+          </a:effectLst>
+        </p:spPr>
+        <p:txBody>
+          <a:bodyPr/>
+          <a:p/>
+        </p:txBody>
+      </p:sp>
+      <p:sp>
+        <p:nvSpPr>
+          <p:cNvPr id="7" name="Text 5"/>
+          <p:cNvSpPr/>
+          <p:nvPr/>
+        </p:nvSpPr>
+        <p:spPr>
+          <a:xfrm>
+            <a:off x="7439376" y="2578608"/>
+            <a:ext cx="3965936" cy="457200"/>
+          </a:xfrm>
+          <a:prstGeom prst="rect">
+            <a:avLst/>
+          </a:prstGeom>
+          <a:noFill/>
+          <a:ln/>
+        </p:spPr>
+        <p:txBody>
+          <a:bodyPr wrap="square" lIns="0" tIns="0" rIns="0" bIns="0" rtlCol="0" anchor="ctr"/>
+          <a:lstStyle/>
+          <a:p>
+            <a:pPr indent="0" marL="0">
+              <a:buNone/>
+            </a:pPr>
+            <a:r>
+              <a:rPr lang="en-US" sz="1500" b="1" dirty="0">
+                <a:solidFill>
+                  <a:srgbClr val="1565C0"/>
+                </a:solidFill>
+                <a:latin typeface="Calibri" pitchFamily="34" charset="0"/>
+                <a:ea typeface="Calibri" pitchFamily="34" charset="-122"/>
+                <a:cs typeface="Calibri" pitchFamily="34" charset="-120"/>
+              </a:rPr>
+              <a:t>ANSWER  </a:t>
+            </a:r>
+            <a:pPr indent="0" marL="0">
+              <a:buNone/>
+            </a:pPr>
+            <a:r>
+              <a:rPr lang="en-US" sz="1500" b="1" dirty="0">
+                <a:solidFill>
+                  <a:srgbClr val="1B2A38"/>
+                </a:solidFill>
+                <a:latin typeface="Calibri" pitchFamily="34" charset="0"/>
+                <a:ea typeface="Calibri" pitchFamily="34" charset="-122"/>
+                <a:cs typeface="Calibri" pitchFamily="34" charset="-120"/>
+              </a:rPr>
+              <a:t>B — Inhibition of tubular secretion</a:t>
+            </a:r>
+            <a:endParaRPr lang="en-US" sz="1500" dirty="0"/>
+          </a:p>
+        </p:txBody>
+      </p:sp>
+      <p:sp>
+        <p:nvSpPr>
+          <p:cNvPr id="8" name="Text 6"/>
+          <p:cNvSpPr/>
+          <p:nvPr/>
+        </p:nvSpPr>
+        <p:spPr>
+          <a:xfrm>
+            <a:off x="7439376" y="3127248"/>
+            <a:ext cx="3947648" cy="2377440"/>
+          </a:xfrm>
+          <a:prstGeom prst="rect">
+            <a:avLst/>
+          </a:prstGeom>
+          <a:noFill/>
+          <a:ln/>
+        </p:spPr>
+        <p:txBody>
+          <a:bodyPr wrap="square" lIns="0" tIns="0" rIns="0" bIns="0" rtlCol="0" anchor="t"/>
+          <a:lstStyle/>
+          <a:p>
+            <a:pPr algn="l" indent="0" marL="0">
+              <a:lnSpc>
+                <a:spcPct val="108000"/>
+              </a:lnSpc>
+              <a:buNone/>
+            </a:pPr>
+            <a:r>
+              <a:rPr lang="en-US" sz="1250" dirty="0">
+                <a:solidFill>
+                  <a:srgbClr val="33444F"/>
+                </a:solidFill>
+                <a:latin typeface="Calibri" pitchFamily="34" charset="0"/>
+                <a:ea typeface="Calibri" pitchFamily="34" charset="-122"/>
+                <a:cs typeface="Calibri" pitchFamily="34" charset="-120"/>
+              </a:rPr>
+              <a:t>Trimethoprim and cimetidine block tubular creatinine secretion, raising serum creatinine without changing GFR.</a:t>
+            </a:r>
+            <a:endParaRPr lang="en-US" sz="1250" dirty="0"/>
+          </a:p>
+        </p:txBody>
+      </p:sp>
+      <p:sp>
+        <p:nvSpPr>
+          <p:cNvPr id="9" name="Text 7"/>
+          <p:cNvSpPr/>
+          <p:nvPr/>
+        </p:nvSpPr>
+        <p:spPr>
+          <a:xfrm>
+            <a:off x="566928" y="6473952"/>
+            <a:ext cx="7772400" cy="274320"/>
+          </a:xfrm>
+          <a:prstGeom prst="rect">
+            <a:avLst/>
+          </a:prstGeom>
+          <a:noFill/>
+          <a:ln/>
+        </p:spPr>
+        <p:txBody>
+          <a:bodyPr wrap="square" lIns="0" tIns="0" rIns="0" bIns="0" rtlCol="0" anchor="ctr"/>
+          <a:lstStyle/>
+          <a:p>
+            <a:pPr algn="l" indent="0" marL="0">
+              <a:buNone/>
+            </a:pPr>
+            <a:r>
+              <a:rPr lang="en-US" sz="850" dirty="0">
+                <a:solidFill>
+                  <a:srgbClr val="9AA8B4"/>
+                </a:solidFill>
+                <a:latin typeface="Calibri" pitchFamily="34" charset="0"/>
+                <a:ea typeface="Calibri" pitchFamily="34" charset="-122"/>
+                <a:cs typeface="Calibri" pitchFamily="34" charset="-120"/>
+              </a:rPr>
+              <a:t>Makassed General Hospital  ·  Department of Laboratory Medicine</a:t>
+            </a:r>
+            <a:endParaRPr lang="en-US" sz="850" dirty="0"/>
+          </a:p>
+        </p:txBody>
+      </p:sp>
+      <p:sp>
+        <p:nvSpPr>
+          <p:cNvPr id="10" name="Text 8"/>
+          <p:cNvSpPr/>
+          <p:nvPr/>
+        </p:nvSpPr>
+        <p:spPr>
+          <a:xfrm>
+            <a:off x="9814255" y="6473952"/>
+            <a:ext cx="1828800" cy="274320"/>
+          </a:xfrm>
+          <a:prstGeom prst="rect">
+            <a:avLst/>
+          </a:prstGeom>
+          <a:noFill/>
+          <a:ln/>
+        </p:spPr>
+        <p:txBody>
+          <a:bodyPr wrap="square" lIns="0" tIns="0" rIns="0" bIns="0" rtlCol="0" anchor="ctr"/>
+          <a:lstStyle/>
+          <a:p>
+            <a:pPr algn="r" indent="0" marL="0">
+              <a:buNone/>
+            </a:pPr>
+            <a:r>
+              <a:rPr lang="en-US" sz="850" dirty="0">
+                <a:solidFill>
+                  <a:srgbClr val="9AA8B4"/>
+                </a:solidFill>
+                <a:latin typeface="Calibri" pitchFamily="34" charset="0"/>
+                <a:ea typeface="Calibri" pitchFamily="34" charset="-122"/>
+                <a:cs typeface="Calibri" pitchFamily="34" charset="-120"/>
+              </a:rPr>
+              <a:t>CP Lecture Series</a:t>
+            </a:r>
+            <a:pPr algn="r" indent="0" marL="0">
+              <a:buNone/>
+            </a:pPr>
+            <a:r>
+              <a:rPr lang="en-US" sz="850" dirty="0">
+                <a:solidFill>
+                  <a:srgbClr val="DCE4EC"/>
+                </a:solidFill>
+                <a:latin typeface="Calibri" pitchFamily="34" charset="0"/>
+                <a:ea typeface="Calibri" pitchFamily="34" charset="-122"/>
+                <a:cs typeface="Calibri" pitchFamily="34" charset="-120"/>
+              </a:rPr>
+              <a:t>   ·   </a:t>
+            </a:r>
+            <a:pPr algn="r" indent="0" marL="0">
+              <a:buNone/>
+            </a:pPr>
+            <a:r>
+              <a:rPr lang="en-US" sz="850" b="1" dirty="0">
+                <a:solidFill>
+                  <a:srgbClr val="1565C0"/>
+                </a:solidFill>
+                <a:latin typeface="Calibri" pitchFamily="34" charset="0"/>
+                <a:ea typeface="Calibri" pitchFamily="34" charset="-122"/>
+                <a:cs typeface="Calibri" pitchFamily="34" charset="-120"/>
+              </a:rPr>
+              <a:t>20</a:t>
+            </a:r>
+            <a:endParaRPr lang="en-US" sz="850" dirty="0"/>
+          </a:p>
+        </p:txBody>
+      </p:sp>
+    </p:spTree>
+  </p:cSld>
+  <p:clrMapOvr>
+    <a:masterClrMapping/>
+  </p:clrMapOvr>
+</p:sld>
+</file>
+
+<file path=ppt/slides/slide29.xml><?xml version="1.0" encoding="utf-8"?>
+<p:sld xmlns:a="http://schemas.openxmlformats.org/drawingml/2006/main" xmlns:p="http://schemas.openxmlformats.org/presentationml/2006/main" xmlns:r="http://schemas.openxmlformats.org/officeDocument/2006/relationships">
+  <p:cSld>
+    <p:spTree>
+      <p:nvGrpSpPr>
+        <p:cNvPr id="1" name=""/>
+        <p:cNvGrpSpPr/>
+        <p:nvPr/>
+      </p:nvGrpSpPr>
+      <p:grpSpPr/>
+      <p:sp>
+        <p:nvSpPr>
+          <p:cNvPr id="2" name="Text 0"/>
+          <p:cNvSpPr/>
+          <p:nvPr/>
+        </p:nvSpPr>
+        <p:spPr>
+          <a:xfrm>
+            <a:off x="566928" y="329184"/>
+            <a:ext cx="10515600" cy="310896"/>
+          </a:xfrm>
+          <a:prstGeom prst="rect">
+            <a:avLst/>
+          </a:prstGeom>
+          <a:noFill/>
+          <a:ln/>
+        </p:spPr>
+        <p:txBody>
+          <a:bodyPr wrap="square" lIns="0" tIns="0" rIns="0" bIns="0" rtlCol="0" anchor="ctr"/>
+          <a:lstStyle/>
+          <a:p>
+            <a:pPr algn="l" indent="0" marL="0">
+              <a:buNone/>
+            </a:pPr>
+            <a:r>
+              <a:rPr lang="en-US" sz="1100" b="1" spc="150" kern="0" dirty="0">
+                <a:solidFill>
+                  <a:srgbClr val="1565C0"/>
+                </a:solidFill>
+                <a:latin typeface="Calibri" pitchFamily="34" charset="0"/>
+                <a:ea typeface="Calibri" pitchFamily="34" charset="-122"/>
+                <a:cs typeface="Calibri" pitchFamily="34" charset="-120"/>
+              </a:rPr>
+              <a:t>CLINICAL CHEMISTRY   ·   BOARD REVIEW  ·  Q2</a:t>
+            </a:r>
+            <a:endParaRPr lang="en-US" sz="1100" dirty="0"/>
+          </a:p>
+        </p:txBody>
+      </p:sp>
+      <p:sp>
+        <p:nvSpPr>
+          <p:cNvPr id="3" name="Text 1"/>
+          <p:cNvSpPr/>
+          <p:nvPr/>
+        </p:nvSpPr>
+        <p:spPr>
+          <a:xfrm>
+            <a:off x="566928" y="713232"/>
+            <a:ext cx="11064240" cy="749808"/>
+          </a:xfrm>
+          <a:prstGeom prst="rect">
+            <a:avLst/>
+          </a:prstGeom>
+          <a:noFill/>
+          <a:ln/>
+        </p:spPr>
+        <p:txBody>
+          <a:bodyPr wrap="square" lIns="0" tIns="0" rIns="0" bIns="0" rtlCol="0" anchor="ctr"/>
+          <a:lstStyle/>
+          <a:p>
+            <a:pPr algn="l" indent="0" marL="0">
+              <a:buNone/>
+            </a:pPr>
+            <a:r>
+              <a:rPr lang="en-US" sz="2600" b="1" dirty="0">
+                <a:solidFill>
+                  <a:srgbClr val="0E3A5F"/>
+                </a:solidFill>
+                <a:latin typeface="Calibri" pitchFamily="34" charset="0"/>
+                <a:ea typeface="Calibri" pitchFamily="34" charset="-122"/>
+                <a:cs typeface="Calibri" pitchFamily="34" charset="-120"/>
+              </a:rPr>
+              <a:t>Board-Style Review</a:t>
+            </a:r>
+            <a:endParaRPr lang="en-US" sz="2600" dirty="0"/>
+          </a:p>
+        </p:txBody>
+      </p:sp>
+      <p:sp>
+        <p:nvSpPr>
+          <p:cNvPr id="4" name="Text 2"/>
+          <p:cNvSpPr/>
+          <p:nvPr/>
+        </p:nvSpPr>
+        <p:spPr>
+          <a:xfrm>
+            <a:off x="566928" y="1417320"/>
+            <a:ext cx="11057839" cy="914400"/>
+          </a:xfrm>
+          <a:prstGeom prst="rect">
+            <a:avLst/>
+          </a:prstGeom>
+          <a:noFill/>
+          <a:ln/>
+        </p:spPr>
+        <p:txBody>
+          <a:bodyPr wrap="square" lIns="0" tIns="0" rIns="0" bIns="0" rtlCol="0" anchor="t"/>
+          <a:lstStyle/>
+          <a:p>
+            <a:pPr algn="l" indent="0" marL="0">
+              <a:lnSpc>
+                <a:spcPct val="105000"/>
+              </a:lnSpc>
+              <a:buNone/>
+            </a:pPr>
+            <a:r>
+              <a:rPr lang="en-US" sz="1450" b="1" dirty="0">
+                <a:solidFill>
+                  <a:srgbClr val="1B2A38"/>
+                </a:solidFill>
+                <a:latin typeface="Calibri" pitchFamily="34" charset="0"/>
+                <a:ea typeface="Calibri" pitchFamily="34" charset="-122"/>
+                <a:cs typeface="Calibri" pitchFamily="34" charset="-120"/>
+              </a:rPr>
+              <a:t>An elevated ALP with a normal GGT most likely originates from:</a:t>
+            </a:r>
+            <a:endParaRPr lang="en-US" sz="1450" dirty="0"/>
+          </a:p>
+        </p:txBody>
+      </p:sp>
+      <p:sp>
+        <p:nvSpPr>
+          <p:cNvPr id="5" name="Text 3"/>
+          <p:cNvSpPr/>
+          <p:nvPr/>
+        </p:nvSpPr>
+        <p:spPr>
+          <a:xfrm>
+            <a:off x="658368" y="2395728"/>
+            <a:ext cx="6192390" cy="3017520"/>
+          </a:xfrm>
+          <a:prstGeom prst="rect">
+            <a:avLst/>
+          </a:prstGeom>
+          <a:noFill/>
+          <a:ln/>
+        </p:spPr>
+        <p:txBody>
+          <a:bodyPr wrap="square" lIns="0" tIns="0" rIns="0" bIns="0" rtlCol="0" anchor="t"/>
+          <a:lstStyle/>
+          <a:p>
+            <a:pPr algn="l" indent="0" marL="0">
+              <a:spcAft>
+                <a:spcPts val="600"/>
+              </a:spcAft>
+              <a:buNone/>
+            </a:pPr>
+            <a:r>
+              <a:rPr lang="en-US" sz="1350" dirty="0">
+                <a:solidFill>
+                  <a:srgbClr val="33444F"/>
+                </a:solidFill>
+                <a:latin typeface="Calibri" pitchFamily="34" charset="0"/>
+                <a:ea typeface="Calibri" pitchFamily="34" charset="-122"/>
+                <a:cs typeface="Calibri" pitchFamily="34" charset="-120"/>
+              </a:rPr>
+              <a:t>A. Bile ducts</a:t>
+            </a:r>
+            <a:endParaRPr lang="en-US" sz="1350" dirty="0"/>
+          </a:p>
+          <a:p>
+            <a:pPr algn="l" indent="0" marL="0">
+              <a:spcAft>
+                <a:spcPts val="600"/>
+              </a:spcAft>
+              <a:buNone/>
+            </a:pPr>
+            <a:r>
+              <a:rPr lang="en-US" sz="1350" dirty="0">
+                <a:solidFill>
+                  <a:srgbClr val="33444F"/>
+                </a:solidFill>
+                <a:latin typeface="Calibri" pitchFamily="34" charset="0"/>
+                <a:ea typeface="Calibri" pitchFamily="34" charset="-122"/>
+                <a:cs typeface="Calibri" pitchFamily="34" charset="-120"/>
+              </a:rPr>
+              <a:t>B. Liver</a:t>
+            </a:r>
+            <a:endParaRPr lang="en-US" sz="1350" dirty="0"/>
+          </a:p>
+          <a:p>
+            <a:pPr algn="l" indent="0" marL="0">
+              <a:spcAft>
+                <a:spcPts val="600"/>
+              </a:spcAft>
+              <a:buNone/>
+            </a:pPr>
+            <a:r>
+              <a:rPr lang="en-US" sz="1350" b="1" dirty="0">
+                <a:solidFill>
+                  <a:srgbClr val="0D4A92"/>
+                </a:solidFill>
+                <a:latin typeface="Calibri" pitchFamily="34" charset="0"/>
+                <a:ea typeface="Calibri" pitchFamily="34" charset="-122"/>
+                <a:cs typeface="Calibri" pitchFamily="34" charset="-120"/>
+              </a:rPr>
+              <a:t>C. Bone (or placenta/intestine)</a:t>
+            </a:r>
+            <a:endParaRPr lang="en-US" sz="1350" dirty="0"/>
+          </a:p>
+          <a:p>
+            <a:pPr algn="l" indent="0" marL="0">
+              <a:spcAft>
+                <a:spcPts val="600"/>
+              </a:spcAft>
+              <a:buNone/>
+            </a:pPr>
+            <a:r>
+              <a:rPr lang="en-US" sz="1350" dirty="0">
+                <a:solidFill>
+                  <a:srgbClr val="33444F"/>
+                </a:solidFill>
+                <a:latin typeface="Calibri" pitchFamily="34" charset="0"/>
+                <a:ea typeface="Calibri" pitchFamily="34" charset="-122"/>
+                <a:cs typeface="Calibri" pitchFamily="34" charset="-120"/>
+              </a:rPr>
+              <a:t>D. Red cells</a:t>
+            </a:r>
+            <a:endParaRPr lang="en-US" sz="1350" dirty="0"/>
+          </a:p>
+          <a:p>
+            <a:pPr algn="l" indent="0" marL="0">
+              <a:spcAft>
+                <a:spcPts val="600"/>
+              </a:spcAft>
+              <a:buNone/>
+            </a:pPr>
+            <a:r>
+              <a:rPr lang="en-US" sz="1350" dirty="0">
+                <a:solidFill>
+                  <a:srgbClr val="33444F"/>
+                </a:solidFill>
+                <a:latin typeface="Calibri" pitchFamily="34" charset="0"/>
+                <a:ea typeface="Calibri" pitchFamily="34" charset="-122"/>
+                <a:cs typeface="Calibri" pitchFamily="34" charset="-120"/>
+              </a:rPr>
+              <a:t>E. Muscle</a:t>
+            </a:r>
+            <a:endParaRPr lang="en-US" sz="1350" dirty="0"/>
+          </a:p>
+        </p:txBody>
+      </p:sp>
+      <p:sp>
+        <p:nvSpPr>
+          <p:cNvPr id="6" name="Shape 4"/>
+          <p:cNvSpPr/>
+          <p:nvPr/>
+        </p:nvSpPr>
+        <p:spPr>
+          <a:xfrm>
+            <a:off x="7201632" y="2395728"/>
+            <a:ext cx="4423136" cy="3246120"/>
+          </a:xfrm>
+          <a:prstGeom prst="roundRect">
+            <a:avLst>
+              <a:gd name="adj" fmla="val 2535"/>
+            </a:avLst>
+          </a:prstGeom>
+          <a:solidFill>
+            <a:srgbClr val="E7EFFA"/>
+          </a:solidFill>
+          <a:ln/>
+          <a:effectLst>
+            <a:outerShdw sx="100000" sy="100000" kx="0" ky="0" algn="bl" rotWithShape="0" blurRad="88900" dist="25400" dir="5400000">
+              <a:srgbClr val="22303C">
+                <a:alpha val="12000"/>
+              </a:srgbClr>
+            </a:outerShdw>
+          </a:effectLst>
+        </p:spPr>
+        <p:txBody>
+          <a:bodyPr/>
+          <a:p/>
+        </p:txBody>
+      </p:sp>
+      <p:sp>
+        <p:nvSpPr>
+          <p:cNvPr id="7" name="Text 5"/>
+          <p:cNvSpPr/>
+          <p:nvPr/>
+        </p:nvSpPr>
+        <p:spPr>
+          <a:xfrm>
+            <a:off x="7439376" y="2578608"/>
+            <a:ext cx="3965936" cy="457200"/>
+          </a:xfrm>
+          <a:prstGeom prst="rect">
+            <a:avLst/>
+          </a:prstGeom>
+          <a:noFill/>
+          <a:ln/>
+        </p:spPr>
+        <p:txBody>
+          <a:bodyPr wrap="square" lIns="0" tIns="0" rIns="0" bIns="0" rtlCol="0" anchor="ctr"/>
+          <a:lstStyle/>
+          <a:p>
+            <a:pPr indent="0" marL="0">
+              <a:buNone/>
+            </a:pPr>
+            <a:r>
+              <a:rPr lang="en-US" sz="1500" b="1" dirty="0">
+                <a:solidFill>
+                  <a:srgbClr val="1565C0"/>
+                </a:solidFill>
+                <a:latin typeface="Calibri" pitchFamily="34" charset="0"/>
+                <a:ea typeface="Calibri" pitchFamily="34" charset="-122"/>
+                <a:cs typeface="Calibri" pitchFamily="34" charset="-120"/>
+              </a:rPr>
+              <a:t>ANSWER  </a:t>
+            </a:r>
+            <a:pPr indent="0" marL="0">
+              <a:buNone/>
+            </a:pPr>
+            <a:r>
+              <a:rPr lang="en-US" sz="1500" b="1" dirty="0">
+                <a:solidFill>
+                  <a:srgbClr val="1B2A38"/>
+                </a:solidFill>
+                <a:latin typeface="Calibri" pitchFamily="34" charset="0"/>
+                <a:ea typeface="Calibri" pitchFamily="34" charset="-122"/>
+                <a:cs typeface="Calibri" pitchFamily="34" charset="-120"/>
+              </a:rPr>
+              <a:t>C — Bone (non-hepatic)</a:t>
+            </a:r>
+            <a:endParaRPr lang="en-US" sz="1500" dirty="0"/>
+          </a:p>
+        </p:txBody>
+      </p:sp>
+      <p:sp>
+        <p:nvSpPr>
+          <p:cNvPr id="8" name="Text 6"/>
+          <p:cNvSpPr/>
+          <p:nvPr/>
+        </p:nvSpPr>
+        <p:spPr>
+          <a:xfrm>
+            <a:off x="7439376" y="3127248"/>
+            <a:ext cx="3947648" cy="2377440"/>
+          </a:xfrm>
+          <a:prstGeom prst="rect">
+            <a:avLst/>
+          </a:prstGeom>
+          <a:noFill/>
+          <a:ln/>
+        </p:spPr>
+        <p:txBody>
+          <a:bodyPr wrap="square" lIns="0" tIns="0" rIns="0" bIns="0" rtlCol="0" anchor="t"/>
+          <a:lstStyle/>
+          <a:p>
+            <a:pPr algn="l" indent="0" marL="0">
+              <a:lnSpc>
+                <a:spcPct val="108000"/>
+              </a:lnSpc>
+              <a:buNone/>
+            </a:pPr>
+            <a:r>
+              <a:rPr lang="en-US" sz="1250" dirty="0">
+                <a:solidFill>
+                  <a:srgbClr val="33444F"/>
+                </a:solidFill>
+                <a:latin typeface="Calibri" pitchFamily="34" charset="0"/>
+                <a:ea typeface="Calibri" pitchFamily="34" charset="-122"/>
+                <a:cs typeface="Calibri" pitchFamily="34" charset="-120"/>
+              </a:rPr>
+              <a:t>GGT confirms a hepatic source of ALP; a normal GGT points to bone, placenta, or intestine.</a:t>
+            </a:r>
+            <a:endParaRPr lang="en-US" sz="1250" dirty="0"/>
+          </a:p>
+        </p:txBody>
+      </p:sp>
+      <p:sp>
+        <p:nvSpPr>
+          <p:cNvPr id="9" name="Text 7"/>
+          <p:cNvSpPr/>
+          <p:nvPr/>
+        </p:nvSpPr>
+        <p:spPr>
+          <a:xfrm>
+            <a:off x="566928" y="6473952"/>
+            <a:ext cx="7772400" cy="274320"/>
+          </a:xfrm>
+          <a:prstGeom prst="rect">
+            <a:avLst/>
+          </a:prstGeom>
+          <a:noFill/>
+          <a:ln/>
+        </p:spPr>
+        <p:txBody>
+          <a:bodyPr wrap="square" lIns="0" tIns="0" rIns="0" bIns="0" rtlCol="0" anchor="ctr"/>
+          <a:lstStyle/>
+          <a:p>
+            <a:pPr algn="l" indent="0" marL="0">
+              <a:buNone/>
+            </a:pPr>
+            <a:r>
+              <a:rPr lang="en-US" sz="850" dirty="0">
+                <a:solidFill>
+                  <a:srgbClr val="9AA8B4"/>
+                </a:solidFill>
+                <a:latin typeface="Calibri" pitchFamily="34" charset="0"/>
+                <a:ea typeface="Calibri" pitchFamily="34" charset="-122"/>
+                <a:cs typeface="Calibri" pitchFamily="34" charset="-120"/>
+              </a:rPr>
+              <a:t>Makassed General Hospital  ·  Department of Laboratory Medicine</a:t>
+            </a:r>
+            <a:endParaRPr lang="en-US" sz="850" dirty="0"/>
+          </a:p>
+        </p:txBody>
+      </p:sp>
+      <p:sp>
+        <p:nvSpPr>
+          <p:cNvPr id="10" name="Text 8"/>
+          <p:cNvSpPr/>
+          <p:nvPr/>
+        </p:nvSpPr>
+        <p:spPr>
+          <a:xfrm>
+            <a:off x="9814255" y="6473952"/>
+            <a:ext cx="1828800" cy="274320"/>
+          </a:xfrm>
+          <a:prstGeom prst="rect">
+            <a:avLst/>
+          </a:prstGeom>
+          <a:noFill/>
+          <a:ln/>
+        </p:spPr>
+        <p:txBody>
+          <a:bodyPr wrap="square" lIns="0" tIns="0" rIns="0" bIns="0" rtlCol="0" anchor="ctr"/>
+          <a:lstStyle/>
+          <a:p>
+            <a:pPr algn="r" indent="0" marL="0">
+              <a:buNone/>
+            </a:pPr>
+            <a:r>
+              <a:rPr lang="en-US" sz="850" dirty="0">
+                <a:solidFill>
+                  <a:srgbClr val="9AA8B4"/>
+                </a:solidFill>
+                <a:latin typeface="Calibri" pitchFamily="34" charset="0"/>
+                <a:ea typeface="Calibri" pitchFamily="34" charset="-122"/>
+                <a:cs typeface="Calibri" pitchFamily="34" charset="-120"/>
+              </a:rPr>
+              <a:t>CP Lecture Series</a:t>
+            </a:r>
+            <a:pPr algn="r" indent="0" marL="0">
+              <a:buNone/>
+            </a:pPr>
+            <a:r>
+              <a:rPr lang="en-US" sz="850" dirty="0">
+                <a:solidFill>
+                  <a:srgbClr val="DCE4EC"/>
+                </a:solidFill>
+                <a:latin typeface="Calibri" pitchFamily="34" charset="0"/>
+                <a:ea typeface="Calibri" pitchFamily="34" charset="-122"/>
+                <a:cs typeface="Calibri" pitchFamily="34" charset="-120"/>
+              </a:rPr>
+              <a:t>   ·   </a:t>
+            </a:r>
+            <a:pPr algn="r" indent="0" marL="0">
+              <a:buNone/>
+            </a:pPr>
+            <a:r>
+              <a:rPr lang="en-US" sz="850" b="1" dirty="0">
+                <a:solidFill>
+                  <a:srgbClr val="1565C0"/>
+                </a:solidFill>
+                <a:latin typeface="Calibri" pitchFamily="34" charset="0"/>
+                <a:ea typeface="Calibri" pitchFamily="34" charset="-122"/>
+                <a:cs typeface="Calibri" pitchFamily="34" charset="-120"/>
+              </a:rPr>
+              <a:t>19</a:t>
+            </a:r>
+            <a:endParaRPr lang="en-US" sz="850" dirty="0"/>
+          </a:p>
+        </p:txBody>
+      </p:sp>
+    </p:spTree>
+  </p:cSld>
+  <p:clrMapOvr>
+    <a:masterClrMapping/>
+  </p:clrMapOvr>
+</p:sld>
+</file>
+
 <file path=ppt/slides/slide3.xml><?xml version="1.0" encoding="utf-8"?>
 <p:sld xmlns:a="http://schemas.openxmlformats.org/drawingml/2006/main" xmlns:r="http://schemas.openxmlformats.org/officeDocument/2006/relationships" xmlns:p="http://schemas.openxmlformats.org/presentationml/2006/main">
   <p:cSld name="Slide 3">
@@ -12204,6 +13338,10 @@
             </a:outerShdw>
           </a:effectLst>
         </p:spPr>
+        <p:txBody>
+          <a:bodyPr/>
+          <a:p/>
+        </p:txBody>
       </p:sp>
       <p:sp>
         <p:nvSpPr>
@@ -12231,6 +13369,10 @@
             </a:outerShdw>
           </a:effectLst>
         </p:spPr>
+        <p:txBody>
+          <a:bodyPr/>
+          <a:p/>
+        </p:txBody>
       </p:sp>
       <p:sp>
         <p:nvSpPr>
@@ -12338,6 +13480,10 @@
             </a:outerShdw>
           </a:effectLst>
         </p:spPr>
+        <p:txBody>
+          <a:bodyPr/>
+          <a:p/>
+        </p:txBody>
       </p:sp>
       <p:sp>
         <p:nvSpPr>
@@ -12365,6 +13511,10 @@
             </a:outerShdw>
           </a:effectLst>
         </p:spPr>
+        <p:txBody>
+          <a:bodyPr/>
+          <a:p/>
+        </p:txBody>
       </p:sp>
       <p:sp>
         <p:nvSpPr>
@@ -12472,6 +13622,10 @@
             </a:outerShdw>
           </a:effectLst>
         </p:spPr>
+        <p:txBody>
+          <a:bodyPr/>
+          <a:p/>
+        </p:txBody>
       </p:sp>
       <p:sp>
         <p:nvSpPr>
@@ -12499,6 +13653,10 @@
             </a:outerShdw>
           </a:effectLst>
         </p:spPr>
+        <p:txBody>
+          <a:bodyPr/>
+          <a:p/>
+        </p:txBody>
       </p:sp>
       <p:sp>
         <p:nvSpPr>
@@ -12606,6 +13764,10 @@
             </a:outerShdw>
           </a:effectLst>
         </p:spPr>
+        <p:txBody>
+          <a:bodyPr/>
+          <a:p/>
+        </p:txBody>
       </p:sp>
       <p:sp>
         <p:nvSpPr>
@@ -12633,6 +13795,10 @@
             </a:outerShdw>
           </a:effectLst>
         </p:spPr>
+        <p:txBody>
+          <a:bodyPr/>
+          <a:p/>
+        </p:txBody>
       </p:sp>
       <p:sp>
         <p:nvSpPr>
@@ -12740,6 +13906,10 @@
             </a:outerShdw>
           </a:effectLst>
         </p:spPr>
+        <p:txBody>
+          <a:bodyPr/>
+          <a:p/>
+        </p:txBody>
       </p:sp>
       <p:sp>
         <p:nvSpPr>
@@ -12767,6 +13937,10 @@
             </a:outerShdw>
           </a:effectLst>
         </p:spPr>
+        <p:txBody>
+          <a:bodyPr/>
+          <a:p/>
+        </p:txBody>
       </p:sp>
       <p:sp>
         <p:nvSpPr>
@@ -12874,6 +14048,10 @@
             </a:outerShdw>
           </a:effectLst>
         </p:spPr>
+        <p:txBody>
+          <a:bodyPr/>
+          <a:p/>
+        </p:txBody>
       </p:sp>
       <p:sp>
         <p:nvSpPr>
@@ -12901,6 +14079,10 @@
             </a:outerShdw>
           </a:effectLst>
         </p:spPr>
+        <p:txBody>
+          <a:bodyPr/>
+          <a:p/>
+        </p:txBody>
       </p:sp>
       <p:sp>
         <p:nvSpPr>
@@ -13081,6 +14263,500 @@
                 <a:cs typeface="Calibri" pitchFamily="34" charset="-120"/>
               </a:rPr>
               <a:t>3</a:t>
+            </a:r>
+            <a:endParaRPr lang="en-US" sz="850" dirty="0"/>
+          </a:p>
+        </p:txBody>
+      </p:sp>
+    </p:spTree>
+  </p:cSld>
+  <p:clrMapOvr>
+    <a:masterClrMapping/>
+  </p:clrMapOvr>
+</p:sld>
+</file>
+
+<file path=ppt/slides/slide30.xml><?xml version="1.0" encoding="utf-8"?>
+<p:sld xmlns:a="http://schemas.openxmlformats.org/drawingml/2006/main" xmlns:p="http://schemas.openxmlformats.org/presentationml/2006/main" xmlns:r="http://schemas.openxmlformats.org/officeDocument/2006/relationships">
+  <p:cSld>
+    <p:spTree>
+      <p:nvGrpSpPr>
+        <p:cNvPr id="1" name=""/>
+        <p:cNvGrpSpPr/>
+        <p:nvPr/>
+      </p:nvGrpSpPr>
+      <p:grpSpPr/>
+      <p:sp>
+        <p:nvSpPr>
+          <p:cNvPr id="2" name="Text 0"/>
+          <p:cNvSpPr/>
+          <p:nvPr/>
+        </p:nvSpPr>
+        <p:spPr>
+          <a:xfrm>
+            <a:off x="566928" y="329184"/>
+            <a:ext cx="10515600" cy="310896"/>
+          </a:xfrm>
+          <a:prstGeom prst="rect">
+            <a:avLst/>
+          </a:prstGeom>
+          <a:noFill/>
+          <a:ln/>
+        </p:spPr>
+        <p:txBody>
+          <a:bodyPr wrap="square" lIns="0" tIns="0" rIns="0" bIns="0" rtlCol="0" anchor="ctr"/>
+          <a:lstStyle/>
+          <a:p>
+            <a:pPr algn="l" indent="0" marL="0">
+              <a:buNone/>
+            </a:pPr>
+            <a:r>
+              <a:rPr lang="en-US" sz="1100" b="1" spc="150" kern="0" dirty="0">
+                <a:solidFill>
+                  <a:srgbClr val="1565C0"/>
+                </a:solidFill>
+                <a:latin typeface="Calibri" pitchFamily="34" charset="0"/>
+                <a:ea typeface="Calibri" pitchFamily="34" charset="-122"/>
+                <a:cs typeface="Calibri" pitchFamily="34" charset="-120"/>
+              </a:rPr>
+              <a:t>CLINICAL CHEMISTRY   ·   BOARD REVIEW  ·  Q1</a:t>
+            </a:r>
+            <a:endParaRPr lang="en-US" sz="1100" dirty="0"/>
+          </a:p>
+        </p:txBody>
+      </p:sp>
+      <p:sp>
+        <p:nvSpPr>
+          <p:cNvPr id="3" name="Text 1"/>
+          <p:cNvSpPr/>
+          <p:nvPr/>
+        </p:nvSpPr>
+        <p:spPr>
+          <a:xfrm>
+            <a:off x="566928" y="713232"/>
+            <a:ext cx="11064240" cy="749808"/>
+          </a:xfrm>
+          <a:prstGeom prst="rect">
+            <a:avLst/>
+          </a:prstGeom>
+          <a:noFill/>
+          <a:ln/>
+        </p:spPr>
+        <p:txBody>
+          <a:bodyPr wrap="square" lIns="0" tIns="0" rIns="0" bIns="0" rtlCol="0" anchor="ctr"/>
+          <a:lstStyle/>
+          <a:p>
+            <a:pPr algn="l" indent="0" marL="0">
+              <a:buNone/>
+            </a:pPr>
+            <a:r>
+              <a:rPr lang="en-US" sz="2600" b="1" dirty="0">
+                <a:solidFill>
+                  <a:srgbClr val="0E3A5F"/>
+                </a:solidFill>
+                <a:latin typeface="Calibri" pitchFamily="34" charset="0"/>
+                <a:ea typeface="Calibri" pitchFamily="34" charset="-122"/>
+                <a:cs typeface="Calibri" pitchFamily="34" charset="-120"/>
+              </a:rPr>
+              <a:t>Board-Style Review</a:t>
+            </a:r>
+            <a:endParaRPr lang="en-US" sz="2600" dirty="0"/>
+          </a:p>
+        </p:txBody>
+      </p:sp>
+      <p:sp>
+        <p:nvSpPr>
+          <p:cNvPr id="4" name="Text 2"/>
+          <p:cNvSpPr/>
+          <p:nvPr/>
+        </p:nvSpPr>
+        <p:spPr>
+          <a:xfrm>
+            <a:off x="566928" y="1417320"/>
+            <a:ext cx="11057839" cy="914400"/>
+          </a:xfrm>
+          <a:prstGeom prst="rect">
+            <a:avLst/>
+          </a:prstGeom>
+          <a:noFill/>
+          <a:ln/>
+        </p:spPr>
+        <p:txBody>
+          <a:bodyPr wrap="square" lIns="0" tIns="0" rIns="0" bIns="0" rtlCol="0" anchor="t"/>
+          <a:lstStyle/>
+          <a:p>
+            <a:pPr algn="l" indent="0" marL="0">
+              <a:lnSpc>
+                <a:spcPct val="105000"/>
+              </a:lnSpc>
+              <a:buNone/>
+            </a:pPr>
+            <a:r>
+              <a:rPr lang="en-US" sz="1450" b="1" dirty="0">
+                <a:solidFill>
+                  <a:srgbClr val="1B2A38"/>
+                </a:solidFill>
+                <a:latin typeface="Calibri" pitchFamily="34" charset="0"/>
+                <a:ea typeface="Calibri" pitchFamily="34" charset="-122"/>
+                <a:cs typeface="Calibri" pitchFamily="34" charset="-120"/>
+              </a:rPr>
+              <a:t>Which best distinguishes acute MI from chronic troponin elevation?</a:t>
+            </a:r>
+            <a:endParaRPr lang="en-US" sz="1450" dirty="0"/>
+          </a:p>
+        </p:txBody>
+      </p:sp>
+      <p:sp>
+        <p:nvSpPr>
+          <p:cNvPr id="5" name="Text 3"/>
+          <p:cNvSpPr/>
+          <p:nvPr/>
+        </p:nvSpPr>
+        <p:spPr>
+          <a:xfrm>
+            <a:off x="658368" y="2395728"/>
+            <a:ext cx="6192390" cy="3017520"/>
+          </a:xfrm>
+          <a:prstGeom prst="rect">
+            <a:avLst/>
+          </a:prstGeom>
+          <a:noFill/>
+          <a:ln/>
+        </p:spPr>
+        <p:txBody>
+          <a:bodyPr wrap="square" lIns="0" tIns="0" rIns="0" bIns="0" rtlCol="0" anchor="t"/>
+          <a:lstStyle/>
+          <a:p>
+            <a:pPr algn="l" indent="0" marL="0">
+              <a:spcAft>
+                <a:spcPts val="600"/>
+              </a:spcAft>
+              <a:buNone/>
+            </a:pPr>
+            <a:r>
+              <a:rPr lang="en-US" sz="1350" dirty="0">
+                <a:solidFill>
+                  <a:srgbClr val="33444F"/>
+                </a:solidFill>
+                <a:latin typeface="Calibri" pitchFamily="34" charset="0"/>
+                <a:ea typeface="Calibri" pitchFamily="34" charset="-122"/>
+                <a:cs typeface="Calibri" pitchFamily="34" charset="-120"/>
+              </a:rPr>
+              <a:t>A. Any value above the URL</a:t>
+            </a:r>
+            <a:endParaRPr lang="en-US" sz="1350" dirty="0"/>
+          </a:p>
+          <a:p>
+            <a:pPr algn="l" indent="0" marL="0">
+              <a:spcAft>
+                <a:spcPts val="600"/>
+              </a:spcAft>
+              <a:buNone/>
+            </a:pPr>
+            <a:r>
+              <a:rPr lang="en-US" sz="1350" b="1" dirty="0">
+                <a:solidFill>
+                  <a:srgbClr val="0D4A92"/>
+                </a:solidFill>
+                <a:latin typeface="Calibri" pitchFamily="34" charset="0"/>
+                <a:ea typeface="Calibri" pitchFamily="34" charset="-122"/>
+                <a:cs typeface="Calibri" pitchFamily="34" charset="-120"/>
+              </a:rPr>
+              <a:t>B. A dynamic rise and/or fall on serial testing</a:t>
+            </a:r>
+            <a:endParaRPr lang="en-US" sz="1350" dirty="0"/>
+          </a:p>
+          <a:p>
+            <a:pPr algn="l" indent="0" marL="0">
+              <a:spcAft>
+                <a:spcPts val="600"/>
+              </a:spcAft>
+              <a:buNone/>
+            </a:pPr>
+            <a:r>
+              <a:rPr lang="en-US" sz="1350" dirty="0">
+                <a:solidFill>
+                  <a:srgbClr val="33444F"/>
+                </a:solidFill>
+                <a:latin typeface="Calibri" pitchFamily="34" charset="0"/>
+                <a:ea typeface="Calibri" pitchFamily="34" charset="-122"/>
+                <a:cs typeface="Calibri" pitchFamily="34" charset="-120"/>
+              </a:rPr>
+              <a:t>C. A single very high value</a:t>
+            </a:r>
+            <a:endParaRPr lang="en-US" sz="1350" dirty="0"/>
+          </a:p>
+          <a:p>
+            <a:pPr algn="l" indent="0" marL="0">
+              <a:spcAft>
+                <a:spcPts val="600"/>
+              </a:spcAft>
+              <a:buNone/>
+            </a:pPr>
+            <a:r>
+              <a:rPr lang="en-US" sz="1350" dirty="0">
+                <a:solidFill>
+                  <a:srgbClr val="33444F"/>
+                </a:solidFill>
+                <a:latin typeface="Calibri" pitchFamily="34" charset="0"/>
+                <a:ea typeface="Calibri" pitchFamily="34" charset="-122"/>
+                <a:cs typeface="Calibri" pitchFamily="34" charset="-120"/>
+              </a:rPr>
+              <a:t>D. Coexisting high BNP</a:t>
+            </a:r>
+            <a:endParaRPr lang="en-US" sz="1350" dirty="0"/>
+          </a:p>
+          <a:p>
+            <a:pPr algn="l" indent="0" marL="0">
+              <a:spcAft>
+                <a:spcPts val="600"/>
+              </a:spcAft>
+              <a:buNone/>
+            </a:pPr>
+            <a:r>
+              <a:rPr lang="en-US" sz="1350" dirty="0">
+                <a:solidFill>
+                  <a:srgbClr val="33444F"/>
+                </a:solidFill>
+                <a:latin typeface="Calibri" pitchFamily="34" charset="0"/>
+                <a:ea typeface="Calibri" pitchFamily="34" charset="-122"/>
+                <a:cs typeface="Calibri" pitchFamily="34" charset="-120"/>
+              </a:rPr>
+              <a:t>E. Elevated creatinine</a:t>
+            </a:r>
+            <a:endParaRPr lang="en-US" sz="1350" dirty="0"/>
+          </a:p>
+        </p:txBody>
+      </p:sp>
+      <p:sp>
+        <p:nvSpPr>
+          <p:cNvPr id="6" name="Shape 4"/>
+          <p:cNvSpPr/>
+          <p:nvPr/>
+        </p:nvSpPr>
+        <p:spPr>
+          <a:xfrm>
+            <a:off x="7201632" y="2395728"/>
+            <a:ext cx="4423136" cy="3246120"/>
+          </a:xfrm>
+          <a:prstGeom prst="roundRect">
+            <a:avLst>
+              <a:gd name="adj" fmla="val 2535"/>
+            </a:avLst>
+          </a:prstGeom>
+          <a:solidFill>
+            <a:srgbClr val="E7EFFA"/>
+          </a:solidFill>
+          <a:ln/>
+          <a:effectLst>
+            <a:outerShdw sx="100000" sy="100000" kx="0" ky="0" algn="bl" rotWithShape="0" blurRad="88900" dist="25400" dir="5400000">
+              <a:srgbClr val="22303C">
+                <a:alpha val="12000"/>
+              </a:srgbClr>
+            </a:outerShdw>
+          </a:effectLst>
+        </p:spPr>
+        <p:txBody>
+          <a:bodyPr/>
+          <a:p/>
+        </p:txBody>
+      </p:sp>
+      <p:sp>
+        <p:nvSpPr>
+          <p:cNvPr id="7" name="Text 5"/>
+          <p:cNvSpPr/>
+          <p:nvPr/>
+        </p:nvSpPr>
+        <p:spPr>
+          <a:xfrm>
+            <a:off x="7439376" y="2578608"/>
+            <a:ext cx="3965936" cy="457200"/>
+          </a:xfrm>
+          <a:prstGeom prst="rect">
+            <a:avLst/>
+          </a:prstGeom>
+          <a:noFill/>
+          <a:ln/>
+        </p:spPr>
+        <p:txBody>
+          <a:bodyPr wrap="square" lIns="0" tIns="0" rIns="0" bIns="0" rtlCol="0" anchor="ctr"/>
+          <a:lstStyle/>
+          <a:p>
+            <a:pPr indent="0" marL="0">
+              <a:buNone/>
+            </a:pPr>
+            <a:r>
+              <a:rPr lang="en-US" sz="1500" b="1" dirty="0">
+                <a:solidFill>
+                  <a:srgbClr val="1565C0"/>
+                </a:solidFill>
+                <a:latin typeface="Calibri" pitchFamily="34" charset="0"/>
+                <a:ea typeface="Calibri" pitchFamily="34" charset="-122"/>
+                <a:cs typeface="Calibri" pitchFamily="34" charset="-120"/>
+              </a:rPr>
+              <a:t>ANSWER  </a:t>
+            </a:r>
+            <a:pPr indent="0" marL="0">
+              <a:buNone/>
+            </a:pPr>
+            <a:r>
+              <a:rPr lang="en-US" sz="1500" b="1" dirty="0">
+                <a:solidFill>
+                  <a:srgbClr val="1B2A38"/>
+                </a:solidFill>
+                <a:latin typeface="Calibri" pitchFamily="34" charset="0"/>
+                <a:ea typeface="Calibri" pitchFamily="34" charset="-122"/>
+                <a:cs typeface="Calibri" pitchFamily="34" charset="-120"/>
+              </a:rPr>
+              <a:t>B — A dynamic rise/fall on serial testing</a:t>
+            </a:r>
+            <a:endParaRPr lang="en-US" sz="1500" dirty="0"/>
+          </a:p>
+        </p:txBody>
+      </p:sp>
+      <p:sp>
+        <p:nvSpPr>
+          <p:cNvPr id="8" name="Text 6"/>
+          <p:cNvSpPr/>
+          <p:nvPr/>
+        </p:nvSpPr>
+        <p:spPr>
+          <a:xfrm>
+            <a:off x="7439376" y="3127248"/>
+            <a:ext cx="3947648" cy="2377440"/>
+          </a:xfrm>
+          <a:prstGeom prst="rect">
+            <a:avLst/>
+          </a:prstGeom>
+          <a:noFill/>
+          <a:ln/>
+        </p:spPr>
+        <p:txBody>
+          <a:bodyPr wrap="square" lIns="0" tIns="0" rIns="0" bIns="0" rtlCol="0" anchor="t"/>
+          <a:lstStyle/>
+          <a:p>
+            <a:pPr algn="l" indent="0" marL="0">
+              <a:lnSpc>
+                <a:spcPct val="108000"/>
+              </a:lnSpc>
+              <a:buNone/>
+            </a:pPr>
+            <a:r>
+              <a:rPr lang="en-US" sz="1250" dirty="0">
+                <a:solidFill>
+                  <a:srgbClr val="33444F"/>
+                </a:solidFill>
+                <a:latin typeface="Calibri" pitchFamily="34" charset="0"/>
+                <a:ea typeface="Calibri" pitchFamily="34" charset="-122"/>
+                <a:cs typeface="Calibri" pitchFamily="34" charset="-120"/>
+              </a:rPr>
+              <a:t>Acute injury shows a changing pattern around the URL; chronic conditions show stable elevations.</a:t>
+            </a:r>
+            <a:endParaRPr lang="en-US" sz="1250" dirty="0"/>
+          </a:p>
+        </p:txBody>
+      </p:sp>
+      <p:sp>
+        <p:nvSpPr>
+          <p:cNvPr id="9" name="Text 7"/>
+          <p:cNvSpPr/>
+          <p:nvPr/>
+        </p:nvSpPr>
+        <p:spPr>
+          <a:xfrm>
+            <a:off x="566928" y="6473952"/>
+            <a:ext cx="7772400" cy="274320"/>
+          </a:xfrm>
+          <a:prstGeom prst="rect">
+            <a:avLst/>
+          </a:prstGeom>
+          <a:noFill/>
+          <a:ln/>
+        </p:spPr>
+        <p:txBody>
+          <a:bodyPr wrap="square" lIns="0" tIns="0" rIns="0" bIns="0" rtlCol="0" anchor="ctr"/>
+          <a:lstStyle/>
+          <a:p>
+            <a:pPr algn="l" indent="0" marL="0">
+              <a:buNone/>
+            </a:pPr>
+            <a:r>
+              <a:rPr lang="en-US" sz="850" dirty="0">
+                <a:solidFill>
+                  <a:srgbClr val="9AA8B4"/>
+                </a:solidFill>
+                <a:latin typeface="Calibri" pitchFamily="34" charset="0"/>
+                <a:ea typeface="Calibri" pitchFamily="34" charset="-122"/>
+                <a:cs typeface="Calibri" pitchFamily="34" charset="-120"/>
+              </a:rPr>
+              <a:t>Makassed General Hospital  ·  Department of Laboratory Medicine</a:t>
+            </a:r>
+            <a:endParaRPr lang="en-US" sz="850" dirty="0"/>
+          </a:p>
+        </p:txBody>
+      </p:sp>
+      <p:sp>
+        <p:nvSpPr>
+          <p:cNvPr id="10" name="Text 8"/>
+          <p:cNvSpPr/>
+          <p:nvPr/>
+        </p:nvSpPr>
+        <p:spPr>
+          <a:xfrm>
+            <a:off x="9814255" y="6473952"/>
+            <a:ext cx="1828800" cy="274320"/>
+          </a:xfrm>
+          <a:prstGeom prst="rect">
+            <a:avLst/>
+          </a:prstGeom>
+          <a:noFill/>
+          <a:ln/>
+        </p:spPr>
+        <p:txBody>
+          <a:bodyPr wrap="square" lIns="0" tIns="0" rIns="0" bIns="0" rtlCol="0" anchor="ctr"/>
+          <a:lstStyle/>
+          <a:p>
+            <a:pPr algn="r" indent="0" marL="0">
+              <a:buNone/>
+            </a:pPr>
+            <a:r>
+              <a:rPr lang="en-US" sz="850" dirty="0">
+                <a:solidFill>
+                  <a:srgbClr val="9AA8B4"/>
+                </a:solidFill>
+                <a:latin typeface="Calibri" pitchFamily="34" charset="0"/>
+                <a:ea typeface="Calibri" pitchFamily="34" charset="-122"/>
+                <a:cs typeface="Calibri" pitchFamily="34" charset="-120"/>
+              </a:rPr>
+              <a:t>CP Lecture Series</a:t>
+            </a:r>
+            <a:pPr algn="r" indent="0" marL="0">
+              <a:buNone/>
+            </a:pPr>
+            <a:r>
+              <a:rPr lang="en-US" sz="850" dirty="0">
+                <a:solidFill>
+                  <a:srgbClr val="DCE4EC"/>
+                </a:solidFill>
+                <a:latin typeface="Calibri" pitchFamily="34" charset="0"/>
+                <a:ea typeface="Calibri" pitchFamily="34" charset="-122"/>
+                <a:cs typeface="Calibri" pitchFamily="34" charset="-120"/>
+              </a:rPr>
+              <a:t>   ·   </a:t>
+            </a:r>
+            <a:pPr algn="r" indent="0" marL="0">
+              <a:buNone/>
+            </a:pPr>
+            <a:r>
+              <a:rPr lang="en-US" sz="850" b="1" dirty="0">
+                <a:solidFill>
+                  <a:srgbClr val="1565C0"/>
+                </a:solidFill>
+                <a:latin typeface="Calibri" pitchFamily="34" charset="0"/>
+                <a:ea typeface="Calibri" pitchFamily="34" charset="-122"/>
+                <a:cs typeface="Calibri" pitchFamily="34" charset="-120"/>
+              </a:rPr>
+              <a:t>18</a:t>
             </a:r>
             <a:endParaRPr lang="en-US" sz="850" dirty="0"/>
           </a:p>
@@ -13224,6 +14900,10 @@
             </a:outerShdw>
           </a:effectLst>
         </p:spPr>
+        <p:txBody>
+          <a:bodyPr/>
+          <a:p/>
+        </p:txBody>
       </p:sp>
       <p:sp>
         <p:nvSpPr>
@@ -13251,6 +14931,10 @@
             </a:outerShdw>
           </a:effectLst>
         </p:spPr>
+        <p:txBody>
+          <a:bodyPr/>
+          <a:p/>
+        </p:txBody>
       </p:sp>
       <p:sp>
         <p:nvSpPr>
@@ -13365,6 +15049,10 @@
           </a:solidFill>
           <a:ln/>
         </p:spPr>
+        <p:txBody>
+          <a:bodyPr/>
+          <a:p/>
+        </p:txBody>
       </p:sp>
       <p:sp>
         <p:nvSpPr>
@@ -13392,6 +15080,10 @@
             </a:outerShdw>
           </a:effectLst>
         </p:spPr>
+        <p:txBody>
+          <a:bodyPr/>
+          <a:p/>
+        </p:txBody>
       </p:sp>
       <p:sp>
         <p:nvSpPr>
@@ -13513,6 +15205,10 @@
             </a:outerShdw>
           </a:effectLst>
         </p:spPr>
+        <p:txBody>
+          <a:bodyPr/>
+          <a:p/>
+        </p:txBody>
       </p:sp>
       <p:sp>
         <p:nvSpPr>
@@ -13540,6 +15236,10 @@
             </a:outerShdw>
           </a:effectLst>
         </p:spPr>
+        <p:txBody>
+          <a:bodyPr/>
+          <a:p/>
+        </p:txBody>
       </p:sp>
       <p:sp>
         <p:nvSpPr>
@@ -13654,6 +15354,10 @@
           </a:solidFill>
           <a:ln/>
         </p:spPr>
+        <p:txBody>
+          <a:bodyPr/>
+          <a:p/>
+        </p:txBody>
       </p:sp>
       <p:sp>
         <p:nvSpPr>
@@ -13681,6 +15385,10 @@
             </a:outerShdw>
           </a:effectLst>
         </p:spPr>
+        <p:txBody>
+          <a:bodyPr/>
+          <a:p/>
+        </p:txBody>
       </p:sp>
       <p:sp>
         <p:nvSpPr>
@@ -13802,6 +15510,10 @@
             </a:outerShdw>
           </a:effectLst>
         </p:spPr>
+        <p:txBody>
+          <a:bodyPr/>
+          <a:p/>
+        </p:txBody>
       </p:sp>
       <p:sp>
         <p:nvSpPr>
@@ -13829,6 +15541,10 @@
             </a:outerShdw>
           </a:effectLst>
         </p:spPr>
+        <p:txBody>
+          <a:bodyPr/>
+          <a:p/>
+        </p:txBody>
       </p:sp>
       <p:sp>
         <p:nvSpPr>
@@ -14067,6 +15783,10 @@
           </a:solidFill>
           <a:ln/>
         </p:spPr>
+        <p:txBody>
+          <a:bodyPr/>
+          <a:p/>
+        </p:txBody>
       </p:sp>
       <p:sp>
         <p:nvSpPr>
@@ -14089,6 +15809,10 @@
           </a:solidFill>
           <a:ln/>
         </p:spPr>
+        <p:txBody>
+          <a:bodyPr/>
+          <a:p/>
+        </p:txBody>
       </p:sp>
       <p:sp>
         <p:nvSpPr>
@@ -14345,6 +16069,10 @@
             </a:outerShdw>
           </a:effectLst>
         </p:spPr>
+        <p:txBody>
+          <a:bodyPr/>
+          <a:p/>
+        </p:txBody>
       </p:sp>
       <p:sp>
         <p:nvSpPr>
@@ -14519,6 +16247,10 @@
             </a:outerShdw>
           </a:effectLst>
         </p:spPr>
+        <p:txBody>
+          <a:bodyPr/>
+          <a:p/>
+        </p:txBody>
       </p:sp>
       <p:sp>
         <p:nvSpPr>
@@ -14909,6 +16641,10 @@
             </a:outerShdw>
           </a:effectLst>
         </p:spPr>
+        <p:txBody>
+          <a:bodyPr/>
+          <a:p/>
+        </p:txBody>
       </p:sp>
       <p:sp>
         <p:nvSpPr>
@@ -15083,6 +16819,10 @@
             </a:outerShdw>
           </a:effectLst>
         </p:spPr>
+        <p:txBody>
+          <a:bodyPr/>
+          <a:p/>
+        </p:txBody>
       </p:sp>
       <p:sp>
         <p:nvSpPr>
@@ -15388,6 +17128,10 @@
           </a:solidFill>
           <a:ln/>
         </p:spPr>
+        <p:txBody>
+          <a:bodyPr/>
+          <a:p/>
+        </p:txBody>
       </p:sp>
       <p:sp>
         <p:nvSpPr>
@@ -15410,6 +17154,10 @@
           </a:solidFill>
           <a:ln/>
         </p:spPr>
+        <p:txBody>
+          <a:bodyPr/>
+          <a:p/>
+        </p:txBody>
       </p:sp>
       <p:sp>
         <p:nvSpPr>
@@ -15671,6 +17419,10 @@
             </a:outerShdw>
           </a:effectLst>
         </p:spPr>
+        <p:txBody>
+          <a:bodyPr/>
+          <a:p/>
+        </p:txBody>
       </p:sp>
       <p:pic>
         <p:nvPicPr>
